--- a/output/wordlabs-excite-3day.pptx
+++ b/output/wordlabs-excite-3day.pptx
@@ -4240,7 +4240,7 @@
                 <a:ea typeface="Calibri" pitchFamily="34" charset="-122"/>
                 <a:cs typeface="Calibri" pitchFamily="34" charset="-120"/>
               </a:rPr>
-              <a:t>"to stir up or rouse"</a:t>
+              <a:t>"to stir up or arouse"</a:t>
             </a:r>
             <a:endParaRPr lang="en-US" sz="2200" dirty="0"/>
           </a:p>
@@ -5288,7 +5288,7 @@
                 <a:ea typeface="Calibri" pitchFamily="34" charset="-122"/>
                 <a:cs typeface="Calibri" pitchFamily="34" charset="-120"/>
               </a:rPr>
-              <a:t>Word Labs  •  wordlabs.app  •  Root: 'excite' = to stir up or rouse</a:t>
+              <a:t>Word Labs  •  wordlabs.app  •  Root: 'excite' = to stir up or arouse</a:t>
             </a:r>
             <a:endParaRPr lang="en-US" sz="800" dirty="0"/>
           </a:p>
@@ -5622,7 +5622,7 @@
                 <a:ea typeface="Trebuchet MS" pitchFamily="34" charset="-122"/>
                 <a:cs typeface="Trebuchet MS" pitchFamily="34" charset="-120"/>
               </a:rPr>
-              <a:t>0</a:t>
+              <a:t>2</a:t>
             </a:r>
             <a:pPr algn="ctr" indent="0" marL="0">
               <a:buNone/>
@@ -5636,7 +5636,7 @@
                 <a:ea typeface="Trebuchet MS" pitchFamily="34" charset="-122"/>
                 <a:cs typeface="Trebuchet MS" pitchFamily="34" charset="-120"/>
               </a:rPr>
-              <a:t>  punctuation mark</a:t>
+              <a:t>  punctuation marks</a:t>
             </a:r>
             <a:endParaRPr lang="en-US" sz="2800" dirty="0"/>
           </a:p>
@@ -5928,7 +5928,7 @@
                 <a:ea typeface="Calibri" pitchFamily="34" charset="-122"/>
                 <a:cs typeface="Calibri" pitchFamily="34" charset="-120"/>
               </a:rPr>
-              <a:t>Word Labs  •  wordlabs.app  •  Root: 'excite' = to stir up or rouse</a:t>
+              <a:t>Word Labs  •  wordlabs.app  •  Root: 'excite' = to stir up or arouse</a:t>
             </a:r>
             <a:endParaRPr lang="en-US" sz="800" dirty="0"/>
           </a:p>
@@ -6071,7 +6071,7 @@
                 <a:ea typeface="Calibri" pitchFamily="34" charset="-122"/>
                 <a:cs typeface="Calibri" pitchFamily="34" charset="-120"/>
               </a:rPr>
-              <a:t> in the crowd was enormous as the </a:t>
+              <a:t> was clear on every face, and the crowd cheered in an </a:t>
             </a:r>
             <a:pPr algn="l" indent="0" marL="0">
               <a:buNone/>
@@ -6088,7 +6088,7 @@
                 <a:ea typeface="Calibri" pitchFamily="34" charset="-122"/>
                 <a:cs typeface="Calibri" pitchFamily="34" charset="-120"/>
               </a:rPr>
-              <a:t>exciting</a:t>
+              <a:t>excitable</a:t>
             </a:r>
             <a:pPr algn="l" indent="0" marL="0">
               <a:buNone/>
@@ -6102,7 +6102,7 @@
                 <a:ea typeface="Calibri" pitchFamily="34" charset="-122"/>
                 <a:cs typeface="Calibri" pitchFamily="34" charset="-120"/>
               </a:rPr>
-              <a:t> final moments of the match played out.</a:t>
+              <a:t> frenzy!</a:t>
             </a:r>
             <a:endParaRPr lang="en-US" sz="1800" dirty="0"/>
           </a:p>
@@ -6385,7 +6385,7 @@
                 <a:ea typeface="Trebuchet MS" pitchFamily="34" charset="-122"/>
                 <a:cs typeface="Trebuchet MS" pitchFamily="34" charset="-120"/>
               </a:rPr>
-              <a:t>exciting</a:t>
+              <a:t>excitable</a:t>
             </a:r>
             <a:endParaRPr lang="en-US" sz="1400" dirty="0"/>
           </a:p>
@@ -6716,7 +6716,7 @@
                 <a:ea typeface="Calibri" pitchFamily="34" charset="-122"/>
                 <a:cs typeface="Calibri" pitchFamily="34" charset="-120"/>
               </a:rPr>
-              <a:t>Word Labs  •  wordlabs.app  •  Root: 'excite' = to stir up or rouse</a:t>
+              <a:t>Word Labs  •  wordlabs.app  •  Root: 'excite' = to stir up or arouse</a:t>
             </a:r>
             <a:endParaRPr lang="en-US" sz="800" dirty="0"/>
           </a:p>
@@ -7543,7 +7543,7 @@
                 <a:ea typeface="Calibri" pitchFamily="34" charset="-122"/>
                 <a:cs typeface="Calibri" pitchFamily="34" charset="-120"/>
               </a:rPr>
-              <a:t>Word Labs  •  wordlabs.app  •  Root: 'excite' = to stir up or rouse</a:t>
+              <a:t>Word Labs  •  wordlabs.app  •  Root: 'excite' = to stir up or arouse</a:t>
             </a:r>
             <a:endParaRPr lang="en-US" sz="800" dirty="0"/>
           </a:p>
@@ -7860,7 +7860,7 @@
                 <a:ea typeface="Calibri" pitchFamily="34" charset="-122"/>
                 <a:cs typeface="Calibri" pitchFamily="34" charset="-120"/>
               </a:rPr>
-              <a:t>to stir up or rouse</a:t>
+              <a:t>to stir up or arouse</a:t>
             </a:r>
             <a:endParaRPr lang="en-US" sz="850" dirty="0"/>
           </a:p>
@@ -8567,7 +8567,7 @@
                 <a:ea typeface="Calibri" pitchFamily="34" charset="-122"/>
                 <a:cs typeface="Calibri" pitchFamily="34" charset="-120"/>
               </a:rPr>
-              <a:t>Word Labs  •  wordlabs.app  •  Root: 'excite' = to stir up or rouse</a:t>
+              <a:t>Word Labs  •  wordlabs.app  •  Root: 'excite' = to stir up or arouse</a:t>
             </a:r>
             <a:endParaRPr lang="en-US" sz="800" dirty="0"/>
           </a:p>
@@ -8884,7 +8884,7 @@
                 <a:ea typeface="Calibri" pitchFamily="34" charset="-122"/>
                 <a:cs typeface="Calibri" pitchFamily="34" charset="-120"/>
               </a:rPr>
-              <a:t>to stir up or rouse</a:t>
+              <a:t>to stir up or arouse</a:t>
             </a:r>
             <a:endParaRPr lang="en-US" sz="850" dirty="0"/>
           </a:p>
@@ -9828,7 +9828,7 @@
                 <a:ea typeface="Calibri" pitchFamily="34" charset="-122"/>
                 <a:cs typeface="Calibri" pitchFamily="34" charset="-120"/>
               </a:rPr>
-              <a:t>Word Labs  •  wordlabs.app  •  Root: 'excite' = to stir up or rouse</a:t>
+              <a:t>Word Labs  •  wordlabs.app  •  Root: 'excite' = to stir up or arouse</a:t>
             </a:r>
             <a:endParaRPr lang="en-US" sz="800" dirty="0"/>
           </a:p>
@@ -10145,7 +10145,7 @@
                 <a:ea typeface="Calibri" pitchFamily="34" charset="-122"/>
                 <a:cs typeface="Calibri" pitchFamily="34" charset="-120"/>
               </a:rPr>
-              <a:t>to stir up or rouse</a:t>
+              <a:t>to stir up or arouse</a:t>
             </a:r>
             <a:endParaRPr lang="en-US" sz="850" dirty="0"/>
           </a:p>
@@ -10772,8 +10772,8 @@
         </p:nvSpPr>
         <p:spPr>
           <a:xfrm>
-            <a:off x="1951828" y="4169664"/>
-            <a:ext cx="603504" cy="384048"/>
+            <a:off x="2124837" y="4169664"/>
+            <a:ext cx="685800" cy="384048"/>
           </a:xfrm>
           <a:prstGeom prst="rect">
             <a:avLst>
@@ -10799,8 +10799,8 @@
         </p:nvSpPr>
         <p:spPr>
           <a:xfrm>
-            <a:off x="1951828" y="4169664"/>
-            <a:ext cx="603504" cy="384048"/>
+            <a:off x="2124837" y="4169664"/>
+            <a:ext cx="685800" cy="384048"/>
           </a:xfrm>
           <a:prstGeom prst="rect">
             <a:avLst/>
@@ -10838,8 +10838,8 @@
         </p:nvSpPr>
         <p:spPr>
           <a:xfrm>
-            <a:off x="2605209" y="4169664"/>
-            <a:ext cx="603504" cy="384048"/>
+            <a:off x="3033522" y="4169664"/>
+            <a:ext cx="685800" cy="384048"/>
           </a:xfrm>
           <a:prstGeom prst="rect">
             <a:avLst>
@@ -10865,8 +10865,8 @@
         </p:nvSpPr>
         <p:spPr>
           <a:xfrm>
-            <a:off x="2605209" y="4169664"/>
-            <a:ext cx="603504" cy="384048"/>
+            <a:off x="3033522" y="4169664"/>
+            <a:ext cx="685800" cy="384048"/>
           </a:xfrm>
           <a:prstGeom prst="rect">
             <a:avLst/>
@@ -10898,14 +10898,53 @@
       </p:sp>
       <p:sp>
         <p:nvSpPr>
-          <p:cNvPr id="41" name="Shape 39"/>
-          <p:cNvSpPr/>
-          <p:nvPr/>
-        </p:nvSpPr>
-        <p:spPr>
-          <a:xfrm>
-            <a:off x="3258589" y="4169664"/>
-            <a:ext cx="603504" cy="384048"/>
+          <p:cNvPr id="41" name="Text 39"/>
+          <p:cNvSpPr/>
+          <p:nvPr/>
+        </p:nvSpPr>
+        <p:spPr>
+          <a:xfrm>
+            <a:off x="3033522" y="4572000"/>
+            <a:ext cx="685800" cy="219456"/>
+          </a:xfrm>
+          <a:prstGeom prst="rect">
+            <a:avLst/>
+          </a:prstGeom>
+          <a:noFill/>
+          <a:ln/>
+        </p:spPr>
+        <p:txBody>
+          <a:bodyPr wrap="square" lIns="0" tIns="0" rIns="0" bIns="0" rtlCol="0" anchor="t"/>
+          <a:lstStyle/>
+          <a:p>
+            <a:pPr algn="ctr" indent="0" marL="0">
+              <a:buNone/>
+            </a:pPr>
+            <a:r>
+              <a:rPr lang="en-US" sz="750" i="1" dirty="0">
+                <a:solidFill>
+                  <a:srgbClr val="94A3B8"/>
+                </a:solidFill>
+                <a:latin typeface="Calibri" pitchFamily="34" charset="0"/>
+                <a:ea typeface="Calibri" pitchFamily="34" charset="-122"/>
+                <a:cs typeface="Calibri" pitchFamily="34" charset="-120"/>
+              </a:rPr>
+              <a:t>/ks/</a:t>
+            </a:r>
+            <a:endParaRPr lang="en-US" sz="750" dirty="0"/>
+          </a:p>
+        </p:txBody>
+      </p:sp>
+      <p:sp>
+        <p:nvSpPr>
+          <p:cNvPr id="42" name="Shape 40"/>
+          <p:cNvSpPr/>
+          <p:nvPr/>
+        </p:nvSpPr>
+        <p:spPr>
+          <a:xfrm>
+            <a:off x="3942207" y="4169664"/>
+            <a:ext cx="685800" cy="384048"/>
           </a:xfrm>
           <a:prstGeom prst="rect">
             <a:avLst>
@@ -10925,14 +10964,14 @@
       </p:sp>
       <p:sp>
         <p:nvSpPr>
-          <p:cNvPr id="42" name="Text 40"/>
-          <p:cNvSpPr/>
-          <p:nvPr/>
-        </p:nvSpPr>
-        <p:spPr>
-          <a:xfrm>
-            <a:off x="3258589" y="4169664"/>
-            <a:ext cx="603504" cy="384048"/>
+          <p:cNvPr id="43" name="Text 41"/>
+          <p:cNvSpPr/>
+          <p:nvPr/>
+        </p:nvSpPr>
+        <p:spPr>
+          <a:xfrm>
+            <a:off x="3942207" y="4169664"/>
+            <a:ext cx="685800" cy="384048"/>
           </a:xfrm>
           <a:prstGeom prst="rect">
             <a:avLst/>
@@ -10956,7 +10995,7 @@
                 <a:ea typeface="Trebuchet MS" pitchFamily="34" charset="-122"/>
                 <a:cs typeface="Trebuchet MS" pitchFamily="34" charset="-120"/>
               </a:rPr>
-              <a:t>c</a:t>
+              <a:t>ite</a:t>
             </a:r>
             <a:endParaRPr lang="en-US" sz="900" dirty="0"/>
           </a:p>
@@ -10964,14 +11003,14 @@
       </p:sp>
       <p:sp>
         <p:nvSpPr>
-          <p:cNvPr id="43" name="Text 41"/>
-          <p:cNvSpPr/>
-          <p:nvPr/>
-        </p:nvSpPr>
-        <p:spPr>
-          <a:xfrm>
-            <a:off x="3258589" y="4572000"/>
-            <a:ext cx="603504" cy="219456"/>
+          <p:cNvPr id="44" name="Text 42"/>
+          <p:cNvSpPr/>
+          <p:nvPr/>
+        </p:nvSpPr>
+        <p:spPr>
+          <a:xfrm>
+            <a:off x="3942207" y="4572000"/>
+            <a:ext cx="685800" cy="219456"/>
           </a:xfrm>
           <a:prstGeom prst="rect">
             <a:avLst/>
@@ -10995,7 +11034,7 @@
                 <a:ea typeface="Calibri" pitchFamily="34" charset="-122"/>
                 <a:cs typeface="Calibri" pitchFamily="34" charset="-120"/>
               </a:rPr>
-              <a:t>/s/</a:t>
+              <a:t>/ight/</a:t>
             </a:r>
             <a:endParaRPr lang="en-US" sz="750" dirty="0"/>
           </a:p>
@@ -11003,14 +11042,14 @@
       </p:sp>
       <p:sp>
         <p:nvSpPr>
-          <p:cNvPr id="44" name="Shape 42"/>
-          <p:cNvSpPr/>
-          <p:nvPr/>
-        </p:nvSpPr>
-        <p:spPr>
-          <a:xfrm>
-            <a:off x="3911969" y="4169664"/>
-            <a:ext cx="603504" cy="384048"/>
+          <p:cNvPr id="45" name="Shape 43"/>
+          <p:cNvSpPr/>
+          <p:nvPr/>
+        </p:nvSpPr>
+        <p:spPr>
+          <a:xfrm>
+            <a:off x="4850892" y="4169664"/>
+            <a:ext cx="685800" cy="384048"/>
           </a:xfrm>
           <a:prstGeom prst="rect">
             <a:avLst>
@@ -11030,14 +11069,14 @@
       </p:sp>
       <p:sp>
         <p:nvSpPr>
-          <p:cNvPr id="45" name="Text 43"/>
-          <p:cNvSpPr/>
-          <p:nvPr/>
-        </p:nvSpPr>
-        <p:spPr>
-          <a:xfrm>
-            <a:off x="3911969" y="4169664"/>
-            <a:ext cx="603504" cy="384048"/>
+          <p:cNvPr id="46" name="Text 44"/>
+          <p:cNvSpPr/>
+          <p:nvPr/>
+        </p:nvSpPr>
+        <p:spPr>
+          <a:xfrm>
+            <a:off x="4850892" y="4169664"/>
+            <a:ext cx="685800" cy="384048"/>
           </a:xfrm>
           <a:prstGeom prst="rect">
             <a:avLst/>
@@ -11061,7 +11100,7 @@
                 <a:ea typeface="Trebuchet MS" pitchFamily="34" charset="-122"/>
                 <a:cs typeface="Trebuchet MS" pitchFamily="34" charset="-120"/>
               </a:rPr>
-              <a:t>i</a:t>
+              <a:t>m</a:t>
             </a:r>
             <a:endParaRPr lang="en-US" sz="900" dirty="0"/>
           </a:p>
@@ -11069,14 +11108,14 @@
       </p:sp>
       <p:sp>
         <p:nvSpPr>
-          <p:cNvPr id="46" name="Shape 44"/>
-          <p:cNvSpPr/>
-          <p:nvPr/>
-        </p:nvSpPr>
-        <p:spPr>
-          <a:xfrm>
-            <a:off x="4565350" y="4169664"/>
-            <a:ext cx="603504" cy="384048"/>
+          <p:cNvPr id="47" name="Shape 45"/>
+          <p:cNvSpPr/>
+          <p:nvPr/>
+        </p:nvSpPr>
+        <p:spPr>
+          <a:xfrm>
+            <a:off x="5759577" y="4169664"/>
+            <a:ext cx="685800" cy="384048"/>
           </a:xfrm>
           <a:prstGeom prst="rect">
             <a:avLst>
@@ -11096,14 +11135,14 @@
       </p:sp>
       <p:sp>
         <p:nvSpPr>
-          <p:cNvPr id="47" name="Text 45"/>
-          <p:cNvSpPr/>
-          <p:nvPr/>
-        </p:nvSpPr>
-        <p:spPr>
-          <a:xfrm>
-            <a:off x="4565350" y="4169664"/>
-            <a:ext cx="603504" cy="384048"/>
+          <p:cNvPr id="48" name="Text 46"/>
+          <p:cNvSpPr/>
+          <p:nvPr/>
+        </p:nvSpPr>
+        <p:spPr>
+          <a:xfrm>
+            <a:off x="5759577" y="4169664"/>
+            <a:ext cx="685800" cy="384048"/>
           </a:xfrm>
           <a:prstGeom prst="rect">
             <a:avLst/>
@@ -11127,7 +11166,7 @@
                 <a:ea typeface="Trebuchet MS" pitchFamily="34" charset="-122"/>
                 <a:cs typeface="Trebuchet MS" pitchFamily="34" charset="-120"/>
               </a:rPr>
-              <a:t>t</a:t>
+              <a:t>e</a:t>
             </a:r>
             <a:endParaRPr lang="en-US" sz="900" dirty="0"/>
           </a:p>
@@ -11135,14 +11174,14 @@
       </p:sp>
       <p:sp>
         <p:nvSpPr>
-          <p:cNvPr id="48" name="Shape 46"/>
-          <p:cNvSpPr/>
-          <p:nvPr/>
-        </p:nvSpPr>
-        <p:spPr>
-          <a:xfrm>
-            <a:off x="5218730" y="4169664"/>
-            <a:ext cx="603504" cy="384048"/>
+          <p:cNvPr id="49" name="Shape 47"/>
+          <p:cNvSpPr/>
+          <p:nvPr/>
+        </p:nvSpPr>
+        <p:spPr>
+          <a:xfrm>
+            <a:off x="6668262" y="4169664"/>
+            <a:ext cx="685800" cy="384048"/>
           </a:xfrm>
           <a:prstGeom prst="rect">
             <a:avLst>
@@ -11162,14 +11201,14 @@
       </p:sp>
       <p:sp>
         <p:nvSpPr>
-          <p:cNvPr id="49" name="Text 47"/>
-          <p:cNvSpPr/>
-          <p:nvPr/>
-        </p:nvSpPr>
-        <p:spPr>
-          <a:xfrm>
-            <a:off x="5218730" y="4169664"/>
-            <a:ext cx="603504" cy="384048"/>
+          <p:cNvPr id="50" name="Text 48"/>
+          <p:cNvSpPr/>
+          <p:nvPr/>
+        </p:nvSpPr>
+        <p:spPr>
+          <a:xfrm>
+            <a:off x="6668262" y="4169664"/>
+            <a:ext cx="685800" cy="384048"/>
           </a:xfrm>
           <a:prstGeom prst="rect">
             <a:avLst/>
@@ -11193,7 +11232,7 @@
                 <a:ea typeface="Trebuchet MS" pitchFamily="34" charset="-122"/>
                 <a:cs typeface="Trebuchet MS" pitchFamily="34" charset="-120"/>
               </a:rPr>
-              <a:t>e</a:t>
+              <a:t>n</a:t>
             </a:r>
             <a:endParaRPr lang="en-US" sz="900" dirty="0"/>
           </a:p>
@@ -11201,14 +11240,14 @@
       </p:sp>
       <p:sp>
         <p:nvSpPr>
-          <p:cNvPr id="50" name="Shape 48"/>
-          <p:cNvSpPr/>
-          <p:nvPr/>
-        </p:nvSpPr>
-        <p:spPr>
-          <a:xfrm>
-            <a:off x="5872111" y="4169664"/>
-            <a:ext cx="603504" cy="384048"/>
+          <p:cNvPr id="51" name="Shape 49"/>
+          <p:cNvSpPr/>
+          <p:nvPr/>
+        </p:nvSpPr>
+        <p:spPr>
+          <a:xfrm>
+            <a:off x="7576947" y="4169664"/>
+            <a:ext cx="685800" cy="384048"/>
           </a:xfrm>
           <a:prstGeom prst="rect">
             <a:avLst>
@@ -11228,212 +11267,14 @@
       </p:sp>
       <p:sp>
         <p:nvSpPr>
-          <p:cNvPr id="51" name="Text 49"/>
-          <p:cNvSpPr/>
-          <p:nvPr/>
-        </p:nvSpPr>
-        <p:spPr>
-          <a:xfrm>
-            <a:off x="5872111" y="4169664"/>
-            <a:ext cx="603504" cy="384048"/>
-          </a:xfrm>
-          <a:prstGeom prst="rect">
-            <a:avLst/>
-          </a:prstGeom>
-          <a:noFill/>
-          <a:ln/>
-        </p:spPr>
-        <p:txBody>
-          <a:bodyPr wrap="square" lIns="0" tIns="0" rIns="0" bIns="0" rtlCol="0" anchor="ctr"/>
-          <a:lstStyle/>
-          <a:p>
-            <a:pPr algn="ctr" indent="0" marL="0">
-              <a:buNone/>
-            </a:pPr>
-            <a:r>
-              <a:rPr lang="en-US" sz="900" b="1" dirty="0">
-                <a:solidFill>
-                  <a:srgbClr val="9D174D"/>
-                </a:solidFill>
-                <a:latin typeface="Trebuchet MS" pitchFamily="34" charset="0"/>
-                <a:ea typeface="Trebuchet MS" pitchFamily="34" charset="-122"/>
-                <a:cs typeface="Trebuchet MS" pitchFamily="34" charset="-120"/>
-              </a:rPr>
-              <a:t>m</a:t>
-            </a:r>
-            <a:endParaRPr lang="en-US" sz="900" dirty="0"/>
-          </a:p>
-        </p:txBody>
-      </p:sp>
-      <p:sp>
-        <p:nvSpPr>
-          <p:cNvPr id="52" name="Shape 50"/>
-          <p:cNvSpPr/>
-          <p:nvPr/>
-        </p:nvSpPr>
-        <p:spPr>
-          <a:xfrm>
-            <a:off x="6525491" y="4169664"/>
-            <a:ext cx="603504" cy="384048"/>
-          </a:xfrm>
-          <a:prstGeom prst="rect">
-            <a:avLst>
-              <a:gd name="adj" fmla="val 9524"/>
-            </a:avLst>
-          </a:prstGeom>
-          <a:solidFill>
-            <a:srgbClr val="FFFFFF"/>
-          </a:solidFill>
-          <a:ln w="12700">
-            <a:solidFill>
-              <a:srgbClr val="DB2777"/>
-            </a:solidFill>
-            <a:prstDash val="solid"/>
-          </a:ln>
-        </p:spPr>
-      </p:sp>
-      <p:sp>
-        <p:nvSpPr>
-          <p:cNvPr id="53" name="Text 51"/>
-          <p:cNvSpPr/>
-          <p:nvPr/>
-        </p:nvSpPr>
-        <p:spPr>
-          <a:xfrm>
-            <a:off x="6525491" y="4169664"/>
-            <a:ext cx="603504" cy="384048"/>
-          </a:xfrm>
-          <a:prstGeom prst="rect">
-            <a:avLst/>
-          </a:prstGeom>
-          <a:noFill/>
-          <a:ln/>
-        </p:spPr>
-        <p:txBody>
-          <a:bodyPr wrap="square" lIns="0" tIns="0" rIns="0" bIns="0" rtlCol="0" anchor="ctr"/>
-          <a:lstStyle/>
-          <a:p>
-            <a:pPr algn="ctr" indent="0" marL="0">
-              <a:buNone/>
-            </a:pPr>
-            <a:r>
-              <a:rPr lang="en-US" sz="900" b="1" dirty="0">
-                <a:solidFill>
-                  <a:srgbClr val="9D174D"/>
-                </a:solidFill>
-                <a:latin typeface="Trebuchet MS" pitchFamily="34" charset="0"/>
-                <a:ea typeface="Trebuchet MS" pitchFamily="34" charset="-122"/>
-                <a:cs typeface="Trebuchet MS" pitchFamily="34" charset="-120"/>
-              </a:rPr>
-              <a:t>e</a:t>
-            </a:r>
-            <a:endParaRPr lang="en-US" sz="900" dirty="0"/>
-          </a:p>
-        </p:txBody>
-      </p:sp>
-      <p:sp>
-        <p:nvSpPr>
-          <p:cNvPr id="54" name="Shape 52"/>
-          <p:cNvSpPr/>
-          <p:nvPr/>
-        </p:nvSpPr>
-        <p:spPr>
-          <a:xfrm>
-            <a:off x="7178871" y="4169664"/>
-            <a:ext cx="603504" cy="384048"/>
-          </a:xfrm>
-          <a:prstGeom prst="rect">
-            <a:avLst>
-              <a:gd name="adj" fmla="val 9524"/>
-            </a:avLst>
-          </a:prstGeom>
-          <a:solidFill>
-            <a:srgbClr val="FFFFFF"/>
-          </a:solidFill>
-          <a:ln w="12700">
-            <a:solidFill>
-              <a:srgbClr val="DB2777"/>
-            </a:solidFill>
-            <a:prstDash val="solid"/>
-          </a:ln>
-        </p:spPr>
-      </p:sp>
-      <p:sp>
-        <p:nvSpPr>
-          <p:cNvPr id="55" name="Text 53"/>
-          <p:cNvSpPr/>
-          <p:nvPr/>
-        </p:nvSpPr>
-        <p:spPr>
-          <a:xfrm>
-            <a:off x="7178871" y="4169664"/>
-            <a:ext cx="603504" cy="384048"/>
-          </a:xfrm>
-          <a:prstGeom prst="rect">
-            <a:avLst/>
-          </a:prstGeom>
-          <a:noFill/>
-          <a:ln/>
-        </p:spPr>
-        <p:txBody>
-          <a:bodyPr wrap="square" lIns="0" tIns="0" rIns="0" bIns="0" rtlCol="0" anchor="ctr"/>
-          <a:lstStyle/>
-          <a:p>
-            <a:pPr algn="ctr" indent="0" marL="0">
-              <a:buNone/>
-            </a:pPr>
-            <a:r>
-              <a:rPr lang="en-US" sz="900" b="1" dirty="0">
-                <a:solidFill>
-                  <a:srgbClr val="9D174D"/>
-                </a:solidFill>
-                <a:latin typeface="Trebuchet MS" pitchFamily="34" charset="0"/>
-                <a:ea typeface="Trebuchet MS" pitchFamily="34" charset="-122"/>
-                <a:cs typeface="Trebuchet MS" pitchFamily="34" charset="-120"/>
-              </a:rPr>
-              <a:t>n</a:t>
-            </a:r>
-            <a:endParaRPr lang="en-US" sz="900" dirty="0"/>
-          </a:p>
-        </p:txBody>
-      </p:sp>
-      <p:sp>
-        <p:nvSpPr>
-          <p:cNvPr id="56" name="Shape 54"/>
-          <p:cNvSpPr/>
-          <p:nvPr/>
-        </p:nvSpPr>
-        <p:spPr>
-          <a:xfrm>
-            <a:off x="7832252" y="4169664"/>
-            <a:ext cx="603504" cy="384048"/>
-          </a:xfrm>
-          <a:prstGeom prst="rect">
-            <a:avLst>
-              <a:gd name="adj" fmla="val 9524"/>
-            </a:avLst>
-          </a:prstGeom>
-          <a:solidFill>
-            <a:srgbClr val="FFFFFF"/>
-          </a:solidFill>
-          <a:ln w="12700">
-            <a:solidFill>
-              <a:srgbClr val="DB2777"/>
-            </a:solidFill>
-            <a:prstDash val="solid"/>
-          </a:ln>
-        </p:spPr>
-      </p:sp>
-      <p:sp>
-        <p:nvSpPr>
-          <p:cNvPr id="57" name="Text 55"/>
-          <p:cNvSpPr/>
-          <p:nvPr/>
-        </p:nvSpPr>
-        <p:spPr>
-          <a:xfrm>
-            <a:off x="7832252" y="4169664"/>
-            <a:ext cx="603504" cy="384048"/>
+          <p:cNvPr id="52" name="Text 50"/>
+          <p:cNvSpPr/>
+          <p:nvPr/>
+        </p:nvSpPr>
+        <p:spPr>
+          <a:xfrm>
+            <a:off x="7576947" y="4169664"/>
+            <a:ext cx="685800" cy="384048"/>
           </a:xfrm>
           <a:prstGeom prst="rect">
             <a:avLst/>
@@ -11749,7 +11590,7 @@
                 <a:ea typeface="Calibri" pitchFamily="34" charset="-122"/>
                 <a:cs typeface="Calibri" pitchFamily="34" charset="-120"/>
               </a:rPr>
-              <a:t>Word Labs  •  wordlabs.app  •  Root: 'excite' = to stir up or rouse</a:t>
+              <a:t>Word Labs  •  wordlabs.app  •  Root: 'excite' = to stir up or arouse</a:t>
             </a:r>
             <a:endParaRPr lang="en-US" sz="800" dirty="0"/>
           </a:p>
@@ -11888,7 +11729,7 @@
                 <a:ea typeface="Trebuchet MS" pitchFamily="34" charset="-122"/>
                 <a:cs typeface="Trebuchet MS" pitchFamily="34" charset="-120"/>
               </a:rPr>
-              <a:t>exciting</a:t>
+              <a:t>excitable</a:t>
             </a:r>
             <a:endParaRPr lang="en-US" sz="2800" dirty="0"/>
           </a:p>
@@ -12576,7 +12417,7 @@
                 <a:ea typeface="Calibri" pitchFamily="34" charset="-122"/>
                 <a:cs typeface="Calibri" pitchFamily="34" charset="-120"/>
               </a:rPr>
-              <a:t>Word Labs  •  wordlabs.app  •  Root: 'excite' = to stir up or rouse</a:t>
+              <a:t>Word Labs  •  wordlabs.app  •  Root: 'excite' = to stir up or arouse</a:t>
             </a:r>
             <a:endParaRPr lang="en-US" sz="800" dirty="0"/>
           </a:p>
@@ -12715,7 +12556,7 @@
                 <a:ea typeface="Trebuchet MS" pitchFamily="34" charset="-122"/>
                 <a:cs typeface="Trebuchet MS" pitchFamily="34" charset="-120"/>
               </a:rPr>
-              <a:t>exciting</a:t>
+              <a:t>excitable</a:t>
             </a:r>
             <a:endParaRPr lang="en-US" sz="2800" dirty="0"/>
           </a:p>
@@ -12893,7 +12734,7 @@
                 <a:ea typeface="Calibri" pitchFamily="34" charset="-122"/>
                 <a:cs typeface="Calibri" pitchFamily="34" charset="-120"/>
               </a:rPr>
-              <a:t>to stir up or rouse</a:t>
+              <a:t>to stir up or arouse</a:t>
             </a:r>
             <a:endParaRPr lang="en-US" sz="850" dirty="0"/>
           </a:p>
@@ -12966,7 +12807,7 @@
                 <a:ea typeface="Trebuchet MS" pitchFamily="34" charset="-122"/>
                 <a:cs typeface="Trebuchet MS" pitchFamily="34" charset="-120"/>
               </a:rPr>
-              <a:t>ing</a:t>
+              <a:t>able</a:t>
             </a:r>
             <a:endParaRPr lang="en-US" sz="1300" dirty="0"/>
           </a:p>
@@ -13005,7 +12846,7 @@
                 <a:ea typeface="Calibri" pitchFamily="34" charset="-122"/>
                 <a:cs typeface="Calibri" pitchFamily="34" charset="-120"/>
               </a:rPr>
-              <a:t>ongoing action or quality</a:t>
+              <a:t>able to be; having the quality of</a:t>
             </a:r>
             <a:endParaRPr lang="en-US" sz="850" dirty="0"/>
           </a:p>
@@ -13600,7 +13441,7 @@
                 <a:ea typeface="Calibri" pitchFamily="34" charset="-122"/>
                 <a:cs typeface="Calibri" pitchFamily="34" charset="-120"/>
               </a:rPr>
-              <a:t>Word Labs  •  wordlabs.app  •  Root: 'excite' = to stir up or rouse</a:t>
+              <a:t>Word Labs  •  wordlabs.app  •  Root: 'excite' = to stir up or arouse</a:t>
             </a:r>
             <a:endParaRPr lang="en-US" sz="800" dirty="0"/>
           </a:p>
@@ -13739,7 +13580,7 @@
                 <a:ea typeface="Trebuchet MS" pitchFamily="34" charset="-122"/>
                 <a:cs typeface="Trebuchet MS" pitchFamily="34" charset="-120"/>
               </a:rPr>
-              <a:t>exciting</a:t>
+              <a:t>excitable</a:t>
             </a:r>
             <a:endParaRPr lang="en-US" sz="2800" dirty="0"/>
           </a:p>
@@ -13917,7 +13758,7 @@
                 <a:ea typeface="Calibri" pitchFamily="34" charset="-122"/>
                 <a:cs typeface="Calibri" pitchFamily="34" charset="-120"/>
               </a:rPr>
-              <a:t>to stir up or rouse</a:t>
+              <a:t>to stir up or arouse</a:t>
             </a:r>
             <a:endParaRPr lang="en-US" sz="850" dirty="0"/>
           </a:p>
@@ -13990,7 +13831,7 @@
                 <a:ea typeface="Trebuchet MS" pitchFamily="34" charset="-122"/>
                 <a:cs typeface="Trebuchet MS" pitchFamily="34" charset="-120"/>
               </a:rPr>
-              <a:t>ing</a:t>
+              <a:t>able</a:t>
             </a:r>
             <a:endParaRPr lang="en-US" sz="1300" dirty="0"/>
           </a:p>
@@ -14029,7 +13870,7 @@
                 <a:ea typeface="Calibri" pitchFamily="34" charset="-122"/>
                 <a:cs typeface="Calibri" pitchFamily="34" charset="-120"/>
               </a:rPr>
-              <a:t>ongoing action or quality</a:t>
+              <a:t>able to be; having the quality of</a:t>
             </a:r>
             <a:endParaRPr lang="en-US" sz="850" dirty="0"/>
           </a:p>
@@ -14175,8 +14016,8 @@
         </p:nvSpPr>
         <p:spPr>
           <a:xfrm>
-            <a:off x="2313432" y="3364992"/>
-            <a:ext cx="1645920" cy="475488"/>
+            <a:off x="1975104" y="3364992"/>
+            <a:ext cx="1554480" cy="475488"/>
           </a:xfrm>
           <a:prstGeom prst="rect">
             <a:avLst>
@@ -14202,8 +14043,8 @@
         </p:nvSpPr>
         <p:spPr>
           <a:xfrm>
-            <a:off x="2313432" y="3364992"/>
-            <a:ext cx="1645920" cy="475488"/>
+            <a:off x="1975104" y="3364992"/>
+            <a:ext cx="1554480" cy="475488"/>
           </a:xfrm>
           <a:prstGeom prst="rect">
             <a:avLst/>
@@ -14241,8 +14082,8 @@
         </p:nvSpPr>
         <p:spPr>
           <a:xfrm>
-            <a:off x="3959352" y="3364992"/>
-            <a:ext cx="411480" cy="475488"/>
+            <a:off x="3529584" y="3364992"/>
+            <a:ext cx="73152" cy="475488"/>
           </a:xfrm>
           <a:prstGeom prst="rect">
             <a:avLst/>
@@ -14280,8 +14121,8 @@
         </p:nvSpPr>
         <p:spPr>
           <a:xfrm>
-            <a:off x="4370832" y="3364992"/>
-            <a:ext cx="1645920" cy="475488"/>
+            <a:off x="3602736" y="3364992"/>
+            <a:ext cx="1554480" cy="475488"/>
           </a:xfrm>
           <a:prstGeom prst="rect">
             <a:avLst>
@@ -14307,8 +14148,8 @@
         </p:nvSpPr>
         <p:spPr>
           <a:xfrm>
-            <a:off x="4370832" y="3364992"/>
-            <a:ext cx="1645920" cy="475488"/>
+            <a:off x="3602736" y="3364992"/>
+            <a:ext cx="1554480" cy="475488"/>
           </a:xfrm>
           <a:prstGeom prst="rect">
             <a:avLst/>
@@ -14332,7 +14173,7 @@
                 <a:ea typeface="Trebuchet MS" pitchFamily="34" charset="-122"/>
                 <a:cs typeface="Trebuchet MS" pitchFamily="34" charset="-120"/>
               </a:rPr>
-              <a:t>ci</a:t>
+              <a:t>cit</a:t>
             </a:r>
             <a:endParaRPr lang="en-US" sz="1400" dirty="0"/>
           </a:p>
@@ -14346,8 +14187,8 @@
         </p:nvSpPr>
         <p:spPr>
           <a:xfrm>
-            <a:off x="6016752" y="3364992"/>
-            <a:ext cx="411480" cy="475488"/>
+            <a:off x="5157216" y="3364992"/>
+            <a:ext cx="73152" cy="475488"/>
           </a:xfrm>
           <a:prstGeom prst="rect">
             <a:avLst/>
@@ -14385,8 +14226,8 @@
         </p:nvSpPr>
         <p:spPr>
           <a:xfrm>
-            <a:off x="6428232" y="3364992"/>
-            <a:ext cx="1645920" cy="475488"/>
+            <a:off x="5230368" y="3364992"/>
+            <a:ext cx="1554480" cy="475488"/>
           </a:xfrm>
           <a:prstGeom prst="rect">
             <a:avLst>
@@ -14412,8 +14253,8 @@
         </p:nvSpPr>
         <p:spPr>
           <a:xfrm>
-            <a:off x="6428232" y="3364992"/>
-            <a:ext cx="1645920" cy="475488"/>
+            <a:off x="5230368" y="3364992"/>
+            <a:ext cx="1554480" cy="475488"/>
           </a:xfrm>
           <a:prstGeom prst="rect">
             <a:avLst/>
@@ -14437,7 +14278,7 @@
                 <a:ea typeface="Trebuchet MS" pitchFamily="34" charset="-122"/>
                 <a:cs typeface="Trebuchet MS" pitchFamily="34" charset="-120"/>
               </a:rPr>
-              <a:t>ting</a:t>
+              <a:t>a</a:t>
             </a:r>
             <a:endParaRPr lang="en-US" sz="1400" dirty="0"/>
           </a:p>
@@ -14445,7 +14286,112 @@
       </p:sp>
       <p:sp>
         <p:nvSpPr>
-          <p:cNvPr id="34" name="Shape 32"/>
+          <p:cNvPr id="34" name="Text 32"/>
+          <p:cNvSpPr/>
+          <p:nvPr/>
+        </p:nvSpPr>
+        <p:spPr>
+          <a:xfrm>
+            <a:off x="6784848" y="3364992"/>
+            <a:ext cx="73152" cy="475488"/>
+          </a:xfrm>
+          <a:prstGeom prst="rect">
+            <a:avLst/>
+          </a:prstGeom>
+          <a:noFill/>
+          <a:ln/>
+        </p:spPr>
+        <p:txBody>
+          <a:bodyPr wrap="square" lIns="0" tIns="0" rIns="0" bIns="0" rtlCol="0" anchor="ctr"/>
+          <a:lstStyle/>
+          <a:p>
+            <a:pPr algn="ctr" indent="0" marL="0">
+              <a:buNone/>
+            </a:pPr>
+            <a:r>
+              <a:rPr lang="en-US" sz="1600" b="1" dirty="0">
+                <a:solidFill>
+                  <a:srgbClr val="0D9488"/>
+                </a:solidFill>
+                <a:latin typeface="Trebuchet MS" pitchFamily="34" charset="0"/>
+                <a:ea typeface="Trebuchet MS" pitchFamily="34" charset="-122"/>
+                <a:cs typeface="Trebuchet MS" pitchFamily="34" charset="-120"/>
+              </a:rPr>
+              <a:t>·</a:t>
+            </a:r>
+            <a:endParaRPr lang="en-US" sz="1600" dirty="0"/>
+          </a:p>
+        </p:txBody>
+      </p:sp>
+      <p:sp>
+        <p:nvSpPr>
+          <p:cNvPr id="35" name="Shape 33"/>
+          <p:cNvSpPr/>
+          <p:nvPr/>
+        </p:nvSpPr>
+        <p:spPr>
+          <a:xfrm>
+            <a:off x="6858000" y="3364992"/>
+            <a:ext cx="1554480" cy="475488"/>
+          </a:xfrm>
+          <a:prstGeom prst="rect">
+            <a:avLst>
+              <a:gd name="adj" fmla="val 9615"/>
+            </a:avLst>
+          </a:prstGeom>
+          <a:solidFill>
+            <a:srgbClr val="FFFFFF"/>
+          </a:solidFill>
+          <a:ln w="12700">
+            <a:solidFill>
+              <a:srgbClr val="0D9488"/>
+            </a:solidFill>
+            <a:prstDash val="solid"/>
+          </a:ln>
+        </p:spPr>
+      </p:sp>
+      <p:sp>
+        <p:nvSpPr>
+          <p:cNvPr id="36" name="Text 34"/>
+          <p:cNvSpPr/>
+          <p:nvPr/>
+        </p:nvSpPr>
+        <p:spPr>
+          <a:xfrm>
+            <a:off x="6858000" y="3364992"/>
+            <a:ext cx="1554480" cy="475488"/>
+          </a:xfrm>
+          <a:prstGeom prst="rect">
+            <a:avLst/>
+          </a:prstGeom>
+          <a:noFill/>
+          <a:ln/>
+        </p:spPr>
+        <p:txBody>
+          <a:bodyPr wrap="square" lIns="0" tIns="0" rIns="0" bIns="0" rtlCol="0" anchor="ctr"/>
+          <a:lstStyle/>
+          <a:p>
+            <a:pPr algn="ctr" indent="0" marL="0">
+              <a:buNone/>
+            </a:pPr>
+            <a:r>
+              <a:rPr lang="en-US" sz="1400" b="1" dirty="0">
+                <a:solidFill>
+                  <a:srgbClr val="0D9488"/>
+                </a:solidFill>
+                <a:latin typeface="Trebuchet MS" pitchFamily="34" charset="0"/>
+                <a:ea typeface="Trebuchet MS" pitchFamily="34" charset="-122"/>
+                <a:cs typeface="Trebuchet MS" pitchFamily="34" charset="-120"/>
+              </a:rPr>
+              <a:t>ble</a:t>
+            </a:r>
+            <a:endParaRPr lang="en-US" sz="1400" dirty="0"/>
+          </a:p>
+        </p:txBody>
+      </p:sp>
+      <p:sp>
+        <p:nvSpPr>
+          <p:cNvPr id="37" name="Shape 35"/>
           <p:cNvSpPr/>
           <p:nvPr/>
         </p:nvSpPr>
@@ -14472,7 +14418,7 @@
       </p:sp>
       <p:sp>
         <p:nvSpPr>
-          <p:cNvPr id="35" name="Text 33"/>
+          <p:cNvPr id="38" name="Text 36"/>
           <p:cNvSpPr/>
           <p:nvPr/>
         </p:nvSpPr>
@@ -14511,7 +14457,7 @@
       </p:sp>
       <p:sp>
         <p:nvSpPr>
-          <p:cNvPr id="36" name="Shape 34"/>
+          <p:cNvPr id="39" name="Shape 37"/>
           <p:cNvSpPr/>
           <p:nvPr/>
         </p:nvSpPr>
@@ -14538,7 +14484,7 @@
       </p:sp>
       <p:sp>
         <p:nvSpPr>
-          <p:cNvPr id="37" name="Text 35"/>
+          <p:cNvPr id="40" name="Text 38"/>
           <p:cNvSpPr/>
           <p:nvPr/>
         </p:nvSpPr>
@@ -14770,7 +14716,7 @@
                 <a:ea typeface="Calibri" pitchFamily="34" charset="-122"/>
                 <a:cs typeface="Calibri" pitchFamily="34" charset="-120"/>
               </a:rPr>
-              <a:t>Root 'excite' — to stir up or rouse</a:t>
+              <a:t>Root 'excite' — to stir up or arouse</a:t>
             </a:r>
             <a:endParaRPr lang="en-US" sz="1600" dirty="0"/>
           </a:p>
@@ -15126,7 +15072,7 @@
                 <a:ea typeface="Calibri" pitchFamily="34" charset="-122"/>
                 <a:cs typeface="Calibri" pitchFamily="34" charset="-120"/>
               </a:rPr>
-              <a:t>Word Labs  •  wordlabs.app  •  Root: 'excite' = to stir up or rouse</a:t>
+              <a:t>Word Labs  •  wordlabs.app  •  Root: 'excite' = to stir up or arouse</a:t>
             </a:r>
             <a:endParaRPr lang="en-US" sz="800" dirty="0"/>
           </a:p>
@@ -15265,7 +15211,7 @@
                 <a:ea typeface="Trebuchet MS" pitchFamily="34" charset="-122"/>
                 <a:cs typeface="Trebuchet MS" pitchFamily="34" charset="-120"/>
               </a:rPr>
-              <a:t>exciting</a:t>
+              <a:t>excitable</a:t>
             </a:r>
             <a:endParaRPr lang="en-US" sz="2800" dirty="0"/>
           </a:p>
@@ -15443,7 +15389,7 @@
                 <a:ea typeface="Calibri" pitchFamily="34" charset="-122"/>
                 <a:cs typeface="Calibri" pitchFamily="34" charset="-120"/>
               </a:rPr>
-              <a:t>to stir up or rouse</a:t>
+              <a:t>to stir up or arouse</a:t>
             </a:r>
             <a:endParaRPr lang="en-US" sz="850" dirty="0"/>
           </a:p>
@@ -15516,7 +15462,7 @@
                 <a:ea typeface="Trebuchet MS" pitchFamily="34" charset="-122"/>
                 <a:cs typeface="Trebuchet MS" pitchFamily="34" charset="-120"/>
               </a:rPr>
-              <a:t>ing</a:t>
+              <a:t>able</a:t>
             </a:r>
             <a:endParaRPr lang="en-US" sz="1300" dirty="0"/>
           </a:p>
@@ -15555,7 +15501,7 @@
                 <a:ea typeface="Calibri" pitchFamily="34" charset="-122"/>
                 <a:cs typeface="Calibri" pitchFamily="34" charset="-120"/>
               </a:rPr>
-              <a:t>ongoing action or quality</a:t>
+              <a:t>able to be; having the quality of</a:t>
             </a:r>
             <a:endParaRPr lang="en-US" sz="850" dirty="0"/>
           </a:p>
@@ -15701,8 +15647,8 @@
         </p:nvSpPr>
         <p:spPr>
           <a:xfrm>
-            <a:off x="2313432" y="3364992"/>
-            <a:ext cx="1645920" cy="475488"/>
+            <a:off x="1975104" y="3364992"/>
+            <a:ext cx="1554480" cy="475488"/>
           </a:xfrm>
           <a:prstGeom prst="rect">
             <a:avLst>
@@ -15728,8 +15674,8 @@
         </p:nvSpPr>
         <p:spPr>
           <a:xfrm>
-            <a:off x="2313432" y="3364992"/>
-            <a:ext cx="1645920" cy="475488"/>
+            <a:off x="1975104" y="3364992"/>
+            <a:ext cx="1554480" cy="475488"/>
           </a:xfrm>
           <a:prstGeom prst="rect">
             <a:avLst/>
@@ -15767,8 +15713,8 @@
         </p:nvSpPr>
         <p:spPr>
           <a:xfrm>
-            <a:off x="3959352" y="3364992"/>
-            <a:ext cx="411480" cy="475488"/>
+            <a:off x="3529584" y="3364992"/>
+            <a:ext cx="73152" cy="475488"/>
           </a:xfrm>
           <a:prstGeom prst="rect">
             <a:avLst/>
@@ -15806,8 +15752,8 @@
         </p:nvSpPr>
         <p:spPr>
           <a:xfrm>
-            <a:off x="4370832" y="3364992"/>
-            <a:ext cx="1645920" cy="475488"/>
+            <a:off x="3602736" y="3364992"/>
+            <a:ext cx="1554480" cy="475488"/>
           </a:xfrm>
           <a:prstGeom prst="rect">
             <a:avLst>
@@ -15833,8 +15779,8 @@
         </p:nvSpPr>
         <p:spPr>
           <a:xfrm>
-            <a:off x="4370832" y="3364992"/>
-            <a:ext cx="1645920" cy="475488"/>
+            <a:off x="3602736" y="3364992"/>
+            <a:ext cx="1554480" cy="475488"/>
           </a:xfrm>
           <a:prstGeom prst="rect">
             <a:avLst/>
@@ -15858,7 +15804,7 @@
                 <a:ea typeface="Trebuchet MS" pitchFamily="34" charset="-122"/>
                 <a:cs typeface="Trebuchet MS" pitchFamily="34" charset="-120"/>
               </a:rPr>
-              <a:t>ci</a:t>
+              <a:t>cit</a:t>
             </a:r>
             <a:endParaRPr lang="en-US" sz="1400" dirty="0"/>
           </a:p>
@@ -15872,8 +15818,8 @@
         </p:nvSpPr>
         <p:spPr>
           <a:xfrm>
-            <a:off x="6016752" y="3364992"/>
-            <a:ext cx="411480" cy="475488"/>
+            <a:off x="5157216" y="3364992"/>
+            <a:ext cx="73152" cy="475488"/>
           </a:xfrm>
           <a:prstGeom prst="rect">
             <a:avLst/>
@@ -15911,8 +15857,8 @@
         </p:nvSpPr>
         <p:spPr>
           <a:xfrm>
-            <a:off x="6428232" y="3364992"/>
-            <a:ext cx="1645920" cy="475488"/>
+            <a:off x="5230368" y="3364992"/>
+            <a:ext cx="1554480" cy="475488"/>
           </a:xfrm>
           <a:prstGeom prst="rect">
             <a:avLst>
@@ -15938,8 +15884,8 @@
         </p:nvSpPr>
         <p:spPr>
           <a:xfrm>
-            <a:off x="6428232" y="3364992"/>
-            <a:ext cx="1645920" cy="475488"/>
+            <a:off x="5230368" y="3364992"/>
+            <a:ext cx="1554480" cy="475488"/>
           </a:xfrm>
           <a:prstGeom prst="rect">
             <a:avLst/>
@@ -15963,7 +15909,7 @@
                 <a:ea typeface="Trebuchet MS" pitchFamily="34" charset="-122"/>
                 <a:cs typeface="Trebuchet MS" pitchFamily="34" charset="-120"/>
               </a:rPr>
-              <a:t>ting</a:t>
+              <a:t>a</a:t>
             </a:r>
             <a:endParaRPr lang="en-US" sz="1400" dirty="0"/>
           </a:p>
@@ -15971,7 +15917,112 @@
       </p:sp>
       <p:sp>
         <p:nvSpPr>
-          <p:cNvPr id="34" name="Shape 32"/>
+          <p:cNvPr id="34" name="Text 32"/>
+          <p:cNvSpPr/>
+          <p:nvPr/>
+        </p:nvSpPr>
+        <p:spPr>
+          <a:xfrm>
+            <a:off x="6784848" y="3364992"/>
+            <a:ext cx="73152" cy="475488"/>
+          </a:xfrm>
+          <a:prstGeom prst="rect">
+            <a:avLst/>
+          </a:prstGeom>
+          <a:noFill/>
+          <a:ln/>
+        </p:spPr>
+        <p:txBody>
+          <a:bodyPr wrap="square" lIns="0" tIns="0" rIns="0" bIns="0" rtlCol="0" anchor="ctr"/>
+          <a:lstStyle/>
+          <a:p>
+            <a:pPr algn="ctr" indent="0" marL="0">
+              <a:buNone/>
+            </a:pPr>
+            <a:r>
+              <a:rPr lang="en-US" sz="1600" b="1" dirty="0">
+                <a:solidFill>
+                  <a:srgbClr val="0D9488"/>
+                </a:solidFill>
+                <a:latin typeface="Trebuchet MS" pitchFamily="34" charset="0"/>
+                <a:ea typeface="Trebuchet MS" pitchFamily="34" charset="-122"/>
+                <a:cs typeface="Trebuchet MS" pitchFamily="34" charset="-120"/>
+              </a:rPr>
+              <a:t>·</a:t>
+            </a:r>
+            <a:endParaRPr lang="en-US" sz="1600" dirty="0"/>
+          </a:p>
+        </p:txBody>
+      </p:sp>
+      <p:sp>
+        <p:nvSpPr>
+          <p:cNvPr id="35" name="Shape 33"/>
+          <p:cNvSpPr/>
+          <p:nvPr/>
+        </p:nvSpPr>
+        <p:spPr>
+          <a:xfrm>
+            <a:off x="6858000" y="3364992"/>
+            <a:ext cx="1554480" cy="475488"/>
+          </a:xfrm>
+          <a:prstGeom prst="rect">
+            <a:avLst>
+              <a:gd name="adj" fmla="val 9615"/>
+            </a:avLst>
+          </a:prstGeom>
+          <a:solidFill>
+            <a:srgbClr val="FFFFFF"/>
+          </a:solidFill>
+          <a:ln w="12700">
+            <a:solidFill>
+              <a:srgbClr val="0D9488"/>
+            </a:solidFill>
+            <a:prstDash val="solid"/>
+          </a:ln>
+        </p:spPr>
+      </p:sp>
+      <p:sp>
+        <p:nvSpPr>
+          <p:cNvPr id="36" name="Text 34"/>
+          <p:cNvSpPr/>
+          <p:nvPr/>
+        </p:nvSpPr>
+        <p:spPr>
+          <a:xfrm>
+            <a:off x="6858000" y="3364992"/>
+            <a:ext cx="1554480" cy="475488"/>
+          </a:xfrm>
+          <a:prstGeom prst="rect">
+            <a:avLst/>
+          </a:prstGeom>
+          <a:noFill/>
+          <a:ln/>
+        </p:spPr>
+        <p:txBody>
+          <a:bodyPr wrap="square" lIns="0" tIns="0" rIns="0" bIns="0" rtlCol="0" anchor="ctr"/>
+          <a:lstStyle/>
+          <a:p>
+            <a:pPr algn="ctr" indent="0" marL="0">
+              <a:buNone/>
+            </a:pPr>
+            <a:r>
+              <a:rPr lang="en-US" sz="1400" b="1" dirty="0">
+                <a:solidFill>
+                  <a:srgbClr val="0D9488"/>
+                </a:solidFill>
+                <a:latin typeface="Trebuchet MS" pitchFamily="34" charset="0"/>
+                <a:ea typeface="Trebuchet MS" pitchFamily="34" charset="-122"/>
+                <a:cs typeface="Trebuchet MS" pitchFamily="34" charset="-120"/>
+              </a:rPr>
+              <a:t>ble</a:t>
+            </a:r>
+            <a:endParaRPr lang="en-US" sz="1400" dirty="0"/>
+          </a:p>
+        </p:txBody>
+      </p:sp>
+      <p:sp>
+        <p:nvSpPr>
+          <p:cNvPr id="37" name="Shape 35"/>
           <p:cNvSpPr/>
           <p:nvPr/>
         </p:nvSpPr>
@@ -15998,7 +16049,7 @@
       </p:sp>
       <p:sp>
         <p:nvSpPr>
-          <p:cNvPr id="35" name="Text 33"/>
+          <p:cNvPr id="38" name="Text 36"/>
           <p:cNvSpPr/>
           <p:nvPr/>
         </p:nvSpPr>
@@ -16037,7 +16088,7 @@
       </p:sp>
       <p:sp>
         <p:nvSpPr>
-          <p:cNvPr id="36" name="Shape 34"/>
+          <p:cNvPr id="39" name="Shape 37"/>
           <p:cNvSpPr/>
           <p:nvPr/>
         </p:nvSpPr>
@@ -16064,13 +16115,13 @@
       </p:sp>
       <p:sp>
         <p:nvSpPr>
-          <p:cNvPr id="37" name="Shape 35"/>
-          <p:cNvSpPr/>
-          <p:nvPr/>
-        </p:nvSpPr>
-        <p:spPr>
-          <a:xfrm>
-            <a:off x="2124837" y="4169664"/>
+          <p:cNvPr id="40" name="Shape 38"/>
+          <p:cNvSpPr/>
+          <p:nvPr/>
+        </p:nvSpPr>
+        <p:spPr>
+          <a:xfrm>
+            <a:off x="2023872" y="4169664"/>
             <a:ext cx="685800" cy="384048"/>
           </a:xfrm>
           <a:prstGeom prst="rect">
@@ -16091,13 +16142,13 @@
       </p:sp>
       <p:sp>
         <p:nvSpPr>
-          <p:cNvPr id="38" name="Text 36"/>
-          <p:cNvSpPr/>
-          <p:nvPr/>
-        </p:nvSpPr>
-        <p:spPr>
-          <a:xfrm>
-            <a:off x="2124837" y="4169664"/>
+          <p:cNvPr id="41" name="Text 39"/>
+          <p:cNvSpPr/>
+          <p:nvPr/>
+        </p:nvSpPr>
+        <p:spPr>
+          <a:xfrm>
+            <a:off x="2023872" y="4169664"/>
             <a:ext cx="685800" cy="384048"/>
           </a:xfrm>
           <a:prstGeom prst="rect">
@@ -16130,13 +16181,13 @@
       </p:sp>
       <p:sp>
         <p:nvSpPr>
-          <p:cNvPr id="39" name="Shape 37"/>
-          <p:cNvSpPr/>
-          <p:nvPr/>
-        </p:nvSpPr>
-        <p:spPr>
-          <a:xfrm>
-            <a:off x="3033522" y="4169664"/>
+          <p:cNvPr id="42" name="Shape 40"/>
+          <p:cNvSpPr/>
+          <p:nvPr/>
+        </p:nvSpPr>
+        <p:spPr>
+          <a:xfrm>
+            <a:off x="2831592" y="4169664"/>
             <a:ext cx="685800" cy="384048"/>
           </a:xfrm>
           <a:prstGeom prst="rect">
@@ -16157,13 +16208,13 @@
       </p:sp>
       <p:sp>
         <p:nvSpPr>
-          <p:cNvPr id="40" name="Text 38"/>
-          <p:cNvSpPr/>
-          <p:nvPr/>
-        </p:nvSpPr>
-        <p:spPr>
-          <a:xfrm>
-            <a:off x="3033522" y="4169664"/>
+          <p:cNvPr id="43" name="Text 41"/>
+          <p:cNvSpPr/>
+          <p:nvPr/>
+        </p:nvSpPr>
+        <p:spPr>
+          <a:xfrm>
+            <a:off x="2831592" y="4169664"/>
             <a:ext cx="685800" cy="384048"/>
           </a:xfrm>
           <a:prstGeom prst="rect">
@@ -16196,13 +16247,52 @@
       </p:sp>
       <p:sp>
         <p:nvSpPr>
-          <p:cNvPr id="41" name="Shape 39"/>
-          <p:cNvSpPr/>
-          <p:nvPr/>
-        </p:nvSpPr>
-        <p:spPr>
-          <a:xfrm>
-            <a:off x="3942207" y="4169664"/>
+          <p:cNvPr id="44" name="Text 42"/>
+          <p:cNvSpPr/>
+          <p:nvPr/>
+        </p:nvSpPr>
+        <p:spPr>
+          <a:xfrm>
+            <a:off x="2831592" y="4572000"/>
+            <a:ext cx="685800" cy="219456"/>
+          </a:xfrm>
+          <a:prstGeom prst="rect">
+            <a:avLst/>
+          </a:prstGeom>
+          <a:noFill/>
+          <a:ln/>
+        </p:spPr>
+        <p:txBody>
+          <a:bodyPr wrap="square" lIns="0" tIns="0" rIns="0" bIns="0" rtlCol="0" anchor="t"/>
+          <a:lstStyle/>
+          <a:p>
+            <a:pPr algn="ctr" indent="0" marL="0">
+              <a:buNone/>
+            </a:pPr>
+            <a:r>
+              <a:rPr lang="en-US" sz="750" i="1" dirty="0">
+                <a:solidFill>
+                  <a:srgbClr val="94A3B8"/>
+                </a:solidFill>
+                <a:latin typeface="Calibri" pitchFamily="34" charset="0"/>
+                <a:ea typeface="Calibri" pitchFamily="34" charset="-122"/>
+                <a:cs typeface="Calibri" pitchFamily="34" charset="-120"/>
+              </a:rPr>
+              <a:t>/ks/</a:t>
+            </a:r>
+            <a:endParaRPr lang="en-US" sz="750" dirty="0"/>
+          </a:p>
+        </p:txBody>
+      </p:sp>
+      <p:sp>
+        <p:nvSpPr>
+          <p:cNvPr id="45" name="Shape 43"/>
+          <p:cNvSpPr/>
+          <p:nvPr/>
+        </p:nvSpPr>
+        <p:spPr>
+          <a:xfrm>
+            <a:off x="3639312" y="4169664"/>
             <a:ext cx="685800" cy="384048"/>
           </a:xfrm>
           <a:prstGeom prst="rect">
@@ -16223,13 +16313,13 @@
       </p:sp>
       <p:sp>
         <p:nvSpPr>
-          <p:cNvPr id="42" name="Text 40"/>
-          <p:cNvSpPr/>
-          <p:nvPr/>
-        </p:nvSpPr>
-        <p:spPr>
-          <a:xfrm>
-            <a:off x="3942207" y="4169664"/>
+          <p:cNvPr id="46" name="Text 44"/>
+          <p:cNvSpPr/>
+          <p:nvPr/>
+        </p:nvSpPr>
+        <p:spPr>
+          <a:xfrm>
+            <a:off x="3639312" y="4169664"/>
             <a:ext cx="685800" cy="384048"/>
           </a:xfrm>
           <a:prstGeom prst="rect">
@@ -16262,13 +16352,13 @@
       </p:sp>
       <p:sp>
         <p:nvSpPr>
-          <p:cNvPr id="43" name="Text 41"/>
-          <p:cNvSpPr/>
-          <p:nvPr/>
-        </p:nvSpPr>
-        <p:spPr>
-          <a:xfrm>
-            <a:off x="3942207" y="4572000"/>
+          <p:cNvPr id="47" name="Text 45"/>
+          <p:cNvSpPr/>
+          <p:nvPr/>
+        </p:nvSpPr>
+        <p:spPr>
+          <a:xfrm>
+            <a:off x="3639312" y="4572000"/>
             <a:ext cx="685800" cy="219456"/>
           </a:xfrm>
           <a:prstGeom prst="rect">
@@ -16301,13 +16391,13 @@
       </p:sp>
       <p:sp>
         <p:nvSpPr>
-          <p:cNvPr id="44" name="Shape 42"/>
-          <p:cNvSpPr/>
-          <p:nvPr/>
-        </p:nvSpPr>
-        <p:spPr>
-          <a:xfrm>
-            <a:off x="4850892" y="4169664"/>
+          <p:cNvPr id="48" name="Shape 46"/>
+          <p:cNvSpPr/>
+          <p:nvPr/>
+        </p:nvSpPr>
+        <p:spPr>
+          <a:xfrm>
+            <a:off x="4447032" y="4169664"/>
             <a:ext cx="685800" cy="384048"/>
           </a:xfrm>
           <a:prstGeom prst="rect">
@@ -16328,13 +16418,13 @@
       </p:sp>
       <p:sp>
         <p:nvSpPr>
-          <p:cNvPr id="45" name="Text 43"/>
-          <p:cNvSpPr/>
-          <p:nvPr/>
-        </p:nvSpPr>
-        <p:spPr>
-          <a:xfrm>
-            <a:off x="4850892" y="4169664"/>
+          <p:cNvPr id="49" name="Text 47"/>
+          <p:cNvSpPr/>
+          <p:nvPr/>
+        </p:nvSpPr>
+        <p:spPr>
+          <a:xfrm>
+            <a:off x="4447032" y="4169664"/>
             <a:ext cx="685800" cy="384048"/>
           </a:xfrm>
           <a:prstGeom prst="rect">
@@ -16367,13 +16457,13 @@
       </p:sp>
       <p:sp>
         <p:nvSpPr>
-          <p:cNvPr id="46" name="Shape 44"/>
-          <p:cNvSpPr/>
-          <p:nvPr/>
-        </p:nvSpPr>
-        <p:spPr>
-          <a:xfrm>
-            <a:off x="5759577" y="4169664"/>
+          <p:cNvPr id="50" name="Shape 48"/>
+          <p:cNvSpPr/>
+          <p:nvPr/>
+        </p:nvSpPr>
+        <p:spPr>
+          <a:xfrm>
+            <a:off x="5254752" y="4169664"/>
             <a:ext cx="685800" cy="384048"/>
           </a:xfrm>
           <a:prstGeom prst="rect">
@@ -16394,13 +16484,13 @@
       </p:sp>
       <p:sp>
         <p:nvSpPr>
-          <p:cNvPr id="47" name="Text 45"/>
-          <p:cNvSpPr/>
-          <p:nvPr/>
-        </p:nvSpPr>
-        <p:spPr>
-          <a:xfrm>
-            <a:off x="5759577" y="4169664"/>
+          <p:cNvPr id="51" name="Text 49"/>
+          <p:cNvSpPr/>
+          <p:nvPr/>
+        </p:nvSpPr>
+        <p:spPr>
+          <a:xfrm>
+            <a:off x="5254752" y="4169664"/>
             <a:ext cx="685800" cy="384048"/>
           </a:xfrm>
           <a:prstGeom prst="rect">
@@ -16433,13 +16523,13 @@
       </p:sp>
       <p:sp>
         <p:nvSpPr>
-          <p:cNvPr id="48" name="Shape 46"/>
-          <p:cNvSpPr/>
-          <p:nvPr/>
-        </p:nvSpPr>
-        <p:spPr>
-          <a:xfrm>
-            <a:off x="6668262" y="4169664"/>
+          <p:cNvPr id="52" name="Shape 50"/>
+          <p:cNvSpPr/>
+          <p:nvPr/>
+        </p:nvSpPr>
+        <p:spPr>
+          <a:xfrm>
+            <a:off x="6062472" y="4169664"/>
             <a:ext cx="685800" cy="384048"/>
           </a:xfrm>
           <a:prstGeom prst="rect">
@@ -16460,13 +16550,13 @@
       </p:sp>
       <p:sp>
         <p:nvSpPr>
-          <p:cNvPr id="49" name="Text 47"/>
-          <p:cNvSpPr/>
-          <p:nvPr/>
-        </p:nvSpPr>
-        <p:spPr>
-          <a:xfrm>
-            <a:off x="6668262" y="4169664"/>
+          <p:cNvPr id="53" name="Text 51"/>
+          <p:cNvSpPr/>
+          <p:nvPr/>
+        </p:nvSpPr>
+        <p:spPr>
+          <a:xfrm>
+            <a:off x="6062472" y="4169664"/>
             <a:ext cx="685800" cy="384048"/>
           </a:xfrm>
           <a:prstGeom prst="rect">
@@ -16491,7 +16581,7 @@
                 <a:ea typeface="Trebuchet MS" pitchFamily="34" charset="-122"/>
                 <a:cs typeface="Trebuchet MS" pitchFamily="34" charset="-120"/>
               </a:rPr>
-              <a:t>i</a:t>
+              <a:t>a</a:t>
             </a:r>
             <a:endParaRPr lang="en-US" sz="900" dirty="0"/>
           </a:p>
@@ -16499,13 +16589,13 @@
       </p:sp>
       <p:sp>
         <p:nvSpPr>
-          <p:cNvPr id="50" name="Shape 48"/>
-          <p:cNvSpPr/>
-          <p:nvPr/>
-        </p:nvSpPr>
-        <p:spPr>
-          <a:xfrm>
-            <a:off x="7576947" y="4169664"/>
+          <p:cNvPr id="54" name="Shape 52"/>
+          <p:cNvSpPr/>
+          <p:nvPr/>
+        </p:nvSpPr>
+        <p:spPr>
+          <a:xfrm>
+            <a:off x="6870192" y="4169664"/>
             <a:ext cx="685800" cy="384048"/>
           </a:xfrm>
           <a:prstGeom prst="rect">
@@ -16526,13 +16616,13 @@
       </p:sp>
       <p:sp>
         <p:nvSpPr>
-          <p:cNvPr id="51" name="Text 49"/>
-          <p:cNvSpPr/>
-          <p:nvPr/>
-        </p:nvSpPr>
-        <p:spPr>
-          <a:xfrm>
-            <a:off x="7576947" y="4169664"/>
+          <p:cNvPr id="55" name="Text 53"/>
+          <p:cNvSpPr/>
+          <p:nvPr/>
+        </p:nvSpPr>
+        <p:spPr>
+          <a:xfrm>
+            <a:off x="6870192" y="4169664"/>
             <a:ext cx="685800" cy="384048"/>
           </a:xfrm>
           <a:prstGeom prst="rect">
@@ -16557,7 +16647,73 @@
                 <a:ea typeface="Trebuchet MS" pitchFamily="34" charset="-122"/>
                 <a:cs typeface="Trebuchet MS" pitchFamily="34" charset="-120"/>
               </a:rPr>
-              <a:t>ng</a:t>
+              <a:t>b</a:t>
+            </a:r>
+            <a:endParaRPr lang="en-US" sz="900" dirty="0"/>
+          </a:p>
+        </p:txBody>
+      </p:sp>
+      <p:sp>
+        <p:nvSpPr>
+          <p:cNvPr id="56" name="Shape 54"/>
+          <p:cNvSpPr/>
+          <p:nvPr/>
+        </p:nvSpPr>
+        <p:spPr>
+          <a:xfrm>
+            <a:off x="7677912" y="4169664"/>
+            <a:ext cx="685800" cy="384048"/>
+          </a:xfrm>
+          <a:prstGeom prst="rect">
+            <a:avLst>
+              <a:gd name="adj" fmla="val 9524"/>
+            </a:avLst>
+          </a:prstGeom>
+          <a:solidFill>
+            <a:srgbClr val="FFFFFF"/>
+          </a:solidFill>
+          <a:ln w="12700">
+            <a:solidFill>
+              <a:srgbClr val="DB2777"/>
+            </a:solidFill>
+            <a:prstDash val="solid"/>
+          </a:ln>
+        </p:spPr>
+      </p:sp>
+      <p:sp>
+        <p:nvSpPr>
+          <p:cNvPr id="57" name="Text 55"/>
+          <p:cNvSpPr/>
+          <p:nvPr/>
+        </p:nvSpPr>
+        <p:spPr>
+          <a:xfrm>
+            <a:off x="7677912" y="4169664"/>
+            <a:ext cx="685800" cy="384048"/>
+          </a:xfrm>
+          <a:prstGeom prst="rect">
+            <a:avLst/>
+          </a:prstGeom>
+          <a:noFill/>
+          <a:ln/>
+        </p:spPr>
+        <p:txBody>
+          <a:bodyPr wrap="square" lIns="0" tIns="0" rIns="0" bIns="0" rtlCol="0" anchor="ctr"/>
+          <a:lstStyle/>
+          <a:p>
+            <a:pPr algn="ctr" indent="0" marL="0">
+              <a:buNone/>
+            </a:pPr>
+            <a:r>
+              <a:rPr lang="en-US" sz="900" b="1" dirty="0">
+                <a:solidFill>
+                  <a:srgbClr val="9D174D"/>
+                </a:solidFill>
+                <a:latin typeface="Trebuchet MS" pitchFamily="34" charset="0"/>
+                <a:ea typeface="Trebuchet MS" pitchFamily="34" charset="-122"/>
+                <a:cs typeface="Trebuchet MS" pitchFamily="34" charset="-120"/>
+              </a:rPr>
+              <a:t>le</a:t>
             </a:r>
             <a:endParaRPr lang="en-US" sz="900" dirty="0"/>
           </a:p>
@@ -17131,7 +17287,7 @@
                 <a:ea typeface="Calibri" pitchFamily="34" charset="-122"/>
                 <a:cs typeface="Calibri" pitchFamily="34" charset="-120"/>
               </a:rPr>
-              <a:t>Word Labs  •  wordlabs.app  •  Root: 'excite' = to stir up or rouse</a:t>
+              <a:t>Word Labs  •  wordlabs.app  •  Root: 'excite' = to stir up or arouse</a:t>
             </a:r>
             <a:endParaRPr lang="en-US" sz="800" dirty="0"/>
           </a:p>
@@ -17771,7 +17927,7 @@
                 <a:ea typeface="Calibri" pitchFamily="34" charset="-122"/>
                 <a:cs typeface="Calibri" pitchFamily="34" charset="-120"/>
               </a:rPr>
-              <a:t>Word Labs  •  wordlabs.app  •  Root: 'excite' = to stir up or rouse</a:t>
+              <a:t>Word Labs  •  wordlabs.app  •  Root: 'excite' = to stir up or arouse</a:t>
             </a:r>
             <a:endParaRPr lang="en-US" sz="800" dirty="0"/>
           </a:p>
@@ -17931,7 +18087,7 @@
                 <a:ea typeface="Calibri" pitchFamily="34" charset="-122"/>
                 <a:cs typeface="Calibri" pitchFamily="34" charset="-120"/>
               </a:rPr>
-              <a:t>overexcited</a:t>
+              <a:t>exciting</a:t>
             </a:r>
             <a:pPr algn="l" indent="0" marL="0">
               <a:buNone/>
@@ -17945,7 +18101,7 @@
                 <a:ea typeface="Calibri" pitchFamily="34" charset="-122"/>
                 <a:cs typeface="Calibri" pitchFamily="34" charset="-120"/>
               </a:rPr>
-              <a:t> puppy, and they all agreed it was the most </a:t>
+              <a:t> news; they were all </a:t>
             </a:r>
             <a:pPr algn="l" indent="0" marL="0">
               <a:buNone/>
@@ -17962,7 +18118,7 @@
                 <a:ea typeface="Calibri" pitchFamily="34" charset="-122"/>
                 <a:cs typeface="Calibri" pitchFamily="34" charset="-120"/>
               </a:rPr>
-              <a:t>excitable</a:t>
+              <a:t>overexcited</a:t>
             </a:r>
             <a:pPr algn="l" indent="0" marL="0">
               <a:buNone/>
@@ -17976,7 +18132,7 @@
                 <a:ea typeface="Calibri" pitchFamily="34" charset="-122"/>
                 <a:cs typeface="Calibri" pitchFamily="34" charset="-120"/>
               </a:rPr>
-              <a:t> dog they had ever seen!</a:t>
+              <a:t> by the end!</a:t>
             </a:r>
             <a:endParaRPr lang="en-US" sz="1800" dirty="0"/>
           </a:p>
@@ -18259,7 +18415,7 @@
                 <a:ea typeface="Trebuchet MS" pitchFamily="34" charset="-122"/>
                 <a:cs typeface="Trebuchet MS" pitchFamily="34" charset="-120"/>
               </a:rPr>
-              <a:t>overexcited</a:t>
+              <a:t>exciting</a:t>
             </a:r>
             <a:endParaRPr lang="en-US" sz="1400" dirty="0"/>
           </a:p>
@@ -18387,7 +18543,7 @@
                 <a:ea typeface="Trebuchet MS" pitchFamily="34" charset="-122"/>
                 <a:cs typeface="Trebuchet MS" pitchFamily="34" charset="-120"/>
               </a:rPr>
-              <a:t>excitable</a:t>
+              <a:t>overexcited</a:t>
             </a:r>
             <a:endParaRPr lang="en-US" sz="1400" dirty="0"/>
           </a:p>
@@ -18718,7 +18874,7 @@
                 <a:ea typeface="Calibri" pitchFamily="34" charset="-122"/>
                 <a:cs typeface="Calibri" pitchFamily="34" charset="-120"/>
               </a:rPr>
-              <a:t>Word Labs  •  wordlabs.app  •  Root: 'excite' = to stir up or rouse</a:t>
+              <a:t>Word Labs  •  wordlabs.app  •  Root: 'excite' = to stir up or arouse</a:t>
             </a:r>
             <a:endParaRPr lang="en-US" sz="800" dirty="0"/>
           </a:p>
@@ -19545,7 +19701,7 @@
                 <a:ea typeface="Calibri" pitchFamily="34" charset="-122"/>
                 <a:cs typeface="Calibri" pitchFamily="34" charset="-120"/>
               </a:rPr>
-              <a:t>Word Labs  •  wordlabs.app  •  Root: 'excite' = to stir up or rouse</a:t>
+              <a:t>Word Labs  •  wordlabs.app  •  Root: 'excite' = to stir up or arouse</a:t>
             </a:r>
             <a:endParaRPr lang="en-US" sz="800" dirty="0"/>
           </a:p>
@@ -19862,7 +20018,7 @@
                 <a:ea typeface="Calibri" pitchFamily="34" charset="-122"/>
                 <a:cs typeface="Calibri" pitchFamily="34" charset="-120"/>
               </a:rPr>
-              <a:t>to stir up or rouse</a:t>
+              <a:t>to stir up or arouse</a:t>
             </a:r>
             <a:endParaRPr lang="en-US" sz="850" dirty="0"/>
           </a:p>
@@ -19974,7 +20130,7 @@
                 <a:ea typeface="Calibri" pitchFamily="34" charset="-122"/>
                 <a:cs typeface="Calibri" pitchFamily="34" charset="-120"/>
               </a:rPr>
-              <a:t>past or adjectival form</a:t>
+              <a:t>past or completed action</a:t>
             </a:r>
             <a:endParaRPr lang="en-US" sz="850" dirty="0"/>
           </a:p>
@@ -20013,7 +20169,7 @@
                 <a:ea typeface="Calibri" pitchFamily="34" charset="-122"/>
                 <a:cs typeface="Calibri" pitchFamily="34" charset="-120"/>
               </a:rPr>
-              <a:t>'e' retained as part of base before consonant suffix</a:t>
+              <a:t>'e' kept as part of base before consonant suffix</a:t>
             </a:r>
             <a:endParaRPr lang="en-US" sz="700" dirty="0"/>
           </a:p>
@@ -20681,7 +20837,7 @@
                 <a:ea typeface="Calibri" pitchFamily="34" charset="-122"/>
                 <a:cs typeface="Calibri" pitchFamily="34" charset="-120"/>
               </a:rPr>
-              <a:t>Word Labs  •  wordlabs.app  •  Root: 'excite' = to stir up or rouse</a:t>
+              <a:t>Word Labs  •  wordlabs.app  •  Root: 'excite' = to stir up or arouse</a:t>
             </a:r>
             <a:endParaRPr lang="en-US" sz="800" dirty="0"/>
           </a:p>
@@ -20998,7 +21154,7 @@
                 <a:ea typeface="Calibri" pitchFamily="34" charset="-122"/>
                 <a:cs typeface="Calibri" pitchFamily="34" charset="-120"/>
               </a:rPr>
-              <a:t>to stir up or rouse</a:t>
+              <a:t>to stir up or arouse</a:t>
             </a:r>
             <a:endParaRPr lang="en-US" sz="850" dirty="0"/>
           </a:p>
@@ -21110,7 +21266,7 @@
                 <a:ea typeface="Calibri" pitchFamily="34" charset="-122"/>
                 <a:cs typeface="Calibri" pitchFamily="34" charset="-120"/>
               </a:rPr>
-              <a:t>past or adjectival form</a:t>
+              <a:t>past or completed action</a:t>
             </a:r>
             <a:endParaRPr lang="en-US" sz="850" dirty="0"/>
           </a:p>
@@ -21149,7 +21305,7 @@
                 <a:ea typeface="Calibri" pitchFamily="34" charset="-122"/>
                 <a:cs typeface="Calibri" pitchFamily="34" charset="-120"/>
               </a:rPr>
-              <a:t>'e' retained as part of base before consonant suffix</a:t>
+              <a:t>'e' kept as part of base before consonant suffix</a:t>
             </a:r>
             <a:endParaRPr lang="en-US" sz="700" dirty="0"/>
           </a:p>
@@ -21525,7 +21681,7 @@
                 <a:ea typeface="Trebuchet MS" pitchFamily="34" charset="-122"/>
                 <a:cs typeface="Trebuchet MS" pitchFamily="34" charset="-120"/>
               </a:rPr>
-              <a:t>ci</a:t>
+              <a:t>cit</a:t>
             </a:r>
             <a:endParaRPr lang="en-US" sz="1400" dirty="0"/>
           </a:p>
@@ -21630,7 +21786,7 @@
                 <a:ea typeface="Trebuchet MS" pitchFamily="34" charset="-122"/>
                 <a:cs typeface="Trebuchet MS" pitchFamily="34" charset="-120"/>
               </a:rPr>
-              <a:t>ted</a:t>
+              <a:t>ed</a:t>
             </a:r>
             <a:endParaRPr lang="en-US" sz="1400" dirty="0"/>
           </a:p>
@@ -22159,7 +22315,7 @@
                 <a:ea typeface="Calibri" pitchFamily="34" charset="-122"/>
                 <a:cs typeface="Calibri" pitchFamily="34" charset="-120"/>
               </a:rPr>
-              <a:t>Word Labs  •  wordlabs.app  •  Root: 'excite' = to stir up or rouse</a:t>
+              <a:t>Word Labs  •  wordlabs.app  •  Root: 'excite' = to stir up or arouse</a:t>
             </a:r>
             <a:endParaRPr lang="en-US" sz="800" dirty="0"/>
           </a:p>
@@ -22476,7 +22632,7 @@
                 <a:ea typeface="Calibri" pitchFamily="34" charset="-122"/>
                 <a:cs typeface="Calibri" pitchFamily="34" charset="-120"/>
               </a:rPr>
-              <a:t>to stir up or rouse</a:t>
+              <a:t>to stir up or arouse</a:t>
             </a:r>
             <a:endParaRPr lang="en-US" sz="850" dirty="0"/>
           </a:p>
@@ -22588,7 +22744,7 @@
                 <a:ea typeface="Calibri" pitchFamily="34" charset="-122"/>
                 <a:cs typeface="Calibri" pitchFamily="34" charset="-120"/>
               </a:rPr>
-              <a:t>past or adjectival form</a:t>
+              <a:t>past or completed action</a:t>
             </a:r>
             <a:endParaRPr lang="en-US" sz="850" dirty="0"/>
           </a:p>
@@ -22627,7 +22783,7 @@
                 <a:ea typeface="Calibri" pitchFamily="34" charset="-122"/>
                 <a:cs typeface="Calibri" pitchFamily="34" charset="-120"/>
               </a:rPr>
-              <a:t>'e' retained as part of base before consonant suffix</a:t>
+              <a:t>'e' kept as part of base before consonant suffix</a:t>
             </a:r>
             <a:endParaRPr lang="en-US" sz="700" dirty="0"/>
           </a:p>
@@ -23003,7 +23159,7 @@
                 <a:ea typeface="Trebuchet MS" pitchFamily="34" charset="-122"/>
                 <a:cs typeface="Trebuchet MS" pitchFamily="34" charset="-120"/>
               </a:rPr>
-              <a:t>ci</a:t>
+              <a:t>cit</a:t>
             </a:r>
             <a:endParaRPr lang="en-US" sz="1400" dirty="0"/>
           </a:p>
@@ -23108,7 +23264,7 @@
                 <a:ea typeface="Trebuchet MS" pitchFamily="34" charset="-122"/>
                 <a:cs typeface="Trebuchet MS" pitchFamily="34" charset="-120"/>
               </a:rPr>
-              <a:t>ted</a:t>
+              <a:t>ed</a:t>
             </a:r>
             <a:endParaRPr lang="en-US" sz="1400" dirty="0"/>
           </a:p>
@@ -23446,7 +23602,46 @@
       </p:sp>
       <p:sp>
         <p:nvSpPr>
-          <p:cNvPr id="47" name="Shape 45"/>
+          <p:cNvPr id="47" name="Text 45"/>
+          <p:cNvSpPr/>
+          <p:nvPr/>
+        </p:nvSpPr>
+        <p:spPr>
+          <a:xfrm>
+            <a:off x="2677363" y="4572000"/>
+            <a:ext cx="676656" cy="219456"/>
+          </a:xfrm>
+          <a:prstGeom prst="rect">
+            <a:avLst/>
+          </a:prstGeom>
+          <a:noFill/>
+          <a:ln/>
+        </p:spPr>
+        <p:txBody>
+          <a:bodyPr wrap="square" lIns="0" tIns="0" rIns="0" bIns="0" rtlCol="0" anchor="t"/>
+          <a:lstStyle/>
+          <a:p>
+            <a:pPr algn="ctr" indent="0" marL="0">
+              <a:buNone/>
+            </a:pPr>
+            <a:r>
+              <a:rPr lang="en-US" sz="750" i="1" dirty="0">
+                <a:solidFill>
+                  <a:srgbClr val="94A3B8"/>
+                </a:solidFill>
+                <a:latin typeface="Calibri" pitchFamily="34" charset="0"/>
+                <a:ea typeface="Calibri" pitchFamily="34" charset="-122"/>
+                <a:cs typeface="Calibri" pitchFamily="34" charset="-120"/>
+              </a:rPr>
+              <a:t>/ks/</a:t>
+            </a:r>
+            <a:endParaRPr lang="en-US" sz="750" dirty="0"/>
+          </a:p>
+        </p:txBody>
+      </p:sp>
+      <p:sp>
+        <p:nvSpPr>
+          <p:cNvPr id="48" name="Shape 46"/>
           <p:cNvSpPr/>
           <p:nvPr/>
         </p:nvSpPr>
@@ -23473,7 +23668,7 @@
       </p:sp>
       <p:sp>
         <p:nvSpPr>
-          <p:cNvPr id="48" name="Text 46"/>
+          <p:cNvPr id="49" name="Text 47"/>
           <p:cNvSpPr/>
           <p:nvPr/>
         </p:nvSpPr>
@@ -23512,7 +23707,7 @@
       </p:sp>
       <p:sp>
         <p:nvSpPr>
-          <p:cNvPr id="49" name="Text 47"/>
+          <p:cNvPr id="50" name="Text 48"/>
           <p:cNvSpPr/>
           <p:nvPr/>
         </p:nvSpPr>
@@ -23551,7 +23746,7 @@
       </p:sp>
       <p:sp>
         <p:nvSpPr>
-          <p:cNvPr id="50" name="Shape 48"/>
+          <p:cNvPr id="51" name="Shape 49"/>
           <p:cNvSpPr/>
           <p:nvPr/>
         </p:nvSpPr>
@@ -23578,7 +23773,7 @@
       </p:sp>
       <p:sp>
         <p:nvSpPr>
-          <p:cNvPr id="51" name="Text 49"/>
+          <p:cNvPr id="52" name="Text 50"/>
           <p:cNvSpPr/>
           <p:nvPr/>
         </p:nvSpPr>
@@ -23617,7 +23812,7 @@
       </p:sp>
       <p:sp>
         <p:nvSpPr>
-          <p:cNvPr id="52" name="Shape 50"/>
+          <p:cNvPr id="53" name="Shape 51"/>
           <p:cNvSpPr/>
           <p:nvPr/>
         </p:nvSpPr>
@@ -23644,7 +23839,7 @@
       </p:sp>
       <p:sp>
         <p:nvSpPr>
-          <p:cNvPr id="53" name="Text 51"/>
+          <p:cNvPr id="54" name="Text 52"/>
           <p:cNvSpPr/>
           <p:nvPr/>
         </p:nvSpPr>
@@ -23683,7 +23878,7 @@
       </p:sp>
       <p:sp>
         <p:nvSpPr>
-          <p:cNvPr id="54" name="Shape 52"/>
+          <p:cNvPr id="55" name="Shape 53"/>
           <p:cNvSpPr/>
           <p:nvPr/>
         </p:nvSpPr>
@@ -23710,7 +23905,7 @@
       </p:sp>
       <p:sp>
         <p:nvSpPr>
-          <p:cNvPr id="55" name="Text 53"/>
+          <p:cNvPr id="56" name="Text 54"/>
           <p:cNvSpPr/>
           <p:nvPr/>
         </p:nvSpPr>
@@ -23749,7 +23944,7 @@
       </p:sp>
       <p:sp>
         <p:nvSpPr>
-          <p:cNvPr id="56" name="Shape 54"/>
+          <p:cNvPr id="57" name="Shape 55"/>
           <p:cNvSpPr/>
           <p:nvPr/>
         </p:nvSpPr>
@@ -23776,7 +23971,7 @@
       </p:sp>
       <p:sp>
         <p:nvSpPr>
-          <p:cNvPr id="57" name="Text 55"/>
+          <p:cNvPr id="58" name="Text 56"/>
           <p:cNvSpPr/>
           <p:nvPr/>
         </p:nvSpPr>
@@ -23815,7 +24010,7 @@
       </p:sp>
       <p:sp>
         <p:nvSpPr>
-          <p:cNvPr id="58" name="Shape 56"/>
+          <p:cNvPr id="59" name="Shape 57"/>
           <p:cNvSpPr/>
           <p:nvPr/>
         </p:nvSpPr>
@@ -23842,7 +24037,7 @@
       </p:sp>
       <p:sp>
         <p:nvSpPr>
-          <p:cNvPr id="59" name="Text 57"/>
+          <p:cNvPr id="60" name="Text 58"/>
           <p:cNvSpPr/>
           <p:nvPr/>
         </p:nvSpPr>
@@ -23881,7 +24076,7 @@
       </p:sp>
       <p:sp>
         <p:nvSpPr>
-          <p:cNvPr id="60" name="Shape 58"/>
+          <p:cNvPr id="61" name="Shape 59"/>
           <p:cNvSpPr/>
           <p:nvPr/>
         </p:nvSpPr>
@@ -23908,7 +24103,7 @@
       </p:sp>
       <p:sp>
         <p:nvSpPr>
-          <p:cNvPr id="61" name="Text 59"/>
+          <p:cNvPr id="62" name="Text 60"/>
           <p:cNvSpPr/>
           <p:nvPr/>
         </p:nvSpPr>
@@ -23942,6 +24137,45 @@
               <a:t>y</a:t>
             </a:r>
             <a:endParaRPr lang="en-US" sz="900" dirty="0"/>
+          </a:p>
+        </p:txBody>
+      </p:sp>
+      <p:sp>
+        <p:nvSpPr>
+          <p:cNvPr id="63" name="Text 61"/>
+          <p:cNvSpPr/>
+          <p:nvPr/>
+        </p:nvSpPr>
+        <p:spPr>
+          <a:xfrm>
+            <a:off x="7759598" y="4572000"/>
+            <a:ext cx="676656" cy="219456"/>
+          </a:xfrm>
+          <a:prstGeom prst="rect">
+            <a:avLst/>
+          </a:prstGeom>
+          <a:noFill/>
+          <a:ln/>
+        </p:spPr>
+        <p:txBody>
+          <a:bodyPr wrap="square" lIns="0" tIns="0" rIns="0" bIns="0" rtlCol="0" anchor="t"/>
+          <a:lstStyle/>
+          <a:p>
+            <a:pPr algn="ctr" indent="0" marL="0">
+              <a:buNone/>
+            </a:pPr>
+            <a:r>
+              <a:rPr lang="en-US" sz="750" i="1" dirty="0">
+                <a:solidFill>
+                  <a:srgbClr val="94A3B8"/>
+                </a:solidFill>
+                <a:latin typeface="Calibri" pitchFamily="34" charset="0"/>
+                <a:ea typeface="Calibri" pitchFamily="34" charset="-122"/>
+                <a:cs typeface="Calibri" pitchFamily="34" charset="-120"/>
+              </a:rPr>
+              <a:t>/ee/</a:t>
+            </a:r>
+            <a:endParaRPr lang="en-US" sz="750" dirty="0"/>
           </a:p>
         </p:txBody>
       </p:sp>
@@ -24231,7 +24465,7 @@
                 <a:ea typeface="Calibri" pitchFamily="34" charset="-122"/>
                 <a:cs typeface="Calibri" pitchFamily="34" charset="-120"/>
               </a:rPr>
-              <a:t>Word Labs  •  wordlabs.app  •  Root: 'excite' = to stir up or rouse</a:t>
+              <a:t>Word Labs  •  wordlabs.app  •  Root: 'excite' = to stir up or arouse</a:t>
             </a:r>
             <a:endParaRPr lang="en-US" sz="800" dirty="0"/>
           </a:p>
@@ -24370,7 +24604,7 @@
                 <a:ea typeface="Trebuchet MS" pitchFamily="34" charset="-122"/>
                 <a:cs typeface="Trebuchet MS" pitchFamily="34" charset="-120"/>
               </a:rPr>
-              <a:t>overexcited</a:t>
+              <a:t>exciting</a:t>
             </a:r>
             <a:endParaRPr lang="en-US" sz="2800" dirty="0"/>
           </a:p>
@@ -25058,7 +25292,7 @@
                 <a:ea typeface="Calibri" pitchFamily="34" charset="-122"/>
                 <a:cs typeface="Calibri" pitchFamily="34" charset="-120"/>
               </a:rPr>
-              <a:t>Word Labs  •  wordlabs.app  •  Root: 'excite' = to stir up or rouse</a:t>
+              <a:t>Word Labs  •  wordlabs.app  •  Root: 'excite' = to stir up or arouse</a:t>
             </a:r>
             <a:endParaRPr lang="en-US" sz="800" dirty="0"/>
           </a:p>
@@ -25197,7 +25431,7 @@
                 <a:ea typeface="Trebuchet MS" pitchFamily="34" charset="-122"/>
                 <a:cs typeface="Trebuchet MS" pitchFamily="34" charset="-120"/>
               </a:rPr>
-              <a:t>overexcited</a:t>
+              <a:t>exciting</a:t>
             </a:r>
             <a:endParaRPr lang="en-US" sz="2800" dirty="0"/>
           </a:p>
@@ -25277,7 +25511,7 @@
         </p:nvSpPr>
         <p:spPr>
           <a:xfrm>
-            <a:off x="2221992" y="2258568"/>
+            <a:off x="2938272" y="2258568"/>
             <a:ext cx="1828800" cy="292608"/>
           </a:xfrm>
           <a:prstGeom prst="rect">
@@ -25286,11 +25520,11 @@
             </a:avLst>
           </a:prstGeom>
           <a:solidFill>
-            <a:srgbClr val="DDD6FE"/>
+            <a:srgbClr val="CCFBF1"/>
           </a:solidFill>
           <a:ln w="19050">
             <a:solidFill>
-              <a:srgbClr val="7C3AED"/>
+              <a:srgbClr val="0D9488"/>
             </a:solidFill>
             <a:prstDash val="solid"/>
           </a:ln>
@@ -25311,7 +25545,7 @@
         </p:nvSpPr>
         <p:spPr>
           <a:xfrm>
-            <a:off x="2221992" y="2258568"/>
+            <a:off x="2938272" y="2258568"/>
             <a:ext cx="1828800" cy="292608"/>
           </a:xfrm>
           <a:prstGeom prst="rect">
@@ -25330,13 +25564,13 @@
             <a:r>
               <a:rPr lang="en-US" sz="1300" b="1" dirty="0">
                 <a:solidFill>
-                  <a:srgbClr val="4C1D95"/>
+                  <a:srgbClr val="0F766E"/>
                 </a:solidFill>
                 <a:latin typeface="Trebuchet MS" pitchFamily="34" charset="0"/>
                 <a:ea typeface="Trebuchet MS" pitchFamily="34" charset="-122"/>
                 <a:cs typeface="Trebuchet MS" pitchFamily="34" charset="-120"/>
               </a:rPr>
-              <a:t>over</a:t>
+              <a:t>excite</a:t>
             </a:r>
             <a:endParaRPr lang="en-US" sz="1300" dirty="0"/>
           </a:p>
@@ -25350,7 +25584,7 @@
         </p:nvSpPr>
         <p:spPr>
           <a:xfrm>
-            <a:off x="2221992" y="2569464"/>
+            <a:off x="2938272" y="2569464"/>
             <a:ext cx="1828800" cy="201168"/>
           </a:xfrm>
           <a:prstGeom prst="rect">
@@ -25375,7 +25609,7 @@
                 <a:ea typeface="Calibri" pitchFamily="34" charset="-122"/>
                 <a:cs typeface="Calibri" pitchFamily="34" charset="-120"/>
               </a:rPr>
-              <a:t>too much or above</a:t>
+              <a:t>to stir up or arouse</a:t>
             </a:r>
             <a:endParaRPr lang="en-US" sz="850" dirty="0"/>
           </a:p>
@@ -25389,7 +25623,7 @@
         </p:nvSpPr>
         <p:spPr>
           <a:xfrm>
-            <a:off x="4370832" y="2258568"/>
+            <a:off x="5803392" y="2258568"/>
             <a:ext cx="1828800" cy="292608"/>
           </a:xfrm>
           <a:prstGeom prst="rect">
@@ -25398,11 +25632,11 @@
             </a:avLst>
           </a:prstGeom>
           <a:solidFill>
-            <a:srgbClr val="CCFBF1"/>
+            <a:srgbClr val="FCE7F3"/>
           </a:solidFill>
           <a:ln w="19050">
             <a:solidFill>
-              <a:srgbClr val="0D9488"/>
+              <a:srgbClr val="DB2777"/>
             </a:solidFill>
             <a:prstDash val="solid"/>
           </a:ln>
@@ -25423,7 +25657,7 @@
         </p:nvSpPr>
         <p:spPr>
           <a:xfrm>
-            <a:off x="4370832" y="2258568"/>
+            <a:off x="5803392" y="2258568"/>
             <a:ext cx="1828800" cy="292608"/>
           </a:xfrm>
           <a:prstGeom prst="rect">
@@ -25442,13 +25676,13 @@
             <a:r>
               <a:rPr lang="en-US" sz="1300" b="1" dirty="0">
                 <a:solidFill>
-                  <a:srgbClr val="0F766E"/>
+                  <a:srgbClr val="9D174D"/>
                 </a:solidFill>
                 <a:latin typeface="Trebuchet MS" pitchFamily="34" charset="0"/>
                 <a:ea typeface="Trebuchet MS" pitchFamily="34" charset="-122"/>
                 <a:cs typeface="Trebuchet MS" pitchFamily="34" charset="-120"/>
               </a:rPr>
-              <a:t>excite</a:t>
+              <a:t>ing</a:t>
             </a:r>
             <a:endParaRPr lang="en-US" sz="1300" dirty="0"/>
           </a:p>
@@ -25462,7 +25696,7 @@
         </p:nvSpPr>
         <p:spPr>
           <a:xfrm>
-            <a:off x="4370832" y="2569464"/>
+            <a:off x="5803392" y="2569464"/>
             <a:ext cx="1828800" cy="201168"/>
           </a:xfrm>
           <a:prstGeom prst="rect">
@@ -25487,7 +25721,7 @@
                 <a:ea typeface="Calibri" pitchFamily="34" charset="-122"/>
                 <a:cs typeface="Calibri" pitchFamily="34" charset="-120"/>
               </a:rPr>
-              <a:t>to stir up or rouse</a:t>
+              <a:t>ongoing action or quality</a:t>
             </a:r>
             <a:endParaRPr lang="en-US" sz="850" dirty="0"/>
           </a:p>
@@ -25495,169 +25729,189 @@
       </p:sp>
       <p:sp>
         <p:nvSpPr>
-          <p:cNvPr id="22" name="Shape 20"/>
-          <p:cNvSpPr/>
-          <p:nvPr/>
-        </p:nvSpPr>
-        <p:spPr>
-          <a:xfrm>
-            <a:off x="6519672" y="2258568"/>
-            <a:ext cx="1828800" cy="292608"/>
+          <p:cNvPr id="22" name="Text 20"/>
+          <p:cNvSpPr/>
+          <p:nvPr/>
+        </p:nvSpPr>
+        <p:spPr>
+          <a:xfrm>
+            <a:off x="5803392" y="2752344"/>
+            <a:ext cx="1828800" cy="182880"/>
+          </a:xfrm>
+          <a:prstGeom prst="rect">
+            <a:avLst/>
+          </a:prstGeom>
+          <a:noFill/>
+          <a:ln/>
+        </p:spPr>
+        <p:txBody>
+          <a:bodyPr wrap="square" lIns="0" tIns="0" rIns="0" bIns="0" rtlCol="0" anchor="t"/>
+          <a:lstStyle/>
+          <a:p>
+            <a:pPr algn="ctr" indent="0" marL="0">
+              <a:buNone/>
+            </a:pPr>
+            <a:r>
+              <a:rPr lang="en-US" sz="700" i="1" dirty="0">
+                <a:solidFill>
+                  <a:srgbClr val="94A3B8"/>
+                </a:solidFill>
+                <a:latin typeface="Calibri" pitchFamily="34" charset="0"/>
+                <a:ea typeface="Calibri" pitchFamily="34" charset="-122"/>
+                <a:cs typeface="Calibri" pitchFamily="34" charset="-120"/>
+              </a:rPr>
+              <a:t>'e' dropped before vowel suffix</a:t>
+            </a:r>
+            <a:endParaRPr lang="en-US" sz="700" dirty="0"/>
+          </a:p>
+        </p:txBody>
+      </p:sp>
+      <p:sp>
+        <p:nvSpPr>
+          <p:cNvPr id="23" name="Shape 21"/>
+          <p:cNvSpPr/>
+          <p:nvPr/>
+        </p:nvSpPr>
+        <p:spPr>
+          <a:xfrm>
+            <a:off x="365760" y="3273552"/>
+            <a:ext cx="1371600" cy="658368"/>
           </a:xfrm>
           <a:prstGeom prst="rect">
             <a:avLst>
-              <a:gd name="adj" fmla="val 25000"/>
+              <a:gd name="adj" fmla="val 8333"/>
             </a:avLst>
           </a:prstGeom>
           <a:solidFill>
-            <a:srgbClr val="FCE7F3"/>
-          </a:solidFill>
-          <a:ln w="19050">
-            <a:solidFill>
-              <a:srgbClr val="DB2777"/>
-            </a:solidFill>
-            <a:prstDash val="solid"/>
-          </a:ln>
-          <a:effectLst>
-            <a:outerShdw sx="100000" sy="100000" kx="0" ky="0" algn="bl" rotWithShape="0" blurRad="101600" dist="38100" dir="8100000">
-              <a:srgbClr val="000000">
-                <a:alpha val="12000"/>
-              </a:srgbClr>
-            </a:outerShdw>
-          </a:effectLst>
-        </p:spPr>
-      </p:sp>
-      <p:sp>
-        <p:nvSpPr>
-          <p:cNvPr id="23" name="Text 21"/>
-          <p:cNvSpPr/>
-          <p:nvPr/>
-        </p:nvSpPr>
-        <p:spPr>
-          <a:xfrm>
-            <a:off x="6519672" y="2258568"/>
-            <a:ext cx="1828800" cy="292608"/>
-          </a:xfrm>
-          <a:prstGeom prst="rect">
-            <a:avLst/>
-          </a:prstGeom>
-          <a:noFill/>
-          <a:ln/>
-        </p:spPr>
-        <p:txBody>
-          <a:bodyPr wrap="square" lIns="0" tIns="0" rIns="0" bIns="0" rtlCol="0" anchor="ctr"/>
-          <a:lstStyle/>
-          <a:p>
-            <a:pPr algn="ctr" indent="0" marL="0">
-              <a:buNone/>
-            </a:pPr>
-            <a:r>
-              <a:rPr lang="en-US" sz="1300" b="1" dirty="0">
-                <a:solidFill>
-                  <a:srgbClr val="9D174D"/>
+            <a:srgbClr val="E2E8F0"/>
+          </a:solidFill>
+          <a:ln w="12700">
+            <a:solidFill>
+              <a:srgbClr val="E2E8F0"/>
+            </a:solidFill>
+            <a:prstDash val="solid"/>
+          </a:ln>
+        </p:spPr>
+      </p:sp>
+      <p:sp>
+        <p:nvSpPr>
+          <p:cNvPr id="24" name="Text 22"/>
+          <p:cNvSpPr/>
+          <p:nvPr/>
+        </p:nvSpPr>
+        <p:spPr>
+          <a:xfrm>
+            <a:off x="365760" y="3273552"/>
+            <a:ext cx="1371600" cy="658368"/>
+          </a:xfrm>
+          <a:prstGeom prst="rect">
+            <a:avLst/>
+          </a:prstGeom>
+          <a:noFill/>
+          <a:ln/>
+        </p:spPr>
+        <p:txBody>
+          <a:bodyPr wrap="square" lIns="0" tIns="0" rIns="0" bIns="0" rtlCol="0" anchor="ctr"/>
+          <a:lstStyle/>
+          <a:p>
+            <a:pPr algn="ctr" indent="0" marL="0">
+              <a:buNone/>
+            </a:pPr>
+            <a:r>
+              <a:rPr lang="en-US" sz="1100" b="1" dirty="0">
+                <a:solidFill>
+                  <a:srgbClr val="475569"/>
                 </a:solidFill>
                 <a:latin typeface="Trebuchet MS" pitchFamily="34" charset="0"/>
                 <a:ea typeface="Trebuchet MS" pitchFamily="34" charset="-122"/>
                 <a:cs typeface="Trebuchet MS" pitchFamily="34" charset="-120"/>
               </a:rPr>
-              <a:t>d</a:t>
-            </a:r>
-            <a:endParaRPr lang="en-US" sz="1300" dirty="0"/>
-          </a:p>
-        </p:txBody>
-      </p:sp>
-      <p:sp>
-        <p:nvSpPr>
-          <p:cNvPr id="24" name="Text 22"/>
-          <p:cNvSpPr/>
-          <p:nvPr/>
-        </p:nvSpPr>
-        <p:spPr>
-          <a:xfrm>
-            <a:off x="6519672" y="2569464"/>
-            <a:ext cx="1828800" cy="201168"/>
-          </a:xfrm>
-          <a:prstGeom prst="rect">
-            <a:avLst/>
-          </a:prstGeom>
-          <a:noFill/>
-          <a:ln/>
-        </p:spPr>
-        <p:txBody>
-          <a:bodyPr wrap="square" lIns="0" tIns="0" rIns="0" bIns="0" rtlCol="0" anchor="t"/>
-          <a:lstStyle/>
-          <a:p>
-            <a:pPr algn="ctr" indent="0" marL="0">
-              <a:buNone/>
-            </a:pPr>
-            <a:r>
-              <a:rPr lang="en-US" sz="850" dirty="0">
-                <a:solidFill>
-                  <a:srgbClr val="475569"/>
+              <a:t>Syllables</a:t>
+            </a:r>
+            <a:endParaRPr lang="en-US" sz="1100" dirty="0"/>
+          </a:p>
+        </p:txBody>
+      </p:sp>
+      <p:sp>
+        <p:nvSpPr>
+          <p:cNvPr id="25" name="Shape 23"/>
+          <p:cNvSpPr/>
+          <p:nvPr/>
+        </p:nvSpPr>
+        <p:spPr>
+          <a:xfrm>
+            <a:off x="1874520" y="3273552"/>
+            <a:ext cx="6903720" cy="658368"/>
+          </a:xfrm>
+          <a:prstGeom prst="rect">
+            <a:avLst>
+              <a:gd name="adj" fmla="val 8333"/>
+            </a:avLst>
+          </a:prstGeom>
+          <a:solidFill>
+            <a:srgbClr val="F8FAFC"/>
+          </a:solidFill>
+          <a:ln w="12700">
+            <a:solidFill>
+              <a:srgbClr val="E2E8F0"/>
+            </a:solidFill>
+            <a:prstDash val="dash"/>
+          </a:ln>
+        </p:spPr>
+      </p:sp>
+      <p:sp>
+        <p:nvSpPr>
+          <p:cNvPr id="26" name="Text 24"/>
+          <p:cNvSpPr/>
+          <p:nvPr/>
+        </p:nvSpPr>
+        <p:spPr>
+          <a:xfrm>
+            <a:off x="1874520" y="3273552"/>
+            <a:ext cx="6903720" cy="658368"/>
+          </a:xfrm>
+          <a:prstGeom prst="rect">
+            <a:avLst/>
+          </a:prstGeom>
+          <a:noFill/>
+          <a:ln/>
+        </p:spPr>
+        <p:txBody>
+          <a:bodyPr wrap="square" rtlCol="0" anchor="ctr"/>
+          <a:lstStyle/>
+          <a:p>
+            <a:pPr algn="ctr" indent="0" marL="0">
+              <a:buNone/>
+            </a:pPr>
+            <a:r>
+              <a:rPr lang="en-US" sz="1100" i="1" dirty="0">
+                <a:solidFill>
+                  <a:srgbClr val="CBD5E1"/>
                 </a:solidFill>
                 <a:latin typeface="Calibri" pitchFamily="34" charset="0"/>
                 <a:ea typeface="Calibri" pitchFamily="34" charset="-122"/>
                 <a:cs typeface="Calibri" pitchFamily="34" charset="-120"/>
               </a:rPr>
-              <a:t>past tense or adjectival form</a:t>
-            </a:r>
-            <a:endParaRPr lang="en-US" sz="850" dirty="0"/>
-          </a:p>
-        </p:txBody>
-      </p:sp>
-      <p:sp>
-        <p:nvSpPr>
-          <p:cNvPr id="25" name="Text 23"/>
-          <p:cNvSpPr/>
-          <p:nvPr/>
-        </p:nvSpPr>
-        <p:spPr>
-          <a:xfrm>
-            <a:off x="6519672" y="2752344"/>
-            <a:ext cx="1828800" cy="182880"/>
-          </a:xfrm>
-          <a:prstGeom prst="rect">
-            <a:avLst/>
-          </a:prstGeom>
-          <a:noFill/>
-          <a:ln/>
-        </p:spPr>
-        <p:txBody>
-          <a:bodyPr wrap="square" lIns="0" tIns="0" rIns="0" bIns="0" rtlCol="0" anchor="t"/>
-          <a:lstStyle/>
-          <a:p>
-            <a:pPr algn="ctr" indent="0" marL="0">
-              <a:buNone/>
-            </a:pPr>
-            <a:r>
-              <a:rPr lang="en-US" sz="700" i="1" dirty="0">
-                <a:solidFill>
-                  <a:srgbClr val="94A3B8"/>
-                </a:solidFill>
-                <a:latin typeface="Calibri" pitchFamily="34" charset="0"/>
-                <a:ea typeface="Calibri" pitchFamily="34" charset="-122"/>
-                <a:cs typeface="Calibri" pitchFamily="34" charset="-120"/>
-              </a:rPr>
-              <a:t>'e' retained as part of base before consonant suffix</a:t>
-            </a:r>
-            <a:endParaRPr lang="en-US" sz="700" dirty="0"/>
-          </a:p>
-        </p:txBody>
-      </p:sp>
-      <p:sp>
-        <p:nvSpPr>
-          <p:cNvPr id="26" name="Shape 24"/>
-          <p:cNvSpPr/>
-          <p:nvPr/>
-        </p:nvSpPr>
-        <p:spPr>
-          <a:xfrm>
-            <a:off x="365760" y="3273552"/>
-            <a:ext cx="1371600" cy="658368"/>
+              <a:t>Write here...</a:t>
+            </a:r>
+            <a:endParaRPr lang="en-US" sz="1100" dirty="0"/>
+          </a:p>
+        </p:txBody>
+      </p:sp>
+      <p:sp>
+        <p:nvSpPr>
+          <p:cNvPr id="27" name="Shape 25"/>
+          <p:cNvSpPr/>
+          <p:nvPr/>
+        </p:nvSpPr>
+        <p:spPr>
+          <a:xfrm>
+            <a:off x="365760" y="4096512"/>
+            <a:ext cx="1371600" cy="804672"/>
           </a:xfrm>
           <a:prstGeom prst="rect">
             <a:avLst>
-              <a:gd name="adj" fmla="val 8333"/>
+              <a:gd name="adj" fmla="val 6818"/>
             </a:avLst>
           </a:prstGeom>
           <a:solidFill>
@@ -25673,14 +25927,14 @@
       </p:sp>
       <p:sp>
         <p:nvSpPr>
-          <p:cNvPr id="27" name="Text 25"/>
-          <p:cNvSpPr/>
-          <p:nvPr/>
-        </p:nvSpPr>
-        <p:spPr>
-          <a:xfrm>
-            <a:off x="365760" y="3273552"/>
-            <a:ext cx="1371600" cy="658368"/>
+          <p:cNvPr id="28" name="Text 26"/>
+          <p:cNvSpPr/>
+          <p:nvPr/>
+        </p:nvSpPr>
+        <p:spPr>
+          <a:xfrm>
+            <a:off x="365760" y="4096512"/>
+            <a:ext cx="1371600" cy="804672"/>
           </a:xfrm>
           <a:prstGeom prst="rect">
             <a:avLst/>
@@ -25704,7 +25958,7 @@
                 <a:ea typeface="Trebuchet MS" pitchFamily="34" charset="-122"/>
                 <a:cs typeface="Trebuchet MS" pitchFamily="34" charset="-120"/>
               </a:rPr>
-              <a:t>Syllables</a:t>
+              <a:t>Phonemes</a:t>
             </a:r>
             <a:endParaRPr lang="en-US" sz="1100" dirty="0"/>
           </a:p>
@@ -25712,80 +25966,14 @@
       </p:sp>
       <p:sp>
         <p:nvSpPr>
-          <p:cNvPr id="28" name="Shape 26"/>
-          <p:cNvSpPr/>
-          <p:nvPr/>
-        </p:nvSpPr>
-        <p:spPr>
-          <a:xfrm>
-            <a:off x="1874520" y="3273552"/>
-            <a:ext cx="6903720" cy="658368"/>
-          </a:xfrm>
-          <a:prstGeom prst="rect">
-            <a:avLst>
-              <a:gd name="adj" fmla="val 8333"/>
-            </a:avLst>
-          </a:prstGeom>
-          <a:solidFill>
-            <a:srgbClr val="F8FAFC"/>
-          </a:solidFill>
-          <a:ln w="12700">
-            <a:solidFill>
-              <a:srgbClr val="E2E8F0"/>
-            </a:solidFill>
-            <a:prstDash val="dash"/>
-          </a:ln>
-        </p:spPr>
-      </p:sp>
-      <p:sp>
-        <p:nvSpPr>
-          <p:cNvPr id="29" name="Text 27"/>
-          <p:cNvSpPr/>
-          <p:nvPr/>
-        </p:nvSpPr>
-        <p:spPr>
-          <a:xfrm>
-            <a:off x="1874520" y="3273552"/>
-            <a:ext cx="6903720" cy="658368"/>
-          </a:xfrm>
-          <a:prstGeom prst="rect">
-            <a:avLst/>
-          </a:prstGeom>
-          <a:noFill/>
-          <a:ln/>
-        </p:spPr>
-        <p:txBody>
-          <a:bodyPr wrap="square" rtlCol="0" anchor="ctr"/>
-          <a:lstStyle/>
-          <a:p>
-            <a:pPr algn="ctr" indent="0" marL="0">
-              <a:buNone/>
-            </a:pPr>
-            <a:r>
-              <a:rPr lang="en-US" sz="1100" i="1" dirty="0">
-                <a:solidFill>
-                  <a:srgbClr val="CBD5E1"/>
-                </a:solidFill>
-                <a:latin typeface="Calibri" pitchFamily="34" charset="0"/>
-                <a:ea typeface="Calibri" pitchFamily="34" charset="-122"/>
-                <a:cs typeface="Calibri" pitchFamily="34" charset="-120"/>
-              </a:rPr>
-              <a:t>Write here...</a:t>
-            </a:r>
-            <a:endParaRPr lang="en-US" sz="1100" dirty="0"/>
-          </a:p>
-        </p:txBody>
-      </p:sp>
-      <p:sp>
-        <p:nvSpPr>
-          <p:cNvPr id="30" name="Shape 28"/>
-          <p:cNvSpPr/>
-          <p:nvPr/>
-        </p:nvSpPr>
-        <p:spPr>
-          <a:xfrm>
-            <a:off x="365760" y="4096512"/>
-            <a:ext cx="1371600" cy="804672"/>
+          <p:cNvPr id="29" name="Shape 27"/>
+          <p:cNvSpPr/>
+          <p:nvPr/>
+        </p:nvSpPr>
+        <p:spPr>
+          <a:xfrm>
+            <a:off x="1874520" y="4096512"/>
+            <a:ext cx="6903720" cy="804672"/>
           </a:xfrm>
           <a:prstGeom prst="rect">
             <a:avLst>
@@ -25793,85 +25981,19 @@
             </a:avLst>
           </a:prstGeom>
           <a:solidFill>
-            <a:srgbClr val="E2E8F0"/>
+            <a:srgbClr val="F8FAFC"/>
           </a:solidFill>
           <a:ln w="12700">
             <a:solidFill>
               <a:srgbClr val="E2E8F0"/>
             </a:solidFill>
-            <a:prstDash val="solid"/>
-          </a:ln>
-        </p:spPr>
-      </p:sp>
-      <p:sp>
-        <p:nvSpPr>
-          <p:cNvPr id="31" name="Text 29"/>
-          <p:cNvSpPr/>
-          <p:nvPr/>
-        </p:nvSpPr>
-        <p:spPr>
-          <a:xfrm>
-            <a:off x="365760" y="4096512"/>
-            <a:ext cx="1371600" cy="804672"/>
-          </a:xfrm>
-          <a:prstGeom prst="rect">
-            <a:avLst/>
-          </a:prstGeom>
-          <a:noFill/>
-          <a:ln/>
-        </p:spPr>
-        <p:txBody>
-          <a:bodyPr wrap="square" lIns="0" tIns="0" rIns="0" bIns="0" rtlCol="0" anchor="ctr"/>
-          <a:lstStyle/>
-          <a:p>
-            <a:pPr algn="ctr" indent="0" marL="0">
-              <a:buNone/>
-            </a:pPr>
-            <a:r>
-              <a:rPr lang="en-US" sz="1100" b="1" dirty="0">
-                <a:solidFill>
-                  <a:srgbClr val="475569"/>
-                </a:solidFill>
-                <a:latin typeface="Trebuchet MS" pitchFamily="34" charset="0"/>
-                <a:ea typeface="Trebuchet MS" pitchFamily="34" charset="-122"/>
-                <a:cs typeface="Trebuchet MS" pitchFamily="34" charset="-120"/>
-              </a:rPr>
-              <a:t>Phonemes</a:t>
-            </a:r>
-            <a:endParaRPr lang="en-US" sz="1100" dirty="0"/>
-          </a:p>
-        </p:txBody>
-      </p:sp>
-      <p:sp>
-        <p:nvSpPr>
-          <p:cNvPr id="32" name="Shape 30"/>
-          <p:cNvSpPr/>
-          <p:nvPr/>
-        </p:nvSpPr>
-        <p:spPr>
-          <a:xfrm>
-            <a:off x="1874520" y="4096512"/>
-            <a:ext cx="6903720" cy="804672"/>
-          </a:xfrm>
-          <a:prstGeom prst="rect">
-            <a:avLst>
-              <a:gd name="adj" fmla="val 6818"/>
-            </a:avLst>
-          </a:prstGeom>
-          <a:solidFill>
-            <a:srgbClr val="F8FAFC"/>
-          </a:solidFill>
-          <a:ln w="12700">
-            <a:solidFill>
-              <a:srgbClr val="E2E8F0"/>
-            </a:solidFill>
             <a:prstDash val="dash"/>
           </a:ln>
         </p:spPr>
       </p:sp>
       <p:sp>
         <p:nvSpPr>
-          <p:cNvPr id="33" name="Text 31"/>
+          <p:cNvPr id="30" name="Text 28"/>
           <p:cNvSpPr/>
           <p:nvPr/>
         </p:nvSpPr>
@@ -26194,7 +26316,7 @@
                 <a:ea typeface="Calibri" pitchFamily="34" charset="-122"/>
                 <a:cs typeface="Calibri" pitchFamily="34" charset="-120"/>
               </a:rPr>
-              <a:t>Word Labs  •  wordlabs.app  •  Root: 'excite' = to stir up or rouse</a:t>
+              <a:t>Word Labs  •  wordlabs.app  •  Root: 'excite' = to stir up or arouse</a:t>
             </a:r>
             <a:endParaRPr lang="en-US" sz="800" dirty="0"/>
           </a:p>
@@ -26267,7 +26389,7 @@
                 <a:ea typeface="Trebuchet MS" pitchFamily="34" charset="-122"/>
                 <a:cs typeface="Trebuchet MS" pitchFamily="34" charset="-120"/>
               </a:rPr>
-              <a:t>We are learning that the root 'excite' means 'to stir up or rouse'.</a:t>
+              <a:t>We are learning that the root 'excite' means 'to stir up or arouse'.</a:t>
             </a:r>
             <a:endParaRPr lang="en-US" sz="2000" dirty="0"/>
           </a:p>
@@ -26913,7 +27035,7 @@
                 <a:ea typeface="Calibri" pitchFamily="34" charset="-122"/>
                 <a:cs typeface="Calibri" pitchFamily="34" charset="-120"/>
               </a:rPr>
-              <a:t>Word Labs  •  wordlabs.app  •  Root: 'excite' = to stir up or rouse</a:t>
+              <a:t>Word Labs  •  wordlabs.app  •  Root: 'excite' = to stir up or arouse</a:t>
             </a:r>
             <a:endParaRPr lang="en-US" sz="800" dirty="0"/>
           </a:p>
@@ -27052,7 +27174,7 @@
                 <a:ea typeface="Trebuchet MS" pitchFamily="34" charset="-122"/>
                 <a:cs typeface="Trebuchet MS" pitchFamily="34" charset="-120"/>
               </a:rPr>
-              <a:t>overexcited</a:t>
+              <a:t>exciting</a:t>
             </a:r>
             <a:endParaRPr lang="en-US" sz="2800" dirty="0"/>
           </a:p>
@@ -27132,7 +27254,7 @@
         </p:nvSpPr>
         <p:spPr>
           <a:xfrm>
-            <a:off x="2221992" y="2258568"/>
+            <a:off x="2938272" y="2258568"/>
             <a:ext cx="1828800" cy="292608"/>
           </a:xfrm>
           <a:prstGeom prst="rect">
@@ -27141,11 +27263,11 @@
             </a:avLst>
           </a:prstGeom>
           <a:solidFill>
-            <a:srgbClr val="DDD6FE"/>
+            <a:srgbClr val="CCFBF1"/>
           </a:solidFill>
           <a:ln w="19050">
             <a:solidFill>
-              <a:srgbClr val="7C3AED"/>
+              <a:srgbClr val="0D9488"/>
             </a:solidFill>
             <a:prstDash val="solid"/>
           </a:ln>
@@ -27166,7 +27288,7 @@
         </p:nvSpPr>
         <p:spPr>
           <a:xfrm>
-            <a:off x="2221992" y="2258568"/>
+            <a:off x="2938272" y="2258568"/>
             <a:ext cx="1828800" cy="292608"/>
           </a:xfrm>
           <a:prstGeom prst="rect">
@@ -27185,13 +27307,13 @@
             <a:r>
               <a:rPr lang="en-US" sz="1300" b="1" dirty="0">
                 <a:solidFill>
-                  <a:srgbClr val="4C1D95"/>
+                  <a:srgbClr val="0F766E"/>
                 </a:solidFill>
                 <a:latin typeface="Trebuchet MS" pitchFamily="34" charset="0"/>
                 <a:ea typeface="Trebuchet MS" pitchFamily="34" charset="-122"/>
                 <a:cs typeface="Trebuchet MS" pitchFamily="34" charset="-120"/>
               </a:rPr>
-              <a:t>over</a:t>
+              <a:t>excite</a:t>
             </a:r>
             <a:endParaRPr lang="en-US" sz="1300" dirty="0"/>
           </a:p>
@@ -27205,7 +27327,7 @@
         </p:nvSpPr>
         <p:spPr>
           <a:xfrm>
-            <a:off x="2221992" y="2569464"/>
+            <a:off x="2938272" y="2569464"/>
             <a:ext cx="1828800" cy="201168"/>
           </a:xfrm>
           <a:prstGeom prst="rect">
@@ -27230,7 +27352,7 @@
                 <a:ea typeface="Calibri" pitchFamily="34" charset="-122"/>
                 <a:cs typeface="Calibri" pitchFamily="34" charset="-120"/>
               </a:rPr>
-              <a:t>too much or above</a:t>
+              <a:t>to stir up or arouse</a:t>
             </a:r>
             <a:endParaRPr lang="en-US" sz="850" dirty="0"/>
           </a:p>
@@ -27244,7 +27366,7 @@
         </p:nvSpPr>
         <p:spPr>
           <a:xfrm>
-            <a:off x="4370832" y="2258568"/>
+            <a:off x="5803392" y="2258568"/>
             <a:ext cx="1828800" cy="292608"/>
           </a:xfrm>
           <a:prstGeom prst="rect">
@@ -27253,11 +27375,11 @@
             </a:avLst>
           </a:prstGeom>
           <a:solidFill>
-            <a:srgbClr val="CCFBF1"/>
+            <a:srgbClr val="FCE7F3"/>
           </a:solidFill>
           <a:ln w="19050">
             <a:solidFill>
-              <a:srgbClr val="0D9488"/>
+              <a:srgbClr val="DB2777"/>
             </a:solidFill>
             <a:prstDash val="solid"/>
           </a:ln>
@@ -27278,7 +27400,7 @@
         </p:nvSpPr>
         <p:spPr>
           <a:xfrm>
-            <a:off x="4370832" y="2258568"/>
+            <a:off x="5803392" y="2258568"/>
             <a:ext cx="1828800" cy="292608"/>
           </a:xfrm>
           <a:prstGeom prst="rect">
@@ -27297,13 +27419,13 @@
             <a:r>
               <a:rPr lang="en-US" sz="1300" b="1" dirty="0">
                 <a:solidFill>
-                  <a:srgbClr val="0F766E"/>
+                  <a:srgbClr val="9D174D"/>
                 </a:solidFill>
                 <a:latin typeface="Trebuchet MS" pitchFamily="34" charset="0"/>
                 <a:ea typeface="Trebuchet MS" pitchFamily="34" charset="-122"/>
                 <a:cs typeface="Trebuchet MS" pitchFamily="34" charset="-120"/>
               </a:rPr>
-              <a:t>excite</a:t>
+              <a:t>ing</a:t>
             </a:r>
             <a:endParaRPr lang="en-US" sz="1300" dirty="0"/>
           </a:p>
@@ -27317,7 +27439,7 @@
         </p:nvSpPr>
         <p:spPr>
           <a:xfrm>
-            <a:off x="4370832" y="2569464"/>
+            <a:off x="5803392" y="2569464"/>
             <a:ext cx="1828800" cy="201168"/>
           </a:xfrm>
           <a:prstGeom prst="rect">
@@ -27342,7 +27464,7 @@
                 <a:ea typeface="Calibri" pitchFamily="34" charset="-122"/>
                 <a:cs typeface="Calibri" pitchFamily="34" charset="-120"/>
               </a:rPr>
-              <a:t>to stir up or rouse</a:t>
+              <a:t>ongoing action or quality</a:t>
             </a:r>
             <a:endParaRPr lang="en-US" sz="850" dirty="0"/>
           </a:p>
@@ -27350,165 +27472,119 @@
       </p:sp>
       <p:sp>
         <p:nvSpPr>
-          <p:cNvPr id="22" name="Shape 20"/>
-          <p:cNvSpPr/>
-          <p:nvPr/>
-        </p:nvSpPr>
-        <p:spPr>
-          <a:xfrm>
-            <a:off x="6519672" y="2258568"/>
-            <a:ext cx="1828800" cy="292608"/>
+          <p:cNvPr id="22" name="Text 20"/>
+          <p:cNvSpPr/>
+          <p:nvPr/>
+        </p:nvSpPr>
+        <p:spPr>
+          <a:xfrm>
+            <a:off x="5803392" y="2752344"/>
+            <a:ext cx="1828800" cy="182880"/>
+          </a:xfrm>
+          <a:prstGeom prst="rect">
+            <a:avLst/>
+          </a:prstGeom>
+          <a:noFill/>
+          <a:ln/>
+        </p:spPr>
+        <p:txBody>
+          <a:bodyPr wrap="square" lIns="0" tIns="0" rIns="0" bIns="0" rtlCol="0" anchor="t"/>
+          <a:lstStyle/>
+          <a:p>
+            <a:pPr algn="ctr" indent="0" marL="0">
+              <a:buNone/>
+            </a:pPr>
+            <a:r>
+              <a:rPr lang="en-US" sz="700" i="1" dirty="0">
+                <a:solidFill>
+                  <a:srgbClr val="94A3B8"/>
+                </a:solidFill>
+                <a:latin typeface="Calibri" pitchFamily="34" charset="0"/>
+                <a:ea typeface="Calibri" pitchFamily="34" charset="-122"/>
+                <a:cs typeface="Calibri" pitchFamily="34" charset="-120"/>
+              </a:rPr>
+              <a:t>'e' dropped before vowel suffix</a:t>
+            </a:r>
+            <a:endParaRPr lang="en-US" sz="700" dirty="0"/>
+          </a:p>
+        </p:txBody>
+      </p:sp>
+      <p:sp>
+        <p:nvSpPr>
+          <p:cNvPr id="23" name="Shape 21"/>
+          <p:cNvSpPr/>
+          <p:nvPr/>
+        </p:nvSpPr>
+        <p:spPr>
+          <a:xfrm>
+            <a:off x="365760" y="3273552"/>
+            <a:ext cx="1371600" cy="658368"/>
           </a:xfrm>
           <a:prstGeom prst="rect">
             <a:avLst>
-              <a:gd name="adj" fmla="val 25000"/>
+              <a:gd name="adj" fmla="val 8333"/>
             </a:avLst>
           </a:prstGeom>
           <a:solidFill>
-            <a:srgbClr val="FCE7F3"/>
-          </a:solidFill>
-          <a:ln w="19050">
-            <a:solidFill>
-              <a:srgbClr val="DB2777"/>
-            </a:solidFill>
-            <a:prstDash val="solid"/>
-          </a:ln>
-          <a:effectLst>
-            <a:outerShdw sx="100000" sy="100000" kx="0" ky="0" algn="bl" rotWithShape="0" blurRad="101600" dist="38100" dir="8100000">
-              <a:srgbClr val="000000">
-                <a:alpha val="12000"/>
-              </a:srgbClr>
-            </a:outerShdw>
-          </a:effectLst>
-        </p:spPr>
-      </p:sp>
-      <p:sp>
-        <p:nvSpPr>
-          <p:cNvPr id="23" name="Text 21"/>
-          <p:cNvSpPr/>
-          <p:nvPr/>
-        </p:nvSpPr>
-        <p:spPr>
-          <a:xfrm>
-            <a:off x="6519672" y="2258568"/>
-            <a:ext cx="1828800" cy="292608"/>
-          </a:xfrm>
-          <a:prstGeom prst="rect">
-            <a:avLst/>
-          </a:prstGeom>
-          <a:noFill/>
-          <a:ln/>
-        </p:spPr>
-        <p:txBody>
-          <a:bodyPr wrap="square" lIns="0" tIns="0" rIns="0" bIns="0" rtlCol="0" anchor="ctr"/>
-          <a:lstStyle/>
-          <a:p>
-            <a:pPr algn="ctr" indent="0" marL="0">
-              <a:buNone/>
-            </a:pPr>
-            <a:r>
-              <a:rPr lang="en-US" sz="1300" b="1" dirty="0">
-                <a:solidFill>
-                  <a:srgbClr val="9D174D"/>
+            <a:srgbClr val="E2E8F0"/>
+          </a:solidFill>
+          <a:ln w="12700">
+            <a:solidFill>
+              <a:srgbClr val="E2E8F0"/>
+            </a:solidFill>
+            <a:prstDash val="solid"/>
+          </a:ln>
+        </p:spPr>
+      </p:sp>
+      <p:sp>
+        <p:nvSpPr>
+          <p:cNvPr id="24" name="Text 22"/>
+          <p:cNvSpPr/>
+          <p:nvPr/>
+        </p:nvSpPr>
+        <p:spPr>
+          <a:xfrm>
+            <a:off x="365760" y="3273552"/>
+            <a:ext cx="1371600" cy="658368"/>
+          </a:xfrm>
+          <a:prstGeom prst="rect">
+            <a:avLst/>
+          </a:prstGeom>
+          <a:noFill/>
+          <a:ln/>
+        </p:spPr>
+        <p:txBody>
+          <a:bodyPr wrap="square" lIns="0" tIns="0" rIns="0" bIns="0" rtlCol="0" anchor="ctr"/>
+          <a:lstStyle/>
+          <a:p>
+            <a:pPr algn="ctr" indent="0" marL="0">
+              <a:buNone/>
+            </a:pPr>
+            <a:r>
+              <a:rPr lang="en-US" sz="1100" b="1" dirty="0">
+                <a:solidFill>
+                  <a:srgbClr val="475569"/>
                 </a:solidFill>
                 <a:latin typeface="Trebuchet MS" pitchFamily="34" charset="0"/>
                 <a:ea typeface="Trebuchet MS" pitchFamily="34" charset="-122"/>
                 <a:cs typeface="Trebuchet MS" pitchFamily="34" charset="-120"/>
               </a:rPr>
-              <a:t>d</a:t>
-            </a:r>
-            <a:endParaRPr lang="en-US" sz="1300" dirty="0"/>
-          </a:p>
-        </p:txBody>
-      </p:sp>
-      <p:sp>
-        <p:nvSpPr>
-          <p:cNvPr id="24" name="Text 22"/>
-          <p:cNvSpPr/>
-          <p:nvPr/>
-        </p:nvSpPr>
-        <p:spPr>
-          <a:xfrm>
-            <a:off x="6519672" y="2569464"/>
-            <a:ext cx="1828800" cy="201168"/>
-          </a:xfrm>
-          <a:prstGeom prst="rect">
-            <a:avLst/>
-          </a:prstGeom>
-          <a:noFill/>
-          <a:ln/>
-        </p:spPr>
-        <p:txBody>
-          <a:bodyPr wrap="square" lIns="0" tIns="0" rIns="0" bIns="0" rtlCol="0" anchor="t"/>
-          <a:lstStyle/>
-          <a:p>
-            <a:pPr algn="ctr" indent="0" marL="0">
-              <a:buNone/>
-            </a:pPr>
-            <a:r>
-              <a:rPr lang="en-US" sz="850" dirty="0">
-                <a:solidFill>
-                  <a:srgbClr val="475569"/>
-                </a:solidFill>
-                <a:latin typeface="Calibri" pitchFamily="34" charset="0"/>
-                <a:ea typeface="Calibri" pitchFamily="34" charset="-122"/>
-                <a:cs typeface="Calibri" pitchFamily="34" charset="-120"/>
-              </a:rPr>
-              <a:t>past tense or adjectival form</a:t>
-            </a:r>
-            <a:endParaRPr lang="en-US" sz="850" dirty="0"/>
-          </a:p>
-        </p:txBody>
-      </p:sp>
-      <p:sp>
-        <p:nvSpPr>
-          <p:cNvPr id="25" name="Text 23"/>
-          <p:cNvSpPr/>
-          <p:nvPr/>
-        </p:nvSpPr>
-        <p:spPr>
-          <a:xfrm>
-            <a:off x="6519672" y="2752344"/>
-            <a:ext cx="1828800" cy="182880"/>
-          </a:xfrm>
-          <a:prstGeom prst="rect">
-            <a:avLst/>
-          </a:prstGeom>
-          <a:noFill/>
-          <a:ln/>
-        </p:spPr>
-        <p:txBody>
-          <a:bodyPr wrap="square" lIns="0" tIns="0" rIns="0" bIns="0" rtlCol="0" anchor="t"/>
-          <a:lstStyle/>
-          <a:p>
-            <a:pPr algn="ctr" indent="0" marL="0">
-              <a:buNone/>
-            </a:pPr>
-            <a:r>
-              <a:rPr lang="en-US" sz="700" i="1" dirty="0">
-                <a:solidFill>
-                  <a:srgbClr val="94A3B8"/>
-                </a:solidFill>
-                <a:latin typeface="Calibri" pitchFamily="34" charset="0"/>
-                <a:ea typeface="Calibri" pitchFamily="34" charset="-122"/>
-                <a:cs typeface="Calibri" pitchFamily="34" charset="-120"/>
-              </a:rPr>
-              <a:t>'e' retained as part of base before consonant suffix</a:t>
-            </a:r>
-            <a:endParaRPr lang="en-US" sz="700" dirty="0"/>
-          </a:p>
-        </p:txBody>
-      </p:sp>
-      <p:sp>
-        <p:nvSpPr>
-          <p:cNvPr id="26" name="Shape 24"/>
-          <p:cNvSpPr/>
-          <p:nvPr/>
-        </p:nvSpPr>
-        <p:spPr>
-          <a:xfrm>
-            <a:off x="365760" y="3273552"/>
-            <a:ext cx="1371600" cy="658368"/>
+              <a:t>Syllables</a:t>
+            </a:r>
+            <a:endParaRPr lang="en-US" sz="1100" dirty="0"/>
+          </a:p>
+        </p:txBody>
+      </p:sp>
+      <p:sp>
+        <p:nvSpPr>
+          <p:cNvPr id="25" name="Shape 23"/>
+          <p:cNvSpPr/>
+          <p:nvPr/>
+        </p:nvSpPr>
+        <p:spPr>
+          <a:xfrm>
+            <a:off x="1874520" y="3273552"/>
+            <a:ext cx="6903720" cy="658368"/>
           </a:xfrm>
           <a:prstGeom prst="rect">
             <a:avLst>
@@ -27516,11 +27592,38 @@
             </a:avLst>
           </a:prstGeom>
           <a:solidFill>
-            <a:srgbClr val="E2E8F0"/>
-          </a:solidFill>
-          <a:ln w="12700">
-            <a:solidFill>
-              <a:srgbClr val="E2E8F0"/>
+            <a:srgbClr val="CCFBF1"/>
+          </a:solidFill>
+          <a:ln w="12700">
+            <a:solidFill>
+              <a:srgbClr val="0D9488"/>
+            </a:solidFill>
+            <a:prstDash val="solid"/>
+          </a:ln>
+        </p:spPr>
+      </p:sp>
+      <p:sp>
+        <p:nvSpPr>
+          <p:cNvPr id="26" name="Shape 24"/>
+          <p:cNvSpPr/>
+          <p:nvPr/>
+        </p:nvSpPr>
+        <p:spPr>
+          <a:xfrm>
+            <a:off x="2313432" y="3364992"/>
+            <a:ext cx="1645920" cy="475488"/>
+          </a:xfrm>
+          <a:prstGeom prst="rect">
+            <a:avLst>
+              <a:gd name="adj" fmla="val 9615"/>
+            </a:avLst>
+          </a:prstGeom>
+          <a:solidFill>
+            <a:srgbClr val="FFFFFF"/>
+          </a:solidFill>
+          <a:ln w="12700">
+            <a:solidFill>
+              <a:srgbClr val="0D9488"/>
             </a:solidFill>
             <a:prstDash val="solid"/>
           </a:ln>
@@ -27534,63 +27637,75 @@
         </p:nvSpPr>
         <p:spPr>
           <a:xfrm>
-            <a:off x="365760" y="3273552"/>
-            <a:ext cx="1371600" cy="658368"/>
-          </a:xfrm>
-          <a:prstGeom prst="rect">
-            <a:avLst/>
-          </a:prstGeom>
-          <a:noFill/>
-          <a:ln/>
-        </p:spPr>
-        <p:txBody>
-          <a:bodyPr wrap="square" lIns="0" tIns="0" rIns="0" bIns="0" rtlCol="0" anchor="ctr"/>
-          <a:lstStyle/>
-          <a:p>
-            <a:pPr algn="ctr" indent="0" marL="0">
-              <a:buNone/>
-            </a:pPr>
-            <a:r>
-              <a:rPr lang="en-US" sz="1100" b="1" dirty="0">
-                <a:solidFill>
-                  <a:srgbClr val="475569"/>
+            <a:off x="2313432" y="3364992"/>
+            <a:ext cx="1645920" cy="475488"/>
+          </a:xfrm>
+          <a:prstGeom prst="rect">
+            <a:avLst/>
+          </a:prstGeom>
+          <a:noFill/>
+          <a:ln/>
+        </p:spPr>
+        <p:txBody>
+          <a:bodyPr wrap="square" lIns="0" tIns="0" rIns="0" bIns="0" rtlCol="0" anchor="ctr"/>
+          <a:lstStyle/>
+          <a:p>
+            <a:pPr algn="ctr" indent="0" marL="0">
+              <a:buNone/>
+            </a:pPr>
+            <a:r>
+              <a:rPr lang="en-US" sz="1400" b="1" dirty="0">
+                <a:solidFill>
+                  <a:srgbClr val="0D9488"/>
                 </a:solidFill>
                 <a:latin typeface="Trebuchet MS" pitchFamily="34" charset="0"/>
                 <a:ea typeface="Trebuchet MS" pitchFamily="34" charset="-122"/>
                 <a:cs typeface="Trebuchet MS" pitchFamily="34" charset="-120"/>
               </a:rPr>
-              <a:t>Syllables</a:t>
-            </a:r>
-            <a:endParaRPr lang="en-US" sz="1100" dirty="0"/>
-          </a:p>
-        </p:txBody>
-      </p:sp>
-      <p:sp>
-        <p:nvSpPr>
-          <p:cNvPr id="28" name="Shape 26"/>
-          <p:cNvSpPr/>
-          <p:nvPr/>
-        </p:nvSpPr>
-        <p:spPr>
-          <a:xfrm>
-            <a:off x="1874520" y="3273552"/>
-            <a:ext cx="6903720" cy="658368"/>
-          </a:xfrm>
-          <a:prstGeom prst="rect">
-            <a:avLst>
-              <a:gd name="adj" fmla="val 8333"/>
-            </a:avLst>
-          </a:prstGeom>
-          <a:solidFill>
-            <a:srgbClr val="CCFBF1"/>
-          </a:solidFill>
-          <a:ln w="12700">
-            <a:solidFill>
-              <a:srgbClr val="0D9488"/>
-            </a:solidFill>
-            <a:prstDash val="solid"/>
-          </a:ln>
-        </p:spPr>
+              <a:t>ex</a:t>
+            </a:r>
+            <a:endParaRPr lang="en-US" sz="1400" dirty="0"/>
+          </a:p>
+        </p:txBody>
+      </p:sp>
+      <p:sp>
+        <p:nvSpPr>
+          <p:cNvPr id="28" name="Text 26"/>
+          <p:cNvSpPr/>
+          <p:nvPr/>
+        </p:nvSpPr>
+        <p:spPr>
+          <a:xfrm>
+            <a:off x="3959352" y="3364992"/>
+            <a:ext cx="411480" cy="475488"/>
+          </a:xfrm>
+          <a:prstGeom prst="rect">
+            <a:avLst/>
+          </a:prstGeom>
+          <a:noFill/>
+          <a:ln/>
+        </p:spPr>
+        <p:txBody>
+          <a:bodyPr wrap="square" lIns="0" tIns="0" rIns="0" bIns="0" rtlCol="0" anchor="ctr"/>
+          <a:lstStyle/>
+          <a:p>
+            <a:pPr algn="ctr" indent="0" marL="0">
+              <a:buNone/>
+            </a:pPr>
+            <a:r>
+              <a:rPr lang="en-US" sz="1600" b="1" dirty="0">
+                <a:solidFill>
+                  <a:srgbClr val="0D9488"/>
+                </a:solidFill>
+                <a:latin typeface="Trebuchet MS" pitchFamily="34" charset="0"/>
+                <a:ea typeface="Trebuchet MS" pitchFamily="34" charset="-122"/>
+                <a:cs typeface="Trebuchet MS" pitchFamily="34" charset="-120"/>
+              </a:rPr>
+              <a:t>·</a:t>
+            </a:r>
+            <a:endParaRPr lang="en-US" sz="1600" dirty="0"/>
+          </a:p>
+        </p:txBody>
       </p:sp>
       <p:sp>
         <p:nvSpPr>
@@ -27600,8 +27715,8 @@
         </p:nvSpPr>
         <p:spPr>
           <a:xfrm>
-            <a:off x="1978152" y="3364992"/>
-            <a:ext cx="1225296" cy="475488"/>
+            <a:off x="4370832" y="3364992"/>
+            <a:ext cx="1645920" cy="475488"/>
           </a:xfrm>
           <a:prstGeom prst="rect">
             <a:avLst>
@@ -27627,8 +27742,8 @@
         </p:nvSpPr>
         <p:spPr>
           <a:xfrm>
-            <a:off x="1978152" y="3364992"/>
-            <a:ext cx="1225296" cy="475488"/>
+            <a:off x="4370832" y="3364992"/>
+            <a:ext cx="1645920" cy="475488"/>
           </a:xfrm>
           <a:prstGeom prst="rect">
             <a:avLst/>
@@ -27652,7 +27767,7 @@
                 <a:ea typeface="Trebuchet MS" pitchFamily="34" charset="-122"/>
                 <a:cs typeface="Trebuchet MS" pitchFamily="34" charset="-120"/>
               </a:rPr>
-              <a:t>o</a:t>
+              <a:t>cit</a:t>
             </a:r>
             <a:endParaRPr lang="en-US" sz="1400" dirty="0"/>
           </a:p>
@@ -27666,8 +27781,8 @@
         </p:nvSpPr>
         <p:spPr>
           <a:xfrm>
-            <a:off x="3203448" y="3364992"/>
-            <a:ext cx="76200" cy="475488"/>
+            <a:off x="6016752" y="3364992"/>
+            <a:ext cx="411480" cy="475488"/>
           </a:xfrm>
           <a:prstGeom prst="rect">
             <a:avLst/>
@@ -27705,8 +27820,8 @@
         </p:nvSpPr>
         <p:spPr>
           <a:xfrm>
-            <a:off x="3279648" y="3364992"/>
-            <a:ext cx="1225296" cy="475488"/>
+            <a:off x="6428232" y="3364992"/>
+            <a:ext cx="1645920" cy="475488"/>
           </a:xfrm>
           <a:prstGeom prst="rect">
             <a:avLst>
@@ -27732,8 +27847,8 @@
         </p:nvSpPr>
         <p:spPr>
           <a:xfrm>
-            <a:off x="3279648" y="3364992"/>
-            <a:ext cx="1225296" cy="475488"/>
+            <a:off x="6428232" y="3364992"/>
+            <a:ext cx="1645920" cy="475488"/>
           </a:xfrm>
           <a:prstGeom prst="rect">
             <a:avLst/>
@@ -27757,7 +27872,7 @@
                 <a:ea typeface="Trebuchet MS" pitchFamily="34" charset="-122"/>
                 <a:cs typeface="Trebuchet MS" pitchFamily="34" charset="-120"/>
               </a:rPr>
-              <a:t>ver</a:t>
+              <a:t>ing</a:t>
             </a:r>
             <a:endParaRPr lang="en-US" sz="1400" dirty="0"/>
           </a:p>
@@ -27765,329 +27880,80 @@
       </p:sp>
       <p:sp>
         <p:nvSpPr>
-          <p:cNvPr id="34" name="Text 32"/>
-          <p:cNvSpPr/>
-          <p:nvPr/>
-        </p:nvSpPr>
-        <p:spPr>
-          <a:xfrm>
-            <a:off x="4504944" y="3364992"/>
-            <a:ext cx="76200" cy="475488"/>
-          </a:xfrm>
-          <a:prstGeom prst="rect">
-            <a:avLst/>
-          </a:prstGeom>
-          <a:noFill/>
-          <a:ln/>
-        </p:spPr>
-        <p:txBody>
-          <a:bodyPr wrap="square" lIns="0" tIns="0" rIns="0" bIns="0" rtlCol="0" anchor="ctr"/>
-          <a:lstStyle/>
-          <a:p>
-            <a:pPr algn="ctr" indent="0" marL="0">
-              <a:buNone/>
-            </a:pPr>
-            <a:r>
-              <a:rPr lang="en-US" sz="1600" b="1" dirty="0">
-                <a:solidFill>
-                  <a:srgbClr val="0D9488"/>
+          <p:cNvPr id="34" name="Shape 32"/>
+          <p:cNvSpPr/>
+          <p:nvPr/>
+        </p:nvSpPr>
+        <p:spPr>
+          <a:xfrm>
+            <a:off x="365760" y="4096512"/>
+            <a:ext cx="1371600" cy="804672"/>
+          </a:xfrm>
+          <a:prstGeom prst="rect">
+            <a:avLst>
+              <a:gd name="adj" fmla="val 6818"/>
+            </a:avLst>
+          </a:prstGeom>
+          <a:solidFill>
+            <a:srgbClr val="E2E8F0"/>
+          </a:solidFill>
+          <a:ln w="12700">
+            <a:solidFill>
+              <a:srgbClr val="E2E8F0"/>
+            </a:solidFill>
+            <a:prstDash val="solid"/>
+          </a:ln>
+        </p:spPr>
+      </p:sp>
+      <p:sp>
+        <p:nvSpPr>
+          <p:cNvPr id="35" name="Text 33"/>
+          <p:cNvSpPr/>
+          <p:nvPr/>
+        </p:nvSpPr>
+        <p:spPr>
+          <a:xfrm>
+            <a:off x="365760" y="4096512"/>
+            <a:ext cx="1371600" cy="804672"/>
+          </a:xfrm>
+          <a:prstGeom prst="rect">
+            <a:avLst/>
+          </a:prstGeom>
+          <a:noFill/>
+          <a:ln/>
+        </p:spPr>
+        <p:txBody>
+          <a:bodyPr wrap="square" lIns="0" tIns="0" rIns="0" bIns="0" rtlCol="0" anchor="ctr"/>
+          <a:lstStyle/>
+          <a:p>
+            <a:pPr algn="ctr" indent="0" marL="0">
+              <a:buNone/>
+            </a:pPr>
+            <a:r>
+              <a:rPr lang="en-US" sz="1100" b="1" dirty="0">
+                <a:solidFill>
+                  <a:srgbClr val="475569"/>
                 </a:solidFill>
                 <a:latin typeface="Trebuchet MS" pitchFamily="34" charset="0"/>
                 <a:ea typeface="Trebuchet MS" pitchFamily="34" charset="-122"/>
                 <a:cs typeface="Trebuchet MS" pitchFamily="34" charset="-120"/>
               </a:rPr>
-              <a:t>·</a:t>
-            </a:r>
-            <a:endParaRPr lang="en-US" sz="1600" dirty="0"/>
-          </a:p>
-        </p:txBody>
-      </p:sp>
-      <p:sp>
-        <p:nvSpPr>
-          <p:cNvPr id="35" name="Shape 33"/>
-          <p:cNvSpPr/>
-          <p:nvPr/>
-        </p:nvSpPr>
-        <p:spPr>
-          <a:xfrm>
-            <a:off x="4581144" y="3364992"/>
-            <a:ext cx="1225296" cy="475488"/>
-          </a:xfrm>
-          <a:prstGeom prst="rect">
-            <a:avLst>
-              <a:gd name="adj" fmla="val 9615"/>
-            </a:avLst>
-          </a:prstGeom>
-          <a:solidFill>
-            <a:srgbClr val="FFFFFF"/>
-          </a:solidFill>
-          <a:ln w="12700">
-            <a:solidFill>
-              <a:srgbClr val="0D9488"/>
-            </a:solidFill>
-            <a:prstDash val="solid"/>
-          </a:ln>
-        </p:spPr>
-      </p:sp>
-      <p:sp>
-        <p:nvSpPr>
-          <p:cNvPr id="36" name="Text 34"/>
-          <p:cNvSpPr/>
-          <p:nvPr/>
-        </p:nvSpPr>
-        <p:spPr>
-          <a:xfrm>
-            <a:off x="4581144" y="3364992"/>
-            <a:ext cx="1225296" cy="475488"/>
-          </a:xfrm>
-          <a:prstGeom prst="rect">
-            <a:avLst/>
-          </a:prstGeom>
-          <a:noFill/>
-          <a:ln/>
-        </p:spPr>
-        <p:txBody>
-          <a:bodyPr wrap="square" lIns="0" tIns="0" rIns="0" bIns="0" rtlCol="0" anchor="ctr"/>
-          <a:lstStyle/>
-          <a:p>
-            <a:pPr algn="ctr" indent="0" marL="0">
-              <a:buNone/>
-            </a:pPr>
-            <a:r>
-              <a:rPr lang="en-US" sz="1400" b="1" dirty="0">
-                <a:solidFill>
-                  <a:srgbClr val="0D9488"/>
-                </a:solidFill>
-                <a:latin typeface="Trebuchet MS" pitchFamily="34" charset="0"/>
-                <a:ea typeface="Trebuchet MS" pitchFamily="34" charset="-122"/>
-                <a:cs typeface="Trebuchet MS" pitchFamily="34" charset="-120"/>
-              </a:rPr>
-              <a:t>ex</a:t>
-            </a:r>
-            <a:endParaRPr lang="en-US" sz="1400" dirty="0"/>
-          </a:p>
-        </p:txBody>
-      </p:sp>
-      <p:sp>
-        <p:nvSpPr>
-          <p:cNvPr id="37" name="Text 35"/>
-          <p:cNvSpPr/>
-          <p:nvPr/>
-        </p:nvSpPr>
-        <p:spPr>
-          <a:xfrm>
-            <a:off x="5806440" y="3364992"/>
-            <a:ext cx="76200" cy="475488"/>
-          </a:xfrm>
-          <a:prstGeom prst="rect">
-            <a:avLst/>
-          </a:prstGeom>
-          <a:noFill/>
-          <a:ln/>
-        </p:spPr>
-        <p:txBody>
-          <a:bodyPr wrap="square" lIns="0" tIns="0" rIns="0" bIns="0" rtlCol="0" anchor="ctr"/>
-          <a:lstStyle/>
-          <a:p>
-            <a:pPr algn="ctr" indent="0" marL="0">
-              <a:buNone/>
-            </a:pPr>
-            <a:r>
-              <a:rPr lang="en-US" sz="1600" b="1" dirty="0">
-                <a:solidFill>
-                  <a:srgbClr val="0D9488"/>
-                </a:solidFill>
-                <a:latin typeface="Trebuchet MS" pitchFamily="34" charset="0"/>
-                <a:ea typeface="Trebuchet MS" pitchFamily="34" charset="-122"/>
-                <a:cs typeface="Trebuchet MS" pitchFamily="34" charset="-120"/>
-              </a:rPr>
-              <a:t>·</a:t>
-            </a:r>
-            <a:endParaRPr lang="en-US" sz="1600" dirty="0"/>
-          </a:p>
-        </p:txBody>
-      </p:sp>
-      <p:sp>
-        <p:nvSpPr>
-          <p:cNvPr id="38" name="Shape 36"/>
-          <p:cNvSpPr/>
-          <p:nvPr/>
-        </p:nvSpPr>
-        <p:spPr>
-          <a:xfrm>
-            <a:off x="5882640" y="3364992"/>
-            <a:ext cx="1225296" cy="475488"/>
-          </a:xfrm>
-          <a:prstGeom prst="rect">
-            <a:avLst>
-              <a:gd name="adj" fmla="val 9615"/>
-            </a:avLst>
-          </a:prstGeom>
-          <a:solidFill>
-            <a:srgbClr val="FFFFFF"/>
-          </a:solidFill>
-          <a:ln w="12700">
-            <a:solidFill>
-              <a:srgbClr val="0D9488"/>
-            </a:solidFill>
-            <a:prstDash val="solid"/>
-          </a:ln>
-        </p:spPr>
-      </p:sp>
-      <p:sp>
-        <p:nvSpPr>
-          <p:cNvPr id="39" name="Text 37"/>
-          <p:cNvSpPr/>
-          <p:nvPr/>
-        </p:nvSpPr>
-        <p:spPr>
-          <a:xfrm>
-            <a:off x="5882640" y="3364992"/>
-            <a:ext cx="1225296" cy="475488"/>
-          </a:xfrm>
-          <a:prstGeom prst="rect">
-            <a:avLst/>
-          </a:prstGeom>
-          <a:noFill/>
-          <a:ln/>
-        </p:spPr>
-        <p:txBody>
-          <a:bodyPr wrap="square" lIns="0" tIns="0" rIns="0" bIns="0" rtlCol="0" anchor="ctr"/>
-          <a:lstStyle/>
-          <a:p>
-            <a:pPr algn="ctr" indent="0" marL="0">
-              <a:buNone/>
-            </a:pPr>
-            <a:r>
-              <a:rPr lang="en-US" sz="1400" b="1" dirty="0">
-                <a:solidFill>
-                  <a:srgbClr val="0D9488"/>
-                </a:solidFill>
-                <a:latin typeface="Trebuchet MS" pitchFamily="34" charset="0"/>
-                <a:ea typeface="Trebuchet MS" pitchFamily="34" charset="-122"/>
-                <a:cs typeface="Trebuchet MS" pitchFamily="34" charset="-120"/>
-              </a:rPr>
-              <a:t>ci</a:t>
-            </a:r>
-            <a:endParaRPr lang="en-US" sz="1400" dirty="0"/>
-          </a:p>
-        </p:txBody>
-      </p:sp>
-      <p:sp>
-        <p:nvSpPr>
-          <p:cNvPr id="40" name="Text 38"/>
-          <p:cNvSpPr/>
-          <p:nvPr/>
-        </p:nvSpPr>
-        <p:spPr>
-          <a:xfrm>
-            <a:off x="7107936" y="3364992"/>
-            <a:ext cx="76200" cy="475488"/>
-          </a:xfrm>
-          <a:prstGeom prst="rect">
-            <a:avLst/>
-          </a:prstGeom>
-          <a:noFill/>
-          <a:ln/>
-        </p:spPr>
-        <p:txBody>
-          <a:bodyPr wrap="square" lIns="0" tIns="0" rIns="0" bIns="0" rtlCol="0" anchor="ctr"/>
-          <a:lstStyle/>
-          <a:p>
-            <a:pPr algn="ctr" indent="0" marL="0">
-              <a:buNone/>
-            </a:pPr>
-            <a:r>
-              <a:rPr lang="en-US" sz="1600" b="1" dirty="0">
-                <a:solidFill>
-                  <a:srgbClr val="0D9488"/>
-                </a:solidFill>
-                <a:latin typeface="Trebuchet MS" pitchFamily="34" charset="0"/>
-                <a:ea typeface="Trebuchet MS" pitchFamily="34" charset="-122"/>
-                <a:cs typeface="Trebuchet MS" pitchFamily="34" charset="-120"/>
-              </a:rPr>
-              <a:t>·</a:t>
-            </a:r>
-            <a:endParaRPr lang="en-US" sz="1600" dirty="0"/>
-          </a:p>
-        </p:txBody>
-      </p:sp>
-      <p:sp>
-        <p:nvSpPr>
-          <p:cNvPr id="41" name="Shape 39"/>
-          <p:cNvSpPr/>
-          <p:nvPr/>
-        </p:nvSpPr>
-        <p:spPr>
-          <a:xfrm>
-            <a:off x="7184136" y="3364992"/>
-            <a:ext cx="1225296" cy="475488"/>
-          </a:xfrm>
-          <a:prstGeom prst="rect">
-            <a:avLst>
-              <a:gd name="adj" fmla="val 9615"/>
-            </a:avLst>
-          </a:prstGeom>
-          <a:solidFill>
-            <a:srgbClr val="FFFFFF"/>
-          </a:solidFill>
-          <a:ln w="12700">
-            <a:solidFill>
-              <a:srgbClr val="0D9488"/>
-            </a:solidFill>
-            <a:prstDash val="solid"/>
-          </a:ln>
-        </p:spPr>
-      </p:sp>
-      <p:sp>
-        <p:nvSpPr>
-          <p:cNvPr id="42" name="Text 40"/>
-          <p:cNvSpPr/>
-          <p:nvPr/>
-        </p:nvSpPr>
-        <p:spPr>
-          <a:xfrm>
-            <a:off x="7184136" y="3364992"/>
-            <a:ext cx="1225296" cy="475488"/>
-          </a:xfrm>
-          <a:prstGeom prst="rect">
-            <a:avLst/>
-          </a:prstGeom>
-          <a:noFill/>
-          <a:ln/>
-        </p:spPr>
-        <p:txBody>
-          <a:bodyPr wrap="square" lIns="0" tIns="0" rIns="0" bIns="0" rtlCol="0" anchor="ctr"/>
-          <a:lstStyle/>
-          <a:p>
-            <a:pPr algn="ctr" indent="0" marL="0">
-              <a:buNone/>
-            </a:pPr>
-            <a:r>
-              <a:rPr lang="en-US" sz="1400" b="1" dirty="0">
-                <a:solidFill>
-                  <a:srgbClr val="0D9488"/>
-                </a:solidFill>
-                <a:latin typeface="Trebuchet MS" pitchFamily="34" charset="0"/>
-                <a:ea typeface="Trebuchet MS" pitchFamily="34" charset="-122"/>
-                <a:cs typeface="Trebuchet MS" pitchFamily="34" charset="-120"/>
-              </a:rPr>
-              <a:t>ted</a:t>
-            </a:r>
-            <a:endParaRPr lang="en-US" sz="1400" dirty="0"/>
-          </a:p>
-        </p:txBody>
-      </p:sp>
-      <p:sp>
-        <p:nvSpPr>
-          <p:cNvPr id="43" name="Shape 41"/>
-          <p:cNvSpPr/>
-          <p:nvPr/>
-        </p:nvSpPr>
-        <p:spPr>
-          <a:xfrm>
-            <a:off x="365760" y="4096512"/>
-            <a:ext cx="1371600" cy="804672"/>
+              <a:t>Phonemes</a:t>
+            </a:r>
+            <a:endParaRPr lang="en-US" sz="1100" dirty="0"/>
+          </a:p>
+        </p:txBody>
+      </p:sp>
+      <p:sp>
+        <p:nvSpPr>
+          <p:cNvPr id="36" name="Shape 34"/>
+          <p:cNvSpPr/>
+          <p:nvPr/>
+        </p:nvSpPr>
+        <p:spPr>
+          <a:xfrm>
+            <a:off x="1874520" y="4096512"/>
+            <a:ext cx="6903720" cy="804672"/>
           </a:xfrm>
           <a:prstGeom prst="rect">
             <a:avLst>
@@ -28095,85 +27961,19 @@
             </a:avLst>
           </a:prstGeom>
           <a:solidFill>
-            <a:srgbClr val="E2E8F0"/>
+            <a:srgbClr val="F8FAFC"/>
           </a:solidFill>
           <a:ln w="12700">
             <a:solidFill>
               <a:srgbClr val="E2E8F0"/>
             </a:solidFill>
-            <a:prstDash val="solid"/>
-          </a:ln>
-        </p:spPr>
-      </p:sp>
-      <p:sp>
-        <p:nvSpPr>
-          <p:cNvPr id="44" name="Text 42"/>
-          <p:cNvSpPr/>
-          <p:nvPr/>
-        </p:nvSpPr>
-        <p:spPr>
-          <a:xfrm>
-            <a:off x="365760" y="4096512"/>
-            <a:ext cx="1371600" cy="804672"/>
-          </a:xfrm>
-          <a:prstGeom prst="rect">
-            <a:avLst/>
-          </a:prstGeom>
-          <a:noFill/>
-          <a:ln/>
-        </p:spPr>
-        <p:txBody>
-          <a:bodyPr wrap="square" lIns="0" tIns="0" rIns="0" bIns="0" rtlCol="0" anchor="ctr"/>
-          <a:lstStyle/>
-          <a:p>
-            <a:pPr algn="ctr" indent="0" marL="0">
-              <a:buNone/>
-            </a:pPr>
-            <a:r>
-              <a:rPr lang="en-US" sz="1100" b="1" dirty="0">
-                <a:solidFill>
-                  <a:srgbClr val="475569"/>
-                </a:solidFill>
-                <a:latin typeface="Trebuchet MS" pitchFamily="34" charset="0"/>
-                <a:ea typeface="Trebuchet MS" pitchFamily="34" charset="-122"/>
-                <a:cs typeface="Trebuchet MS" pitchFamily="34" charset="-120"/>
-              </a:rPr>
-              <a:t>Phonemes</a:t>
-            </a:r>
-            <a:endParaRPr lang="en-US" sz="1100" dirty="0"/>
-          </a:p>
-        </p:txBody>
-      </p:sp>
-      <p:sp>
-        <p:nvSpPr>
-          <p:cNvPr id="45" name="Shape 43"/>
-          <p:cNvSpPr/>
-          <p:nvPr/>
-        </p:nvSpPr>
-        <p:spPr>
-          <a:xfrm>
-            <a:off x="1874520" y="4096512"/>
-            <a:ext cx="6903720" cy="804672"/>
-          </a:xfrm>
-          <a:prstGeom prst="rect">
-            <a:avLst>
-              <a:gd name="adj" fmla="val 6818"/>
-            </a:avLst>
-          </a:prstGeom>
-          <a:solidFill>
-            <a:srgbClr val="F8FAFC"/>
-          </a:solidFill>
-          <a:ln w="12700">
-            <a:solidFill>
-              <a:srgbClr val="E2E8F0"/>
-            </a:solidFill>
             <a:prstDash val="dash"/>
           </a:ln>
         </p:spPr>
       </p:sp>
       <p:sp>
         <p:nvSpPr>
-          <p:cNvPr id="46" name="Text 44"/>
+          <p:cNvPr id="37" name="Text 35"/>
           <p:cNvSpPr/>
           <p:nvPr/>
         </p:nvSpPr>
@@ -28496,7 +28296,7 @@
                 <a:ea typeface="Calibri" pitchFamily="34" charset="-122"/>
                 <a:cs typeface="Calibri" pitchFamily="34" charset="-120"/>
               </a:rPr>
-              <a:t>Word Labs  •  wordlabs.app  •  Root: 'excite' = to stir up or rouse</a:t>
+              <a:t>Word Labs  •  wordlabs.app  •  Root: 'excite' = to stir up or arouse</a:t>
             </a:r>
             <a:endParaRPr lang="en-US" sz="800" dirty="0"/>
           </a:p>
@@ -28635,7 +28435,7 @@
                 <a:ea typeface="Trebuchet MS" pitchFamily="34" charset="-122"/>
                 <a:cs typeface="Trebuchet MS" pitchFamily="34" charset="-120"/>
               </a:rPr>
-              <a:t>overexcited</a:t>
+              <a:t>exciting</a:t>
             </a:r>
             <a:endParaRPr lang="en-US" sz="2800" dirty="0"/>
           </a:p>
@@ -28715,7 +28515,7 @@
         </p:nvSpPr>
         <p:spPr>
           <a:xfrm>
-            <a:off x="2221992" y="2258568"/>
+            <a:off x="2938272" y="2258568"/>
             <a:ext cx="1828800" cy="292608"/>
           </a:xfrm>
           <a:prstGeom prst="rect">
@@ -28724,11 +28524,11 @@
             </a:avLst>
           </a:prstGeom>
           <a:solidFill>
-            <a:srgbClr val="DDD6FE"/>
+            <a:srgbClr val="CCFBF1"/>
           </a:solidFill>
           <a:ln w="19050">
             <a:solidFill>
-              <a:srgbClr val="7C3AED"/>
+              <a:srgbClr val="0D9488"/>
             </a:solidFill>
             <a:prstDash val="solid"/>
           </a:ln>
@@ -28749,7 +28549,7 @@
         </p:nvSpPr>
         <p:spPr>
           <a:xfrm>
-            <a:off x="2221992" y="2258568"/>
+            <a:off x="2938272" y="2258568"/>
             <a:ext cx="1828800" cy="292608"/>
           </a:xfrm>
           <a:prstGeom prst="rect">
@@ -28768,13 +28568,13 @@
             <a:r>
               <a:rPr lang="en-US" sz="1300" b="1" dirty="0">
                 <a:solidFill>
-                  <a:srgbClr val="4C1D95"/>
+                  <a:srgbClr val="0F766E"/>
                 </a:solidFill>
                 <a:latin typeface="Trebuchet MS" pitchFamily="34" charset="0"/>
                 <a:ea typeface="Trebuchet MS" pitchFamily="34" charset="-122"/>
                 <a:cs typeface="Trebuchet MS" pitchFamily="34" charset="-120"/>
               </a:rPr>
-              <a:t>over</a:t>
+              <a:t>excite</a:t>
             </a:r>
             <a:endParaRPr lang="en-US" sz="1300" dirty="0"/>
           </a:p>
@@ -28788,7 +28588,7 @@
         </p:nvSpPr>
         <p:spPr>
           <a:xfrm>
-            <a:off x="2221992" y="2569464"/>
+            <a:off x="2938272" y="2569464"/>
             <a:ext cx="1828800" cy="201168"/>
           </a:xfrm>
           <a:prstGeom prst="rect">
@@ -28813,7 +28613,7 @@
                 <a:ea typeface="Calibri" pitchFamily="34" charset="-122"/>
                 <a:cs typeface="Calibri" pitchFamily="34" charset="-120"/>
               </a:rPr>
-              <a:t>too much or above</a:t>
+              <a:t>to stir up or arouse</a:t>
             </a:r>
             <a:endParaRPr lang="en-US" sz="850" dirty="0"/>
           </a:p>
@@ -28827,7 +28627,7 @@
         </p:nvSpPr>
         <p:spPr>
           <a:xfrm>
-            <a:off x="4370832" y="2258568"/>
+            <a:off x="5803392" y="2258568"/>
             <a:ext cx="1828800" cy="292608"/>
           </a:xfrm>
           <a:prstGeom prst="rect">
@@ -28836,11 +28636,11 @@
             </a:avLst>
           </a:prstGeom>
           <a:solidFill>
-            <a:srgbClr val="CCFBF1"/>
+            <a:srgbClr val="FCE7F3"/>
           </a:solidFill>
           <a:ln w="19050">
             <a:solidFill>
-              <a:srgbClr val="0D9488"/>
+              <a:srgbClr val="DB2777"/>
             </a:solidFill>
             <a:prstDash val="solid"/>
           </a:ln>
@@ -28861,7 +28661,7 @@
         </p:nvSpPr>
         <p:spPr>
           <a:xfrm>
-            <a:off x="4370832" y="2258568"/>
+            <a:off x="5803392" y="2258568"/>
             <a:ext cx="1828800" cy="292608"/>
           </a:xfrm>
           <a:prstGeom prst="rect">
@@ -28880,13 +28680,13 @@
             <a:r>
               <a:rPr lang="en-US" sz="1300" b="1" dirty="0">
                 <a:solidFill>
-                  <a:srgbClr val="0F766E"/>
+                  <a:srgbClr val="9D174D"/>
                 </a:solidFill>
                 <a:latin typeface="Trebuchet MS" pitchFamily="34" charset="0"/>
                 <a:ea typeface="Trebuchet MS" pitchFamily="34" charset="-122"/>
                 <a:cs typeface="Trebuchet MS" pitchFamily="34" charset="-120"/>
               </a:rPr>
-              <a:t>excite</a:t>
+              <a:t>ing</a:t>
             </a:r>
             <a:endParaRPr lang="en-US" sz="1300" dirty="0"/>
           </a:p>
@@ -28900,7 +28700,7 @@
         </p:nvSpPr>
         <p:spPr>
           <a:xfrm>
-            <a:off x="4370832" y="2569464"/>
+            <a:off x="5803392" y="2569464"/>
             <a:ext cx="1828800" cy="201168"/>
           </a:xfrm>
           <a:prstGeom prst="rect">
@@ -28925,7 +28725,7 @@
                 <a:ea typeface="Calibri" pitchFamily="34" charset="-122"/>
                 <a:cs typeface="Calibri" pitchFamily="34" charset="-120"/>
               </a:rPr>
-              <a:t>to stir up or rouse</a:t>
+              <a:t>ongoing action or quality</a:t>
             </a:r>
             <a:endParaRPr lang="en-US" sz="850" dirty="0"/>
           </a:p>
@@ -28933,87 +28733,647 @@
       </p:sp>
       <p:sp>
         <p:nvSpPr>
-          <p:cNvPr id="22" name="Shape 20"/>
-          <p:cNvSpPr/>
-          <p:nvPr/>
-        </p:nvSpPr>
-        <p:spPr>
-          <a:xfrm>
-            <a:off x="6519672" y="2258568"/>
-            <a:ext cx="1828800" cy="292608"/>
+          <p:cNvPr id="22" name="Text 20"/>
+          <p:cNvSpPr/>
+          <p:nvPr/>
+        </p:nvSpPr>
+        <p:spPr>
+          <a:xfrm>
+            <a:off x="5803392" y="2752344"/>
+            <a:ext cx="1828800" cy="182880"/>
+          </a:xfrm>
+          <a:prstGeom prst="rect">
+            <a:avLst/>
+          </a:prstGeom>
+          <a:noFill/>
+          <a:ln/>
+        </p:spPr>
+        <p:txBody>
+          <a:bodyPr wrap="square" lIns="0" tIns="0" rIns="0" bIns="0" rtlCol="0" anchor="t"/>
+          <a:lstStyle/>
+          <a:p>
+            <a:pPr algn="ctr" indent="0" marL="0">
+              <a:buNone/>
+            </a:pPr>
+            <a:r>
+              <a:rPr lang="en-US" sz="700" i="1" dirty="0">
+                <a:solidFill>
+                  <a:srgbClr val="94A3B8"/>
+                </a:solidFill>
+                <a:latin typeface="Calibri" pitchFamily="34" charset="0"/>
+                <a:ea typeface="Calibri" pitchFamily="34" charset="-122"/>
+                <a:cs typeface="Calibri" pitchFamily="34" charset="-120"/>
+              </a:rPr>
+              <a:t>'e' dropped before vowel suffix</a:t>
+            </a:r>
+            <a:endParaRPr lang="en-US" sz="700" dirty="0"/>
+          </a:p>
+        </p:txBody>
+      </p:sp>
+      <p:sp>
+        <p:nvSpPr>
+          <p:cNvPr id="23" name="Shape 21"/>
+          <p:cNvSpPr/>
+          <p:nvPr/>
+        </p:nvSpPr>
+        <p:spPr>
+          <a:xfrm>
+            <a:off x="365760" y="3273552"/>
+            <a:ext cx="1371600" cy="658368"/>
           </a:xfrm>
           <a:prstGeom prst="rect">
             <a:avLst>
-              <a:gd name="adj" fmla="val 25000"/>
+              <a:gd name="adj" fmla="val 8333"/>
             </a:avLst>
           </a:prstGeom>
           <a:solidFill>
-            <a:srgbClr val="FCE7F3"/>
-          </a:solidFill>
-          <a:ln w="19050">
-            <a:solidFill>
-              <a:srgbClr val="DB2777"/>
-            </a:solidFill>
-            <a:prstDash val="solid"/>
-          </a:ln>
-          <a:effectLst>
-            <a:outerShdw sx="100000" sy="100000" kx="0" ky="0" algn="bl" rotWithShape="0" blurRad="101600" dist="38100" dir="8100000">
-              <a:srgbClr val="000000">
-                <a:alpha val="12000"/>
-              </a:srgbClr>
-            </a:outerShdw>
-          </a:effectLst>
-        </p:spPr>
-      </p:sp>
-      <p:sp>
-        <p:nvSpPr>
-          <p:cNvPr id="23" name="Text 21"/>
-          <p:cNvSpPr/>
-          <p:nvPr/>
-        </p:nvSpPr>
-        <p:spPr>
-          <a:xfrm>
-            <a:off x="6519672" y="2258568"/>
-            <a:ext cx="1828800" cy="292608"/>
-          </a:xfrm>
-          <a:prstGeom prst="rect">
-            <a:avLst/>
-          </a:prstGeom>
-          <a:noFill/>
-          <a:ln/>
-        </p:spPr>
-        <p:txBody>
-          <a:bodyPr wrap="square" lIns="0" tIns="0" rIns="0" bIns="0" rtlCol="0" anchor="ctr"/>
-          <a:lstStyle/>
-          <a:p>
-            <a:pPr algn="ctr" indent="0" marL="0">
-              <a:buNone/>
-            </a:pPr>
-            <a:r>
-              <a:rPr lang="en-US" sz="1300" b="1" dirty="0">
-                <a:solidFill>
-                  <a:srgbClr val="9D174D"/>
+            <a:srgbClr val="E2E8F0"/>
+          </a:solidFill>
+          <a:ln w="12700">
+            <a:solidFill>
+              <a:srgbClr val="E2E8F0"/>
+            </a:solidFill>
+            <a:prstDash val="solid"/>
+          </a:ln>
+        </p:spPr>
+      </p:sp>
+      <p:sp>
+        <p:nvSpPr>
+          <p:cNvPr id="24" name="Text 22"/>
+          <p:cNvSpPr/>
+          <p:nvPr/>
+        </p:nvSpPr>
+        <p:spPr>
+          <a:xfrm>
+            <a:off x="365760" y="3273552"/>
+            <a:ext cx="1371600" cy="658368"/>
+          </a:xfrm>
+          <a:prstGeom prst="rect">
+            <a:avLst/>
+          </a:prstGeom>
+          <a:noFill/>
+          <a:ln/>
+        </p:spPr>
+        <p:txBody>
+          <a:bodyPr wrap="square" lIns="0" tIns="0" rIns="0" bIns="0" rtlCol="0" anchor="ctr"/>
+          <a:lstStyle/>
+          <a:p>
+            <a:pPr algn="ctr" indent="0" marL="0">
+              <a:buNone/>
+            </a:pPr>
+            <a:r>
+              <a:rPr lang="en-US" sz="1100" b="1" dirty="0">
+                <a:solidFill>
+                  <a:srgbClr val="475569"/>
                 </a:solidFill>
                 <a:latin typeface="Trebuchet MS" pitchFamily="34" charset="0"/>
                 <a:ea typeface="Trebuchet MS" pitchFamily="34" charset="-122"/>
                 <a:cs typeface="Trebuchet MS" pitchFamily="34" charset="-120"/>
               </a:rPr>
-              <a:t>d</a:t>
-            </a:r>
-            <a:endParaRPr lang="en-US" sz="1300" dirty="0"/>
-          </a:p>
-        </p:txBody>
-      </p:sp>
-      <p:sp>
-        <p:nvSpPr>
-          <p:cNvPr id="24" name="Text 22"/>
-          <p:cNvSpPr/>
-          <p:nvPr/>
-        </p:nvSpPr>
-        <p:spPr>
-          <a:xfrm>
-            <a:off x="6519672" y="2569464"/>
-            <a:ext cx="1828800" cy="201168"/>
+              <a:t>Syllables</a:t>
+            </a:r>
+            <a:endParaRPr lang="en-US" sz="1100" dirty="0"/>
+          </a:p>
+        </p:txBody>
+      </p:sp>
+      <p:sp>
+        <p:nvSpPr>
+          <p:cNvPr id="25" name="Shape 23"/>
+          <p:cNvSpPr/>
+          <p:nvPr/>
+        </p:nvSpPr>
+        <p:spPr>
+          <a:xfrm>
+            <a:off x="1874520" y="3273552"/>
+            <a:ext cx="6903720" cy="658368"/>
+          </a:xfrm>
+          <a:prstGeom prst="rect">
+            <a:avLst>
+              <a:gd name="adj" fmla="val 8333"/>
+            </a:avLst>
+          </a:prstGeom>
+          <a:solidFill>
+            <a:srgbClr val="CCFBF1"/>
+          </a:solidFill>
+          <a:ln w="12700">
+            <a:solidFill>
+              <a:srgbClr val="0D9488"/>
+            </a:solidFill>
+            <a:prstDash val="solid"/>
+          </a:ln>
+        </p:spPr>
+      </p:sp>
+      <p:sp>
+        <p:nvSpPr>
+          <p:cNvPr id="26" name="Shape 24"/>
+          <p:cNvSpPr/>
+          <p:nvPr/>
+        </p:nvSpPr>
+        <p:spPr>
+          <a:xfrm>
+            <a:off x="2313432" y="3364992"/>
+            <a:ext cx="1645920" cy="475488"/>
+          </a:xfrm>
+          <a:prstGeom prst="rect">
+            <a:avLst>
+              <a:gd name="adj" fmla="val 9615"/>
+            </a:avLst>
+          </a:prstGeom>
+          <a:solidFill>
+            <a:srgbClr val="FFFFFF"/>
+          </a:solidFill>
+          <a:ln w="12700">
+            <a:solidFill>
+              <a:srgbClr val="0D9488"/>
+            </a:solidFill>
+            <a:prstDash val="solid"/>
+          </a:ln>
+        </p:spPr>
+      </p:sp>
+      <p:sp>
+        <p:nvSpPr>
+          <p:cNvPr id="27" name="Text 25"/>
+          <p:cNvSpPr/>
+          <p:nvPr/>
+        </p:nvSpPr>
+        <p:spPr>
+          <a:xfrm>
+            <a:off x="2313432" y="3364992"/>
+            <a:ext cx="1645920" cy="475488"/>
+          </a:xfrm>
+          <a:prstGeom prst="rect">
+            <a:avLst/>
+          </a:prstGeom>
+          <a:noFill/>
+          <a:ln/>
+        </p:spPr>
+        <p:txBody>
+          <a:bodyPr wrap="square" lIns="0" tIns="0" rIns="0" bIns="0" rtlCol="0" anchor="ctr"/>
+          <a:lstStyle/>
+          <a:p>
+            <a:pPr algn="ctr" indent="0" marL="0">
+              <a:buNone/>
+            </a:pPr>
+            <a:r>
+              <a:rPr lang="en-US" sz="1400" b="1" dirty="0">
+                <a:solidFill>
+                  <a:srgbClr val="0D9488"/>
+                </a:solidFill>
+                <a:latin typeface="Trebuchet MS" pitchFamily="34" charset="0"/>
+                <a:ea typeface="Trebuchet MS" pitchFamily="34" charset="-122"/>
+                <a:cs typeface="Trebuchet MS" pitchFamily="34" charset="-120"/>
+              </a:rPr>
+              <a:t>ex</a:t>
+            </a:r>
+            <a:endParaRPr lang="en-US" sz="1400" dirty="0"/>
+          </a:p>
+        </p:txBody>
+      </p:sp>
+      <p:sp>
+        <p:nvSpPr>
+          <p:cNvPr id="28" name="Text 26"/>
+          <p:cNvSpPr/>
+          <p:nvPr/>
+        </p:nvSpPr>
+        <p:spPr>
+          <a:xfrm>
+            <a:off x="3959352" y="3364992"/>
+            <a:ext cx="411480" cy="475488"/>
+          </a:xfrm>
+          <a:prstGeom prst="rect">
+            <a:avLst/>
+          </a:prstGeom>
+          <a:noFill/>
+          <a:ln/>
+        </p:spPr>
+        <p:txBody>
+          <a:bodyPr wrap="square" lIns="0" tIns="0" rIns="0" bIns="0" rtlCol="0" anchor="ctr"/>
+          <a:lstStyle/>
+          <a:p>
+            <a:pPr algn="ctr" indent="0" marL="0">
+              <a:buNone/>
+            </a:pPr>
+            <a:r>
+              <a:rPr lang="en-US" sz="1600" b="1" dirty="0">
+                <a:solidFill>
+                  <a:srgbClr val="0D9488"/>
+                </a:solidFill>
+                <a:latin typeface="Trebuchet MS" pitchFamily="34" charset="0"/>
+                <a:ea typeface="Trebuchet MS" pitchFamily="34" charset="-122"/>
+                <a:cs typeface="Trebuchet MS" pitchFamily="34" charset="-120"/>
+              </a:rPr>
+              <a:t>·</a:t>
+            </a:r>
+            <a:endParaRPr lang="en-US" sz="1600" dirty="0"/>
+          </a:p>
+        </p:txBody>
+      </p:sp>
+      <p:sp>
+        <p:nvSpPr>
+          <p:cNvPr id="29" name="Shape 27"/>
+          <p:cNvSpPr/>
+          <p:nvPr/>
+        </p:nvSpPr>
+        <p:spPr>
+          <a:xfrm>
+            <a:off x="4370832" y="3364992"/>
+            <a:ext cx="1645920" cy="475488"/>
+          </a:xfrm>
+          <a:prstGeom prst="rect">
+            <a:avLst>
+              <a:gd name="adj" fmla="val 9615"/>
+            </a:avLst>
+          </a:prstGeom>
+          <a:solidFill>
+            <a:srgbClr val="FFFFFF"/>
+          </a:solidFill>
+          <a:ln w="12700">
+            <a:solidFill>
+              <a:srgbClr val="0D9488"/>
+            </a:solidFill>
+            <a:prstDash val="solid"/>
+          </a:ln>
+        </p:spPr>
+      </p:sp>
+      <p:sp>
+        <p:nvSpPr>
+          <p:cNvPr id="30" name="Text 28"/>
+          <p:cNvSpPr/>
+          <p:nvPr/>
+        </p:nvSpPr>
+        <p:spPr>
+          <a:xfrm>
+            <a:off x="4370832" y="3364992"/>
+            <a:ext cx="1645920" cy="475488"/>
+          </a:xfrm>
+          <a:prstGeom prst="rect">
+            <a:avLst/>
+          </a:prstGeom>
+          <a:noFill/>
+          <a:ln/>
+        </p:spPr>
+        <p:txBody>
+          <a:bodyPr wrap="square" lIns="0" tIns="0" rIns="0" bIns="0" rtlCol="0" anchor="ctr"/>
+          <a:lstStyle/>
+          <a:p>
+            <a:pPr algn="ctr" indent="0" marL="0">
+              <a:buNone/>
+            </a:pPr>
+            <a:r>
+              <a:rPr lang="en-US" sz="1400" b="1" dirty="0">
+                <a:solidFill>
+                  <a:srgbClr val="0D9488"/>
+                </a:solidFill>
+                <a:latin typeface="Trebuchet MS" pitchFamily="34" charset="0"/>
+                <a:ea typeface="Trebuchet MS" pitchFamily="34" charset="-122"/>
+                <a:cs typeface="Trebuchet MS" pitchFamily="34" charset="-120"/>
+              </a:rPr>
+              <a:t>cit</a:t>
+            </a:r>
+            <a:endParaRPr lang="en-US" sz="1400" dirty="0"/>
+          </a:p>
+        </p:txBody>
+      </p:sp>
+      <p:sp>
+        <p:nvSpPr>
+          <p:cNvPr id="31" name="Text 29"/>
+          <p:cNvSpPr/>
+          <p:nvPr/>
+        </p:nvSpPr>
+        <p:spPr>
+          <a:xfrm>
+            <a:off x="6016752" y="3364992"/>
+            <a:ext cx="411480" cy="475488"/>
+          </a:xfrm>
+          <a:prstGeom prst="rect">
+            <a:avLst/>
+          </a:prstGeom>
+          <a:noFill/>
+          <a:ln/>
+        </p:spPr>
+        <p:txBody>
+          <a:bodyPr wrap="square" lIns="0" tIns="0" rIns="0" bIns="0" rtlCol="0" anchor="ctr"/>
+          <a:lstStyle/>
+          <a:p>
+            <a:pPr algn="ctr" indent="0" marL="0">
+              <a:buNone/>
+            </a:pPr>
+            <a:r>
+              <a:rPr lang="en-US" sz="1600" b="1" dirty="0">
+                <a:solidFill>
+                  <a:srgbClr val="0D9488"/>
+                </a:solidFill>
+                <a:latin typeface="Trebuchet MS" pitchFamily="34" charset="0"/>
+                <a:ea typeface="Trebuchet MS" pitchFamily="34" charset="-122"/>
+                <a:cs typeface="Trebuchet MS" pitchFamily="34" charset="-120"/>
+              </a:rPr>
+              <a:t>·</a:t>
+            </a:r>
+            <a:endParaRPr lang="en-US" sz="1600" dirty="0"/>
+          </a:p>
+        </p:txBody>
+      </p:sp>
+      <p:sp>
+        <p:nvSpPr>
+          <p:cNvPr id="32" name="Shape 30"/>
+          <p:cNvSpPr/>
+          <p:nvPr/>
+        </p:nvSpPr>
+        <p:spPr>
+          <a:xfrm>
+            <a:off x="6428232" y="3364992"/>
+            <a:ext cx="1645920" cy="475488"/>
+          </a:xfrm>
+          <a:prstGeom prst="rect">
+            <a:avLst>
+              <a:gd name="adj" fmla="val 9615"/>
+            </a:avLst>
+          </a:prstGeom>
+          <a:solidFill>
+            <a:srgbClr val="FFFFFF"/>
+          </a:solidFill>
+          <a:ln w="12700">
+            <a:solidFill>
+              <a:srgbClr val="0D9488"/>
+            </a:solidFill>
+            <a:prstDash val="solid"/>
+          </a:ln>
+        </p:spPr>
+      </p:sp>
+      <p:sp>
+        <p:nvSpPr>
+          <p:cNvPr id="33" name="Text 31"/>
+          <p:cNvSpPr/>
+          <p:nvPr/>
+        </p:nvSpPr>
+        <p:spPr>
+          <a:xfrm>
+            <a:off x="6428232" y="3364992"/>
+            <a:ext cx="1645920" cy="475488"/>
+          </a:xfrm>
+          <a:prstGeom prst="rect">
+            <a:avLst/>
+          </a:prstGeom>
+          <a:noFill/>
+          <a:ln/>
+        </p:spPr>
+        <p:txBody>
+          <a:bodyPr wrap="square" lIns="0" tIns="0" rIns="0" bIns="0" rtlCol="0" anchor="ctr"/>
+          <a:lstStyle/>
+          <a:p>
+            <a:pPr algn="ctr" indent="0" marL="0">
+              <a:buNone/>
+            </a:pPr>
+            <a:r>
+              <a:rPr lang="en-US" sz="1400" b="1" dirty="0">
+                <a:solidFill>
+                  <a:srgbClr val="0D9488"/>
+                </a:solidFill>
+                <a:latin typeface="Trebuchet MS" pitchFamily="34" charset="0"/>
+                <a:ea typeface="Trebuchet MS" pitchFamily="34" charset="-122"/>
+                <a:cs typeface="Trebuchet MS" pitchFamily="34" charset="-120"/>
+              </a:rPr>
+              <a:t>ing</a:t>
+            </a:r>
+            <a:endParaRPr lang="en-US" sz="1400" dirty="0"/>
+          </a:p>
+        </p:txBody>
+      </p:sp>
+      <p:sp>
+        <p:nvSpPr>
+          <p:cNvPr id="34" name="Shape 32"/>
+          <p:cNvSpPr/>
+          <p:nvPr/>
+        </p:nvSpPr>
+        <p:spPr>
+          <a:xfrm>
+            <a:off x="365760" y="4096512"/>
+            <a:ext cx="1371600" cy="804672"/>
+          </a:xfrm>
+          <a:prstGeom prst="rect">
+            <a:avLst>
+              <a:gd name="adj" fmla="val 6818"/>
+            </a:avLst>
+          </a:prstGeom>
+          <a:solidFill>
+            <a:srgbClr val="E2E8F0"/>
+          </a:solidFill>
+          <a:ln w="12700">
+            <a:solidFill>
+              <a:srgbClr val="E2E8F0"/>
+            </a:solidFill>
+            <a:prstDash val="solid"/>
+          </a:ln>
+        </p:spPr>
+      </p:sp>
+      <p:sp>
+        <p:nvSpPr>
+          <p:cNvPr id="35" name="Text 33"/>
+          <p:cNvSpPr/>
+          <p:nvPr/>
+        </p:nvSpPr>
+        <p:spPr>
+          <a:xfrm>
+            <a:off x="365760" y="4096512"/>
+            <a:ext cx="1371600" cy="804672"/>
+          </a:xfrm>
+          <a:prstGeom prst="rect">
+            <a:avLst/>
+          </a:prstGeom>
+          <a:noFill/>
+          <a:ln/>
+        </p:spPr>
+        <p:txBody>
+          <a:bodyPr wrap="square" lIns="0" tIns="0" rIns="0" bIns="0" rtlCol="0" anchor="ctr"/>
+          <a:lstStyle/>
+          <a:p>
+            <a:pPr algn="ctr" indent="0" marL="0">
+              <a:buNone/>
+            </a:pPr>
+            <a:r>
+              <a:rPr lang="en-US" sz="1100" b="1" dirty="0">
+                <a:solidFill>
+                  <a:srgbClr val="475569"/>
+                </a:solidFill>
+                <a:latin typeface="Trebuchet MS" pitchFamily="34" charset="0"/>
+                <a:ea typeface="Trebuchet MS" pitchFamily="34" charset="-122"/>
+                <a:cs typeface="Trebuchet MS" pitchFamily="34" charset="-120"/>
+              </a:rPr>
+              <a:t>Phonemes</a:t>
+            </a:r>
+            <a:endParaRPr lang="en-US" sz="1100" dirty="0"/>
+          </a:p>
+        </p:txBody>
+      </p:sp>
+      <p:sp>
+        <p:nvSpPr>
+          <p:cNvPr id="36" name="Shape 34"/>
+          <p:cNvSpPr/>
+          <p:nvPr/>
+        </p:nvSpPr>
+        <p:spPr>
+          <a:xfrm>
+            <a:off x="1874520" y="4096512"/>
+            <a:ext cx="6903720" cy="804672"/>
+          </a:xfrm>
+          <a:prstGeom prst="rect">
+            <a:avLst>
+              <a:gd name="adj" fmla="val 6818"/>
+            </a:avLst>
+          </a:prstGeom>
+          <a:solidFill>
+            <a:srgbClr val="FCE7F3"/>
+          </a:solidFill>
+          <a:ln w="12700">
+            <a:solidFill>
+              <a:srgbClr val="DB2777"/>
+            </a:solidFill>
+            <a:prstDash val="solid"/>
+          </a:ln>
+        </p:spPr>
+      </p:sp>
+      <p:sp>
+        <p:nvSpPr>
+          <p:cNvPr id="37" name="Shape 35"/>
+          <p:cNvSpPr/>
+          <p:nvPr/>
+        </p:nvSpPr>
+        <p:spPr>
+          <a:xfrm>
+            <a:off x="2124837" y="4169664"/>
+            <a:ext cx="685800" cy="384048"/>
+          </a:xfrm>
+          <a:prstGeom prst="rect">
+            <a:avLst>
+              <a:gd name="adj" fmla="val 9524"/>
+            </a:avLst>
+          </a:prstGeom>
+          <a:solidFill>
+            <a:srgbClr val="FFFFFF"/>
+          </a:solidFill>
+          <a:ln w="12700">
+            <a:solidFill>
+              <a:srgbClr val="DB2777"/>
+            </a:solidFill>
+            <a:prstDash val="solid"/>
+          </a:ln>
+        </p:spPr>
+      </p:sp>
+      <p:sp>
+        <p:nvSpPr>
+          <p:cNvPr id="38" name="Text 36"/>
+          <p:cNvSpPr/>
+          <p:nvPr/>
+        </p:nvSpPr>
+        <p:spPr>
+          <a:xfrm>
+            <a:off x="2124837" y="4169664"/>
+            <a:ext cx="685800" cy="384048"/>
+          </a:xfrm>
+          <a:prstGeom prst="rect">
+            <a:avLst/>
+          </a:prstGeom>
+          <a:noFill/>
+          <a:ln/>
+        </p:spPr>
+        <p:txBody>
+          <a:bodyPr wrap="square" lIns="0" tIns="0" rIns="0" bIns="0" rtlCol="0" anchor="ctr"/>
+          <a:lstStyle/>
+          <a:p>
+            <a:pPr algn="ctr" indent="0" marL="0">
+              <a:buNone/>
+            </a:pPr>
+            <a:r>
+              <a:rPr lang="en-US" sz="900" b="1" dirty="0">
+                <a:solidFill>
+                  <a:srgbClr val="9D174D"/>
+                </a:solidFill>
+                <a:latin typeface="Trebuchet MS" pitchFamily="34" charset="0"/>
+                <a:ea typeface="Trebuchet MS" pitchFamily="34" charset="-122"/>
+                <a:cs typeface="Trebuchet MS" pitchFamily="34" charset="-120"/>
+              </a:rPr>
+              <a:t>e</a:t>
+            </a:r>
+            <a:endParaRPr lang="en-US" sz="900" dirty="0"/>
+          </a:p>
+        </p:txBody>
+      </p:sp>
+      <p:sp>
+        <p:nvSpPr>
+          <p:cNvPr id="39" name="Shape 37"/>
+          <p:cNvSpPr/>
+          <p:nvPr/>
+        </p:nvSpPr>
+        <p:spPr>
+          <a:xfrm>
+            <a:off x="3033522" y="4169664"/>
+            <a:ext cx="685800" cy="384048"/>
+          </a:xfrm>
+          <a:prstGeom prst="rect">
+            <a:avLst>
+              <a:gd name="adj" fmla="val 9524"/>
+            </a:avLst>
+          </a:prstGeom>
+          <a:solidFill>
+            <a:srgbClr val="FFFFFF"/>
+          </a:solidFill>
+          <a:ln w="12700">
+            <a:solidFill>
+              <a:srgbClr val="DB2777"/>
+            </a:solidFill>
+            <a:prstDash val="solid"/>
+          </a:ln>
+        </p:spPr>
+      </p:sp>
+      <p:sp>
+        <p:nvSpPr>
+          <p:cNvPr id="40" name="Text 38"/>
+          <p:cNvSpPr/>
+          <p:nvPr/>
+        </p:nvSpPr>
+        <p:spPr>
+          <a:xfrm>
+            <a:off x="3033522" y="4169664"/>
+            <a:ext cx="685800" cy="384048"/>
+          </a:xfrm>
+          <a:prstGeom prst="rect">
+            <a:avLst/>
+          </a:prstGeom>
+          <a:noFill/>
+          <a:ln/>
+        </p:spPr>
+        <p:txBody>
+          <a:bodyPr wrap="square" lIns="0" tIns="0" rIns="0" bIns="0" rtlCol="0" anchor="ctr"/>
+          <a:lstStyle/>
+          <a:p>
+            <a:pPr algn="ctr" indent="0" marL="0">
+              <a:buNone/>
+            </a:pPr>
+            <a:r>
+              <a:rPr lang="en-US" sz="900" b="1" dirty="0">
+                <a:solidFill>
+                  <a:srgbClr val="9D174D"/>
+                </a:solidFill>
+                <a:latin typeface="Trebuchet MS" pitchFamily="34" charset="0"/>
+                <a:ea typeface="Trebuchet MS" pitchFamily="34" charset="-122"/>
+                <a:cs typeface="Trebuchet MS" pitchFamily="34" charset="-120"/>
+              </a:rPr>
+              <a:t>x</a:t>
+            </a:r>
+            <a:endParaRPr lang="en-US" sz="900" dirty="0"/>
+          </a:p>
+        </p:txBody>
+      </p:sp>
+      <p:sp>
+        <p:nvSpPr>
+          <p:cNvPr id="41" name="Text 39"/>
+          <p:cNvSpPr/>
+          <p:nvPr/>
+        </p:nvSpPr>
+        <p:spPr>
+          <a:xfrm>
+            <a:off x="3033522" y="4572000"/>
+            <a:ext cx="685800" cy="219456"/>
           </a:xfrm>
           <a:prstGeom prst="rect">
             <a:avLst/>
@@ -29029,30 +29389,96 @@
               <a:buNone/>
             </a:pPr>
             <a:r>
-              <a:rPr lang="en-US" sz="850" dirty="0">
-                <a:solidFill>
-                  <a:srgbClr val="475569"/>
+              <a:rPr lang="en-US" sz="750" i="1" dirty="0">
+                <a:solidFill>
+                  <a:srgbClr val="94A3B8"/>
                 </a:solidFill>
                 <a:latin typeface="Calibri" pitchFamily="34" charset="0"/>
                 <a:ea typeface="Calibri" pitchFamily="34" charset="-122"/>
                 <a:cs typeface="Calibri" pitchFamily="34" charset="-120"/>
               </a:rPr>
-              <a:t>past tense or adjectival form</a:t>
-            </a:r>
-            <a:endParaRPr lang="en-US" sz="850" dirty="0"/>
-          </a:p>
-        </p:txBody>
-      </p:sp>
-      <p:sp>
-        <p:nvSpPr>
-          <p:cNvPr id="25" name="Text 23"/>
-          <p:cNvSpPr/>
-          <p:nvPr/>
-        </p:nvSpPr>
-        <p:spPr>
-          <a:xfrm>
-            <a:off x="6519672" y="2752344"/>
-            <a:ext cx="1828800" cy="182880"/>
+              <a:t>/ks/</a:t>
+            </a:r>
+            <a:endParaRPr lang="en-US" sz="750" dirty="0"/>
+          </a:p>
+        </p:txBody>
+      </p:sp>
+      <p:sp>
+        <p:nvSpPr>
+          <p:cNvPr id="42" name="Shape 40"/>
+          <p:cNvSpPr/>
+          <p:nvPr/>
+        </p:nvSpPr>
+        <p:spPr>
+          <a:xfrm>
+            <a:off x="3942207" y="4169664"/>
+            <a:ext cx="685800" cy="384048"/>
+          </a:xfrm>
+          <a:prstGeom prst="rect">
+            <a:avLst>
+              <a:gd name="adj" fmla="val 9524"/>
+            </a:avLst>
+          </a:prstGeom>
+          <a:solidFill>
+            <a:srgbClr val="FFFFFF"/>
+          </a:solidFill>
+          <a:ln w="12700">
+            <a:solidFill>
+              <a:srgbClr val="DB2777"/>
+            </a:solidFill>
+            <a:prstDash val="solid"/>
+          </a:ln>
+        </p:spPr>
+      </p:sp>
+      <p:sp>
+        <p:nvSpPr>
+          <p:cNvPr id="43" name="Text 41"/>
+          <p:cNvSpPr/>
+          <p:nvPr/>
+        </p:nvSpPr>
+        <p:spPr>
+          <a:xfrm>
+            <a:off x="3942207" y="4169664"/>
+            <a:ext cx="685800" cy="384048"/>
+          </a:xfrm>
+          <a:prstGeom prst="rect">
+            <a:avLst/>
+          </a:prstGeom>
+          <a:noFill/>
+          <a:ln/>
+        </p:spPr>
+        <p:txBody>
+          <a:bodyPr wrap="square" lIns="0" tIns="0" rIns="0" bIns="0" rtlCol="0" anchor="ctr"/>
+          <a:lstStyle/>
+          <a:p>
+            <a:pPr algn="ctr" indent="0" marL="0">
+              <a:buNone/>
+            </a:pPr>
+            <a:r>
+              <a:rPr lang="en-US" sz="900" b="1" dirty="0">
+                <a:solidFill>
+                  <a:srgbClr val="9D174D"/>
+                </a:solidFill>
+                <a:latin typeface="Trebuchet MS" pitchFamily="34" charset="0"/>
+                <a:ea typeface="Trebuchet MS" pitchFamily="34" charset="-122"/>
+                <a:cs typeface="Trebuchet MS" pitchFamily="34" charset="-120"/>
+              </a:rPr>
+              <a:t>c</a:t>
+            </a:r>
+            <a:endParaRPr lang="en-US" sz="900" dirty="0"/>
+          </a:p>
+        </p:txBody>
+      </p:sp>
+      <p:sp>
+        <p:nvSpPr>
+          <p:cNvPr id="44" name="Text 42"/>
+          <p:cNvSpPr/>
+          <p:nvPr/>
+        </p:nvSpPr>
+        <p:spPr>
+          <a:xfrm>
+            <a:off x="3942207" y="4572000"/>
+            <a:ext cx="685800" cy="219456"/>
           </a:xfrm>
           <a:prstGeom prst="rect">
             <a:avLst/>
@@ -29068,7 +29494,7 @@
               <a:buNone/>
             </a:pPr>
             <a:r>
-              <a:rPr lang="en-US" sz="700" i="1" dirty="0">
+              <a:rPr lang="en-US" sz="750" i="1" dirty="0">
                 <a:solidFill>
                   <a:srgbClr val="94A3B8"/>
                 </a:solidFill>
@@ -29076,224 +29502,224 @@
                 <a:ea typeface="Calibri" pitchFamily="34" charset="-122"/>
                 <a:cs typeface="Calibri" pitchFamily="34" charset="-120"/>
               </a:rPr>
-              <a:t>'e' retained as part of base before consonant suffix</a:t>
-            </a:r>
-            <a:endParaRPr lang="en-US" sz="700" dirty="0"/>
-          </a:p>
-        </p:txBody>
-      </p:sp>
-      <p:sp>
-        <p:nvSpPr>
-          <p:cNvPr id="26" name="Shape 24"/>
-          <p:cNvSpPr/>
-          <p:nvPr/>
-        </p:nvSpPr>
-        <p:spPr>
-          <a:xfrm>
-            <a:off x="365760" y="3273552"/>
-            <a:ext cx="1371600" cy="658368"/>
+              <a:t>/s/</a:t>
+            </a:r>
+            <a:endParaRPr lang="en-US" sz="750" dirty="0"/>
+          </a:p>
+        </p:txBody>
+      </p:sp>
+      <p:sp>
+        <p:nvSpPr>
+          <p:cNvPr id="45" name="Shape 43"/>
+          <p:cNvSpPr/>
+          <p:nvPr/>
+        </p:nvSpPr>
+        <p:spPr>
+          <a:xfrm>
+            <a:off x="4850892" y="4169664"/>
+            <a:ext cx="685800" cy="384048"/>
           </a:xfrm>
           <a:prstGeom prst="rect">
             <a:avLst>
-              <a:gd name="adj" fmla="val 8333"/>
+              <a:gd name="adj" fmla="val 9524"/>
             </a:avLst>
           </a:prstGeom>
           <a:solidFill>
-            <a:srgbClr val="E2E8F0"/>
-          </a:solidFill>
-          <a:ln w="12700">
-            <a:solidFill>
-              <a:srgbClr val="E2E8F0"/>
-            </a:solidFill>
-            <a:prstDash val="solid"/>
-          </a:ln>
-        </p:spPr>
-      </p:sp>
-      <p:sp>
-        <p:nvSpPr>
-          <p:cNvPr id="27" name="Text 25"/>
-          <p:cNvSpPr/>
-          <p:nvPr/>
-        </p:nvSpPr>
-        <p:spPr>
-          <a:xfrm>
-            <a:off x="365760" y="3273552"/>
-            <a:ext cx="1371600" cy="658368"/>
-          </a:xfrm>
-          <a:prstGeom prst="rect">
-            <a:avLst/>
-          </a:prstGeom>
-          <a:noFill/>
-          <a:ln/>
-        </p:spPr>
-        <p:txBody>
-          <a:bodyPr wrap="square" lIns="0" tIns="0" rIns="0" bIns="0" rtlCol="0" anchor="ctr"/>
-          <a:lstStyle/>
-          <a:p>
-            <a:pPr algn="ctr" indent="0" marL="0">
-              <a:buNone/>
-            </a:pPr>
-            <a:r>
-              <a:rPr lang="en-US" sz="1100" b="1" dirty="0">
-                <a:solidFill>
-                  <a:srgbClr val="475569"/>
+            <a:srgbClr val="FFFFFF"/>
+          </a:solidFill>
+          <a:ln w="12700">
+            <a:solidFill>
+              <a:srgbClr val="DB2777"/>
+            </a:solidFill>
+            <a:prstDash val="solid"/>
+          </a:ln>
+        </p:spPr>
+      </p:sp>
+      <p:sp>
+        <p:nvSpPr>
+          <p:cNvPr id="46" name="Text 44"/>
+          <p:cNvSpPr/>
+          <p:nvPr/>
+        </p:nvSpPr>
+        <p:spPr>
+          <a:xfrm>
+            <a:off x="4850892" y="4169664"/>
+            <a:ext cx="685800" cy="384048"/>
+          </a:xfrm>
+          <a:prstGeom prst="rect">
+            <a:avLst/>
+          </a:prstGeom>
+          <a:noFill/>
+          <a:ln/>
+        </p:spPr>
+        <p:txBody>
+          <a:bodyPr wrap="square" lIns="0" tIns="0" rIns="0" bIns="0" rtlCol="0" anchor="ctr"/>
+          <a:lstStyle/>
+          <a:p>
+            <a:pPr algn="ctr" indent="0" marL="0">
+              <a:buNone/>
+            </a:pPr>
+            <a:r>
+              <a:rPr lang="en-US" sz="900" b="1" dirty="0">
+                <a:solidFill>
+                  <a:srgbClr val="9D174D"/>
                 </a:solidFill>
                 <a:latin typeface="Trebuchet MS" pitchFamily="34" charset="0"/>
                 <a:ea typeface="Trebuchet MS" pitchFamily="34" charset="-122"/>
                 <a:cs typeface="Trebuchet MS" pitchFamily="34" charset="-120"/>
               </a:rPr>
-              <a:t>Syllables</a:t>
-            </a:r>
-            <a:endParaRPr lang="en-US" sz="1100" dirty="0"/>
-          </a:p>
-        </p:txBody>
-      </p:sp>
-      <p:sp>
-        <p:nvSpPr>
-          <p:cNvPr id="28" name="Shape 26"/>
-          <p:cNvSpPr/>
-          <p:nvPr/>
-        </p:nvSpPr>
-        <p:spPr>
-          <a:xfrm>
-            <a:off x="1874520" y="3273552"/>
-            <a:ext cx="6903720" cy="658368"/>
+              <a:t>i</a:t>
+            </a:r>
+            <a:endParaRPr lang="en-US" sz="900" dirty="0"/>
+          </a:p>
+        </p:txBody>
+      </p:sp>
+      <p:sp>
+        <p:nvSpPr>
+          <p:cNvPr id="47" name="Shape 45"/>
+          <p:cNvSpPr/>
+          <p:nvPr/>
+        </p:nvSpPr>
+        <p:spPr>
+          <a:xfrm>
+            <a:off x="5759577" y="4169664"/>
+            <a:ext cx="685800" cy="384048"/>
           </a:xfrm>
           <a:prstGeom prst="rect">
             <a:avLst>
-              <a:gd name="adj" fmla="val 8333"/>
+              <a:gd name="adj" fmla="val 9524"/>
             </a:avLst>
           </a:prstGeom>
           <a:solidFill>
-            <a:srgbClr val="CCFBF1"/>
-          </a:solidFill>
-          <a:ln w="12700">
-            <a:solidFill>
-              <a:srgbClr val="0D9488"/>
-            </a:solidFill>
-            <a:prstDash val="solid"/>
-          </a:ln>
-        </p:spPr>
-      </p:sp>
-      <p:sp>
-        <p:nvSpPr>
-          <p:cNvPr id="29" name="Shape 27"/>
-          <p:cNvSpPr/>
-          <p:nvPr/>
-        </p:nvSpPr>
-        <p:spPr>
-          <a:xfrm>
-            <a:off x="1978152" y="3364992"/>
-            <a:ext cx="1225296" cy="475488"/>
-          </a:xfrm>
-          <a:prstGeom prst="rect">
-            <a:avLst>
-              <a:gd name="adj" fmla="val 9615"/>
-            </a:avLst>
-          </a:prstGeom>
-          <a:solidFill>
             <a:srgbClr val="FFFFFF"/>
           </a:solidFill>
           <a:ln w="12700">
             <a:solidFill>
-              <a:srgbClr val="0D9488"/>
-            </a:solidFill>
-            <a:prstDash val="solid"/>
-          </a:ln>
-        </p:spPr>
-      </p:sp>
-      <p:sp>
-        <p:nvSpPr>
-          <p:cNvPr id="30" name="Text 28"/>
-          <p:cNvSpPr/>
-          <p:nvPr/>
-        </p:nvSpPr>
-        <p:spPr>
-          <a:xfrm>
-            <a:off x="1978152" y="3364992"/>
-            <a:ext cx="1225296" cy="475488"/>
-          </a:xfrm>
-          <a:prstGeom prst="rect">
-            <a:avLst/>
-          </a:prstGeom>
-          <a:noFill/>
-          <a:ln/>
-        </p:spPr>
-        <p:txBody>
-          <a:bodyPr wrap="square" lIns="0" tIns="0" rIns="0" bIns="0" rtlCol="0" anchor="ctr"/>
-          <a:lstStyle/>
-          <a:p>
-            <a:pPr algn="ctr" indent="0" marL="0">
-              <a:buNone/>
-            </a:pPr>
-            <a:r>
-              <a:rPr lang="en-US" sz="1400" b="1" dirty="0">
-                <a:solidFill>
-                  <a:srgbClr val="0D9488"/>
+              <a:srgbClr val="DB2777"/>
+            </a:solidFill>
+            <a:prstDash val="solid"/>
+          </a:ln>
+        </p:spPr>
+      </p:sp>
+      <p:sp>
+        <p:nvSpPr>
+          <p:cNvPr id="48" name="Text 46"/>
+          <p:cNvSpPr/>
+          <p:nvPr/>
+        </p:nvSpPr>
+        <p:spPr>
+          <a:xfrm>
+            <a:off x="5759577" y="4169664"/>
+            <a:ext cx="685800" cy="384048"/>
+          </a:xfrm>
+          <a:prstGeom prst="rect">
+            <a:avLst/>
+          </a:prstGeom>
+          <a:noFill/>
+          <a:ln/>
+        </p:spPr>
+        <p:txBody>
+          <a:bodyPr wrap="square" lIns="0" tIns="0" rIns="0" bIns="0" rtlCol="0" anchor="ctr"/>
+          <a:lstStyle/>
+          <a:p>
+            <a:pPr algn="ctr" indent="0" marL="0">
+              <a:buNone/>
+            </a:pPr>
+            <a:r>
+              <a:rPr lang="en-US" sz="900" b="1" dirty="0">
+                <a:solidFill>
+                  <a:srgbClr val="9D174D"/>
                 </a:solidFill>
                 <a:latin typeface="Trebuchet MS" pitchFamily="34" charset="0"/>
                 <a:ea typeface="Trebuchet MS" pitchFamily="34" charset="-122"/>
                 <a:cs typeface="Trebuchet MS" pitchFamily="34" charset="-120"/>
               </a:rPr>
-              <a:t>o</a:t>
-            </a:r>
-            <a:endParaRPr lang="en-US" sz="1400" dirty="0"/>
-          </a:p>
-        </p:txBody>
-      </p:sp>
-      <p:sp>
-        <p:nvSpPr>
-          <p:cNvPr id="31" name="Text 29"/>
-          <p:cNvSpPr/>
-          <p:nvPr/>
-        </p:nvSpPr>
-        <p:spPr>
-          <a:xfrm>
-            <a:off x="3203448" y="3364992"/>
-            <a:ext cx="76200" cy="475488"/>
-          </a:xfrm>
-          <a:prstGeom prst="rect">
-            <a:avLst/>
-          </a:prstGeom>
-          <a:noFill/>
-          <a:ln/>
-        </p:spPr>
-        <p:txBody>
-          <a:bodyPr wrap="square" lIns="0" tIns="0" rIns="0" bIns="0" rtlCol="0" anchor="ctr"/>
-          <a:lstStyle/>
-          <a:p>
-            <a:pPr algn="ctr" indent="0" marL="0">
-              <a:buNone/>
-            </a:pPr>
-            <a:r>
-              <a:rPr lang="en-US" sz="1600" b="1" dirty="0">
-                <a:solidFill>
-                  <a:srgbClr val="0D9488"/>
+              <a:t>t</a:t>
+            </a:r>
+            <a:endParaRPr lang="en-US" sz="900" dirty="0"/>
+          </a:p>
+        </p:txBody>
+      </p:sp>
+      <p:sp>
+        <p:nvSpPr>
+          <p:cNvPr id="49" name="Shape 47"/>
+          <p:cNvSpPr/>
+          <p:nvPr/>
+        </p:nvSpPr>
+        <p:spPr>
+          <a:xfrm>
+            <a:off x="6668262" y="4169664"/>
+            <a:ext cx="685800" cy="384048"/>
+          </a:xfrm>
+          <a:prstGeom prst="rect">
+            <a:avLst>
+              <a:gd name="adj" fmla="val 9524"/>
+            </a:avLst>
+          </a:prstGeom>
+          <a:solidFill>
+            <a:srgbClr val="FFFFFF"/>
+          </a:solidFill>
+          <a:ln w="12700">
+            <a:solidFill>
+              <a:srgbClr val="DB2777"/>
+            </a:solidFill>
+            <a:prstDash val="solid"/>
+          </a:ln>
+        </p:spPr>
+      </p:sp>
+      <p:sp>
+        <p:nvSpPr>
+          <p:cNvPr id="50" name="Text 48"/>
+          <p:cNvSpPr/>
+          <p:nvPr/>
+        </p:nvSpPr>
+        <p:spPr>
+          <a:xfrm>
+            <a:off x="6668262" y="4169664"/>
+            <a:ext cx="685800" cy="384048"/>
+          </a:xfrm>
+          <a:prstGeom prst="rect">
+            <a:avLst/>
+          </a:prstGeom>
+          <a:noFill/>
+          <a:ln/>
+        </p:spPr>
+        <p:txBody>
+          <a:bodyPr wrap="square" lIns="0" tIns="0" rIns="0" bIns="0" rtlCol="0" anchor="ctr"/>
+          <a:lstStyle/>
+          <a:p>
+            <a:pPr algn="ctr" indent="0" marL="0">
+              <a:buNone/>
+            </a:pPr>
+            <a:r>
+              <a:rPr lang="en-US" sz="900" b="1" dirty="0">
+                <a:solidFill>
+                  <a:srgbClr val="9D174D"/>
                 </a:solidFill>
                 <a:latin typeface="Trebuchet MS" pitchFamily="34" charset="0"/>
                 <a:ea typeface="Trebuchet MS" pitchFamily="34" charset="-122"/>
                 <a:cs typeface="Trebuchet MS" pitchFamily="34" charset="-120"/>
               </a:rPr>
-              <a:t>·</a:t>
-            </a:r>
-            <a:endParaRPr lang="en-US" sz="1600" dirty="0"/>
-          </a:p>
-        </p:txBody>
-      </p:sp>
-      <p:sp>
-        <p:nvSpPr>
-          <p:cNvPr id="32" name="Shape 30"/>
-          <p:cNvSpPr/>
-          <p:nvPr/>
-        </p:nvSpPr>
-        <p:spPr>
-          <a:xfrm>
-            <a:off x="3279648" y="3364992"/>
-            <a:ext cx="1225296" cy="475488"/>
+              <a:t>i</a:t>
+            </a:r>
+            <a:endParaRPr lang="en-US" sz="900" dirty="0"/>
+          </a:p>
+        </p:txBody>
+      </p:sp>
+      <p:sp>
+        <p:nvSpPr>
+          <p:cNvPr id="51" name="Shape 49"/>
+          <p:cNvSpPr/>
+          <p:nvPr/>
+        </p:nvSpPr>
+        <p:spPr>
+          <a:xfrm>
+            <a:off x="7576947" y="4169664"/>
+            <a:ext cx="685800" cy="384048"/>
           </a:xfrm>
           <a:prstGeom prst="rect">
             <a:avLst>
-              <a:gd name="adj" fmla="val 9615"/>
+              <a:gd name="adj" fmla="val 9524"/>
             </a:avLst>
           </a:prstGeom>
           <a:solidFill>
@@ -29301,1153 +29727,46 @@
           </a:solidFill>
           <a:ln w="12700">
             <a:solidFill>
-              <a:srgbClr val="0D9488"/>
-            </a:solidFill>
-            <a:prstDash val="solid"/>
-          </a:ln>
-        </p:spPr>
-      </p:sp>
-      <p:sp>
-        <p:nvSpPr>
-          <p:cNvPr id="33" name="Text 31"/>
-          <p:cNvSpPr/>
-          <p:nvPr/>
-        </p:nvSpPr>
-        <p:spPr>
-          <a:xfrm>
-            <a:off x="3279648" y="3364992"/>
-            <a:ext cx="1225296" cy="475488"/>
-          </a:xfrm>
-          <a:prstGeom prst="rect">
-            <a:avLst/>
-          </a:prstGeom>
-          <a:noFill/>
-          <a:ln/>
-        </p:spPr>
-        <p:txBody>
-          <a:bodyPr wrap="square" lIns="0" tIns="0" rIns="0" bIns="0" rtlCol="0" anchor="ctr"/>
-          <a:lstStyle/>
-          <a:p>
-            <a:pPr algn="ctr" indent="0" marL="0">
-              <a:buNone/>
-            </a:pPr>
-            <a:r>
-              <a:rPr lang="en-US" sz="1400" b="1" dirty="0">
-                <a:solidFill>
-                  <a:srgbClr val="0D9488"/>
+              <a:srgbClr val="DB2777"/>
+            </a:solidFill>
+            <a:prstDash val="solid"/>
+          </a:ln>
+        </p:spPr>
+      </p:sp>
+      <p:sp>
+        <p:nvSpPr>
+          <p:cNvPr id="52" name="Text 50"/>
+          <p:cNvSpPr/>
+          <p:nvPr/>
+        </p:nvSpPr>
+        <p:spPr>
+          <a:xfrm>
+            <a:off x="7576947" y="4169664"/>
+            <a:ext cx="685800" cy="384048"/>
+          </a:xfrm>
+          <a:prstGeom prst="rect">
+            <a:avLst/>
+          </a:prstGeom>
+          <a:noFill/>
+          <a:ln/>
+        </p:spPr>
+        <p:txBody>
+          <a:bodyPr wrap="square" lIns="0" tIns="0" rIns="0" bIns="0" rtlCol="0" anchor="ctr"/>
+          <a:lstStyle/>
+          <a:p>
+            <a:pPr algn="ctr" indent="0" marL="0">
+              <a:buNone/>
+            </a:pPr>
+            <a:r>
+              <a:rPr lang="en-US" sz="900" b="1" dirty="0">
+                <a:solidFill>
+                  <a:srgbClr val="9D174D"/>
                 </a:solidFill>
                 <a:latin typeface="Trebuchet MS" pitchFamily="34" charset="0"/>
                 <a:ea typeface="Trebuchet MS" pitchFamily="34" charset="-122"/>
                 <a:cs typeface="Trebuchet MS" pitchFamily="34" charset="-120"/>
               </a:rPr>
-              <a:t>ver</a:t>
-            </a:r>
-            <a:endParaRPr lang="en-US" sz="1400" dirty="0"/>
-          </a:p>
-        </p:txBody>
-      </p:sp>
-      <p:sp>
-        <p:nvSpPr>
-          <p:cNvPr id="34" name="Text 32"/>
-          <p:cNvSpPr/>
-          <p:nvPr/>
-        </p:nvSpPr>
-        <p:spPr>
-          <a:xfrm>
-            <a:off x="4504944" y="3364992"/>
-            <a:ext cx="76200" cy="475488"/>
-          </a:xfrm>
-          <a:prstGeom prst="rect">
-            <a:avLst/>
-          </a:prstGeom>
-          <a:noFill/>
-          <a:ln/>
-        </p:spPr>
-        <p:txBody>
-          <a:bodyPr wrap="square" lIns="0" tIns="0" rIns="0" bIns="0" rtlCol="0" anchor="ctr"/>
-          <a:lstStyle/>
-          <a:p>
-            <a:pPr algn="ctr" indent="0" marL="0">
-              <a:buNone/>
-            </a:pPr>
-            <a:r>
-              <a:rPr lang="en-US" sz="1600" b="1" dirty="0">
-                <a:solidFill>
-                  <a:srgbClr val="0D9488"/>
-                </a:solidFill>
-                <a:latin typeface="Trebuchet MS" pitchFamily="34" charset="0"/>
-                <a:ea typeface="Trebuchet MS" pitchFamily="34" charset="-122"/>
-                <a:cs typeface="Trebuchet MS" pitchFamily="34" charset="-120"/>
-              </a:rPr>
-              <a:t>·</a:t>
-            </a:r>
-            <a:endParaRPr lang="en-US" sz="1600" dirty="0"/>
-          </a:p>
-        </p:txBody>
-      </p:sp>
-      <p:sp>
-        <p:nvSpPr>
-          <p:cNvPr id="35" name="Shape 33"/>
-          <p:cNvSpPr/>
-          <p:nvPr/>
-        </p:nvSpPr>
-        <p:spPr>
-          <a:xfrm>
-            <a:off x="4581144" y="3364992"/>
-            <a:ext cx="1225296" cy="475488"/>
-          </a:xfrm>
-          <a:prstGeom prst="rect">
-            <a:avLst>
-              <a:gd name="adj" fmla="val 9615"/>
-            </a:avLst>
-          </a:prstGeom>
-          <a:solidFill>
-            <a:srgbClr val="FFFFFF"/>
-          </a:solidFill>
-          <a:ln w="12700">
-            <a:solidFill>
-              <a:srgbClr val="0D9488"/>
-            </a:solidFill>
-            <a:prstDash val="solid"/>
-          </a:ln>
-        </p:spPr>
-      </p:sp>
-      <p:sp>
-        <p:nvSpPr>
-          <p:cNvPr id="36" name="Text 34"/>
-          <p:cNvSpPr/>
-          <p:nvPr/>
-        </p:nvSpPr>
-        <p:spPr>
-          <a:xfrm>
-            <a:off x="4581144" y="3364992"/>
-            <a:ext cx="1225296" cy="475488"/>
-          </a:xfrm>
-          <a:prstGeom prst="rect">
-            <a:avLst/>
-          </a:prstGeom>
-          <a:noFill/>
-          <a:ln/>
-        </p:spPr>
-        <p:txBody>
-          <a:bodyPr wrap="square" lIns="0" tIns="0" rIns="0" bIns="0" rtlCol="0" anchor="ctr"/>
-          <a:lstStyle/>
-          <a:p>
-            <a:pPr algn="ctr" indent="0" marL="0">
-              <a:buNone/>
-            </a:pPr>
-            <a:r>
-              <a:rPr lang="en-US" sz="1400" b="1" dirty="0">
-                <a:solidFill>
-                  <a:srgbClr val="0D9488"/>
-                </a:solidFill>
-                <a:latin typeface="Trebuchet MS" pitchFamily="34" charset="0"/>
-                <a:ea typeface="Trebuchet MS" pitchFamily="34" charset="-122"/>
-                <a:cs typeface="Trebuchet MS" pitchFamily="34" charset="-120"/>
-              </a:rPr>
-              <a:t>ex</a:t>
-            </a:r>
-            <a:endParaRPr lang="en-US" sz="1400" dirty="0"/>
-          </a:p>
-        </p:txBody>
-      </p:sp>
-      <p:sp>
-        <p:nvSpPr>
-          <p:cNvPr id="37" name="Text 35"/>
-          <p:cNvSpPr/>
-          <p:nvPr/>
-        </p:nvSpPr>
-        <p:spPr>
-          <a:xfrm>
-            <a:off x="5806440" y="3364992"/>
-            <a:ext cx="76200" cy="475488"/>
-          </a:xfrm>
-          <a:prstGeom prst="rect">
-            <a:avLst/>
-          </a:prstGeom>
-          <a:noFill/>
-          <a:ln/>
-        </p:spPr>
-        <p:txBody>
-          <a:bodyPr wrap="square" lIns="0" tIns="0" rIns="0" bIns="0" rtlCol="0" anchor="ctr"/>
-          <a:lstStyle/>
-          <a:p>
-            <a:pPr algn="ctr" indent="0" marL="0">
-              <a:buNone/>
-            </a:pPr>
-            <a:r>
-              <a:rPr lang="en-US" sz="1600" b="1" dirty="0">
-                <a:solidFill>
-                  <a:srgbClr val="0D9488"/>
-                </a:solidFill>
-                <a:latin typeface="Trebuchet MS" pitchFamily="34" charset="0"/>
-                <a:ea typeface="Trebuchet MS" pitchFamily="34" charset="-122"/>
-                <a:cs typeface="Trebuchet MS" pitchFamily="34" charset="-120"/>
-              </a:rPr>
-              <a:t>·</a:t>
-            </a:r>
-            <a:endParaRPr lang="en-US" sz="1600" dirty="0"/>
-          </a:p>
-        </p:txBody>
-      </p:sp>
-      <p:sp>
-        <p:nvSpPr>
-          <p:cNvPr id="38" name="Shape 36"/>
-          <p:cNvSpPr/>
-          <p:nvPr/>
-        </p:nvSpPr>
-        <p:spPr>
-          <a:xfrm>
-            <a:off x="5882640" y="3364992"/>
-            <a:ext cx="1225296" cy="475488"/>
-          </a:xfrm>
-          <a:prstGeom prst="rect">
-            <a:avLst>
-              <a:gd name="adj" fmla="val 9615"/>
-            </a:avLst>
-          </a:prstGeom>
-          <a:solidFill>
-            <a:srgbClr val="FFFFFF"/>
-          </a:solidFill>
-          <a:ln w="12700">
-            <a:solidFill>
-              <a:srgbClr val="0D9488"/>
-            </a:solidFill>
-            <a:prstDash val="solid"/>
-          </a:ln>
-        </p:spPr>
-      </p:sp>
-      <p:sp>
-        <p:nvSpPr>
-          <p:cNvPr id="39" name="Text 37"/>
-          <p:cNvSpPr/>
-          <p:nvPr/>
-        </p:nvSpPr>
-        <p:spPr>
-          <a:xfrm>
-            <a:off x="5882640" y="3364992"/>
-            <a:ext cx="1225296" cy="475488"/>
-          </a:xfrm>
-          <a:prstGeom prst="rect">
-            <a:avLst/>
-          </a:prstGeom>
-          <a:noFill/>
-          <a:ln/>
-        </p:spPr>
-        <p:txBody>
-          <a:bodyPr wrap="square" lIns="0" tIns="0" rIns="0" bIns="0" rtlCol="0" anchor="ctr"/>
-          <a:lstStyle/>
-          <a:p>
-            <a:pPr algn="ctr" indent="0" marL="0">
-              <a:buNone/>
-            </a:pPr>
-            <a:r>
-              <a:rPr lang="en-US" sz="1400" b="1" dirty="0">
-                <a:solidFill>
-                  <a:srgbClr val="0D9488"/>
-                </a:solidFill>
-                <a:latin typeface="Trebuchet MS" pitchFamily="34" charset="0"/>
-                <a:ea typeface="Trebuchet MS" pitchFamily="34" charset="-122"/>
-                <a:cs typeface="Trebuchet MS" pitchFamily="34" charset="-120"/>
-              </a:rPr>
-              <a:t>ci</a:t>
-            </a:r>
-            <a:endParaRPr lang="en-US" sz="1400" dirty="0"/>
-          </a:p>
-        </p:txBody>
-      </p:sp>
-      <p:sp>
-        <p:nvSpPr>
-          <p:cNvPr id="40" name="Text 38"/>
-          <p:cNvSpPr/>
-          <p:nvPr/>
-        </p:nvSpPr>
-        <p:spPr>
-          <a:xfrm>
-            <a:off x="7107936" y="3364992"/>
-            <a:ext cx="76200" cy="475488"/>
-          </a:xfrm>
-          <a:prstGeom prst="rect">
-            <a:avLst/>
-          </a:prstGeom>
-          <a:noFill/>
-          <a:ln/>
-        </p:spPr>
-        <p:txBody>
-          <a:bodyPr wrap="square" lIns="0" tIns="0" rIns="0" bIns="0" rtlCol="0" anchor="ctr"/>
-          <a:lstStyle/>
-          <a:p>
-            <a:pPr algn="ctr" indent="0" marL="0">
-              <a:buNone/>
-            </a:pPr>
-            <a:r>
-              <a:rPr lang="en-US" sz="1600" b="1" dirty="0">
-                <a:solidFill>
-                  <a:srgbClr val="0D9488"/>
-                </a:solidFill>
-                <a:latin typeface="Trebuchet MS" pitchFamily="34" charset="0"/>
-                <a:ea typeface="Trebuchet MS" pitchFamily="34" charset="-122"/>
-                <a:cs typeface="Trebuchet MS" pitchFamily="34" charset="-120"/>
-              </a:rPr>
-              <a:t>·</a:t>
-            </a:r>
-            <a:endParaRPr lang="en-US" sz="1600" dirty="0"/>
-          </a:p>
-        </p:txBody>
-      </p:sp>
-      <p:sp>
-        <p:nvSpPr>
-          <p:cNvPr id="41" name="Shape 39"/>
-          <p:cNvSpPr/>
-          <p:nvPr/>
-        </p:nvSpPr>
-        <p:spPr>
-          <a:xfrm>
-            <a:off x="7184136" y="3364992"/>
-            <a:ext cx="1225296" cy="475488"/>
-          </a:xfrm>
-          <a:prstGeom prst="rect">
-            <a:avLst>
-              <a:gd name="adj" fmla="val 9615"/>
-            </a:avLst>
-          </a:prstGeom>
-          <a:solidFill>
-            <a:srgbClr val="FFFFFF"/>
-          </a:solidFill>
-          <a:ln w="12700">
-            <a:solidFill>
-              <a:srgbClr val="0D9488"/>
-            </a:solidFill>
-            <a:prstDash val="solid"/>
-          </a:ln>
-        </p:spPr>
-      </p:sp>
-      <p:sp>
-        <p:nvSpPr>
-          <p:cNvPr id="42" name="Text 40"/>
-          <p:cNvSpPr/>
-          <p:nvPr/>
-        </p:nvSpPr>
-        <p:spPr>
-          <a:xfrm>
-            <a:off x="7184136" y="3364992"/>
-            <a:ext cx="1225296" cy="475488"/>
-          </a:xfrm>
-          <a:prstGeom prst="rect">
-            <a:avLst/>
-          </a:prstGeom>
-          <a:noFill/>
-          <a:ln/>
-        </p:spPr>
-        <p:txBody>
-          <a:bodyPr wrap="square" lIns="0" tIns="0" rIns="0" bIns="0" rtlCol="0" anchor="ctr"/>
-          <a:lstStyle/>
-          <a:p>
-            <a:pPr algn="ctr" indent="0" marL="0">
-              <a:buNone/>
-            </a:pPr>
-            <a:r>
-              <a:rPr lang="en-US" sz="1400" b="1" dirty="0">
-                <a:solidFill>
-                  <a:srgbClr val="0D9488"/>
-                </a:solidFill>
-                <a:latin typeface="Trebuchet MS" pitchFamily="34" charset="0"/>
-                <a:ea typeface="Trebuchet MS" pitchFamily="34" charset="-122"/>
-                <a:cs typeface="Trebuchet MS" pitchFamily="34" charset="-120"/>
-              </a:rPr>
-              <a:t>ted</a:t>
-            </a:r>
-            <a:endParaRPr lang="en-US" sz="1400" dirty="0"/>
-          </a:p>
-        </p:txBody>
-      </p:sp>
-      <p:sp>
-        <p:nvSpPr>
-          <p:cNvPr id="43" name="Shape 41"/>
-          <p:cNvSpPr/>
-          <p:nvPr/>
-        </p:nvSpPr>
-        <p:spPr>
-          <a:xfrm>
-            <a:off x="365760" y="4096512"/>
-            <a:ext cx="1371600" cy="804672"/>
-          </a:xfrm>
-          <a:prstGeom prst="rect">
-            <a:avLst>
-              <a:gd name="adj" fmla="val 6818"/>
-            </a:avLst>
-          </a:prstGeom>
-          <a:solidFill>
-            <a:srgbClr val="E2E8F0"/>
-          </a:solidFill>
-          <a:ln w="12700">
-            <a:solidFill>
-              <a:srgbClr val="E2E8F0"/>
-            </a:solidFill>
-            <a:prstDash val="solid"/>
-          </a:ln>
-        </p:spPr>
-      </p:sp>
-      <p:sp>
-        <p:nvSpPr>
-          <p:cNvPr id="44" name="Text 42"/>
-          <p:cNvSpPr/>
-          <p:nvPr/>
-        </p:nvSpPr>
-        <p:spPr>
-          <a:xfrm>
-            <a:off x="365760" y="4096512"/>
-            <a:ext cx="1371600" cy="804672"/>
-          </a:xfrm>
-          <a:prstGeom prst="rect">
-            <a:avLst/>
-          </a:prstGeom>
-          <a:noFill/>
-          <a:ln/>
-        </p:spPr>
-        <p:txBody>
-          <a:bodyPr wrap="square" lIns="0" tIns="0" rIns="0" bIns="0" rtlCol="0" anchor="ctr"/>
-          <a:lstStyle/>
-          <a:p>
-            <a:pPr algn="ctr" indent="0" marL="0">
-              <a:buNone/>
-            </a:pPr>
-            <a:r>
-              <a:rPr lang="en-US" sz="1100" b="1" dirty="0">
-                <a:solidFill>
-                  <a:srgbClr val="475569"/>
-                </a:solidFill>
-                <a:latin typeface="Trebuchet MS" pitchFamily="34" charset="0"/>
-                <a:ea typeface="Trebuchet MS" pitchFamily="34" charset="-122"/>
-                <a:cs typeface="Trebuchet MS" pitchFamily="34" charset="-120"/>
-              </a:rPr>
-              <a:t>Phonemes</a:t>
-            </a:r>
-            <a:endParaRPr lang="en-US" sz="1100" dirty="0"/>
-          </a:p>
-        </p:txBody>
-      </p:sp>
-      <p:sp>
-        <p:nvSpPr>
-          <p:cNvPr id="45" name="Shape 43"/>
-          <p:cNvSpPr/>
-          <p:nvPr/>
-        </p:nvSpPr>
-        <p:spPr>
-          <a:xfrm>
-            <a:off x="1874520" y="4096512"/>
-            <a:ext cx="6903720" cy="804672"/>
-          </a:xfrm>
-          <a:prstGeom prst="rect">
-            <a:avLst>
-              <a:gd name="adj" fmla="val 6818"/>
-            </a:avLst>
-          </a:prstGeom>
-          <a:solidFill>
-            <a:srgbClr val="FCE7F3"/>
-          </a:solidFill>
-          <a:ln w="12700">
-            <a:solidFill>
-              <a:srgbClr val="DB2777"/>
-            </a:solidFill>
-            <a:prstDash val="solid"/>
-          </a:ln>
-        </p:spPr>
-      </p:sp>
-      <p:sp>
-        <p:nvSpPr>
-          <p:cNvPr id="46" name="Shape 44"/>
-          <p:cNvSpPr/>
-          <p:nvPr/>
-        </p:nvSpPr>
-        <p:spPr>
-          <a:xfrm>
-            <a:off x="1951828" y="4169664"/>
-            <a:ext cx="603504" cy="384048"/>
-          </a:xfrm>
-          <a:prstGeom prst="rect">
-            <a:avLst>
-              <a:gd name="adj" fmla="val 9524"/>
-            </a:avLst>
-          </a:prstGeom>
-          <a:solidFill>
-            <a:srgbClr val="FFFFFF"/>
-          </a:solidFill>
-          <a:ln w="12700">
-            <a:solidFill>
-              <a:srgbClr val="DB2777"/>
-            </a:solidFill>
-            <a:prstDash val="solid"/>
-          </a:ln>
-        </p:spPr>
-      </p:sp>
-      <p:sp>
-        <p:nvSpPr>
-          <p:cNvPr id="47" name="Text 45"/>
-          <p:cNvSpPr/>
-          <p:nvPr/>
-        </p:nvSpPr>
-        <p:spPr>
-          <a:xfrm>
-            <a:off x="1951828" y="4169664"/>
-            <a:ext cx="603504" cy="384048"/>
-          </a:xfrm>
-          <a:prstGeom prst="rect">
-            <a:avLst/>
-          </a:prstGeom>
-          <a:noFill/>
-          <a:ln/>
-        </p:spPr>
-        <p:txBody>
-          <a:bodyPr wrap="square" lIns="0" tIns="0" rIns="0" bIns="0" rtlCol="0" anchor="ctr"/>
-          <a:lstStyle/>
-          <a:p>
-            <a:pPr algn="ctr" indent="0" marL="0">
-              <a:buNone/>
-            </a:pPr>
-            <a:r>
-              <a:rPr lang="en-US" sz="900" b="1" dirty="0">
-                <a:solidFill>
-                  <a:srgbClr val="9D174D"/>
-                </a:solidFill>
-                <a:latin typeface="Trebuchet MS" pitchFamily="34" charset="0"/>
-                <a:ea typeface="Trebuchet MS" pitchFamily="34" charset="-122"/>
-                <a:cs typeface="Trebuchet MS" pitchFamily="34" charset="-120"/>
-              </a:rPr>
-              <a:t>o</a:t>
-            </a:r>
-            <a:endParaRPr lang="en-US" sz="900" dirty="0"/>
-          </a:p>
-        </p:txBody>
-      </p:sp>
-      <p:sp>
-        <p:nvSpPr>
-          <p:cNvPr id="48" name="Shape 46"/>
-          <p:cNvSpPr/>
-          <p:nvPr/>
-        </p:nvSpPr>
-        <p:spPr>
-          <a:xfrm>
-            <a:off x="2605209" y="4169664"/>
-            <a:ext cx="603504" cy="384048"/>
-          </a:xfrm>
-          <a:prstGeom prst="rect">
-            <a:avLst>
-              <a:gd name="adj" fmla="val 9524"/>
-            </a:avLst>
-          </a:prstGeom>
-          <a:solidFill>
-            <a:srgbClr val="FFFFFF"/>
-          </a:solidFill>
-          <a:ln w="12700">
-            <a:solidFill>
-              <a:srgbClr val="DB2777"/>
-            </a:solidFill>
-            <a:prstDash val="solid"/>
-          </a:ln>
-        </p:spPr>
-      </p:sp>
-      <p:sp>
-        <p:nvSpPr>
-          <p:cNvPr id="49" name="Text 47"/>
-          <p:cNvSpPr/>
-          <p:nvPr/>
-        </p:nvSpPr>
-        <p:spPr>
-          <a:xfrm>
-            <a:off x="2605209" y="4169664"/>
-            <a:ext cx="603504" cy="384048"/>
-          </a:xfrm>
-          <a:prstGeom prst="rect">
-            <a:avLst/>
-          </a:prstGeom>
-          <a:noFill/>
-          <a:ln/>
-        </p:spPr>
-        <p:txBody>
-          <a:bodyPr wrap="square" lIns="0" tIns="0" rIns="0" bIns="0" rtlCol="0" anchor="ctr"/>
-          <a:lstStyle/>
-          <a:p>
-            <a:pPr algn="ctr" indent="0" marL="0">
-              <a:buNone/>
-            </a:pPr>
-            <a:r>
-              <a:rPr lang="en-US" sz="900" b="1" dirty="0">
-                <a:solidFill>
-                  <a:srgbClr val="9D174D"/>
-                </a:solidFill>
-                <a:latin typeface="Trebuchet MS" pitchFamily="34" charset="0"/>
-                <a:ea typeface="Trebuchet MS" pitchFamily="34" charset="-122"/>
-                <a:cs typeface="Trebuchet MS" pitchFamily="34" charset="-120"/>
-              </a:rPr>
-              <a:t>v</a:t>
-            </a:r>
-            <a:endParaRPr lang="en-US" sz="900" dirty="0"/>
-          </a:p>
-        </p:txBody>
-      </p:sp>
-      <p:sp>
-        <p:nvSpPr>
-          <p:cNvPr id="50" name="Shape 48"/>
-          <p:cNvSpPr/>
-          <p:nvPr/>
-        </p:nvSpPr>
-        <p:spPr>
-          <a:xfrm>
-            <a:off x="3258589" y="4169664"/>
-            <a:ext cx="603504" cy="384048"/>
-          </a:xfrm>
-          <a:prstGeom prst="rect">
-            <a:avLst>
-              <a:gd name="adj" fmla="val 9524"/>
-            </a:avLst>
-          </a:prstGeom>
-          <a:solidFill>
-            <a:srgbClr val="FFFFFF"/>
-          </a:solidFill>
-          <a:ln w="12700">
-            <a:solidFill>
-              <a:srgbClr val="DB2777"/>
-            </a:solidFill>
-            <a:prstDash val="solid"/>
-          </a:ln>
-        </p:spPr>
-      </p:sp>
-      <p:sp>
-        <p:nvSpPr>
-          <p:cNvPr id="51" name="Text 49"/>
-          <p:cNvSpPr/>
-          <p:nvPr/>
-        </p:nvSpPr>
-        <p:spPr>
-          <a:xfrm>
-            <a:off x="3258589" y="4169664"/>
-            <a:ext cx="603504" cy="384048"/>
-          </a:xfrm>
-          <a:prstGeom prst="rect">
-            <a:avLst/>
-          </a:prstGeom>
-          <a:noFill/>
-          <a:ln/>
-        </p:spPr>
-        <p:txBody>
-          <a:bodyPr wrap="square" lIns="0" tIns="0" rIns="0" bIns="0" rtlCol="0" anchor="ctr"/>
-          <a:lstStyle/>
-          <a:p>
-            <a:pPr algn="ctr" indent="0" marL="0">
-              <a:buNone/>
-            </a:pPr>
-            <a:r>
-              <a:rPr lang="en-US" sz="900" b="1" dirty="0">
-                <a:solidFill>
-                  <a:srgbClr val="9D174D"/>
-                </a:solidFill>
-                <a:latin typeface="Trebuchet MS" pitchFamily="34" charset="0"/>
-                <a:ea typeface="Trebuchet MS" pitchFamily="34" charset="-122"/>
-                <a:cs typeface="Trebuchet MS" pitchFamily="34" charset="-120"/>
-              </a:rPr>
-              <a:t>er</a:t>
-            </a:r>
-            <a:endParaRPr lang="en-US" sz="900" dirty="0"/>
-          </a:p>
-        </p:txBody>
-      </p:sp>
-      <p:sp>
-        <p:nvSpPr>
-          <p:cNvPr id="52" name="Shape 50"/>
-          <p:cNvSpPr/>
-          <p:nvPr/>
-        </p:nvSpPr>
-        <p:spPr>
-          <a:xfrm>
-            <a:off x="3911969" y="4169664"/>
-            <a:ext cx="603504" cy="384048"/>
-          </a:xfrm>
-          <a:prstGeom prst="rect">
-            <a:avLst>
-              <a:gd name="adj" fmla="val 9524"/>
-            </a:avLst>
-          </a:prstGeom>
-          <a:solidFill>
-            <a:srgbClr val="FFFFFF"/>
-          </a:solidFill>
-          <a:ln w="12700">
-            <a:solidFill>
-              <a:srgbClr val="DB2777"/>
-            </a:solidFill>
-            <a:prstDash val="solid"/>
-          </a:ln>
-        </p:spPr>
-      </p:sp>
-      <p:sp>
-        <p:nvSpPr>
-          <p:cNvPr id="53" name="Text 51"/>
-          <p:cNvSpPr/>
-          <p:nvPr/>
-        </p:nvSpPr>
-        <p:spPr>
-          <a:xfrm>
-            <a:off x="3911969" y="4169664"/>
-            <a:ext cx="603504" cy="384048"/>
-          </a:xfrm>
-          <a:prstGeom prst="rect">
-            <a:avLst/>
-          </a:prstGeom>
-          <a:noFill/>
-          <a:ln/>
-        </p:spPr>
-        <p:txBody>
-          <a:bodyPr wrap="square" lIns="0" tIns="0" rIns="0" bIns="0" rtlCol="0" anchor="ctr"/>
-          <a:lstStyle/>
-          <a:p>
-            <a:pPr algn="ctr" indent="0" marL="0">
-              <a:buNone/>
-            </a:pPr>
-            <a:r>
-              <a:rPr lang="en-US" sz="900" b="1" dirty="0">
-                <a:solidFill>
-                  <a:srgbClr val="9D174D"/>
-                </a:solidFill>
-                <a:latin typeface="Trebuchet MS" pitchFamily="34" charset="0"/>
-                <a:ea typeface="Trebuchet MS" pitchFamily="34" charset="-122"/>
-                <a:cs typeface="Trebuchet MS" pitchFamily="34" charset="-120"/>
-              </a:rPr>
-              <a:t>e</a:t>
-            </a:r>
-            <a:endParaRPr lang="en-US" sz="900" dirty="0"/>
-          </a:p>
-        </p:txBody>
-      </p:sp>
-      <p:sp>
-        <p:nvSpPr>
-          <p:cNvPr id="54" name="Shape 52"/>
-          <p:cNvSpPr/>
-          <p:nvPr/>
-        </p:nvSpPr>
-        <p:spPr>
-          <a:xfrm>
-            <a:off x="4565350" y="4169664"/>
-            <a:ext cx="603504" cy="384048"/>
-          </a:xfrm>
-          <a:prstGeom prst="rect">
-            <a:avLst>
-              <a:gd name="adj" fmla="val 9524"/>
-            </a:avLst>
-          </a:prstGeom>
-          <a:solidFill>
-            <a:srgbClr val="FFFFFF"/>
-          </a:solidFill>
-          <a:ln w="12700">
-            <a:solidFill>
-              <a:srgbClr val="DB2777"/>
-            </a:solidFill>
-            <a:prstDash val="solid"/>
-          </a:ln>
-        </p:spPr>
-      </p:sp>
-      <p:sp>
-        <p:nvSpPr>
-          <p:cNvPr id="55" name="Text 53"/>
-          <p:cNvSpPr/>
-          <p:nvPr/>
-        </p:nvSpPr>
-        <p:spPr>
-          <a:xfrm>
-            <a:off x="4565350" y="4169664"/>
-            <a:ext cx="603504" cy="384048"/>
-          </a:xfrm>
-          <a:prstGeom prst="rect">
-            <a:avLst/>
-          </a:prstGeom>
-          <a:noFill/>
-          <a:ln/>
-        </p:spPr>
-        <p:txBody>
-          <a:bodyPr wrap="square" lIns="0" tIns="0" rIns="0" bIns="0" rtlCol="0" anchor="ctr"/>
-          <a:lstStyle/>
-          <a:p>
-            <a:pPr algn="ctr" indent="0" marL="0">
-              <a:buNone/>
-            </a:pPr>
-            <a:r>
-              <a:rPr lang="en-US" sz="900" b="1" dirty="0">
-                <a:solidFill>
-                  <a:srgbClr val="9D174D"/>
-                </a:solidFill>
-                <a:latin typeface="Trebuchet MS" pitchFamily="34" charset="0"/>
-                <a:ea typeface="Trebuchet MS" pitchFamily="34" charset="-122"/>
-                <a:cs typeface="Trebuchet MS" pitchFamily="34" charset="-120"/>
-              </a:rPr>
-              <a:t>x</a:t>
-            </a:r>
-            <a:endParaRPr lang="en-US" sz="900" dirty="0"/>
-          </a:p>
-        </p:txBody>
-      </p:sp>
-      <p:sp>
-        <p:nvSpPr>
-          <p:cNvPr id="56" name="Shape 54"/>
-          <p:cNvSpPr/>
-          <p:nvPr/>
-        </p:nvSpPr>
-        <p:spPr>
-          <a:xfrm>
-            <a:off x="5218730" y="4169664"/>
-            <a:ext cx="603504" cy="384048"/>
-          </a:xfrm>
-          <a:prstGeom prst="rect">
-            <a:avLst>
-              <a:gd name="adj" fmla="val 9524"/>
-            </a:avLst>
-          </a:prstGeom>
-          <a:solidFill>
-            <a:srgbClr val="FFFFFF"/>
-          </a:solidFill>
-          <a:ln w="12700">
-            <a:solidFill>
-              <a:srgbClr val="DB2777"/>
-            </a:solidFill>
-            <a:prstDash val="solid"/>
-          </a:ln>
-        </p:spPr>
-      </p:sp>
-      <p:sp>
-        <p:nvSpPr>
-          <p:cNvPr id="57" name="Text 55"/>
-          <p:cNvSpPr/>
-          <p:nvPr/>
-        </p:nvSpPr>
-        <p:spPr>
-          <a:xfrm>
-            <a:off x="5218730" y="4169664"/>
-            <a:ext cx="603504" cy="384048"/>
-          </a:xfrm>
-          <a:prstGeom prst="rect">
-            <a:avLst/>
-          </a:prstGeom>
-          <a:noFill/>
-          <a:ln/>
-        </p:spPr>
-        <p:txBody>
-          <a:bodyPr wrap="square" lIns="0" tIns="0" rIns="0" bIns="0" rtlCol="0" anchor="ctr"/>
-          <a:lstStyle/>
-          <a:p>
-            <a:pPr algn="ctr" indent="0" marL="0">
-              <a:buNone/>
-            </a:pPr>
-            <a:r>
-              <a:rPr lang="en-US" sz="900" b="1" dirty="0">
-                <a:solidFill>
-                  <a:srgbClr val="9D174D"/>
-                </a:solidFill>
-                <a:latin typeface="Trebuchet MS" pitchFamily="34" charset="0"/>
-                <a:ea typeface="Trebuchet MS" pitchFamily="34" charset="-122"/>
-                <a:cs typeface="Trebuchet MS" pitchFamily="34" charset="-120"/>
-              </a:rPr>
-              <a:t>c</a:t>
-            </a:r>
-            <a:endParaRPr lang="en-US" sz="900" dirty="0"/>
-          </a:p>
-        </p:txBody>
-      </p:sp>
-      <p:sp>
-        <p:nvSpPr>
-          <p:cNvPr id="58" name="Text 56"/>
-          <p:cNvSpPr/>
-          <p:nvPr/>
-        </p:nvSpPr>
-        <p:spPr>
-          <a:xfrm>
-            <a:off x="5218730" y="4572000"/>
-            <a:ext cx="603504" cy="219456"/>
-          </a:xfrm>
-          <a:prstGeom prst="rect">
-            <a:avLst/>
-          </a:prstGeom>
-          <a:noFill/>
-          <a:ln/>
-        </p:spPr>
-        <p:txBody>
-          <a:bodyPr wrap="square" lIns="0" tIns="0" rIns="0" bIns="0" rtlCol="0" anchor="t"/>
-          <a:lstStyle/>
-          <a:p>
-            <a:pPr algn="ctr" indent="0" marL="0">
-              <a:buNone/>
-            </a:pPr>
-            <a:r>
-              <a:rPr lang="en-US" sz="750" i="1" dirty="0">
-                <a:solidFill>
-                  <a:srgbClr val="94A3B8"/>
-                </a:solidFill>
-                <a:latin typeface="Calibri" pitchFamily="34" charset="0"/>
-                <a:ea typeface="Calibri" pitchFamily="34" charset="-122"/>
-                <a:cs typeface="Calibri" pitchFamily="34" charset="-120"/>
-              </a:rPr>
-              <a:t>/s/</a:t>
-            </a:r>
-            <a:endParaRPr lang="en-US" sz="750" dirty="0"/>
-          </a:p>
-        </p:txBody>
-      </p:sp>
-      <p:sp>
-        <p:nvSpPr>
-          <p:cNvPr id="59" name="Shape 57"/>
-          <p:cNvSpPr/>
-          <p:nvPr/>
-        </p:nvSpPr>
-        <p:spPr>
-          <a:xfrm>
-            <a:off x="5872111" y="4169664"/>
-            <a:ext cx="603504" cy="384048"/>
-          </a:xfrm>
-          <a:prstGeom prst="rect">
-            <a:avLst>
-              <a:gd name="adj" fmla="val 9524"/>
-            </a:avLst>
-          </a:prstGeom>
-          <a:solidFill>
-            <a:srgbClr val="FFFFFF"/>
-          </a:solidFill>
-          <a:ln w="12700">
-            <a:solidFill>
-              <a:srgbClr val="DB2777"/>
-            </a:solidFill>
-            <a:prstDash val="solid"/>
-          </a:ln>
-        </p:spPr>
-      </p:sp>
-      <p:sp>
-        <p:nvSpPr>
-          <p:cNvPr id="60" name="Text 58"/>
-          <p:cNvSpPr/>
-          <p:nvPr/>
-        </p:nvSpPr>
-        <p:spPr>
-          <a:xfrm>
-            <a:off x="5872111" y="4169664"/>
-            <a:ext cx="603504" cy="384048"/>
-          </a:xfrm>
-          <a:prstGeom prst="rect">
-            <a:avLst/>
-          </a:prstGeom>
-          <a:noFill/>
-          <a:ln/>
-        </p:spPr>
-        <p:txBody>
-          <a:bodyPr wrap="square" lIns="0" tIns="0" rIns="0" bIns="0" rtlCol="0" anchor="ctr"/>
-          <a:lstStyle/>
-          <a:p>
-            <a:pPr algn="ctr" indent="0" marL="0">
-              <a:buNone/>
-            </a:pPr>
-            <a:r>
-              <a:rPr lang="en-US" sz="900" b="1" dirty="0">
-                <a:solidFill>
-                  <a:srgbClr val="9D174D"/>
-                </a:solidFill>
-                <a:latin typeface="Trebuchet MS" pitchFamily="34" charset="0"/>
-                <a:ea typeface="Trebuchet MS" pitchFamily="34" charset="-122"/>
-                <a:cs typeface="Trebuchet MS" pitchFamily="34" charset="-120"/>
-              </a:rPr>
-              <a:t>i</a:t>
-            </a:r>
-            <a:endParaRPr lang="en-US" sz="900" dirty="0"/>
-          </a:p>
-        </p:txBody>
-      </p:sp>
-      <p:sp>
-        <p:nvSpPr>
-          <p:cNvPr id="61" name="Shape 59"/>
-          <p:cNvSpPr/>
-          <p:nvPr/>
-        </p:nvSpPr>
-        <p:spPr>
-          <a:xfrm>
-            <a:off x="6525491" y="4169664"/>
-            <a:ext cx="603504" cy="384048"/>
-          </a:xfrm>
-          <a:prstGeom prst="rect">
-            <a:avLst>
-              <a:gd name="adj" fmla="val 9524"/>
-            </a:avLst>
-          </a:prstGeom>
-          <a:solidFill>
-            <a:srgbClr val="FFFFFF"/>
-          </a:solidFill>
-          <a:ln w="12700">
-            <a:solidFill>
-              <a:srgbClr val="DB2777"/>
-            </a:solidFill>
-            <a:prstDash val="solid"/>
-          </a:ln>
-        </p:spPr>
-      </p:sp>
-      <p:sp>
-        <p:nvSpPr>
-          <p:cNvPr id="62" name="Text 60"/>
-          <p:cNvSpPr/>
-          <p:nvPr/>
-        </p:nvSpPr>
-        <p:spPr>
-          <a:xfrm>
-            <a:off x="6525491" y="4169664"/>
-            <a:ext cx="603504" cy="384048"/>
-          </a:xfrm>
-          <a:prstGeom prst="rect">
-            <a:avLst/>
-          </a:prstGeom>
-          <a:noFill/>
-          <a:ln/>
-        </p:spPr>
-        <p:txBody>
-          <a:bodyPr wrap="square" lIns="0" tIns="0" rIns="0" bIns="0" rtlCol="0" anchor="ctr"/>
-          <a:lstStyle/>
-          <a:p>
-            <a:pPr algn="ctr" indent="0" marL="0">
-              <a:buNone/>
-            </a:pPr>
-            <a:r>
-              <a:rPr lang="en-US" sz="900" b="1" dirty="0">
-                <a:solidFill>
-                  <a:srgbClr val="9D174D"/>
-                </a:solidFill>
-                <a:latin typeface="Trebuchet MS" pitchFamily="34" charset="0"/>
-                <a:ea typeface="Trebuchet MS" pitchFamily="34" charset="-122"/>
-                <a:cs typeface="Trebuchet MS" pitchFamily="34" charset="-120"/>
-              </a:rPr>
-              <a:t>t</a:t>
-            </a:r>
-            <a:endParaRPr lang="en-US" sz="900" dirty="0"/>
-          </a:p>
-        </p:txBody>
-      </p:sp>
-      <p:sp>
-        <p:nvSpPr>
-          <p:cNvPr id="63" name="Shape 61"/>
-          <p:cNvSpPr/>
-          <p:nvPr/>
-        </p:nvSpPr>
-        <p:spPr>
-          <a:xfrm>
-            <a:off x="7178871" y="4169664"/>
-            <a:ext cx="603504" cy="384048"/>
-          </a:xfrm>
-          <a:prstGeom prst="rect">
-            <a:avLst>
-              <a:gd name="adj" fmla="val 9524"/>
-            </a:avLst>
-          </a:prstGeom>
-          <a:solidFill>
-            <a:srgbClr val="FFFFFF"/>
-          </a:solidFill>
-          <a:ln w="12700">
-            <a:solidFill>
-              <a:srgbClr val="DB2777"/>
-            </a:solidFill>
-            <a:prstDash val="solid"/>
-          </a:ln>
-        </p:spPr>
-      </p:sp>
-      <p:sp>
-        <p:nvSpPr>
-          <p:cNvPr id="64" name="Text 62"/>
-          <p:cNvSpPr/>
-          <p:nvPr/>
-        </p:nvSpPr>
-        <p:spPr>
-          <a:xfrm>
-            <a:off x="7178871" y="4169664"/>
-            <a:ext cx="603504" cy="384048"/>
-          </a:xfrm>
-          <a:prstGeom prst="rect">
-            <a:avLst/>
-          </a:prstGeom>
-          <a:noFill/>
-          <a:ln/>
-        </p:spPr>
-        <p:txBody>
-          <a:bodyPr wrap="square" lIns="0" tIns="0" rIns="0" bIns="0" rtlCol="0" anchor="ctr"/>
-          <a:lstStyle/>
-          <a:p>
-            <a:pPr algn="ctr" indent="0" marL="0">
-              <a:buNone/>
-            </a:pPr>
-            <a:r>
-              <a:rPr lang="en-US" sz="900" b="1" dirty="0">
-                <a:solidFill>
-                  <a:srgbClr val="9D174D"/>
-                </a:solidFill>
-                <a:latin typeface="Trebuchet MS" pitchFamily="34" charset="0"/>
-                <a:ea typeface="Trebuchet MS" pitchFamily="34" charset="-122"/>
-                <a:cs typeface="Trebuchet MS" pitchFamily="34" charset="-120"/>
-              </a:rPr>
-              <a:t>e</a:t>
-            </a:r>
-            <a:endParaRPr lang="en-US" sz="900" dirty="0"/>
-          </a:p>
-        </p:txBody>
-      </p:sp>
-      <p:sp>
-        <p:nvSpPr>
-          <p:cNvPr id="65" name="Shape 63"/>
-          <p:cNvSpPr/>
-          <p:nvPr/>
-        </p:nvSpPr>
-        <p:spPr>
-          <a:xfrm>
-            <a:off x="7832252" y="4169664"/>
-            <a:ext cx="603504" cy="384048"/>
-          </a:xfrm>
-          <a:prstGeom prst="rect">
-            <a:avLst>
-              <a:gd name="adj" fmla="val 9524"/>
-            </a:avLst>
-          </a:prstGeom>
-          <a:solidFill>
-            <a:srgbClr val="FFFFFF"/>
-          </a:solidFill>
-          <a:ln w="12700">
-            <a:solidFill>
-              <a:srgbClr val="DB2777"/>
-            </a:solidFill>
-            <a:prstDash val="solid"/>
-          </a:ln>
-        </p:spPr>
-      </p:sp>
-      <p:sp>
-        <p:nvSpPr>
-          <p:cNvPr id="66" name="Text 64"/>
-          <p:cNvSpPr/>
-          <p:nvPr/>
-        </p:nvSpPr>
-        <p:spPr>
-          <a:xfrm>
-            <a:off x="7832252" y="4169664"/>
-            <a:ext cx="603504" cy="384048"/>
-          </a:xfrm>
-          <a:prstGeom prst="rect">
-            <a:avLst/>
-          </a:prstGeom>
-          <a:noFill/>
-          <a:ln/>
-        </p:spPr>
-        <p:txBody>
-          <a:bodyPr wrap="square" lIns="0" tIns="0" rIns="0" bIns="0" rtlCol="0" anchor="ctr"/>
-          <a:lstStyle/>
-          <a:p>
-            <a:pPr algn="ctr" indent="0" marL="0">
-              <a:buNone/>
-            </a:pPr>
-            <a:r>
-              <a:rPr lang="en-US" sz="900" b="1" dirty="0">
-                <a:solidFill>
-                  <a:srgbClr val="9D174D"/>
-                </a:solidFill>
-                <a:latin typeface="Trebuchet MS" pitchFamily="34" charset="0"/>
-                <a:ea typeface="Trebuchet MS" pitchFamily="34" charset="-122"/>
-                <a:cs typeface="Trebuchet MS" pitchFamily="34" charset="-120"/>
-              </a:rPr>
-              <a:t>d</a:t>
+              <a:t>ng</a:t>
             </a:r>
             <a:endParaRPr lang="en-US" sz="900" dirty="0"/>
           </a:p>
@@ -30739,7 +30058,7 @@
                 <a:ea typeface="Calibri" pitchFamily="34" charset="-122"/>
                 <a:cs typeface="Calibri" pitchFamily="34" charset="-120"/>
               </a:rPr>
-              <a:t>Word Labs  •  wordlabs.app  •  Root: 'excite' = to stir up or rouse</a:t>
+              <a:t>Word Labs  •  wordlabs.app  •  Root: 'excite' = to stir up or arouse</a:t>
             </a:r>
             <a:endParaRPr lang="en-US" sz="800" dirty="0"/>
           </a:p>
@@ -30878,7 +30197,7 @@
                 <a:ea typeface="Trebuchet MS" pitchFamily="34" charset="-122"/>
                 <a:cs typeface="Trebuchet MS" pitchFamily="34" charset="-120"/>
               </a:rPr>
-              <a:t>excitable</a:t>
+              <a:t>overexcited</a:t>
             </a:r>
             <a:endParaRPr lang="en-US" sz="2800" dirty="0"/>
           </a:p>
@@ -31566,7 +30885,7 @@
                 <a:ea typeface="Calibri" pitchFamily="34" charset="-122"/>
                 <a:cs typeface="Calibri" pitchFamily="34" charset="-120"/>
               </a:rPr>
-              <a:t>Word Labs  •  wordlabs.app  •  Root: 'excite' = to stir up or rouse</a:t>
+              <a:t>Word Labs  •  wordlabs.app  •  Root: 'excite' = to stir up or arouse</a:t>
             </a:r>
             <a:endParaRPr lang="en-US" sz="800" dirty="0"/>
           </a:p>
@@ -31705,7 +31024,7 @@
                 <a:ea typeface="Trebuchet MS" pitchFamily="34" charset="-122"/>
                 <a:cs typeface="Trebuchet MS" pitchFamily="34" charset="-120"/>
               </a:rPr>
-              <a:t>excitable</a:t>
+              <a:t>overexcited</a:t>
             </a:r>
             <a:endParaRPr lang="en-US" sz="2800" dirty="0"/>
           </a:p>
@@ -31785,7 +31104,7 @@
         </p:nvSpPr>
         <p:spPr>
           <a:xfrm>
-            <a:off x="2938272" y="2258568"/>
+            <a:off x="2221992" y="2258568"/>
             <a:ext cx="1828800" cy="292608"/>
           </a:xfrm>
           <a:prstGeom prst="rect">
@@ -31794,11 +31113,11 @@
             </a:avLst>
           </a:prstGeom>
           <a:solidFill>
-            <a:srgbClr val="CCFBF1"/>
+            <a:srgbClr val="DDD6FE"/>
           </a:solidFill>
           <a:ln w="19050">
             <a:solidFill>
-              <a:srgbClr val="0D9488"/>
+              <a:srgbClr val="7C3AED"/>
             </a:solidFill>
             <a:prstDash val="solid"/>
           </a:ln>
@@ -31819,7 +31138,7 @@
         </p:nvSpPr>
         <p:spPr>
           <a:xfrm>
-            <a:off x="2938272" y="2258568"/>
+            <a:off x="2221992" y="2258568"/>
             <a:ext cx="1828800" cy="292608"/>
           </a:xfrm>
           <a:prstGeom prst="rect">
@@ -31838,13 +31157,13 @@
             <a:r>
               <a:rPr lang="en-US" sz="1300" b="1" dirty="0">
                 <a:solidFill>
-                  <a:srgbClr val="0F766E"/>
+                  <a:srgbClr val="4C1D95"/>
                 </a:solidFill>
                 <a:latin typeface="Trebuchet MS" pitchFamily="34" charset="0"/>
                 <a:ea typeface="Trebuchet MS" pitchFamily="34" charset="-122"/>
                 <a:cs typeface="Trebuchet MS" pitchFamily="34" charset="-120"/>
               </a:rPr>
-              <a:t>excite</a:t>
+              <a:t>over</a:t>
             </a:r>
             <a:endParaRPr lang="en-US" sz="1300" dirty="0"/>
           </a:p>
@@ -31858,7 +31177,7 @@
         </p:nvSpPr>
         <p:spPr>
           <a:xfrm>
-            <a:off x="2938272" y="2569464"/>
+            <a:off x="2221992" y="2569464"/>
             <a:ext cx="1828800" cy="201168"/>
           </a:xfrm>
           <a:prstGeom prst="rect">
@@ -31883,7 +31202,7 @@
                 <a:ea typeface="Calibri" pitchFamily="34" charset="-122"/>
                 <a:cs typeface="Calibri" pitchFamily="34" charset="-120"/>
               </a:rPr>
-              <a:t>to stir up or rouse</a:t>
+              <a:t>too much; above</a:t>
             </a:r>
             <a:endParaRPr lang="en-US" sz="850" dirty="0"/>
           </a:p>
@@ -31897,7 +31216,7 @@
         </p:nvSpPr>
         <p:spPr>
           <a:xfrm>
-            <a:off x="5803392" y="2258568"/>
+            <a:off x="4370832" y="2258568"/>
             <a:ext cx="1828800" cy="292608"/>
           </a:xfrm>
           <a:prstGeom prst="rect">
@@ -31906,11 +31225,11 @@
             </a:avLst>
           </a:prstGeom>
           <a:solidFill>
-            <a:srgbClr val="FCE7F3"/>
+            <a:srgbClr val="CCFBF1"/>
           </a:solidFill>
           <a:ln w="19050">
             <a:solidFill>
-              <a:srgbClr val="DB2777"/>
+              <a:srgbClr val="0D9488"/>
             </a:solidFill>
             <a:prstDash val="solid"/>
           </a:ln>
@@ -31931,7 +31250,7 @@
         </p:nvSpPr>
         <p:spPr>
           <a:xfrm>
-            <a:off x="5803392" y="2258568"/>
+            <a:off x="4370832" y="2258568"/>
             <a:ext cx="1828800" cy="292608"/>
           </a:xfrm>
           <a:prstGeom prst="rect">
@@ -31950,13 +31269,13 @@
             <a:r>
               <a:rPr lang="en-US" sz="1300" b="1" dirty="0">
                 <a:solidFill>
-                  <a:srgbClr val="9D174D"/>
+                  <a:srgbClr val="0F766E"/>
                 </a:solidFill>
                 <a:latin typeface="Trebuchet MS" pitchFamily="34" charset="0"/>
                 <a:ea typeface="Trebuchet MS" pitchFamily="34" charset="-122"/>
                 <a:cs typeface="Trebuchet MS" pitchFamily="34" charset="-120"/>
               </a:rPr>
-              <a:t>able</a:t>
+              <a:t>excite</a:t>
             </a:r>
             <a:endParaRPr lang="en-US" sz="1300" dirty="0"/>
           </a:p>
@@ -31970,7 +31289,7 @@
         </p:nvSpPr>
         <p:spPr>
           <a:xfrm>
-            <a:off x="5803392" y="2569464"/>
+            <a:off x="4370832" y="2569464"/>
             <a:ext cx="1828800" cy="201168"/>
           </a:xfrm>
           <a:prstGeom prst="rect">
@@ -31995,7 +31314,7 @@
                 <a:ea typeface="Calibri" pitchFamily="34" charset="-122"/>
                 <a:cs typeface="Calibri" pitchFamily="34" charset="-120"/>
               </a:rPr>
-              <a:t>able to be or capable of</a:t>
+              <a:t>to stir up or arouse</a:t>
             </a:r>
             <a:endParaRPr lang="en-US" sz="850" dirty="0"/>
           </a:p>
@@ -32003,14 +31322,87 @@
       </p:sp>
       <p:sp>
         <p:nvSpPr>
-          <p:cNvPr id="22" name="Text 20"/>
-          <p:cNvSpPr/>
-          <p:nvPr/>
-        </p:nvSpPr>
-        <p:spPr>
-          <a:xfrm>
-            <a:off x="5803392" y="2752344"/>
-            <a:ext cx="1828800" cy="182880"/>
+          <p:cNvPr id="22" name="Shape 20"/>
+          <p:cNvSpPr/>
+          <p:nvPr/>
+        </p:nvSpPr>
+        <p:spPr>
+          <a:xfrm>
+            <a:off x="6519672" y="2258568"/>
+            <a:ext cx="1828800" cy="292608"/>
+          </a:xfrm>
+          <a:prstGeom prst="rect">
+            <a:avLst>
+              <a:gd name="adj" fmla="val 25000"/>
+            </a:avLst>
+          </a:prstGeom>
+          <a:solidFill>
+            <a:srgbClr val="FCE7F3"/>
+          </a:solidFill>
+          <a:ln w="19050">
+            <a:solidFill>
+              <a:srgbClr val="DB2777"/>
+            </a:solidFill>
+            <a:prstDash val="solid"/>
+          </a:ln>
+          <a:effectLst>
+            <a:outerShdw sx="100000" sy="100000" kx="0" ky="0" algn="bl" rotWithShape="0" blurRad="101600" dist="38100" dir="8100000">
+              <a:srgbClr val="000000">
+                <a:alpha val="12000"/>
+              </a:srgbClr>
+            </a:outerShdw>
+          </a:effectLst>
+        </p:spPr>
+      </p:sp>
+      <p:sp>
+        <p:nvSpPr>
+          <p:cNvPr id="23" name="Text 21"/>
+          <p:cNvSpPr/>
+          <p:nvPr/>
+        </p:nvSpPr>
+        <p:spPr>
+          <a:xfrm>
+            <a:off x="6519672" y="2258568"/>
+            <a:ext cx="1828800" cy="292608"/>
+          </a:xfrm>
+          <a:prstGeom prst="rect">
+            <a:avLst/>
+          </a:prstGeom>
+          <a:noFill/>
+          <a:ln/>
+        </p:spPr>
+        <p:txBody>
+          <a:bodyPr wrap="square" lIns="0" tIns="0" rIns="0" bIns="0" rtlCol="0" anchor="ctr"/>
+          <a:lstStyle/>
+          <a:p>
+            <a:pPr algn="ctr" indent="0" marL="0">
+              <a:buNone/>
+            </a:pPr>
+            <a:r>
+              <a:rPr lang="en-US" sz="1300" b="1" dirty="0">
+                <a:solidFill>
+                  <a:srgbClr val="9D174D"/>
+                </a:solidFill>
+                <a:latin typeface="Trebuchet MS" pitchFamily="34" charset="0"/>
+                <a:ea typeface="Trebuchet MS" pitchFamily="34" charset="-122"/>
+                <a:cs typeface="Trebuchet MS" pitchFamily="34" charset="-120"/>
+              </a:rPr>
+              <a:t>d</a:t>
+            </a:r>
+            <a:endParaRPr lang="en-US" sz="1300" dirty="0"/>
+          </a:p>
+        </p:txBody>
+      </p:sp>
+      <p:sp>
+        <p:nvSpPr>
+          <p:cNvPr id="24" name="Text 22"/>
+          <p:cNvSpPr/>
+          <p:nvPr/>
+        </p:nvSpPr>
+        <p:spPr>
+          <a:xfrm>
+            <a:off x="6519672" y="2569464"/>
+            <a:ext cx="1828800" cy="201168"/>
           </a:xfrm>
           <a:prstGeom prst="rect">
             <a:avLst/>
@@ -32026,15 +31418,54 @@
               <a:buNone/>
             </a:pPr>
             <a:r>
-              <a:rPr lang="en-US" sz="700" i="1" dirty="0">
-                <a:solidFill>
-                  <a:srgbClr val="94A3B8"/>
+              <a:rPr lang="en-US" sz="850" dirty="0">
+                <a:solidFill>
+                  <a:srgbClr val="475569"/>
                 </a:solidFill>
                 <a:latin typeface="Calibri" pitchFamily="34" charset="0"/>
                 <a:ea typeface="Calibri" pitchFamily="34" charset="-122"/>
                 <a:cs typeface="Calibri" pitchFamily="34" charset="-120"/>
               </a:rPr>
-              <a:t>'e' dropped before vowel suffix</a:t>
+              <a:t>past or completed action</a:t>
+            </a:r>
+            <a:endParaRPr lang="en-US" sz="850" dirty="0"/>
+          </a:p>
+        </p:txBody>
+      </p:sp>
+      <p:sp>
+        <p:nvSpPr>
+          <p:cNvPr id="25" name="Text 23"/>
+          <p:cNvSpPr/>
+          <p:nvPr/>
+        </p:nvSpPr>
+        <p:spPr>
+          <a:xfrm>
+            <a:off x="6519672" y="2752344"/>
+            <a:ext cx="1828800" cy="182880"/>
+          </a:xfrm>
+          <a:prstGeom prst="rect">
+            <a:avLst/>
+          </a:prstGeom>
+          <a:noFill/>
+          <a:ln/>
+        </p:spPr>
+        <p:txBody>
+          <a:bodyPr wrap="square" lIns="0" tIns="0" rIns="0" bIns="0" rtlCol="0" anchor="t"/>
+          <a:lstStyle/>
+          <a:p>
+            <a:pPr algn="ctr" indent="0" marL="0">
+              <a:buNone/>
+            </a:pPr>
+            <a:r>
+              <a:rPr lang="en-US" sz="700" i="1" dirty="0">
+                <a:solidFill>
+                  <a:srgbClr val="94A3B8"/>
+                </a:solidFill>
+                <a:latin typeface="Calibri" pitchFamily="34" charset="0"/>
+                <a:ea typeface="Calibri" pitchFamily="34" charset="-122"/>
+                <a:cs typeface="Calibri" pitchFamily="34" charset="-120"/>
+              </a:rPr>
+              <a:t>'e' kept as part of base before consonant suffix</a:t>
             </a:r>
             <a:endParaRPr lang="en-US" sz="700" dirty="0"/>
           </a:p>
@@ -32042,7 +31473,7 @@
       </p:sp>
       <p:sp>
         <p:nvSpPr>
-          <p:cNvPr id="23" name="Shape 21"/>
+          <p:cNvPr id="26" name="Shape 24"/>
           <p:cNvSpPr/>
           <p:nvPr/>
         </p:nvSpPr>
@@ -32069,7 +31500,7 @@
       </p:sp>
       <p:sp>
         <p:nvSpPr>
-          <p:cNvPr id="24" name="Text 22"/>
+          <p:cNvPr id="27" name="Text 25"/>
           <p:cNvSpPr/>
           <p:nvPr/>
         </p:nvSpPr>
@@ -32108,7 +31539,7 @@
       </p:sp>
       <p:sp>
         <p:nvSpPr>
-          <p:cNvPr id="25" name="Shape 23"/>
+          <p:cNvPr id="28" name="Shape 26"/>
           <p:cNvSpPr/>
           <p:nvPr/>
         </p:nvSpPr>
@@ -32135,7 +31566,7 @@
       </p:sp>
       <p:sp>
         <p:nvSpPr>
-          <p:cNvPr id="26" name="Text 24"/>
+          <p:cNvPr id="29" name="Text 27"/>
           <p:cNvSpPr/>
           <p:nvPr/>
         </p:nvSpPr>
@@ -32174,7 +31605,7 @@
       </p:sp>
       <p:sp>
         <p:nvSpPr>
-          <p:cNvPr id="27" name="Shape 25"/>
+          <p:cNvPr id="30" name="Shape 28"/>
           <p:cNvSpPr/>
           <p:nvPr/>
         </p:nvSpPr>
@@ -32201,7 +31632,7 @@
       </p:sp>
       <p:sp>
         <p:nvSpPr>
-          <p:cNvPr id="28" name="Text 26"/>
+          <p:cNvPr id="31" name="Text 29"/>
           <p:cNvSpPr/>
           <p:nvPr/>
         </p:nvSpPr>
@@ -32240,7 +31671,7 @@
       </p:sp>
       <p:sp>
         <p:nvSpPr>
-          <p:cNvPr id="29" name="Shape 27"/>
+          <p:cNvPr id="32" name="Shape 30"/>
           <p:cNvSpPr/>
           <p:nvPr/>
         </p:nvSpPr>
@@ -32267,7 +31698,7 @@
       </p:sp>
       <p:sp>
         <p:nvSpPr>
-          <p:cNvPr id="30" name="Text 28"/>
+          <p:cNvPr id="33" name="Text 31"/>
           <p:cNvSpPr/>
           <p:nvPr/>
         </p:nvSpPr>
@@ -32590,7 +32021,7 @@
                 <a:ea typeface="Calibri" pitchFamily="34" charset="-122"/>
                 <a:cs typeface="Calibri" pitchFamily="34" charset="-120"/>
               </a:rPr>
-              <a:t>Word Labs  •  wordlabs.app  •  Root: 'excite' = to stir up or rouse</a:t>
+              <a:t>Word Labs  •  wordlabs.app  •  Root: 'excite' = to stir up or arouse</a:t>
             </a:r>
             <a:endParaRPr lang="en-US" sz="800" dirty="0"/>
           </a:p>
@@ -32729,7 +32160,7 @@
                 <a:ea typeface="Trebuchet MS" pitchFamily="34" charset="-122"/>
                 <a:cs typeface="Trebuchet MS" pitchFamily="34" charset="-120"/>
               </a:rPr>
-              <a:t>excitable</a:t>
+              <a:t>overexcited</a:t>
             </a:r>
             <a:endParaRPr lang="en-US" sz="2800" dirty="0"/>
           </a:p>
@@ -32809,7 +32240,7 @@
         </p:nvSpPr>
         <p:spPr>
           <a:xfrm>
-            <a:off x="2938272" y="2258568"/>
+            <a:off x="2221992" y="2258568"/>
             <a:ext cx="1828800" cy="292608"/>
           </a:xfrm>
           <a:prstGeom prst="rect">
@@ -32818,11 +32249,11 @@
             </a:avLst>
           </a:prstGeom>
           <a:solidFill>
-            <a:srgbClr val="CCFBF1"/>
+            <a:srgbClr val="DDD6FE"/>
           </a:solidFill>
           <a:ln w="19050">
             <a:solidFill>
-              <a:srgbClr val="0D9488"/>
+              <a:srgbClr val="7C3AED"/>
             </a:solidFill>
             <a:prstDash val="solid"/>
           </a:ln>
@@ -32843,7 +32274,7 @@
         </p:nvSpPr>
         <p:spPr>
           <a:xfrm>
-            <a:off x="2938272" y="2258568"/>
+            <a:off x="2221992" y="2258568"/>
             <a:ext cx="1828800" cy="292608"/>
           </a:xfrm>
           <a:prstGeom prst="rect">
@@ -32862,13 +32293,13 @@
             <a:r>
               <a:rPr lang="en-US" sz="1300" b="1" dirty="0">
                 <a:solidFill>
-                  <a:srgbClr val="0F766E"/>
+                  <a:srgbClr val="4C1D95"/>
                 </a:solidFill>
                 <a:latin typeface="Trebuchet MS" pitchFamily="34" charset="0"/>
                 <a:ea typeface="Trebuchet MS" pitchFamily="34" charset="-122"/>
                 <a:cs typeface="Trebuchet MS" pitchFamily="34" charset="-120"/>
               </a:rPr>
-              <a:t>excite</a:t>
+              <a:t>over</a:t>
             </a:r>
             <a:endParaRPr lang="en-US" sz="1300" dirty="0"/>
           </a:p>
@@ -32882,7 +32313,7 @@
         </p:nvSpPr>
         <p:spPr>
           <a:xfrm>
-            <a:off x="2938272" y="2569464"/>
+            <a:off x="2221992" y="2569464"/>
             <a:ext cx="1828800" cy="201168"/>
           </a:xfrm>
           <a:prstGeom prst="rect">
@@ -32907,7 +32338,7 @@
                 <a:ea typeface="Calibri" pitchFamily="34" charset="-122"/>
                 <a:cs typeface="Calibri" pitchFamily="34" charset="-120"/>
               </a:rPr>
-              <a:t>to stir up or rouse</a:t>
+              <a:t>too much; above</a:t>
             </a:r>
             <a:endParaRPr lang="en-US" sz="850" dirty="0"/>
           </a:p>
@@ -32921,7 +32352,7 @@
         </p:nvSpPr>
         <p:spPr>
           <a:xfrm>
-            <a:off x="5803392" y="2258568"/>
+            <a:off x="4370832" y="2258568"/>
             <a:ext cx="1828800" cy="292608"/>
           </a:xfrm>
           <a:prstGeom prst="rect">
@@ -32930,11 +32361,11 @@
             </a:avLst>
           </a:prstGeom>
           <a:solidFill>
-            <a:srgbClr val="FCE7F3"/>
+            <a:srgbClr val="CCFBF1"/>
           </a:solidFill>
           <a:ln w="19050">
             <a:solidFill>
-              <a:srgbClr val="DB2777"/>
+              <a:srgbClr val="0D9488"/>
             </a:solidFill>
             <a:prstDash val="solid"/>
           </a:ln>
@@ -32955,7 +32386,7 @@
         </p:nvSpPr>
         <p:spPr>
           <a:xfrm>
-            <a:off x="5803392" y="2258568"/>
+            <a:off x="4370832" y="2258568"/>
             <a:ext cx="1828800" cy="292608"/>
           </a:xfrm>
           <a:prstGeom prst="rect">
@@ -32974,13 +32405,13 @@
             <a:r>
               <a:rPr lang="en-US" sz="1300" b="1" dirty="0">
                 <a:solidFill>
-                  <a:srgbClr val="9D174D"/>
+                  <a:srgbClr val="0F766E"/>
                 </a:solidFill>
                 <a:latin typeface="Trebuchet MS" pitchFamily="34" charset="0"/>
                 <a:ea typeface="Trebuchet MS" pitchFamily="34" charset="-122"/>
                 <a:cs typeface="Trebuchet MS" pitchFamily="34" charset="-120"/>
               </a:rPr>
-              <a:t>able</a:t>
+              <a:t>excite</a:t>
             </a:r>
             <a:endParaRPr lang="en-US" sz="1300" dirty="0"/>
           </a:p>
@@ -32994,7 +32425,7 @@
         </p:nvSpPr>
         <p:spPr>
           <a:xfrm>
-            <a:off x="5803392" y="2569464"/>
+            <a:off x="4370832" y="2569464"/>
             <a:ext cx="1828800" cy="201168"/>
           </a:xfrm>
           <a:prstGeom prst="rect">
@@ -33019,7 +32450,7 @@
                 <a:ea typeface="Calibri" pitchFamily="34" charset="-122"/>
                 <a:cs typeface="Calibri" pitchFamily="34" charset="-120"/>
               </a:rPr>
-              <a:t>able to be or capable of</a:t>
+              <a:t>to stir up or arouse</a:t>
             </a:r>
             <a:endParaRPr lang="en-US" sz="850" dirty="0"/>
           </a:p>
@@ -33027,14 +32458,87 @@
       </p:sp>
       <p:sp>
         <p:nvSpPr>
-          <p:cNvPr id="22" name="Text 20"/>
-          <p:cNvSpPr/>
-          <p:nvPr/>
-        </p:nvSpPr>
-        <p:spPr>
-          <a:xfrm>
-            <a:off x="5803392" y="2752344"/>
-            <a:ext cx="1828800" cy="182880"/>
+          <p:cNvPr id="22" name="Shape 20"/>
+          <p:cNvSpPr/>
+          <p:nvPr/>
+        </p:nvSpPr>
+        <p:spPr>
+          <a:xfrm>
+            <a:off x="6519672" y="2258568"/>
+            <a:ext cx="1828800" cy="292608"/>
+          </a:xfrm>
+          <a:prstGeom prst="rect">
+            <a:avLst>
+              <a:gd name="adj" fmla="val 25000"/>
+            </a:avLst>
+          </a:prstGeom>
+          <a:solidFill>
+            <a:srgbClr val="FCE7F3"/>
+          </a:solidFill>
+          <a:ln w="19050">
+            <a:solidFill>
+              <a:srgbClr val="DB2777"/>
+            </a:solidFill>
+            <a:prstDash val="solid"/>
+          </a:ln>
+          <a:effectLst>
+            <a:outerShdw sx="100000" sy="100000" kx="0" ky="0" algn="bl" rotWithShape="0" blurRad="101600" dist="38100" dir="8100000">
+              <a:srgbClr val="000000">
+                <a:alpha val="12000"/>
+              </a:srgbClr>
+            </a:outerShdw>
+          </a:effectLst>
+        </p:spPr>
+      </p:sp>
+      <p:sp>
+        <p:nvSpPr>
+          <p:cNvPr id="23" name="Text 21"/>
+          <p:cNvSpPr/>
+          <p:nvPr/>
+        </p:nvSpPr>
+        <p:spPr>
+          <a:xfrm>
+            <a:off x="6519672" y="2258568"/>
+            <a:ext cx="1828800" cy="292608"/>
+          </a:xfrm>
+          <a:prstGeom prst="rect">
+            <a:avLst/>
+          </a:prstGeom>
+          <a:noFill/>
+          <a:ln/>
+        </p:spPr>
+        <p:txBody>
+          <a:bodyPr wrap="square" lIns="0" tIns="0" rIns="0" bIns="0" rtlCol="0" anchor="ctr"/>
+          <a:lstStyle/>
+          <a:p>
+            <a:pPr algn="ctr" indent="0" marL="0">
+              <a:buNone/>
+            </a:pPr>
+            <a:r>
+              <a:rPr lang="en-US" sz="1300" b="1" dirty="0">
+                <a:solidFill>
+                  <a:srgbClr val="9D174D"/>
+                </a:solidFill>
+                <a:latin typeface="Trebuchet MS" pitchFamily="34" charset="0"/>
+                <a:ea typeface="Trebuchet MS" pitchFamily="34" charset="-122"/>
+                <a:cs typeface="Trebuchet MS" pitchFamily="34" charset="-120"/>
+              </a:rPr>
+              <a:t>d</a:t>
+            </a:r>
+            <a:endParaRPr lang="en-US" sz="1300" dirty="0"/>
+          </a:p>
+        </p:txBody>
+      </p:sp>
+      <p:sp>
+        <p:nvSpPr>
+          <p:cNvPr id="24" name="Text 22"/>
+          <p:cNvSpPr/>
+          <p:nvPr/>
+        </p:nvSpPr>
+        <p:spPr>
+          <a:xfrm>
+            <a:off x="6519672" y="2569464"/>
+            <a:ext cx="1828800" cy="201168"/>
           </a:xfrm>
           <a:prstGeom prst="rect">
             <a:avLst/>
@@ -33050,15 +32554,54 @@
               <a:buNone/>
             </a:pPr>
             <a:r>
-              <a:rPr lang="en-US" sz="700" i="1" dirty="0">
-                <a:solidFill>
-                  <a:srgbClr val="94A3B8"/>
+              <a:rPr lang="en-US" sz="850" dirty="0">
+                <a:solidFill>
+                  <a:srgbClr val="475569"/>
                 </a:solidFill>
                 <a:latin typeface="Calibri" pitchFamily="34" charset="0"/>
                 <a:ea typeface="Calibri" pitchFamily="34" charset="-122"/>
                 <a:cs typeface="Calibri" pitchFamily="34" charset="-120"/>
               </a:rPr>
-              <a:t>'e' dropped before vowel suffix</a:t>
+              <a:t>past or completed action</a:t>
+            </a:r>
+            <a:endParaRPr lang="en-US" sz="850" dirty="0"/>
+          </a:p>
+        </p:txBody>
+      </p:sp>
+      <p:sp>
+        <p:nvSpPr>
+          <p:cNvPr id="25" name="Text 23"/>
+          <p:cNvSpPr/>
+          <p:nvPr/>
+        </p:nvSpPr>
+        <p:spPr>
+          <a:xfrm>
+            <a:off x="6519672" y="2752344"/>
+            <a:ext cx="1828800" cy="182880"/>
+          </a:xfrm>
+          <a:prstGeom prst="rect">
+            <a:avLst/>
+          </a:prstGeom>
+          <a:noFill/>
+          <a:ln/>
+        </p:spPr>
+        <p:txBody>
+          <a:bodyPr wrap="square" lIns="0" tIns="0" rIns="0" bIns="0" rtlCol="0" anchor="t"/>
+          <a:lstStyle/>
+          <a:p>
+            <a:pPr algn="ctr" indent="0" marL="0">
+              <a:buNone/>
+            </a:pPr>
+            <a:r>
+              <a:rPr lang="en-US" sz="700" i="1" dirty="0">
+                <a:solidFill>
+                  <a:srgbClr val="94A3B8"/>
+                </a:solidFill>
+                <a:latin typeface="Calibri" pitchFamily="34" charset="0"/>
+                <a:ea typeface="Calibri" pitchFamily="34" charset="-122"/>
+                <a:cs typeface="Calibri" pitchFamily="34" charset="-120"/>
+              </a:rPr>
+              <a:t>'e' kept as part of base before consonant suffix</a:t>
             </a:r>
             <a:endParaRPr lang="en-US" sz="700" dirty="0"/>
           </a:p>
@@ -33066,7 +32609,7 @@
       </p:sp>
       <p:sp>
         <p:nvSpPr>
-          <p:cNvPr id="23" name="Shape 21"/>
+          <p:cNvPr id="26" name="Shape 24"/>
           <p:cNvSpPr/>
           <p:nvPr/>
         </p:nvSpPr>
@@ -33093,7 +32636,7 @@
       </p:sp>
       <p:sp>
         <p:nvSpPr>
-          <p:cNvPr id="24" name="Text 22"/>
+          <p:cNvPr id="27" name="Text 25"/>
           <p:cNvSpPr/>
           <p:nvPr/>
         </p:nvSpPr>
@@ -33132,7 +32675,7 @@
       </p:sp>
       <p:sp>
         <p:nvSpPr>
-          <p:cNvPr id="25" name="Shape 23"/>
+          <p:cNvPr id="28" name="Shape 26"/>
           <p:cNvSpPr/>
           <p:nvPr/>
         </p:nvSpPr>
@@ -33159,14 +32702,14 @@
       </p:sp>
       <p:sp>
         <p:nvSpPr>
-          <p:cNvPr id="26" name="Shape 24"/>
-          <p:cNvSpPr/>
-          <p:nvPr/>
-        </p:nvSpPr>
-        <p:spPr>
-          <a:xfrm>
-            <a:off x="1975104" y="3364992"/>
-            <a:ext cx="1554480" cy="475488"/>
+          <p:cNvPr id="29" name="Shape 27"/>
+          <p:cNvSpPr/>
+          <p:nvPr/>
+        </p:nvSpPr>
+        <p:spPr>
+          <a:xfrm>
+            <a:off x="1978152" y="3364992"/>
+            <a:ext cx="1225296" cy="475488"/>
           </a:xfrm>
           <a:prstGeom prst="rect">
             <a:avLst>
@@ -33186,14 +32729,14 @@
       </p:sp>
       <p:sp>
         <p:nvSpPr>
-          <p:cNvPr id="27" name="Text 25"/>
-          <p:cNvSpPr/>
-          <p:nvPr/>
-        </p:nvSpPr>
-        <p:spPr>
-          <a:xfrm>
-            <a:off x="1975104" y="3364992"/>
-            <a:ext cx="1554480" cy="475488"/>
+          <p:cNvPr id="30" name="Text 28"/>
+          <p:cNvSpPr/>
+          <p:nvPr/>
+        </p:nvSpPr>
+        <p:spPr>
+          <a:xfrm>
+            <a:off x="1978152" y="3364992"/>
+            <a:ext cx="1225296" cy="475488"/>
           </a:xfrm>
           <a:prstGeom prst="rect">
             <a:avLst/>
@@ -33217,7 +32760,7 @@
                 <a:ea typeface="Trebuchet MS" pitchFamily="34" charset="-122"/>
                 <a:cs typeface="Trebuchet MS" pitchFamily="34" charset="-120"/>
               </a:rPr>
-              <a:t>ex</a:t>
+              <a:t>o</a:t>
             </a:r>
             <a:endParaRPr lang="en-US" sz="1400" dirty="0"/>
           </a:p>
@@ -33225,14 +32768,14 @@
       </p:sp>
       <p:sp>
         <p:nvSpPr>
-          <p:cNvPr id="28" name="Text 26"/>
-          <p:cNvSpPr/>
-          <p:nvPr/>
-        </p:nvSpPr>
-        <p:spPr>
-          <a:xfrm>
-            <a:off x="3529584" y="3364992"/>
-            <a:ext cx="73152" cy="475488"/>
+          <p:cNvPr id="31" name="Text 29"/>
+          <p:cNvSpPr/>
+          <p:nvPr/>
+        </p:nvSpPr>
+        <p:spPr>
+          <a:xfrm>
+            <a:off x="3203448" y="3364992"/>
+            <a:ext cx="76200" cy="475488"/>
           </a:xfrm>
           <a:prstGeom prst="rect">
             <a:avLst/>
@@ -33264,14 +32807,14 @@
       </p:sp>
       <p:sp>
         <p:nvSpPr>
-          <p:cNvPr id="29" name="Shape 27"/>
-          <p:cNvSpPr/>
-          <p:nvPr/>
-        </p:nvSpPr>
-        <p:spPr>
-          <a:xfrm>
-            <a:off x="3602736" y="3364992"/>
-            <a:ext cx="1554480" cy="475488"/>
+          <p:cNvPr id="32" name="Shape 30"/>
+          <p:cNvSpPr/>
+          <p:nvPr/>
+        </p:nvSpPr>
+        <p:spPr>
+          <a:xfrm>
+            <a:off x="3279648" y="3364992"/>
+            <a:ext cx="1225296" cy="475488"/>
           </a:xfrm>
           <a:prstGeom prst="rect">
             <a:avLst>
@@ -33291,14 +32834,14 @@
       </p:sp>
       <p:sp>
         <p:nvSpPr>
-          <p:cNvPr id="30" name="Text 28"/>
-          <p:cNvSpPr/>
-          <p:nvPr/>
-        </p:nvSpPr>
-        <p:spPr>
-          <a:xfrm>
-            <a:off x="3602736" y="3364992"/>
-            <a:ext cx="1554480" cy="475488"/>
+          <p:cNvPr id="33" name="Text 31"/>
+          <p:cNvSpPr/>
+          <p:nvPr/>
+        </p:nvSpPr>
+        <p:spPr>
+          <a:xfrm>
+            <a:off x="3279648" y="3364992"/>
+            <a:ext cx="1225296" cy="475488"/>
           </a:xfrm>
           <a:prstGeom prst="rect">
             <a:avLst/>
@@ -33322,7 +32865,7 @@
                 <a:ea typeface="Trebuchet MS" pitchFamily="34" charset="-122"/>
                 <a:cs typeface="Trebuchet MS" pitchFamily="34" charset="-120"/>
               </a:rPr>
-              <a:t>ci</a:t>
+              <a:t>ver</a:t>
             </a:r>
             <a:endParaRPr lang="en-US" sz="1400" dirty="0"/>
           </a:p>
@@ -33330,14 +32873,14 @@
       </p:sp>
       <p:sp>
         <p:nvSpPr>
-          <p:cNvPr id="31" name="Text 29"/>
-          <p:cNvSpPr/>
-          <p:nvPr/>
-        </p:nvSpPr>
-        <p:spPr>
-          <a:xfrm>
-            <a:off x="5157216" y="3364992"/>
-            <a:ext cx="73152" cy="475488"/>
+          <p:cNvPr id="34" name="Text 32"/>
+          <p:cNvSpPr/>
+          <p:nvPr/>
+        </p:nvSpPr>
+        <p:spPr>
+          <a:xfrm>
+            <a:off x="4504944" y="3364992"/>
+            <a:ext cx="76200" cy="475488"/>
           </a:xfrm>
           <a:prstGeom prst="rect">
             <a:avLst/>
@@ -33369,14 +32912,14 @@
       </p:sp>
       <p:sp>
         <p:nvSpPr>
-          <p:cNvPr id="32" name="Shape 30"/>
-          <p:cNvSpPr/>
-          <p:nvPr/>
-        </p:nvSpPr>
-        <p:spPr>
-          <a:xfrm>
-            <a:off x="5230368" y="3364992"/>
-            <a:ext cx="1554480" cy="475488"/>
+          <p:cNvPr id="35" name="Shape 33"/>
+          <p:cNvSpPr/>
+          <p:nvPr/>
+        </p:nvSpPr>
+        <p:spPr>
+          <a:xfrm>
+            <a:off x="4581144" y="3364992"/>
+            <a:ext cx="1225296" cy="475488"/>
           </a:xfrm>
           <a:prstGeom prst="rect">
             <a:avLst>
@@ -33396,14 +32939,14 @@
       </p:sp>
       <p:sp>
         <p:nvSpPr>
-          <p:cNvPr id="33" name="Text 31"/>
-          <p:cNvSpPr/>
-          <p:nvPr/>
-        </p:nvSpPr>
-        <p:spPr>
-          <a:xfrm>
-            <a:off x="5230368" y="3364992"/>
-            <a:ext cx="1554480" cy="475488"/>
+          <p:cNvPr id="36" name="Text 34"/>
+          <p:cNvSpPr/>
+          <p:nvPr/>
+        </p:nvSpPr>
+        <p:spPr>
+          <a:xfrm>
+            <a:off x="4581144" y="3364992"/>
+            <a:ext cx="1225296" cy="475488"/>
           </a:xfrm>
           <a:prstGeom prst="rect">
             <a:avLst/>
@@ -33427,7 +32970,7 @@
                 <a:ea typeface="Trebuchet MS" pitchFamily="34" charset="-122"/>
                 <a:cs typeface="Trebuchet MS" pitchFamily="34" charset="-120"/>
               </a:rPr>
-              <a:t>ta</a:t>
+              <a:t>ex</a:t>
             </a:r>
             <a:endParaRPr lang="en-US" sz="1400" dirty="0"/>
           </a:p>
@@ -33435,14 +32978,14 @@
       </p:sp>
       <p:sp>
         <p:nvSpPr>
-          <p:cNvPr id="34" name="Text 32"/>
-          <p:cNvSpPr/>
-          <p:nvPr/>
-        </p:nvSpPr>
-        <p:spPr>
-          <a:xfrm>
-            <a:off x="6784848" y="3364992"/>
-            <a:ext cx="73152" cy="475488"/>
+          <p:cNvPr id="37" name="Text 35"/>
+          <p:cNvSpPr/>
+          <p:nvPr/>
+        </p:nvSpPr>
+        <p:spPr>
+          <a:xfrm>
+            <a:off x="5806440" y="3364992"/>
+            <a:ext cx="76200" cy="475488"/>
           </a:xfrm>
           <a:prstGeom prst="rect">
             <a:avLst/>
@@ -33474,14 +33017,14 @@
       </p:sp>
       <p:sp>
         <p:nvSpPr>
-          <p:cNvPr id="35" name="Shape 33"/>
-          <p:cNvSpPr/>
-          <p:nvPr/>
-        </p:nvSpPr>
-        <p:spPr>
-          <a:xfrm>
-            <a:off x="6858000" y="3364992"/>
-            <a:ext cx="1554480" cy="475488"/>
+          <p:cNvPr id="38" name="Shape 36"/>
+          <p:cNvSpPr/>
+          <p:nvPr/>
+        </p:nvSpPr>
+        <p:spPr>
+          <a:xfrm>
+            <a:off x="5882640" y="3364992"/>
+            <a:ext cx="1225296" cy="475488"/>
           </a:xfrm>
           <a:prstGeom prst="rect">
             <a:avLst>
@@ -33501,14 +33044,14 @@
       </p:sp>
       <p:sp>
         <p:nvSpPr>
-          <p:cNvPr id="36" name="Text 34"/>
-          <p:cNvSpPr/>
-          <p:nvPr/>
-        </p:nvSpPr>
-        <p:spPr>
-          <a:xfrm>
-            <a:off x="6858000" y="3364992"/>
-            <a:ext cx="1554480" cy="475488"/>
+          <p:cNvPr id="39" name="Text 37"/>
+          <p:cNvSpPr/>
+          <p:nvPr/>
+        </p:nvSpPr>
+        <p:spPr>
+          <a:xfrm>
+            <a:off x="5882640" y="3364992"/>
+            <a:ext cx="1225296" cy="475488"/>
           </a:xfrm>
           <a:prstGeom prst="rect">
             <a:avLst/>
@@ -33532,7 +33075,7 @@
                 <a:ea typeface="Trebuchet MS" pitchFamily="34" charset="-122"/>
                 <a:cs typeface="Trebuchet MS" pitchFamily="34" charset="-120"/>
               </a:rPr>
-              <a:t>ble</a:t>
+              <a:t>cit</a:t>
             </a:r>
             <a:endParaRPr lang="en-US" sz="1400" dirty="0"/>
           </a:p>
@@ -33540,7 +33083,112 @@
       </p:sp>
       <p:sp>
         <p:nvSpPr>
-          <p:cNvPr id="37" name="Shape 35"/>
+          <p:cNvPr id="40" name="Text 38"/>
+          <p:cNvSpPr/>
+          <p:nvPr/>
+        </p:nvSpPr>
+        <p:spPr>
+          <a:xfrm>
+            <a:off x="7107936" y="3364992"/>
+            <a:ext cx="76200" cy="475488"/>
+          </a:xfrm>
+          <a:prstGeom prst="rect">
+            <a:avLst/>
+          </a:prstGeom>
+          <a:noFill/>
+          <a:ln/>
+        </p:spPr>
+        <p:txBody>
+          <a:bodyPr wrap="square" lIns="0" tIns="0" rIns="0" bIns="0" rtlCol="0" anchor="ctr"/>
+          <a:lstStyle/>
+          <a:p>
+            <a:pPr algn="ctr" indent="0" marL="0">
+              <a:buNone/>
+            </a:pPr>
+            <a:r>
+              <a:rPr lang="en-US" sz="1600" b="1" dirty="0">
+                <a:solidFill>
+                  <a:srgbClr val="0D9488"/>
+                </a:solidFill>
+                <a:latin typeface="Trebuchet MS" pitchFamily="34" charset="0"/>
+                <a:ea typeface="Trebuchet MS" pitchFamily="34" charset="-122"/>
+                <a:cs typeface="Trebuchet MS" pitchFamily="34" charset="-120"/>
+              </a:rPr>
+              <a:t>·</a:t>
+            </a:r>
+            <a:endParaRPr lang="en-US" sz="1600" dirty="0"/>
+          </a:p>
+        </p:txBody>
+      </p:sp>
+      <p:sp>
+        <p:nvSpPr>
+          <p:cNvPr id="41" name="Shape 39"/>
+          <p:cNvSpPr/>
+          <p:nvPr/>
+        </p:nvSpPr>
+        <p:spPr>
+          <a:xfrm>
+            <a:off x="7184136" y="3364992"/>
+            <a:ext cx="1225296" cy="475488"/>
+          </a:xfrm>
+          <a:prstGeom prst="rect">
+            <a:avLst>
+              <a:gd name="adj" fmla="val 9615"/>
+            </a:avLst>
+          </a:prstGeom>
+          <a:solidFill>
+            <a:srgbClr val="FFFFFF"/>
+          </a:solidFill>
+          <a:ln w="12700">
+            <a:solidFill>
+              <a:srgbClr val="0D9488"/>
+            </a:solidFill>
+            <a:prstDash val="solid"/>
+          </a:ln>
+        </p:spPr>
+      </p:sp>
+      <p:sp>
+        <p:nvSpPr>
+          <p:cNvPr id="42" name="Text 40"/>
+          <p:cNvSpPr/>
+          <p:nvPr/>
+        </p:nvSpPr>
+        <p:spPr>
+          <a:xfrm>
+            <a:off x="7184136" y="3364992"/>
+            <a:ext cx="1225296" cy="475488"/>
+          </a:xfrm>
+          <a:prstGeom prst="rect">
+            <a:avLst/>
+          </a:prstGeom>
+          <a:noFill/>
+          <a:ln/>
+        </p:spPr>
+        <p:txBody>
+          <a:bodyPr wrap="square" lIns="0" tIns="0" rIns="0" bIns="0" rtlCol="0" anchor="ctr"/>
+          <a:lstStyle/>
+          <a:p>
+            <a:pPr algn="ctr" indent="0" marL="0">
+              <a:buNone/>
+            </a:pPr>
+            <a:r>
+              <a:rPr lang="en-US" sz="1400" b="1" dirty="0">
+                <a:solidFill>
+                  <a:srgbClr val="0D9488"/>
+                </a:solidFill>
+                <a:latin typeface="Trebuchet MS" pitchFamily="34" charset="0"/>
+                <a:ea typeface="Trebuchet MS" pitchFamily="34" charset="-122"/>
+                <a:cs typeface="Trebuchet MS" pitchFamily="34" charset="-120"/>
+              </a:rPr>
+              <a:t>ed</a:t>
+            </a:r>
+            <a:endParaRPr lang="en-US" sz="1400" dirty="0"/>
+          </a:p>
+        </p:txBody>
+      </p:sp>
+      <p:sp>
+        <p:nvSpPr>
+          <p:cNvPr id="43" name="Shape 41"/>
           <p:cNvSpPr/>
           <p:nvPr/>
         </p:nvSpPr>
@@ -33567,7 +33215,7 @@
       </p:sp>
       <p:sp>
         <p:nvSpPr>
-          <p:cNvPr id="38" name="Text 36"/>
+          <p:cNvPr id="44" name="Text 42"/>
           <p:cNvSpPr/>
           <p:nvPr/>
         </p:nvSpPr>
@@ -33606,7 +33254,7 @@
       </p:sp>
       <p:sp>
         <p:nvSpPr>
-          <p:cNvPr id="39" name="Shape 37"/>
+          <p:cNvPr id="45" name="Shape 43"/>
           <p:cNvSpPr/>
           <p:nvPr/>
         </p:nvSpPr>
@@ -33633,7 +33281,7 @@
       </p:sp>
       <p:sp>
         <p:nvSpPr>
-          <p:cNvPr id="40" name="Text 38"/>
+          <p:cNvPr id="46" name="Text 44"/>
           <p:cNvSpPr/>
           <p:nvPr/>
         </p:nvSpPr>
@@ -33956,7 +33604,7 @@
                 <a:ea typeface="Calibri" pitchFamily="34" charset="-122"/>
                 <a:cs typeface="Calibri" pitchFamily="34" charset="-120"/>
               </a:rPr>
-              <a:t>Word Labs  •  wordlabs.app  •  Root: 'excite' = to stir up or rouse</a:t>
+              <a:t>Word Labs  •  wordlabs.app  •  Root: 'excite' = to stir up or arouse</a:t>
             </a:r>
             <a:endParaRPr lang="en-US" sz="800" dirty="0"/>
           </a:p>
@@ -34095,7 +33743,7 @@
                 <a:ea typeface="Trebuchet MS" pitchFamily="34" charset="-122"/>
                 <a:cs typeface="Trebuchet MS" pitchFamily="34" charset="-120"/>
               </a:rPr>
-              <a:t>excitable</a:t>
+              <a:t>overexcited</a:t>
             </a:r>
             <a:endParaRPr lang="en-US" sz="2800" dirty="0"/>
           </a:p>
@@ -34175,7 +33823,7 @@
         </p:nvSpPr>
         <p:spPr>
           <a:xfrm>
-            <a:off x="2938272" y="2258568"/>
+            <a:off x="2221992" y="2258568"/>
             <a:ext cx="1828800" cy="292608"/>
           </a:xfrm>
           <a:prstGeom prst="rect">
@@ -34184,11 +33832,11 @@
             </a:avLst>
           </a:prstGeom>
           <a:solidFill>
-            <a:srgbClr val="CCFBF1"/>
+            <a:srgbClr val="DDD6FE"/>
           </a:solidFill>
           <a:ln w="19050">
             <a:solidFill>
-              <a:srgbClr val="0D9488"/>
+              <a:srgbClr val="7C3AED"/>
             </a:solidFill>
             <a:prstDash val="solid"/>
           </a:ln>
@@ -34209,7 +33857,7 @@
         </p:nvSpPr>
         <p:spPr>
           <a:xfrm>
-            <a:off x="2938272" y="2258568"/>
+            <a:off x="2221992" y="2258568"/>
             <a:ext cx="1828800" cy="292608"/>
           </a:xfrm>
           <a:prstGeom prst="rect">
@@ -34228,13 +33876,13 @@
             <a:r>
               <a:rPr lang="en-US" sz="1300" b="1" dirty="0">
                 <a:solidFill>
-                  <a:srgbClr val="0F766E"/>
+                  <a:srgbClr val="4C1D95"/>
                 </a:solidFill>
                 <a:latin typeface="Trebuchet MS" pitchFamily="34" charset="0"/>
                 <a:ea typeface="Trebuchet MS" pitchFamily="34" charset="-122"/>
                 <a:cs typeface="Trebuchet MS" pitchFamily="34" charset="-120"/>
               </a:rPr>
-              <a:t>excite</a:t>
+              <a:t>over</a:t>
             </a:r>
             <a:endParaRPr lang="en-US" sz="1300" dirty="0"/>
           </a:p>
@@ -34248,7 +33896,7 @@
         </p:nvSpPr>
         <p:spPr>
           <a:xfrm>
-            <a:off x="2938272" y="2569464"/>
+            <a:off x="2221992" y="2569464"/>
             <a:ext cx="1828800" cy="201168"/>
           </a:xfrm>
           <a:prstGeom prst="rect">
@@ -34273,7 +33921,7 @@
                 <a:ea typeface="Calibri" pitchFamily="34" charset="-122"/>
                 <a:cs typeface="Calibri" pitchFamily="34" charset="-120"/>
               </a:rPr>
-              <a:t>to stir up or rouse</a:t>
+              <a:t>too much; above</a:t>
             </a:r>
             <a:endParaRPr lang="en-US" sz="850" dirty="0"/>
           </a:p>
@@ -34287,7 +33935,7 @@
         </p:nvSpPr>
         <p:spPr>
           <a:xfrm>
-            <a:off x="5803392" y="2258568"/>
+            <a:off x="4370832" y="2258568"/>
             <a:ext cx="1828800" cy="292608"/>
           </a:xfrm>
           <a:prstGeom prst="rect">
@@ -34296,11 +33944,11 @@
             </a:avLst>
           </a:prstGeom>
           <a:solidFill>
-            <a:srgbClr val="FCE7F3"/>
+            <a:srgbClr val="CCFBF1"/>
           </a:solidFill>
           <a:ln w="19050">
             <a:solidFill>
-              <a:srgbClr val="DB2777"/>
+              <a:srgbClr val="0D9488"/>
             </a:solidFill>
             <a:prstDash val="solid"/>
           </a:ln>
@@ -34321,7 +33969,7 @@
         </p:nvSpPr>
         <p:spPr>
           <a:xfrm>
-            <a:off x="5803392" y="2258568"/>
+            <a:off x="4370832" y="2258568"/>
             <a:ext cx="1828800" cy="292608"/>
           </a:xfrm>
           <a:prstGeom prst="rect">
@@ -34340,13 +33988,13 @@
             <a:r>
               <a:rPr lang="en-US" sz="1300" b="1" dirty="0">
                 <a:solidFill>
-                  <a:srgbClr val="9D174D"/>
+                  <a:srgbClr val="0F766E"/>
                 </a:solidFill>
                 <a:latin typeface="Trebuchet MS" pitchFamily="34" charset="0"/>
                 <a:ea typeface="Trebuchet MS" pitchFamily="34" charset="-122"/>
                 <a:cs typeface="Trebuchet MS" pitchFamily="34" charset="-120"/>
               </a:rPr>
-              <a:t>able</a:t>
+              <a:t>excite</a:t>
             </a:r>
             <a:endParaRPr lang="en-US" sz="1300" dirty="0"/>
           </a:p>
@@ -34360,7 +34008,7 @@
         </p:nvSpPr>
         <p:spPr>
           <a:xfrm>
-            <a:off x="5803392" y="2569464"/>
+            <a:off x="4370832" y="2569464"/>
             <a:ext cx="1828800" cy="201168"/>
           </a:xfrm>
           <a:prstGeom prst="rect">
@@ -34385,7 +34033,7 @@
                 <a:ea typeface="Calibri" pitchFamily="34" charset="-122"/>
                 <a:cs typeface="Calibri" pitchFamily="34" charset="-120"/>
               </a:rPr>
-              <a:t>able to be or capable of</a:t>
+              <a:t>to stir up or arouse</a:t>
             </a:r>
             <a:endParaRPr lang="en-US" sz="850" dirty="0"/>
           </a:p>
@@ -34393,14 +34041,87 @@
       </p:sp>
       <p:sp>
         <p:nvSpPr>
-          <p:cNvPr id="22" name="Text 20"/>
-          <p:cNvSpPr/>
-          <p:nvPr/>
-        </p:nvSpPr>
-        <p:spPr>
-          <a:xfrm>
-            <a:off x="5803392" y="2752344"/>
-            <a:ext cx="1828800" cy="182880"/>
+          <p:cNvPr id="22" name="Shape 20"/>
+          <p:cNvSpPr/>
+          <p:nvPr/>
+        </p:nvSpPr>
+        <p:spPr>
+          <a:xfrm>
+            <a:off x="6519672" y="2258568"/>
+            <a:ext cx="1828800" cy="292608"/>
+          </a:xfrm>
+          <a:prstGeom prst="rect">
+            <a:avLst>
+              <a:gd name="adj" fmla="val 25000"/>
+            </a:avLst>
+          </a:prstGeom>
+          <a:solidFill>
+            <a:srgbClr val="FCE7F3"/>
+          </a:solidFill>
+          <a:ln w="19050">
+            <a:solidFill>
+              <a:srgbClr val="DB2777"/>
+            </a:solidFill>
+            <a:prstDash val="solid"/>
+          </a:ln>
+          <a:effectLst>
+            <a:outerShdw sx="100000" sy="100000" kx="0" ky="0" algn="bl" rotWithShape="0" blurRad="101600" dist="38100" dir="8100000">
+              <a:srgbClr val="000000">
+                <a:alpha val="12000"/>
+              </a:srgbClr>
+            </a:outerShdw>
+          </a:effectLst>
+        </p:spPr>
+      </p:sp>
+      <p:sp>
+        <p:nvSpPr>
+          <p:cNvPr id="23" name="Text 21"/>
+          <p:cNvSpPr/>
+          <p:nvPr/>
+        </p:nvSpPr>
+        <p:spPr>
+          <a:xfrm>
+            <a:off x="6519672" y="2258568"/>
+            <a:ext cx="1828800" cy="292608"/>
+          </a:xfrm>
+          <a:prstGeom prst="rect">
+            <a:avLst/>
+          </a:prstGeom>
+          <a:noFill/>
+          <a:ln/>
+        </p:spPr>
+        <p:txBody>
+          <a:bodyPr wrap="square" lIns="0" tIns="0" rIns="0" bIns="0" rtlCol="0" anchor="ctr"/>
+          <a:lstStyle/>
+          <a:p>
+            <a:pPr algn="ctr" indent="0" marL="0">
+              <a:buNone/>
+            </a:pPr>
+            <a:r>
+              <a:rPr lang="en-US" sz="1300" b="1" dirty="0">
+                <a:solidFill>
+                  <a:srgbClr val="9D174D"/>
+                </a:solidFill>
+                <a:latin typeface="Trebuchet MS" pitchFamily="34" charset="0"/>
+                <a:ea typeface="Trebuchet MS" pitchFamily="34" charset="-122"/>
+                <a:cs typeface="Trebuchet MS" pitchFamily="34" charset="-120"/>
+              </a:rPr>
+              <a:t>d</a:t>
+            </a:r>
+            <a:endParaRPr lang="en-US" sz="1300" dirty="0"/>
+          </a:p>
+        </p:txBody>
+      </p:sp>
+      <p:sp>
+        <p:nvSpPr>
+          <p:cNvPr id="24" name="Text 22"/>
+          <p:cNvSpPr/>
+          <p:nvPr/>
+        </p:nvSpPr>
+        <p:spPr>
+          <a:xfrm>
+            <a:off x="6519672" y="2569464"/>
+            <a:ext cx="1828800" cy="201168"/>
           </a:xfrm>
           <a:prstGeom prst="rect">
             <a:avLst/>
@@ -34416,15 +34137,54 @@
               <a:buNone/>
             </a:pPr>
             <a:r>
-              <a:rPr lang="en-US" sz="700" i="1" dirty="0">
-                <a:solidFill>
-                  <a:srgbClr val="94A3B8"/>
+              <a:rPr lang="en-US" sz="850" dirty="0">
+                <a:solidFill>
+                  <a:srgbClr val="475569"/>
                 </a:solidFill>
                 <a:latin typeface="Calibri" pitchFamily="34" charset="0"/>
                 <a:ea typeface="Calibri" pitchFamily="34" charset="-122"/>
                 <a:cs typeface="Calibri" pitchFamily="34" charset="-120"/>
               </a:rPr>
-              <a:t>'e' dropped before vowel suffix</a:t>
+              <a:t>past or completed action</a:t>
+            </a:r>
+            <a:endParaRPr lang="en-US" sz="850" dirty="0"/>
+          </a:p>
+        </p:txBody>
+      </p:sp>
+      <p:sp>
+        <p:nvSpPr>
+          <p:cNvPr id="25" name="Text 23"/>
+          <p:cNvSpPr/>
+          <p:nvPr/>
+        </p:nvSpPr>
+        <p:spPr>
+          <a:xfrm>
+            <a:off x="6519672" y="2752344"/>
+            <a:ext cx="1828800" cy="182880"/>
+          </a:xfrm>
+          <a:prstGeom prst="rect">
+            <a:avLst/>
+          </a:prstGeom>
+          <a:noFill/>
+          <a:ln/>
+        </p:spPr>
+        <p:txBody>
+          <a:bodyPr wrap="square" lIns="0" tIns="0" rIns="0" bIns="0" rtlCol="0" anchor="t"/>
+          <a:lstStyle/>
+          <a:p>
+            <a:pPr algn="ctr" indent="0" marL="0">
+              <a:buNone/>
+            </a:pPr>
+            <a:r>
+              <a:rPr lang="en-US" sz="700" i="1" dirty="0">
+                <a:solidFill>
+                  <a:srgbClr val="94A3B8"/>
+                </a:solidFill>
+                <a:latin typeface="Calibri" pitchFamily="34" charset="0"/>
+                <a:ea typeface="Calibri" pitchFamily="34" charset="-122"/>
+                <a:cs typeface="Calibri" pitchFamily="34" charset="-120"/>
+              </a:rPr>
+              <a:t>'e' kept as part of base before consonant suffix</a:t>
             </a:r>
             <a:endParaRPr lang="en-US" sz="700" dirty="0"/>
           </a:p>
@@ -34432,7 +34192,7 @@
       </p:sp>
       <p:sp>
         <p:nvSpPr>
-          <p:cNvPr id="23" name="Shape 21"/>
+          <p:cNvPr id="26" name="Shape 24"/>
           <p:cNvSpPr/>
           <p:nvPr/>
         </p:nvSpPr>
@@ -34459,7 +34219,7 @@
       </p:sp>
       <p:sp>
         <p:nvSpPr>
-          <p:cNvPr id="24" name="Text 22"/>
+          <p:cNvPr id="27" name="Text 25"/>
           <p:cNvSpPr/>
           <p:nvPr/>
         </p:nvSpPr>
@@ -34498,7 +34258,7 @@
       </p:sp>
       <p:sp>
         <p:nvSpPr>
-          <p:cNvPr id="25" name="Shape 23"/>
+          <p:cNvPr id="28" name="Shape 26"/>
           <p:cNvSpPr/>
           <p:nvPr/>
         </p:nvSpPr>
@@ -34525,14 +34285,14 @@
       </p:sp>
       <p:sp>
         <p:nvSpPr>
-          <p:cNvPr id="26" name="Shape 24"/>
-          <p:cNvSpPr/>
-          <p:nvPr/>
-        </p:nvSpPr>
-        <p:spPr>
-          <a:xfrm>
-            <a:off x="1975104" y="3364992"/>
-            <a:ext cx="1554480" cy="475488"/>
+          <p:cNvPr id="29" name="Shape 27"/>
+          <p:cNvSpPr/>
+          <p:nvPr/>
+        </p:nvSpPr>
+        <p:spPr>
+          <a:xfrm>
+            <a:off x="1978152" y="3364992"/>
+            <a:ext cx="1225296" cy="475488"/>
           </a:xfrm>
           <a:prstGeom prst="rect">
             <a:avLst>
@@ -34552,14 +34312,14 @@
       </p:sp>
       <p:sp>
         <p:nvSpPr>
-          <p:cNvPr id="27" name="Text 25"/>
-          <p:cNvSpPr/>
-          <p:nvPr/>
-        </p:nvSpPr>
-        <p:spPr>
-          <a:xfrm>
-            <a:off x="1975104" y="3364992"/>
-            <a:ext cx="1554480" cy="475488"/>
+          <p:cNvPr id="30" name="Text 28"/>
+          <p:cNvSpPr/>
+          <p:nvPr/>
+        </p:nvSpPr>
+        <p:spPr>
+          <a:xfrm>
+            <a:off x="1978152" y="3364992"/>
+            <a:ext cx="1225296" cy="475488"/>
           </a:xfrm>
           <a:prstGeom prst="rect">
             <a:avLst/>
@@ -34583,7 +34343,7 @@
                 <a:ea typeface="Trebuchet MS" pitchFamily="34" charset="-122"/>
                 <a:cs typeface="Trebuchet MS" pitchFamily="34" charset="-120"/>
               </a:rPr>
-              <a:t>ex</a:t>
+              <a:t>o</a:t>
             </a:r>
             <a:endParaRPr lang="en-US" sz="1400" dirty="0"/>
           </a:p>
@@ -34591,14 +34351,14 @@
       </p:sp>
       <p:sp>
         <p:nvSpPr>
-          <p:cNvPr id="28" name="Text 26"/>
-          <p:cNvSpPr/>
-          <p:nvPr/>
-        </p:nvSpPr>
-        <p:spPr>
-          <a:xfrm>
-            <a:off x="3529584" y="3364992"/>
-            <a:ext cx="73152" cy="475488"/>
+          <p:cNvPr id="31" name="Text 29"/>
+          <p:cNvSpPr/>
+          <p:nvPr/>
+        </p:nvSpPr>
+        <p:spPr>
+          <a:xfrm>
+            <a:off x="3203448" y="3364992"/>
+            <a:ext cx="76200" cy="475488"/>
           </a:xfrm>
           <a:prstGeom prst="rect">
             <a:avLst/>
@@ -34630,14 +34390,14 @@
       </p:sp>
       <p:sp>
         <p:nvSpPr>
-          <p:cNvPr id="29" name="Shape 27"/>
-          <p:cNvSpPr/>
-          <p:nvPr/>
-        </p:nvSpPr>
-        <p:spPr>
-          <a:xfrm>
-            <a:off x="3602736" y="3364992"/>
-            <a:ext cx="1554480" cy="475488"/>
+          <p:cNvPr id="32" name="Shape 30"/>
+          <p:cNvSpPr/>
+          <p:nvPr/>
+        </p:nvSpPr>
+        <p:spPr>
+          <a:xfrm>
+            <a:off x="3279648" y="3364992"/>
+            <a:ext cx="1225296" cy="475488"/>
           </a:xfrm>
           <a:prstGeom prst="rect">
             <a:avLst>
@@ -34657,14 +34417,14 @@
       </p:sp>
       <p:sp>
         <p:nvSpPr>
-          <p:cNvPr id="30" name="Text 28"/>
-          <p:cNvSpPr/>
-          <p:nvPr/>
-        </p:nvSpPr>
-        <p:spPr>
-          <a:xfrm>
-            <a:off x="3602736" y="3364992"/>
-            <a:ext cx="1554480" cy="475488"/>
+          <p:cNvPr id="33" name="Text 31"/>
+          <p:cNvSpPr/>
+          <p:nvPr/>
+        </p:nvSpPr>
+        <p:spPr>
+          <a:xfrm>
+            <a:off x="3279648" y="3364992"/>
+            <a:ext cx="1225296" cy="475488"/>
           </a:xfrm>
           <a:prstGeom prst="rect">
             <a:avLst/>
@@ -34688,7 +34448,7 @@
                 <a:ea typeface="Trebuchet MS" pitchFamily="34" charset="-122"/>
                 <a:cs typeface="Trebuchet MS" pitchFamily="34" charset="-120"/>
               </a:rPr>
-              <a:t>ci</a:t>
+              <a:t>ver</a:t>
             </a:r>
             <a:endParaRPr lang="en-US" sz="1400" dirty="0"/>
           </a:p>
@@ -34696,14 +34456,14 @@
       </p:sp>
       <p:sp>
         <p:nvSpPr>
-          <p:cNvPr id="31" name="Text 29"/>
-          <p:cNvSpPr/>
-          <p:nvPr/>
-        </p:nvSpPr>
-        <p:spPr>
-          <a:xfrm>
-            <a:off x="5157216" y="3364992"/>
-            <a:ext cx="73152" cy="475488"/>
+          <p:cNvPr id="34" name="Text 32"/>
+          <p:cNvSpPr/>
+          <p:nvPr/>
+        </p:nvSpPr>
+        <p:spPr>
+          <a:xfrm>
+            <a:off x="4504944" y="3364992"/>
+            <a:ext cx="76200" cy="475488"/>
           </a:xfrm>
           <a:prstGeom prst="rect">
             <a:avLst/>
@@ -34735,14 +34495,14 @@
       </p:sp>
       <p:sp>
         <p:nvSpPr>
-          <p:cNvPr id="32" name="Shape 30"/>
-          <p:cNvSpPr/>
-          <p:nvPr/>
-        </p:nvSpPr>
-        <p:spPr>
-          <a:xfrm>
-            <a:off x="5230368" y="3364992"/>
-            <a:ext cx="1554480" cy="475488"/>
+          <p:cNvPr id="35" name="Shape 33"/>
+          <p:cNvSpPr/>
+          <p:nvPr/>
+        </p:nvSpPr>
+        <p:spPr>
+          <a:xfrm>
+            <a:off x="4581144" y="3364992"/>
+            <a:ext cx="1225296" cy="475488"/>
           </a:xfrm>
           <a:prstGeom prst="rect">
             <a:avLst>
@@ -34762,14 +34522,14 @@
       </p:sp>
       <p:sp>
         <p:nvSpPr>
-          <p:cNvPr id="33" name="Text 31"/>
-          <p:cNvSpPr/>
-          <p:nvPr/>
-        </p:nvSpPr>
-        <p:spPr>
-          <a:xfrm>
-            <a:off x="5230368" y="3364992"/>
-            <a:ext cx="1554480" cy="475488"/>
+          <p:cNvPr id="36" name="Text 34"/>
+          <p:cNvSpPr/>
+          <p:nvPr/>
+        </p:nvSpPr>
+        <p:spPr>
+          <a:xfrm>
+            <a:off x="4581144" y="3364992"/>
+            <a:ext cx="1225296" cy="475488"/>
           </a:xfrm>
           <a:prstGeom prst="rect">
             <a:avLst/>
@@ -34793,7 +34553,7 @@
                 <a:ea typeface="Trebuchet MS" pitchFamily="34" charset="-122"/>
                 <a:cs typeface="Trebuchet MS" pitchFamily="34" charset="-120"/>
               </a:rPr>
-              <a:t>ta</a:t>
+              <a:t>ex</a:t>
             </a:r>
             <a:endParaRPr lang="en-US" sz="1400" dirty="0"/>
           </a:p>
@@ -34801,14 +34561,14 @@
       </p:sp>
       <p:sp>
         <p:nvSpPr>
-          <p:cNvPr id="34" name="Text 32"/>
-          <p:cNvSpPr/>
-          <p:nvPr/>
-        </p:nvSpPr>
-        <p:spPr>
-          <a:xfrm>
-            <a:off x="6784848" y="3364992"/>
-            <a:ext cx="73152" cy="475488"/>
+          <p:cNvPr id="37" name="Text 35"/>
+          <p:cNvSpPr/>
+          <p:nvPr/>
+        </p:nvSpPr>
+        <p:spPr>
+          <a:xfrm>
+            <a:off x="5806440" y="3364992"/>
+            <a:ext cx="76200" cy="475488"/>
           </a:xfrm>
           <a:prstGeom prst="rect">
             <a:avLst/>
@@ -34840,14 +34600,14 @@
       </p:sp>
       <p:sp>
         <p:nvSpPr>
-          <p:cNvPr id="35" name="Shape 33"/>
-          <p:cNvSpPr/>
-          <p:nvPr/>
-        </p:nvSpPr>
-        <p:spPr>
-          <a:xfrm>
-            <a:off x="6858000" y="3364992"/>
-            <a:ext cx="1554480" cy="475488"/>
+          <p:cNvPr id="38" name="Shape 36"/>
+          <p:cNvSpPr/>
+          <p:nvPr/>
+        </p:nvSpPr>
+        <p:spPr>
+          <a:xfrm>
+            <a:off x="5882640" y="3364992"/>
+            <a:ext cx="1225296" cy="475488"/>
           </a:xfrm>
           <a:prstGeom prst="rect">
             <a:avLst>
@@ -34867,14 +34627,14 @@
       </p:sp>
       <p:sp>
         <p:nvSpPr>
-          <p:cNvPr id="36" name="Text 34"/>
-          <p:cNvSpPr/>
-          <p:nvPr/>
-        </p:nvSpPr>
-        <p:spPr>
-          <a:xfrm>
-            <a:off x="6858000" y="3364992"/>
-            <a:ext cx="1554480" cy="475488"/>
+          <p:cNvPr id="39" name="Text 37"/>
+          <p:cNvSpPr/>
+          <p:nvPr/>
+        </p:nvSpPr>
+        <p:spPr>
+          <a:xfrm>
+            <a:off x="5882640" y="3364992"/>
+            <a:ext cx="1225296" cy="475488"/>
           </a:xfrm>
           <a:prstGeom prst="rect">
             <a:avLst/>
@@ -34898,7 +34658,7 @@
                 <a:ea typeface="Trebuchet MS" pitchFamily="34" charset="-122"/>
                 <a:cs typeface="Trebuchet MS" pitchFamily="34" charset="-120"/>
               </a:rPr>
-              <a:t>ble</a:t>
+              <a:t>cit</a:t>
             </a:r>
             <a:endParaRPr lang="en-US" sz="1400" dirty="0"/>
           </a:p>
@@ -34906,7 +34666,112 @@
       </p:sp>
       <p:sp>
         <p:nvSpPr>
-          <p:cNvPr id="37" name="Shape 35"/>
+          <p:cNvPr id="40" name="Text 38"/>
+          <p:cNvSpPr/>
+          <p:nvPr/>
+        </p:nvSpPr>
+        <p:spPr>
+          <a:xfrm>
+            <a:off x="7107936" y="3364992"/>
+            <a:ext cx="76200" cy="475488"/>
+          </a:xfrm>
+          <a:prstGeom prst="rect">
+            <a:avLst/>
+          </a:prstGeom>
+          <a:noFill/>
+          <a:ln/>
+        </p:spPr>
+        <p:txBody>
+          <a:bodyPr wrap="square" lIns="0" tIns="0" rIns="0" bIns="0" rtlCol="0" anchor="ctr"/>
+          <a:lstStyle/>
+          <a:p>
+            <a:pPr algn="ctr" indent="0" marL="0">
+              <a:buNone/>
+            </a:pPr>
+            <a:r>
+              <a:rPr lang="en-US" sz="1600" b="1" dirty="0">
+                <a:solidFill>
+                  <a:srgbClr val="0D9488"/>
+                </a:solidFill>
+                <a:latin typeface="Trebuchet MS" pitchFamily="34" charset="0"/>
+                <a:ea typeface="Trebuchet MS" pitchFamily="34" charset="-122"/>
+                <a:cs typeface="Trebuchet MS" pitchFamily="34" charset="-120"/>
+              </a:rPr>
+              <a:t>·</a:t>
+            </a:r>
+            <a:endParaRPr lang="en-US" sz="1600" dirty="0"/>
+          </a:p>
+        </p:txBody>
+      </p:sp>
+      <p:sp>
+        <p:nvSpPr>
+          <p:cNvPr id="41" name="Shape 39"/>
+          <p:cNvSpPr/>
+          <p:nvPr/>
+        </p:nvSpPr>
+        <p:spPr>
+          <a:xfrm>
+            <a:off x="7184136" y="3364992"/>
+            <a:ext cx="1225296" cy="475488"/>
+          </a:xfrm>
+          <a:prstGeom prst="rect">
+            <a:avLst>
+              <a:gd name="adj" fmla="val 9615"/>
+            </a:avLst>
+          </a:prstGeom>
+          <a:solidFill>
+            <a:srgbClr val="FFFFFF"/>
+          </a:solidFill>
+          <a:ln w="12700">
+            <a:solidFill>
+              <a:srgbClr val="0D9488"/>
+            </a:solidFill>
+            <a:prstDash val="solid"/>
+          </a:ln>
+        </p:spPr>
+      </p:sp>
+      <p:sp>
+        <p:nvSpPr>
+          <p:cNvPr id="42" name="Text 40"/>
+          <p:cNvSpPr/>
+          <p:nvPr/>
+        </p:nvSpPr>
+        <p:spPr>
+          <a:xfrm>
+            <a:off x="7184136" y="3364992"/>
+            <a:ext cx="1225296" cy="475488"/>
+          </a:xfrm>
+          <a:prstGeom prst="rect">
+            <a:avLst/>
+          </a:prstGeom>
+          <a:noFill/>
+          <a:ln/>
+        </p:spPr>
+        <p:txBody>
+          <a:bodyPr wrap="square" lIns="0" tIns="0" rIns="0" bIns="0" rtlCol="0" anchor="ctr"/>
+          <a:lstStyle/>
+          <a:p>
+            <a:pPr algn="ctr" indent="0" marL="0">
+              <a:buNone/>
+            </a:pPr>
+            <a:r>
+              <a:rPr lang="en-US" sz="1400" b="1" dirty="0">
+                <a:solidFill>
+                  <a:srgbClr val="0D9488"/>
+                </a:solidFill>
+                <a:latin typeface="Trebuchet MS" pitchFamily="34" charset="0"/>
+                <a:ea typeface="Trebuchet MS" pitchFamily="34" charset="-122"/>
+                <a:cs typeface="Trebuchet MS" pitchFamily="34" charset="-120"/>
+              </a:rPr>
+              <a:t>ed</a:t>
+            </a:r>
+            <a:endParaRPr lang="en-US" sz="1400" dirty="0"/>
+          </a:p>
+        </p:txBody>
+      </p:sp>
+      <p:sp>
+        <p:nvSpPr>
+          <p:cNvPr id="43" name="Shape 41"/>
           <p:cNvSpPr/>
           <p:nvPr/>
         </p:nvSpPr>
@@ -34933,7 +34798,7 @@
       </p:sp>
       <p:sp>
         <p:nvSpPr>
-          <p:cNvPr id="38" name="Text 36"/>
+          <p:cNvPr id="44" name="Text 42"/>
           <p:cNvSpPr/>
           <p:nvPr/>
         </p:nvSpPr>
@@ -34972,7 +34837,7 @@
       </p:sp>
       <p:sp>
         <p:nvSpPr>
-          <p:cNvPr id="39" name="Shape 37"/>
+          <p:cNvPr id="45" name="Shape 43"/>
           <p:cNvSpPr/>
           <p:nvPr/>
         </p:nvSpPr>
@@ -34999,14 +34864,14 @@
       </p:sp>
       <p:sp>
         <p:nvSpPr>
-          <p:cNvPr id="40" name="Shape 38"/>
-          <p:cNvSpPr/>
-          <p:nvPr/>
-        </p:nvSpPr>
-        <p:spPr>
-          <a:xfrm>
-            <a:off x="2023872" y="4169664"/>
-            <a:ext cx="685800" cy="384048"/>
+          <p:cNvPr id="46" name="Shape 44"/>
+          <p:cNvSpPr/>
+          <p:nvPr/>
+        </p:nvSpPr>
+        <p:spPr>
+          <a:xfrm>
+            <a:off x="1951828" y="4169664"/>
+            <a:ext cx="603504" cy="384048"/>
           </a:xfrm>
           <a:prstGeom prst="rect">
             <a:avLst>
@@ -35026,14 +34891,14 @@
       </p:sp>
       <p:sp>
         <p:nvSpPr>
-          <p:cNvPr id="41" name="Text 39"/>
-          <p:cNvSpPr/>
-          <p:nvPr/>
-        </p:nvSpPr>
-        <p:spPr>
-          <a:xfrm>
-            <a:off x="2023872" y="4169664"/>
-            <a:ext cx="685800" cy="384048"/>
+          <p:cNvPr id="47" name="Text 45"/>
+          <p:cNvSpPr/>
+          <p:nvPr/>
+        </p:nvSpPr>
+        <p:spPr>
+          <a:xfrm>
+            <a:off x="1951828" y="4169664"/>
+            <a:ext cx="603504" cy="384048"/>
           </a:xfrm>
           <a:prstGeom prst="rect">
             <a:avLst/>
@@ -35057,7 +34922,7 @@
                 <a:ea typeface="Trebuchet MS" pitchFamily="34" charset="-122"/>
                 <a:cs typeface="Trebuchet MS" pitchFamily="34" charset="-120"/>
               </a:rPr>
-              <a:t>e</a:t>
+              <a:t>o</a:t>
             </a:r>
             <a:endParaRPr lang="en-US" sz="900" dirty="0"/>
           </a:p>
@@ -35065,14 +34930,14 @@
       </p:sp>
       <p:sp>
         <p:nvSpPr>
-          <p:cNvPr id="42" name="Shape 40"/>
-          <p:cNvSpPr/>
-          <p:nvPr/>
-        </p:nvSpPr>
-        <p:spPr>
-          <a:xfrm>
-            <a:off x="2831592" y="4169664"/>
-            <a:ext cx="685800" cy="384048"/>
+          <p:cNvPr id="48" name="Shape 46"/>
+          <p:cNvSpPr/>
+          <p:nvPr/>
+        </p:nvSpPr>
+        <p:spPr>
+          <a:xfrm>
+            <a:off x="2605209" y="4169664"/>
+            <a:ext cx="603504" cy="384048"/>
           </a:xfrm>
           <a:prstGeom prst="rect">
             <a:avLst>
@@ -35092,14 +34957,14 @@
       </p:sp>
       <p:sp>
         <p:nvSpPr>
-          <p:cNvPr id="43" name="Text 41"/>
-          <p:cNvSpPr/>
-          <p:nvPr/>
-        </p:nvSpPr>
-        <p:spPr>
-          <a:xfrm>
-            <a:off x="2831592" y="4169664"/>
-            <a:ext cx="685800" cy="384048"/>
+          <p:cNvPr id="49" name="Text 47"/>
+          <p:cNvSpPr/>
+          <p:nvPr/>
+        </p:nvSpPr>
+        <p:spPr>
+          <a:xfrm>
+            <a:off x="2605209" y="4169664"/>
+            <a:ext cx="603504" cy="384048"/>
           </a:xfrm>
           <a:prstGeom prst="rect">
             <a:avLst/>
@@ -35123,7 +34988,7 @@
                 <a:ea typeface="Trebuchet MS" pitchFamily="34" charset="-122"/>
                 <a:cs typeface="Trebuchet MS" pitchFamily="34" charset="-120"/>
               </a:rPr>
-              <a:t>x</a:t>
+              <a:t>v</a:t>
             </a:r>
             <a:endParaRPr lang="en-US" sz="900" dirty="0"/>
           </a:p>
@@ -35131,14 +34996,14 @@
       </p:sp>
       <p:sp>
         <p:nvSpPr>
-          <p:cNvPr id="44" name="Shape 42"/>
-          <p:cNvSpPr/>
-          <p:nvPr/>
-        </p:nvSpPr>
-        <p:spPr>
-          <a:xfrm>
-            <a:off x="3639312" y="4169664"/>
-            <a:ext cx="685800" cy="384048"/>
+          <p:cNvPr id="50" name="Shape 48"/>
+          <p:cNvSpPr/>
+          <p:nvPr/>
+        </p:nvSpPr>
+        <p:spPr>
+          <a:xfrm>
+            <a:off x="3258589" y="4169664"/>
+            <a:ext cx="603504" cy="384048"/>
           </a:xfrm>
           <a:prstGeom prst="rect">
             <a:avLst>
@@ -35158,14 +35023,14 @@
       </p:sp>
       <p:sp>
         <p:nvSpPr>
-          <p:cNvPr id="45" name="Text 43"/>
-          <p:cNvSpPr/>
-          <p:nvPr/>
-        </p:nvSpPr>
-        <p:spPr>
-          <a:xfrm>
-            <a:off x="3639312" y="4169664"/>
-            <a:ext cx="685800" cy="384048"/>
+          <p:cNvPr id="51" name="Text 49"/>
+          <p:cNvSpPr/>
+          <p:nvPr/>
+        </p:nvSpPr>
+        <p:spPr>
+          <a:xfrm>
+            <a:off x="3258589" y="4169664"/>
+            <a:ext cx="603504" cy="384048"/>
           </a:xfrm>
           <a:prstGeom prst="rect">
             <a:avLst/>
@@ -35189,7 +35054,7 @@
                 <a:ea typeface="Trebuchet MS" pitchFamily="34" charset="-122"/>
                 <a:cs typeface="Trebuchet MS" pitchFamily="34" charset="-120"/>
               </a:rPr>
-              <a:t>c</a:t>
+              <a:t>er</a:t>
             </a:r>
             <a:endParaRPr lang="en-US" sz="900" dirty="0"/>
           </a:p>
@@ -35197,14 +35062,146 @@
       </p:sp>
       <p:sp>
         <p:nvSpPr>
-          <p:cNvPr id="46" name="Text 44"/>
-          <p:cNvSpPr/>
-          <p:nvPr/>
-        </p:nvSpPr>
-        <p:spPr>
-          <a:xfrm>
-            <a:off x="3639312" y="4572000"/>
-            <a:ext cx="685800" cy="219456"/>
+          <p:cNvPr id="52" name="Shape 50"/>
+          <p:cNvSpPr/>
+          <p:nvPr/>
+        </p:nvSpPr>
+        <p:spPr>
+          <a:xfrm>
+            <a:off x="3911969" y="4169664"/>
+            <a:ext cx="603504" cy="384048"/>
+          </a:xfrm>
+          <a:prstGeom prst="rect">
+            <a:avLst>
+              <a:gd name="adj" fmla="val 9524"/>
+            </a:avLst>
+          </a:prstGeom>
+          <a:solidFill>
+            <a:srgbClr val="FFFFFF"/>
+          </a:solidFill>
+          <a:ln w="12700">
+            <a:solidFill>
+              <a:srgbClr val="DB2777"/>
+            </a:solidFill>
+            <a:prstDash val="solid"/>
+          </a:ln>
+        </p:spPr>
+      </p:sp>
+      <p:sp>
+        <p:nvSpPr>
+          <p:cNvPr id="53" name="Text 51"/>
+          <p:cNvSpPr/>
+          <p:nvPr/>
+        </p:nvSpPr>
+        <p:spPr>
+          <a:xfrm>
+            <a:off x="3911969" y="4169664"/>
+            <a:ext cx="603504" cy="384048"/>
+          </a:xfrm>
+          <a:prstGeom prst="rect">
+            <a:avLst/>
+          </a:prstGeom>
+          <a:noFill/>
+          <a:ln/>
+        </p:spPr>
+        <p:txBody>
+          <a:bodyPr wrap="square" lIns="0" tIns="0" rIns="0" bIns="0" rtlCol="0" anchor="ctr"/>
+          <a:lstStyle/>
+          <a:p>
+            <a:pPr algn="ctr" indent="0" marL="0">
+              <a:buNone/>
+            </a:pPr>
+            <a:r>
+              <a:rPr lang="en-US" sz="900" b="1" dirty="0">
+                <a:solidFill>
+                  <a:srgbClr val="9D174D"/>
+                </a:solidFill>
+                <a:latin typeface="Trebuchet MS" pitchFamily="34" charset="0"/>
+                <a:ea typeface="Trebuchet MS" pitchFamily="34" charset="-122"/>
+                <a:cs typeface="Trebuchet MS" pitchFamily="34" charset="-120"/>
+              </a:rPr>
+              <a:t>e</a:t>
+            </a:r>
+            <a:endParaRPr lang="en-US" sz="900" dirty="0"/>
+          </a:p>
+        </p:txBody>
+      </p:sp>
+      <p:sp>
+        <p:nvSpPr>
+          <p:cNvPr id="54" name="Shape 52"/>
+          <p:cNvSpPr/>
+          <p:nvPr/>
+        </p:nvSpPr>
+        <p:spPr>
+          <a:xfrm>
+            <a:off x="4565350" y="4169664"/>
+            <a:ext cx="603504" cy="384048"/>
+          </a:xfrm>
+          <a:prstGeom prst="rect">
+            <a:avLst>
+              <a:gd name="adj" fmla="val 9524"/>
+            </a:avLst>
+          </a:prstGeom>
+          <a:solidFill>
+            <a:srgbClr val="FFFFFF"/>
+          </a:solidFill>
+          <a:ln w="12700">
+            <a:solidFill>
+              <a:srgbClr val="DB2777"/>
+            </a:solidFill>
+            <a:prstDash val="solid"/>
+          </a:ln>
+        </p:spPr>
+      </p:sp>
+      <p:sp>
+        <p:nvSpPr>
+          <p:cNvPr id="55" name="Text 53"/>
+          <p:cNvSpPr/>
+          <p:nvPr/>
+        </p:nvSpPr>
+        <p:spPr>
+          <a:xfrm>
+            <a:off x="4565350" y="4169664"/>
+            <a:ext cx="603504" cy="384048"/>
+          </a:xfrm>
+          <a:prstGeom prst="rect">
+            <a:avLst/>
+          </a:prstGeom>
+          <a:noFill/>
+          <a:ln/>
+        </p:spPr>
+        <p:txBody>
+          <a:bodyPr wrap="square" lIns="0" tIns="0" rIns="0" bIns="0" rtlCol="0" anchor="ctr"/>
+          <a:lstStyle/>
+          <a:p>
+            <a:pPr algn="ctr" indent="0" marL="0">
+              <a:buNone/>
+            </a:pPr>
+            <a:r>
+              <a:rPr lang="en-US" sz="900" b="1" dirty="0">
+                <a:solidFill>
+                  <a:srgbClr val="9D174D"/>
+                </a:solidFill>
+                <a:latin typeface="Trebuchet MS" pitchFamily="34" charset="0"/>
+                <a:ea typeface="Trebuchet MS" pitchFamily="34" charset="-122"/>
+                <a:cs typeface="Trebuchet MS" pitchFamily="34" charset="-120"/>
+              </a:rPr>
+              <a:t>x</a:t>
+            </a:r>
+            <a:endParaRPr lang="en-US" sz="900" dirty="0"/>
+          </a:p>
+        </p:txBody>
+      </p:sp>
+      <p:sp>
+        <p:nvSpPr>
+          <p:cNvPr id="56" name="Text 54"/>
+          <p:cNvSpPr/>
+          <p:nvPr/>
+        </p:nvSpPr>
+        <p:spPr>
+          <a:xfrm>
+            <a:off x="4565350" y="4572000"/>
+            <a:ext cx="603504" cy="219456"/>
           </a:xfrm>
           <a:prstGeom prst="rect">
             <a:avLst/>
@@ -35228,7 +35225,7 @@
                 <a:ea typeface="Calibri" pitchFamily="34" charset="-122"/>
                 <a:cs typeface="Calibri" pitchFamily="34" charset="-120"/>
               </a:rPr>
-              <a:t>/s/</a:t>
+              <a:t>/ks/</a:t>
             </a:r>
             <a:endParaRPr lang="en-US" sz="750" dirty="0"/>
           </a:p>
@@ -35236,14 +35233,14 @@
       </p:sp>
       <p:sp>
         <p:nvSpPr>
-          <p:cNvPr id="47" name="Shape 45"/>
-          <p:cNvSpPr/>
-          <p:nvPr/>
-        </p:nvSpPr>
-        <p:spPr>
-          <a:xfrm>
-            <a:off x="4447032" y="4169664"/>
-            <a:ext cx="685800" cy="384048"/>
+          <p:cNvPr id="57" name="Shape 55"/>
+          <p:cNvSpPr/>
+          <p:nvPr/>
+        </p:nvSpPr>
+        <p:spPr>
+          <a:xfrm>
+            <a:off x="5218730" y="4169664"/>
+            <a:ext cx="603504" cy="384048"/>
           </a:xfrm>
           <a:prstGeom prst="rect">
             <a:avLst>
@@ -35263,14 +35260,14 @@
       </p:sp>
       <p:sp>
         <p:nvSpPr>
-          <p:cNvPr id="48" name="Text 46"/>
-          <p:cNvSpPr/>
-          <p:nvPr/>
-        </p:nvSpPr>
-        <p:spPr>
-          <a:xfrm>
-            <a:off x="4447032" y="4169664"/>
-            <a:ext cx="685800" cy="384048"/>
+          <p:cNvPr id="58" name="Text 56"/>
+          <p:cNvSpPr/>
+          <p:nvPr/>
+        </p:nvSpPr>
+        <p:spPr>
+          <a:xfrm>
+            <a:off x="5218730" y="4169664"/>
+            <a:ext cx="603504" cy="384048"/>
           </a:xfrm>
           <a:prstGeom prst="rect">
             <a:avLst/>
@@ -35294,7 +35291,7 @@
                 <a:ea typeface="Trebuchet MS" pitchFamily="34" charset="-122"/>
                 <a:cs typeface="Trebuchet MS" pitchFamily="34" charset="-120"/>
               </a:rPr>
-              <a:t>i</a:t>
+              <a:t>c</a:t>
             </a:r>
             <a:endParaRPr lang="en-US" sz="900" dirty="0"/>
           </a:p>
@@ -35302,14 +35299,53 @@
       </p:sp>
       <p:sp>
         <p:nvSpPr>
-          <p:cNvPr id="49" name="Shape 47"/>
-          <p:cNvSpPr/>
-          <p:nvPr/>
-        </p:nvSpPr>
-        <p:spPr>
-          <a:xfrm>
-            <a:off x="5254752" y="4169664"/>
-            <a:ext cx="685800" cy="384048"/>
+          <p:cNvPr id="59" name="Text 57"/>
+          <p:cNvSpPr/>
+          <p:nvPr/>
+        </p:nvSpPr>
+        <p:spPr>
+          <a:xfrm>
+            <a:off x="5218730" y="4572000"/>
+            <a:ext cx="603504" cy="219456"/>
+          </a:xfrm>
+          <a:prstGeom prst="rect">
+            <a:avLst/>
+          </a:prstGeom>
+          <a:noFill/>
+          <a:ln/>
+        </p:spPr>
+        <p:txBody>
+          <a:bodyPr wrap="square" lIns="0" tIns="0" rIns="0" bIns="0" rtlCol="0" anchor="t"/>
+          <a:lstStyle/>
+          <a:p>
+            <a:pPr algn="ctr" indent="0" marL="0">
+              <a:buNone/>
+            </a:pPr>
+            <a:r>
+              <a:rPr lang="en-US" sz="750" i="1" dirty="0">
+                <a:solidFill>
+                  <a:srgbClr val="94A3B8"/>
+                </a:solidFill>
+                <a:latin typeface="Calibri" pitchFamily="34" charset="0"/>
+                <a:ea typeface="Calibri" pitchFamily="34" charset="-122"/>
+                <a:cs typeface="Calibri" pitchFamily="34" charset="-120"/>
+              </a:rPr>
+              <a:t>/s/</a:t>
+            </a:r>
+            <a:endParaRPr lang="en-US" sz="750" dirty="0"/>
+          </a:p>
+        </p:txBody>
+      </p:sp>
+      <p:sp>
+        <p:nvSpPr>
+          <p:cNvPr id="60" name="Shape 58"/>
+          <p:cNvSpPr/>
+          <p:nvPr/>
+        </p:nvSpPr>
+        <p:spPr>
+          <a:xfrm>
+            <a:off x="5872111" y="4169664"/>
+            <a:ext cx="603504" cy="384048"/>
           </a:xfrm>
           <a:prstGeom prst="rect">
             <a:avLst>
@@ -35329,14 +35365,14 @@
       </p:sp>
       <p:sp>
         <p:nvSpPr>
-          <p:cNvPr id="50" name="Text 48"/>
-          <p:cNvSpPr/>
-          <p:nvPr/>
-        </p:nvSpPr>
-        <p:spPr>
-          <a:xfrm>
-            <a:off x="5254752" y="4169664"/>
-            <a:ext cx="685800" cy="384048"/>
+          <p:cNvPr id="61" name="Text 59"/>
+          <p:cNvSpPr/>
+          <p:nvPr/>
+        </p:nvSpPr>
+        <p:spPr>
+          <a:xfrm>
+            <a:off x="5872111" y="4169664"/>
+            <a:ext cx="603504" cy="384048"/>
           </a:xfrm>
           <a:prstGeom prst="rect">
             <a:avLst/>
@@ -35360,7 +35396,7 @@
                 <a:ea typeface="Trebuchet MS" pitchFamily="34" charset="-122"/>
                 <a:cs typeface="Trebuchet MS" pitchFamily="34" charset="-120"/>
               </a:rPr>
-              <a:t>t</a:t>
+              <a:t>i</a:t>
             </a:r>
             <a:endParaRPr lang="en-US" sz="900" dirty="0"/>
           </a:p>
@@ -35368,14 +35404,14 @@
       </p:sp>
       <p:sp>
         <p:nvSpPr>
-          <p:cNvPr id="51" name="Shape 49"/>
-          <p:cNvSpPr/>
-          <p:nvPr/>
-        </p:nvSpPr>
-        <p:spPr>
-          <a:xfrm>
-            <a:off x="6062472" y="4169664"/>
-            <a:ext cx="685800" cy="384048"/>
+          <p:cNvPr id="62" name="Shape 60"/>
+          <p:cNvSpPr/>
+          <p:nvPr/>
+        </p:nvSpPr>
+        <p:spPr>
+          <a:xfrm>
+            <a:off x="6525491" y="4169664"/>
+            <a:ext cx="603504" cy="384048"/>
           </a:xfrm>
           <a:prstGeom prst="rect">
             <a:avLst>
@@ -35395,14 +35431,14 @@
       </p:sp>
       <p:sp>
         <p:nvSpPr>
-          <p:cNvPr id="52" name="Text 50"/>
-          <p:cNvSpPr/>
-          <p:nvPr/>
-        </p:nvSpPr>
-        <p:spPr>
-          <a:xfrm>
-            <a:off x="6062472" y="4169664"/>
-            <a:ext cx="685800" cy="384048"/>
+          <p:cNvPr id="63" name="Text 61"/>
+          <p:cNvSpPr/>
+          <p:nvPr/>
+        </p:nvSpPr>
+        <p:spPr>
+          <a:xfrm>
+            <a:off x="6525491" y="4169664"/>
+            <a:ext cx="603504" cy="384048"/>
           </a:xfrm>
           <a:prstGeom prst="rect">
             <a:avLst/>
@@ -35426,7 +35462,7 @@
                 <a:ea typeface="Trebuchet MS" pitchFamily="34" charset="-122"/>
                 <a:cs typeface="Trebuchet MS" pitchFamily="34" charset="-120"/>
               </a:rPr>
-              <a:t>a</a:t>
+              <a:t>t</a:t>
             </a:r>
             <a:endParaRPr lang="en-US" sz="900" dirty="0"/>
           </a:p>
@@ -35434,14 +35470,14 @@
       </p:sp>
       <p:sp>
         <p:nvSpPr>
-          <p:cNvPr id="53" name="Shape 51"/>
-          <p:cNvSpPr/>
-          <p:nvPr/>
-        </p:nvSpPr>
-        <p:spPr>
-          <a:xfrm>
-            <a:off x="6870192" y="4169664"/>
-            <a:ext cx="685800" cy="384048"/>
+          <p:cNvPr id="64" name="Shape 62"/>
+          <p:cNvSpPr/>
+          <p:nvPr/>
+        </p:nvSpPr>
+        <p:spPr>
+          <a:xfrm>
+            <a:off x="7178871" y="4169664"/>
+            <a:ext cx="603504" cy="384048"/>
           </a:xfrm>
           <a:prstGeom prst="rect">
             <a:avLst>
@@ -35461,14 +35497,14 @@
       </p:sp>
       <p:sp>
         <p:nvSpPr>
-          <p:cNvPr id="54" name="Text 52"/>
-          <p:cNvSpPr/>
-          <p:nvPr/>
-        </p:nvSpPr>
-        <p:spPr>
-          <a:xfrm>
-            <a:off x="6870192" y="4169664"/>
-            <a:ext cx="685800" cy="384048"/>
+          <p:cNvPr id="65" name="Text 63"/>
+          <p:cNvSpPr/>
+          <p:nvPr/>
+        </p:nvSpPr>
+        <p:spPr>
+          <a:xfrm>
+            <a:off x="7178871" y="4169664"/>
+            <a:ext cx="603504" cy="384048"/>
           </a:xfrm>
           <a:prstGeom prst="rect">
             <a:avLst/>
@@ -35492,7 +35528,7 @@
                 <a:ea typeface="Trebuchet MS" pitchFamily="34" charset="-122"/>
                 <a:cs typeface="Trebuchet MS" pitchFamily="34" charset="-120"/>
               </a:rPr>
-              <a:t>b</a:t>
+              <a:t>e</a:t>
             </a:r>
             <a:endParaRPr lang="en-US" sz="900" dirty="0"/>
           </a:p>
@@ -35500,14 +35536,14 @@
       </p:sp>
       <p:sp>
         <p:nvSpPr>
-          <p:cNvPr id="55" name="Shape 53"/>
-          <p:cNvSpPr/>
-          <p:nvPr/>
-        </p:nvSpPr>
-        <p:spPr>
-          <a:xfrm>
-            <a:off x="7677912" y="4169664"/>
-            <a:ext cx="685800" cy="384048"/>
+          <p:cNvPr id="66" name="Shape 64"/>
+          <p:cNvSpPr/>
+          <p:nvPr/>
+        </p:nvSpPr>
+        <p:spPr>
+          <a:xfrm>
+            <a:off x="7832252" y="4169664"/>
+            <a:ext cx="603504" cy="384048"/>
           </a:xfrm>
           <a:prstGeom prst="rect">
             <a:avLst>
@@ -35527,14 +35563,14 @@
       </p:sp>
       <p:sp>
         <p:nvSpPr>
-          <p:cNvPr id="56" name="Text 54"/>
-          <p:cNvSpPr/>
-          <p:nvPr/>
-        </p:nvSpPr>
-        <p:spPr>
-          <a:xfrm>
-            <a:off x="7677912" y="4169664"/>
-            <a:ext cx="685800" cy="384048"/>
+          <p:cNvPr id="67" name="Text 65"/>
+          <p:cNvSpPr/>
+          <p:nvPr/>
+        </p:nvSpPr>
+        <p:spPr>
+          <a:xfrm>
+            <a:off x="7832252" y="4169664"/>
+            <a:ext cx="603504" cy="384048"/>
           </a:xfrm>
           <a:prstGeom prst="rect">
             <a:avLst/>
@@ -35558,7 +35594,7 @@
                 <a:ea typeface="Trebuchet MS" pitchFamily="34" charset="-122"/>
                 <a:cs typeface="Trebuchet MS" pitchFamily="34" charset="-120"/>
               </a:rPr>
-              <a:t>le</a:t>
+              <a:t>d</a:t>
             </a:r>
             <a:endParaRPr lang="en-US" sz="900" dirty="0"/>
           </a:p>
@@ -35850,7 +35886,7 @@
                 <a:ea typeface="Calibri" pitchFamily="34" charset="-122"/>
                 <a:cs typeface="Calibri" pitchFamily="34" charset="-120"/>
               </a:rPr>
-              <a:t>Word Labs  •  wordlabs.app  •  Root: 'excite' = to stir up or rouse</a:t>
+              <a:t>Word Labs  •  wordlabs.app  •  Root: 'excite' = to stir up or arouse</a:t>
             </a:r>
             <a:endParaRPr lang="en-US" sz="800" dirty="0"/>
           </a:p>
@@ -37019,7 +37055,7 @@
                 <a:ea typeface="Calibri" pitchFamily="34" charset="-122"/>
                 <a:cs typeface="Calibri" pitchFamily="34" charset="-120"/>
               </a:rPr>
-              <a:t>Word Labs  •  wordlabs.app  •  Root: 'excite' = to stir up or rouse</a:t>
+              <a:t>Word Labs  •  wordlabs.app  •  Root: 'excite' = to stir up or arouse</a:t>
             </a:r>
             <a:endParaRPr lang="en-US" sz="800" dirty="0"/>
           </a:p>
@@ -37818,7 +37854,7 @@
                 <a:ea typeface="Trebuchet MS" pitchFamily="34" charset="-122"/>
                 <a:cs typeface="Trebuchet MS" pitchFamily="34" charset="-120"/>
               </a:rPr>
-              <a:t>super-</a:t>
+              <a:t>hyper-</a:t>
             </a:r>
             <a:endParaRPr lang="en-US" sz="1300" dirty="0"/>
           </a:p>
@@ -38429,7 +38465,7 @@
                 <a:ea typeface="Trebuchet MS" pitchFamily="34" charset="-122"/>
                 <a:cs typeface="Trebuchet MS" pitchFamily="34" charset="-120"/>
               </a:rPr>
-              <a:t>excitedly</a:t>
+              <a:t>excitation</a:t>
             </a:r>
             <a:endParaRPr lang="en-US" sz="1200" dirty="0"/>
           </a:p>
@@ -38495,7 +38531,7 @@
                 <a:ea typeface="Trebuchet MS" pitchFamily="34" charset="-122"/>
                 <a:cs typeface="Trebuchet MS" pitchFamily="34" charset="-120"/>
               </a:rPr>
-              <a:t>excitation</a:t>
+              <a:t>overexcited</a:t>
             </a:r>
             <a:endParaRPr lang="en-US" sz="1200" dirty="0"/>
           </a:p>
@@ -38561,7 +38597,7 @@
                 <a:ea typeface="Trebuchet MS" pitchFamily="34" charset="-122"/>
                 <a:cs typeface="Trebuchet MS" pitchFamily="34" charset="-120"/>
               </a:rPr>
-              <a:t>overexcited</a:t>
+              <a:t>excitedly</a:t>
             </a:r>
             <a:endParaRPr lang="en-US" sz="1200" dirty="0"/>
           </a:p>
@@ -38627,7 +38663,7 @@
                 <a:ea typeface="Trebuchet MS" pitchFamily="34" charset="-122"/>
                 <a:cs typeface="Trebuchet MS" pitchFamily="34" charset="-120"/>
               </a:rPr>
-              <a:t>unexcited</a:t>
+              <a:t>unexciting</a:t>
             </a:r>
             <a:endParaRPr lang="en-US" sz="1200" dirty="0"/>
           </a:p>
@@ -38919,7 +38955,7 @@
                 <a:ea typeface="Calibri" pitchFamily="34" charset="-122"/>
                 <a:cs typeface="Calibri" pitchFamily="34" charset="-120"/>
               </a:rPr>
-              <a:t>Word Labs  •  wordlabs.app  •  Root: 'excite' = to stir up or rouse</a:t>
+              <a:t>Word Labs  •  wordlabs.app  •  Root: 'excite' = to stir up or arouse</a:t>
             </a:r>
             <a:endParaRPr lang="en-US" sz="800" dirty="0"/>
           </a:p>
@@ -39083,7 +39119,7 @@
                 <a:ea typeface="Calibri" pitchFamily="34" charset="-122"/>
                 <a:cs typeface="Calibri" pitchFamily="34" charset="-120"/>
               </a:rPr>
-              <a:t>The core part of a word carrying its basic meaning. For example, 'excite' means 'to stir up or rouse'.</a:t>
+              <a:t>The core part of a word carrying its basic meaning. For example, 'excite' means 'to stir up or arouse'.</a:t>
             </a:r>
             <a:endParaRPr lang="en-US" sz="1350" dirty="0"/>
           </a:p>
@@ -39703,7 +39739,7 @@
                 <a:ea typeface="Calibri" pitchFamily="34" charset="-122"/>
                 <a:cs typeface="Calibri" pitchFamily="34" charset="-120"/>
               </a:rPr>
-              <a:t>Word Labs  •  wordlabs.app  •  Root: 'excite' = to stir up or rouse</a:t>
+              <a:t>Word Labs  •  wordlabs.app  •  Root: 'excite' = to stir up or arouse</a:t>
             </a:r>
             <a:endParaRPr lang="en-US" sz="800" dirty="0"/>
           </a:p>
@@ -39815,7 +39851,7 @@
                 <a:ea typeface="Calibri" pitchFamily="34" charset="-122"/>
                 <a:cs typeface="Calibri" pitchFamily="34" charset="-120"/>
               </a:rPr>
-              <a:t>1.  The root 'excite' comes from a Latin word meaning to stir up or rouse.</a:t>
+              <a:t>1.  The word 'excited' does not contain the root 'excite'.</a:t>
             </a:r>
             <a:endParaRPr lang="en-US" sz="1300" dirty="0"/>
           </a:p>
@@ -39838,11 +39874,11 @@
             </a:avLst>
           </a:prstGeom>
           <a:solidFill>
-            <a:srgbClr val="DCFCE7"/>
-          </a:solidFill>
-          <a:ln w="12700">
-            <a:solidFill>
-              <a:srgbClr val="16A34A"/>
+            <a:srgbClr val="FEE2E2"/>
+          </a:solidFill>
+          <a:ln w="12700">
+            <a:solidFill>
+              <a:srgbClr val="DC2626"/>
             </a:solidFill>
             <a:prstDash val="solid"/>
           </a:ln>
@@ -39875,13 +39911,13 @@
             <a:r>
               <a:rPr lang="en-US" sz="1100" b="1" dirty="0">
                 <a:solidFill>
-                  <a:srgbClr val="16A34A"/>
+                  <a:srgbClr val="DC2626"/>
                 </a:solidFill>
                 <a:latin typeface="Trebuchet MS" pitchFamily="34" charset="0"/>
                 <a:ea typeface="Trebuchet MS" pitchFamily="34" charset="-122"/>
                 <a:cs typeface="Trebuchet MS" pitchFamily="34" charset="-120"/>
               </a:rPr>
-              <a:t>TRUE</a:t>
+              <a:t>FALSE</a:t>
             </a:r>
             <a:endParaRPr lang="en-US" sz="1100" dirty="0"/>
           </a:p>
@@ -39954,7 +39990,7 @@
                 <a:ea typeface="Calibri" pitchFamily="34" charset="-122"/>
                 <a:cs typeface="Calibri" pitchFamily="34" charset="-120"/>
               </a:rPr>
-              <a:t>2.  The word 'excitement' is formed by adding the prefix 'ex' and the suffix 'ment' to the root 'cite'.</a:t>
+              <a:t>2.  The root 'excite' means to make someone feel calm and sleepy.</a:t>
             </a:r>
             <a:endParaRPr lang="en-US" sz="1300" dirty="0"/>
           </a:p>
@@ -40093,7 +40129,7 @@
                 <a:ea typeface="Calibri" pitchFamily="34" charset="-122"/>
                 <a:cs typeface="Calibri" pitchFamily="34" charset="-120"/>
               </a:rPr>
-              <a:t>3.  Adding '-ing' to 'excite' gives us the word 'exciting'.</a:t>
+              <a:t>3.  The root 'excite' comes from the Latin word 'excitare'.</a:t>
             </a:r>
             <a:endParaRPr lang="en-US" sz="1300" dirty="0"/>
           </a:p>
@@ -40232,7 +40268,7 @@
                 <a:ea typeface="Calibri" pitchFamily="34" charset="-122"/>
                 <a:cs typeface="Calibri" pitchFamily="34" charset="-120"/>
               </a:rPr>
-              <a:t>4.  The word 'overexcited' means being far too excited or worked up.</a:t>
+              <a:t>4.  Adding the suffix '-ment' to 'excite' makes the word 'excitement'.</a:t>
             </a:r>
             <a:endParaRPr lang="en-US" sz="1300" dirty="0"/>
           </a:p>
@@ -40371,7 +40407,7 @@
                 <a:ea typeface="Calibri" pitchFamily="34" charset="-122"/>
                 <a:cs typeface="Calibri" pitchFamily="34" charset="-120"/>
               </a:rPr>
-              <a:t>5.  The root 'excite' means to calm down or settle.</a:t>
+              <a:t>5.  The prefix 'over' can be added to 'excited' to mean too excited.</a:t>
             </a:r>
             <a:endParaRPr lang="en-US" sz="1300" dirty="0"/>
           </a:p>
@@ -40394,11 +40430,11 @@
             </a:avLst>
           </a:prstGeom>
           <a:solidFill>
-            <a:srgbClr val="FEE2E2"/>
-          </a:solidFill>
-          <a:ln w="12700">
-            <a:solidFill>
-              <a:srgbClr val="DC2626"/>
+            <a:srgbClr val="DCFCE7"/>
+          </a:solidFill>
+          <a:ln w="12700">
+            <a:solidFill>
+              <a:srgbClr val="16A34A"/>
             </a:solidFill>
             <a:prstDash val="solid"/>
           </a:ln>
@@ -40431,13 +40467,13 @@
             <a:r>
               <a:rPr lang="en-US" sz="1100" b="1" dirty="0">
                 <a:solidFill>
-                  <a:srgbClr val="DC2626"/>
+                  <a:srgbClr val="16A34A"/>
                 </a:solidFill>
                 <a:latin typeface="Trebuchet MS" pitchFamily="34" charset="0"/>
                 <a:ea typeface="Trebuchet MS" pitchFamily="34" charset="-122"/>
                 <a:cs typeface="Trebuchet MS" pitchFamily="34" charset="-120"/>
               </a:rPr>
-              <a:t>FALSE</a:t>
+              <a:t>TRUE</a:t>
             </a:r>
             <a:endParaRPr lang="en-US" sz="1100" dirty="0"/>
           </a:p>
@@ -40729,7 +40765,7 @@
                 <a:ea typeface="Calibri" pitchFamily="34" charset="-122"/>
                 <a:cs typeface="Calibri" pitchFamily="34" charset="-120"/>
               </a:rPr>
-              <a:t>Word Labs  •  wordlabs.app  •  Root: 'excite' = to stir up or rouse</a:t>
+              <a:t>Word Labs  •  wordlabs.app  •  Root: 'excite' = to stir up or arouse</a:t>
             </a:r>
             <a:endParaRPr lang="en-US" sz="800" dirty="0"/>
           </a:p>
@@ -40866,7 +40902,7 @@
                 <a:ea typeface="Trebuchet MS" pitchFamily="34" charset="-122"/>
                 <a:cs typeface="Trebuchet MS" pitchFamily="34" charset="-120"/>
               </a:rPr>
-              <a:t>to stir up or rouse</a:t>
+              <a:t>to stir up or arouse</a:t>
             </a:r>
             <a:endParaRPr lang="en-US" sz="2000" dirty="0"/>
           </a:p>
@@ -41274,7 +41310,7 @@
                 <a:ea typeface="Trebuchet MS" pitchFamily="34" charset="-122"/>
                 <a:cs typeface="Trebuchet MS" pitchFamily="34" charset="-120"/>
               </a:rPr>
-              <a:t>excitedly</a:t>
+              <a:t>excitation</a:t>
             </a:r>
             <a:endParaRPr lang="en-US" sz="1300" dirty="0"/>
           </a:p>
@@ -41340,7 +41376,7 @@
                 <a:ea typeface="Trebuchet MS" pitchFamily="34" charset="-122"/>
                 <a:cs typeface="Trebuchet MS" pitchFamily="34" charset="-120"/>
               </a:rPr>
-              <a:t>excitation</a:t>
+              <a:t>overexcited</a:t>
             </a:r>
             <a:endParaRPr lang="en-US" sz="1300" dirty="0"/>
           </a:p>
@@ -41406,7 +41442,7 @@
                 <a:ea typeface="Trebuchet MS" pitchFamily="34" charset="-122"/>
                 <a:cs typeface="Trebuchet MS" pitchFamily="34" charset="-120"/>
               </a:rPr>
-              <a:t>overexcited</a:t>
+              <a:t>excitedly</a:t>
             </a:r>
             <a:endParaRPr lang="en-US" sz="1300" dirty="0"/>
           </a:p>
@@ -41698,7 +41734,7 @@
                 <a:ea typeface="Calibri" pitchFamily="34" charset="-122"/>
                 <a:cs typeface="Calibri" pitchFamily="34" charset="-120"/>
               </a:rPr>
-              <a:t>Word Labs  •  wordlabs.app  •  Root: 'excite' = to stir up or rouse</a:t>
+              <a:t>Word Labs  •  wordlabs.app  •  Root: 'excite' = to stir up or arouse</a:t>
             </a:r>
             <a:endParaRPr lang="en-US" sz="800" dirty="0"/>
           </a:p>
@@ -42497,7 +42533,7 @@
                 <a:ea typeface="Trebuchet MS" pitchFamily="34" charset="-122"/>
                 <a:cs typeface="Trebuchet MS" pitchFamily="34" charset="-120"/>
               </a:rPr>
-              <a:t>super-</a:t>
+              <a:t>hyper-</a:t>
             </a:r>
             <a:endParaRPr lang="en-US" sz="1300" dirty="0"/>
           </a:p>
@@ -43472,7 +43508,7 @@
                 <a:ea typeface="Calibri" pitchFamily="34" charset="-122"/>
                 <a:cs typeface="Calibri" pitchFamily="34" charset="-120"/>
               </a:rPr>
-              <a:t>Word Labs  •  wordlabs.app  •  Root: 'excite' = to stir up or rouse</a:t>
+              <a:t>Word Labs  •  wordlabs.app  •  Root: 'excite' = to stir up or arouse</a:t>
             </a:r>
             <a:endParaRPr lang="en-US" sz="800" dirty="0"/>
           </a:p>
@@ -43650,7 +43686,7 @@
                 <a:ea typeface="Calibri" pitchFamily="34" charset="-122"/>
                 <a:cs typeface="Calibri" pitchFamily="34" charset="-120"/>
               </a:rPr>
-              <a:t>Describing someone or something that gets worked up or thrilled very easily.</a:t>
+              <a:t>Describing a person or animal that gets worked up and enthusiastic very easily.</a:t>
             </a:r>
             <a:endParaRPr lang="en-US" sz="1200" dirty="0"/>
           </a:p>
@@ -43789,7 +43825,7 @@
                 <a:ea typeface="Calibri" pitchFamily="34" charset="-122"/>
                 <a:cs typeface="Calibri" pitchFamily="34" charset="-120"/>
               </a:rPr>
-              <a:t>Feeling very happy and eager about something that is happening or about to happen.</a:t>
+              <a:t>Feeling very happy and enthusiastic about something that is happening or about to happen.</a:t>
             </a:r>
             <a:endParaRPr lang="en-US" sz="1200" dirty="0"/>
           </a:p>
@@ -43928,7 +43964,7 @@
                 <a:ea typeface="Calibri" pitchFamily="34" charset="-122"/>
                 <a:cs typeface="Calibri" pitchFamily="34" charset="-120"/>
               </a:rPr>
-              <a:t>Being so excited that you have too much energy and can't calm down.</a:t>
+              <a:t>Doing something in a very enthusiastic and energetic way, showing lots of happiness.</a:t>
             </a:r>
             <a:endParaRPr lang="en-US" sz="1200" dirty="0"/>
           </a:p>
@@ -44067,7 +44103,7 @@
                 <a:ea typeface="Calibri" pitchFamily="34" charset="-122"/>
                 <a:cs typeface="Calibri" pitchFamily="34" charset="-120"/>
               </a:rPr>
-              <a:t>The feeling you get when something thrilling or wonderful is about to happen.</a:t>
+              <a:t>The feeling of being very happy, enthusiastic, and full of energy about something.</a:t>
             </a:r>
             <a:endParaRPr lang="en-US" sz="1200" dirty="0"/>
           </a:p>
@@ -44140,7 +44176,7 @@
                 <a:ea typeface="Trebuchet MS" pitchFamily="34" charset="-122"/>
                 <a:cs typeface="Trebuchet MS" pitchFamily="34" charset="-120"/>
               </a:rPr>
-              <a:t>excitedly</a:t>
+              <a:t>excitation</a:t>
             </a:r>
             <a:endParaRPr lang="en-US" sz="1200" dirty="0"/>
           </a:p>
@@ -44206,7 +44242,7 @@
                 <a:ea typeface="Calibri" pitchFamily="34" charset="-122"/>
                 <a:cs typeface="Calibri" pitchFamily="34" charset="-120"/>
               </a:rPr>
-              <a:t>The process of making something or someone full of energy or activity.</a:t>
+              <a:t>Feeling so excited that you can barely calm down — more excited than you should be.</a:t>
             </a:r>
             <a:endParaRPr lang="en-US" sz="1200" dirty="0"/>
           </a:p>
@@ -44279,7 +44315,7 @@
                 <a:ea typeface="Trebuchet MS" pitchFamily="34" charset="-122"/>
                 <a:cs typeface="Trebuchet MS" pitchFamily="34" charset="-120"/>
               </a:rPr>
-              <a:t>excitation</a:t>
+              <a:t>overexcited</a:t>
             </a:r>
             <a:endParaRPr lang="en-US" sz="1200" dirty="0"/>
           </a:p>
@@ -44345,7 +44381,7 @@
                 <a:ea typeface="Calibri" pitchFamily="34" charset="-122"/>
                 <a:cs typeface="Calibri" pitchFamily="34" charset="-120"/>
               </a:rPr>
-              <a:t>Doing something in a way that shows you are very happy and eager.</a:t>
+              <a:t>The process of stirring something up or causing a state of energy and activity.</a:t>
             </a:r>
             <a:endParaRPr lang="en-US" sz="1200" dirty="0"/>
           </a:p>
@@ -44418,7 +44454,7 @@
                 <a:ea typeface="Trebuchet MS" pitchFamily="34" charset="-122"/>
                 <a:cs typeface="Trebuchet MS" pitchFamily="34" charset="-120"/>
               </a:rPr>
-              <a:t>overexcited</a:t>
+              <a:t>excitedly</a:t>
             </a:r>
             <a:endParaRPr lang="en-US" sz="1200" dirty="0"/>
           </a:p>
@@ -44484,7 +44520,7 @@
                 <a:ea typeface="Calibri" pitchFamily="34" charset="-122"/>
                 <a:cs typeface="Calibri" pitchFamily="34" charset="-120"/>
               </a:rPr>
-              <a:t>Something that makes you feel happy, energetic, or full of interest.</a:t>
+              <a:t>Something that makes you feel thrilled and full of energy.</a:t>
             </a:r>
             <a:endParaRPr lang="en-US" sz="1200" dirty="0"/>
           </a:p>
@@ -44776,7 +44812,7 @@
                 <a:ea typeface="Calibri" pitchFamily="34" charset="-122"/>
                 <a:cs typeface="Calibri" pitchFamily="34" charset="-120"/>
               </a:rPr>
-              <a:t>Word Labs  •  wordlabs.app  •  Root: 'excite' = to stir up or rouse</a:t>
+              <a:t>Word Labs  •  wordlabs.app  •  Root: 'excite' = to stir up or arouse</a:t>
             </a:r>
             <a:endParaRPr lang="en-US" sz="800" dirty="0"/>
           </a:p>
@@ -44979,7 +45015,7 @@
                 <a:ea typeface="Calibri" pitchFamily="34" charset="-122"/>
                 <a:cs typeface="Calibri" pitchFamily="34" charset="-120"/>
               </a:rPr>
-              <a:t>The children were so excited about the school excursion that they could hardly sleep the night before.</a:t>
+              <a:t>The children were so excited about the school excursion that they could barely sleep the night before.</a:t>
             </a:r>
             <a:endParaRPr lang="en-US" sz="1500" dirty="0"/>
           </a:p>
@@ -45143,7 +45179,7 @@
                 <a:ea typeface="Calibri" pitchFamily="34" charset="-122"/>
                 <a:cs typeface="Calibri" pitchFamily="34" charset="-120"/>
               </a:rPr>
-              <a:t>Our teacher told us that learning about space is one of the most exciting topics in science.</a:t>
+              <a:t>The excitement in the classroom was clear when the teacher announced a special science experiment.</a:t>
             </a:r>
             <a:endParaRPr lang="en-US" sz="1500" dirty="0"/>
           </a:p>
@@ -45307,7 +45343,7 @@
                 <a:ea typeface="Calibri" pitchFamily="34" charset="-122"/>
                 <a:cs typeface="Calibri" pitchFamily="34" charset="-120"/>
               </a:rPr>
-              <a:t>You could feel the excitement in the room when the principal announced the surprise assembly.</a:t>
+              <a:t>Jumping on a trampoline is an exciting activity that many students enjoy on weekends.</a:t>
             </a:r>
             <a:endParaRPr lang="en-US" sz="1500" dirty="0"/>
           </a:p>

--- a/output/wordlabs-excite-3day.pptx
+++ b/output/wordlabs-excite-3day.pptx
@@ -10746,11 +10746,11 @@
         <p:spPr>
           <a:xfrm>
             <a:off x="1874520" y="4096512"/>
-            <a:ext cx="6903720" cy="804672"/>
+            <a:ext cx="6903720" cy="658368"/>
           </a:xfrm>
           <a:prstGeom prst="rect">
             <a:avLst>
-              <a:gd name="adj" fmla="val 6818"/>
+              <a:gd name="adj" fmla="val 8333"/>
             </a:avLst>
           </a:prstGeom>
           <a:solidFill>
@@ -10772,12 +10772,12 @@
         </p:nvSpPr>
         <p:spPr>
           <a:xfrm>
-            <a:off x="2124837" y="4169664"/>
-            <a:ext cx="685800" cy="384048"/>
+            <a:off x="1951828" y="4169664"/>
+            <a:ext cx="603504" cy="475488"/>
           </a:xfrm>
           <a:prstGeom prst="rect">
             <a:avLst>
-              <a:gd name="adj" fmla="val 9524"/>
+              <a:gd name="adj" fmla="val 7692"/>
             </a:avLst>
           </a:prstGeom>
           <a:solidFill>
@@ -10799,8 +10799,8 @@
         </p:nvSpPr>
         <p:spPr>
           <a:xfrm>
-            <a:off x="2124837" y="4169664"/>
-            <a:ext cx="685800" cy="384048"/>
+            <a:off x="1951828" y="4169664"/>
+            <a:ext cx="603504" cy="475488"/>
           </a:xfrm>
           <a:prstGeom prst="rect">
             <a:avLst/>
@@ -10838,12 +10838,12 @@
         </p:nvSpPr>
         <p:spPr>
           <a:xfrm>
-            <a:off x="3033522" y="4169664"/>
-            <a:ext cx="685800" cy="384048"/>
+            <a:off x="2605209" y="4169664"/>
+            <a:ext cx="603504" cy="475488"/>
           </a:xfrm>
           <a:prstGeom prst="rect">
             <a:avLst>
-              <a:gd name="adj" fmla="val 9524"/>
+              <a:gd name="adj" fmla="val 7692"/>
             </a:avLst>
           </a:prstGeom>
           <a:solidFill>
@@ -10865,8 +10865,8 @@
         </p:nvSpPr>
         <p:spPr>
           <a:xfrm>
-            <a:off x="3033522" y="4169664"/>
-            <a:ext cx="685800" cy="384048"/>
+            <a:off x="2605209" y="4169664"/>
+            <a:ext cx="603504" cy="475488"/>
           </a:xfrm>
           <a:prstGeom prst="rect">
             <a:avLst/>
@@ -10898,57 +10898,18 @@
       </p:sp>
       <p:sp>
         <p:nvSpPr>
-          <p:cNvPr id="41" name="Text 39"/>
-          <p:cNvSpPr/>
-          <p:nvPr/>
-        </p:nvSpPr>
-        <p:spPr>
-          <a:xfrm>
-            <a:off x="3033522" y="4572000"/>
-            <a:ext cx="685800" cy="219456"/>
-          </a:xfrm>
-          <a:prstGeom prst="rect">
-            <a:avLst/>
-          </a:prstGeom>
-          <a:noFill/>
-          <a:ln/>
-        </p:spPr>
-        <p:txBody>
-          <a:bodyPr wrap="square" lIns="0" tIns="0" rIns="0" bIns="0" rtlCol="0" anchor="t"/>
-          <a:lstStyle/>
-          <a:p>
-            <a:pPr algn="ctr" indent="0" marL="0">
-              <a:buNone/>
-            </a:pPr>
-            <a:r>
-              <a:rPr lang="en-US" sz="750" i="1" dirty="0">
-                <a:solidFill>
-                  <a:srgbClr val="94A3B8"/>
-                </a:solidFill>
-                <a:latin typeface="Calibri" pitchFamily="34" charset="0"/>
-                <a:ea typeface="Calibri" pitchFamily="34" charset="-122"/>
-                <a:cs typeface="Calibri" pitchFamily="34" charset="-120"/>
-              </a:rPr>
-              <a:t>/ks/</a:t>
-            </a:r>
-            <a:endParaRPr lang="en-US" sz="750" dirty="0"/>
-          </a:p>
-        </p:txBody>
-      </p:sp>
-      <p:sp>
-        <p:nvSpPr>
-          <p:cNvPr id="42" name="Shape 40"/>
-          <p:cNvSpPr/>
-          <p:nvPr/>
-        </p:nvSpPr>
-        <p:spPr>
-          <a:xfrm>
-            <a:off x="3942207" y="4169664"/>
-            <a:ext cx="685800" cy="384048"/>
+          <p:cNvPr id="41" name="Shape 39"/>
+          <p:cNvSpPr/>
+          <p:nvPr/>
+        </p:nvSpPr>
+        <p:spPr>
+          <a:xfrm>
+            <a:off x="3258589" y="4169664"/>
+            <a:ext cx="603504" cy="475488"/>
           </a:xfrm>
           <a:prstGeom prst="rect">
             <a:avLst>
-              <a:gd name="adj" fmla="val 9524"/>
+              <a:gd name="adj" fmla="val 7692"/>
             </a:avLst>
           </a:prstGeom>
           <a:solidFill>
@@ -10964,14 +10925,14 @@
       </p:sp>
       <p:sp>
         <p:nvSpPr>
-          <p:cNvPr id="43" name="Text 41"/>
-          <p:cNvSpPr/>
-          <p:nvPr/>
-        </p:nvSpPr>
-        <p:spPr>
-          <a:xfrm>
-            <a:off x="3942207" y="4169664"/>
-            <a:ext cx="685800" cy="384048"/>
+          <p:cNvPr id="42" name="Text 40"/>
+          <p:cNvSpPr/>
+          <p:nvPr/>
+        </p:nvSpPr>
+        <p:spPr>
+          <a:xfrm>
+            <a:off x="3258589" y="4169664"/>
+            <a:ext cx="603504" cy="475488"/>
           </a:xfrm>
           <a:prstGeom prst="rect">
             <a:avLst/>
@@ -10995,7 +10956,7 @@
                 <a:ea typeface="Trebuchet MS" pitchFamily="34" charset="-122"/>
                 <a:cs typeface="Trebuchet MS" pitchFamily="34" charset="-120"/>
               </a:rPr>
-              <a:t>ite</a:t>
+              <a:t>c</a:t>
             </a:r>
             <a:endParaRPr lang="en-US" sz="900" dirty="0"/>
           </a:p>
@@ -11003,80 +10964,41 @@
       </p:sp>
       <p:sp>
         <p:nvSpPr>
+          <p:cNvPr id="43" name="Shape 41"/>
+          <p:cNvSpPr/>
+          <p:nvPr/>
+        </p:nvSpPr>
+        <p:spPr>
+          <a:xfrm>
+            <a:off x="3911969" y="4169664"/>
+            <a:ext cx="603504" cy="475488"/>
+          </a:xfrm>
+          <a:prstGeom prst="rect">
+            <a:avLst>
+              <a:gd name="adj" fmla="val 7692"/>
+            </a:avLst>
+          </a:prstGeom>
+          <a:solidFill>
+            <a:srgbClr val="FFFFFF"/>
+          </a:solidFill>
+          <a:ln w="12700">
+            <a:solidFill>
+              <a:srgbClr val="DB2777"/>
+            </a:solidFill>
+            <a:prstDash val="solid"/>
+          </a:ln>
+        </p:spPr>
+      </p:sp>
+      <p:sp>
+        <p:nvSpPr>
           <p:cNvPr id="44" name="Text 42"/>
           <p:cNvSpPr/>
           <p:nvPr/>
         </p:nvSpPr>
         <p:spPr>
           <a:xfrm>
-            <a:off x="3942207" y="4572000"/>
-            <a:ext cx="685800" cy="219456"/>
-          </a:xfrm>
-          <a:prstGeom prst="rect">
-            <a:avLst/>
-          </a:prstGeom>
-          <a:noFill/>
-          <a:ln/>
-        </p:spPr>
-        <p:txBody>
-          <a:bodyPr wrap="square" lIns="0" tIns="0" rIns="0" bIns="0" rtlCol="0" anchor="t"/>
-          <a:lstStyle/>
-          <a:p>
-            <a:pPr algn="ctr" indent="0" marL="0">
-              <a:buNone/>
-            </a:pPr>
-            <a:r>
-              <a:rPr lang="en-US" sz="750" i="1" dirty="0">
-                <a:solidFill>
-                  <a:srgbClr val="94A3B8"/>
-                </a:solidFill>
-                <a:latin typeface="Calibri" pitchFamily="34" charset="0"/>
-                <a:ea typeface="Calibri" pitchFamily="34" charset="-122"/>
-                <a:cs typeface="Calibri" pitchFamily="34" charset="-120"/>
-              </a:rPr>
-              <a:t>/ight/</a:t>
-            </a:r>
-            <a:endParaRPr lang="en-US" sz="750" dirty="0"/>
-          </a:p>
-        </p:txBody>
-      </p:sp>
-      <p:sp>
-        <p:nvSpPr>
-          <p:cNvPr id="45" name="Shape 43"/>
-          <p:cNvSpPr/>
-          <p:nvPr/>
-        </p:nvSpPr>
-        <p:spPr>
-          <a:xfrm>
-            <a:off x="4850892" y="4169664"/>
-            <a:ext cx="685800" cy="384048"/>
-          </a:xfrm>
-          <a:prstGeom prst="rect">
-            <a:avLst>
-              <a:gd name="adj" fmla="val 9524"/>
-            </a:avLst>
-          </a:prstGeom>
-          <a:solidFill>
-            <a:srgbClr val="FFFFFF"/>
-          </a:solidFill>
-          <a:ln w="12700">
-            <a:solidFill>
-              <a:srgbClr val="DB2777"/>
-            </a:solidFill>
-            <a:prstDash val="solid"/>
-          </a:ln>
-        </p:spPr>
-      </p:sp>
-      <p:sp>
-        <p:nvSpPr>
-          <p:cNvPr id="46" name="Text 44"/>
-          <p:cNvSpPr/>
-          <p:nvPr/>
-        </p:nvSpPr>
-        <p:spPr>
-          <a:xfrm>
-            <a:off x="4850892" y="4169664"/>
-            <a:ext cx="685800" cy="384048"/>
+            <a:off x="3911969" y="4169664"/>
+            <a:ext cx="603504" cy="475488"/>
           </a:xfrm>
           <a:prstGeom prst="rect">
             <a:avLst/>
@@ -11100,7 +11022,7 @@
                 <a:ea typeface="Trebuchet MS" pitchFamily="34" charset="-122"/>
                 <a:cs typeface="Trebuchet MS" pitchFamily="34" charset="-120"/>
               </a:rPr>
-              <a:t>m</a:t>
+              <a:t>i</a:t>
             </a:r>
             <a:endParaRPr lang="en-US" sz="900" dirty="0"/>
           </a:p>
@@ -11108,18 +11030,18 @@
       </p:sp>
       <p:sp>
         <p:nvSpPr>
-          <p:cNvPr id="47" name="Shape 45"/>
-          <p:cNvSpPr/>
-          <p:nvPr/>
-        </p:nvSpPr>
-        <p:spPr>
-          <a:xfrm>
-            <a:off x="5759577" y="4169664"/>
-            <a:ext cx="685800" cy="384048"/>
+          <p:cNvPr id="45" name="Shape 43"/>
+          <p:cNvSpPr/>
+          <p:nvPr/>
+        </p:nvSpPr>
+        <p:spPr>
+          <a:xfrm>
+            <a:off x="4565350" y="4169664"/>
+            <a:ext cx="603504" cy="475488"/>
           </a:xfrm>
           <a:prstGeom prst="rect">
             <a:avLst>
-              <a:gd name="adj" fmla="val 9524"/>
+              <a:gd name="adj" fmla="val 7692"/>
             </a:avLst>
           </a:prstGeom>
           <a:solidFill>
@@ -11135,14 +11057,14 @@
       </p:sp>
       <p:sp>
         <p:nvSpPr>
-          <p:cNvPr id="48" name="Text 46"/>
-          <p:cNvSpPr/>
-          <p:nvPr/>
-        </p:nvSpPr>
-        <p:spPr>
-          <a:xfrm>
-            <a:off x="5759577" y="4169664"/>
-            <a:ext cx="685800" cy="384048"/>
+          <p:cNvPr id="46" name="Text 44"/>
+          <p:cNvSpPr/>
+          <p:nvPr/>
+        </p:nvSpPr>
+        <p:spPr>
+          <a:xfrm>
+            <a:off x="4565350" y="4169664"/>
+            <a:ext cx="603504" cy="475488"/>
           </a:xfrm>
           <a:prstGeom prst="rect">
             <a:avLst/>
@@ -11166,7 +11088,7 @@
                 <a:ea typeface="Trebuchet MS" pitchFamily="34" charset="-122"/>
                 <a:cs typeface="Trebuchet MS" pitchFamily="34" charset="-120"/>
               </a:rPr>
-              <a:t>e</a:t>
+              <a:t>t</a:t>
             </a:r>
             <a:endParaRPr lang="en-US" sz="900" dirty="0"/>
           </a:p>
@@ -11174,18 +11096,18 @@
       </p:sp>
       <p:sp>
         <p:nvSpPr>
-          <p:cNvPr id="49" name="Shape 47"/>
-          <p:cNvSpPr/>
-          <p:nvPr/>
-        </p:nvSpPr>
-        <p:spPr>
-          <a:xfrm>
-            <a:off x="6668262" y="4169664"/>
-            <a:ext cx="685800" cy="384048"/>
+          <p:cNvPr id="47" name="Shape 45"/>
+          <p:cNvSpPr/>
+          <p:nvPr/>
+        </p:nvSpPr>
+        <p:spPr>
+          <a:xfrm>
+            <a:off x="5218730" y="4169664"/>
+            <a:ext cx="603504" cy="475488"/>
           </a:xfrm>
           <a:prstGeom prst="rect">
             <a:avLst>
-              <a:gd name="adj" fmla="val 9524"/>
+              <a:gd name="adj" fmla="val 7692"/>
             </a:avLst>
           </a:prstGeom>
           <a:solidFill>
@@ -11201,14 +11123,14 @@
       </p:sp>
       <p:sp>
         <p:nvSpPr>
-          <p:cNvPr id="50" name="Text 48"/>
-          <p:cNvSpPr/>
-          <p:nvPr/>
-        </p:nvSpPr>
-        <p:spPr>
-          <a:xfrm>
-            <a:off x="6668262" y="4169664"/>
-            <a:ext cx="685800" cy="384048"/>
+          <p:cNvPr id="48" name="Text 46"/>
+          <p:cNvSpPr/>
+          <p:nvPr/>
+        </p:nvSpPr>
+        <p:spPr>
+          <a:xfrm>
+            <a:off x="5218730" y="4169664"/>
+            <a:ext cx="603504" cy="475488"/>
           </a:xfrm>
           <a:prstGeom prst="rect">
             <a:avLst/>
@@ -11232,6 +11154,204 @@
                 <a:ea typeface="Trebuchet MS" pitchFamily="34" charset="-122"/>
                 <a:cs typeface="Trebuchet MS" pitchFamily="34" charset="-120"/>
               </a:rPr>
+              <a:t>e</a:t>
+            </a:r>
+            <a:endParaRPr lang="en-US" sz="900" dirty="0"/>
+          </a:p>
+        </p:txBody>
+      </p:sp>
+      <p:sp>
+        <p:nvSpPr>
+          <p:cNvPr id="49" name="Shape 47"/>
+          <p:cNvSpPr/>
+          <p:nvPr/>
+        </p:nvSpPr>
+        <p:spPr>
+          <a:xfrm>
+            <a:off x="5872111" y="4169664"/>
+            <a:ext cx="603504" cy="475488"/>
+          </a:xfrm>
+          <a:prstGeom prst="rect">
+            <a:avLst>
+              <a:gd name="adj" fmla="val 7692"/>
+            </a:avLst>
+          </a:prstGeom>
+          <a:solidFill>
+            <a:srgbClr val="FFFFFF"/>
+          </a:solidFill>
+          <a:ln w="12700">
+            <a:solidFill>
+              <a:srgbClr val="DB2777"/>
+            </a:solidFill>
+            <a:prstDash val="solid"/>
+          </a:ln>
+        </p:spPr>
+      </p:sp>
+      <p:sp>
+        <p:nvSpPr>
+          <p:cNvPr id="50" name="Text 48"/>
+          <p:cNvSpPr/>
+          <p:nvPr/>
+        </p:nvSpPr>
+        <p:spPr>
+          <a:xfrm>
+            <a:off x="5872111" y="4169664"/>
+            <a:ext cx="603504" cy="475488"/>
+          </a:xfrm>
+          <a:prstGeom prst="rect">
+            <a:avLst/>
+          </a:prstGeom>
+          <a:noFill/>
+          <a:ln/>
+        </p:spPr>
+        <p:txBody>
+          <a:bodyPr wrap="square" lIns="0" tIns="0" rIns="0" bIns="0" rtlCol="0" anchor="ctr"/>
+          <a:lstStyle/>
+          <a:p>
+            <a:pPr algn="ctr" indent="0" marL="0">
+              <a:buNone/>
+            </a:pPr>
+            <a:r>
+              <a:rPr lang="en-US" sz="900" b="1" dirty="0">
+                <a:solidFill>
+                  <a:srgbClr val="9D174D"/>
+                </a:solidFill>
+                <a:latin typeface="Trebuchet MS" pitchFamily="34" charset="0"/>
+                <a:ea typeface="Trebuchet MS" pitchFamily="34" charset="-122"/>
+                <a:cs typeface="Trebuchet MS" pitchFamily="34" charset="-120"/>
+              </a:rPr>
+              <a:t>m</a:t>
+            </a:r>
+            <a:endParaRPr lang="en-US" sz="900" dirty="0"/>
+          </a:p>
+        </p:txBody>
+      </p:sp>
+      <p:sp>
+        <p:nvSpPr>
+          <p:cNvPr id="51" name="Shape 49"/>
+          <p:cNvSpPr/>
+          <p:nvPr/>
+        </p:nvSpPr>
+        <p:spPr>
+          <a:xfrm>
+            <a:off x="6525491" y="4169664"/>
+            <a:ext cx="603504" cy="475488"/>
+          </a:xfrm>
+          <a:prstGeom prst="rect">
+            <a:avLst>
+              <a:gd name="adj" fmla="val 7692"/>
+            </a:avLst>
+          </a:prstGeom>
+          <a:solidFill>
+            <a:srgbClr val="FFFFFF"/>
+          </a:solidFill>
+          <a:ln w="12700">
+            <a:solidFill>
+              <a:srgbClr val="DB2777"/>
+            </a:solidFill>
+            <a:prstDash val="solid"/>
+          </a:ln>
+        </p:spPr>
+      </p:sp>
+      <p:sp>
+        <p:nvSpPr>
+          <p:cNvPr id="52" name="Text 50"/>
+          <p:cNvSpPr/>
+          <p:nvPr/>
+        </p:nvSpPr>
+        <p:spPr>
+          <a:xfrm>
+            <a:off x="6525491" y="4169664"/>
+            <a:ext cx="603504" cy="475488"/>
+          </a:xfrm>
+          <a:prstGeom prst="rect">
+            <a:avLst/>
+          </a:prstGeom>
+          <a:noFill/>
+          <a:ln/>
+        </p:spPr>
+        <p:txBody>
+          <a:bodyPr wrap="square" lIns="0" tIns="0" rIns="0" bIns="0" rtlCol="0" anchor="ctr"/>
+          <a:lstStyle/>
+          <a:p>
+            <a:pPr algn="ctr" indent="0" marL="0">
+              <a:buNone/>
+            </a:pPr>
+            <a:r>
+              <a:rPr lang="en-US" sz="900" b="1" dirty="0">
+                <a:solidFill>
+                  <a:srgbClr val="9D174D"/>
+                </a:solidFill>
+                <a:latin typeface="Trebuchet MS" pitchFamily="34" charset="0"/>
+                <a:ea typeface="Trebuchet MS" pitchFamily="34" charset="-122"/>
+                <a:cs typeface="Trebuchet MS" pitchFamily="34" charset="-120"/>
+              </a:rPr>
+              <a:t>e</a:t>
+            </a:r>
+            <a:endParaRPr lang="en-US" sz="900" dirty="0"/>
+          </a:p>
+        </p:txBody>
+      </p:sp>
+      <p:sp>
+        <p:nvSpPr>
+          <p:cNvPr id="53" name="Shape 51"/>
+          <p:cNvSpPr/>
+          <p:nvPr/>
+        </p:nvSpPr>
+        <p:spPr>
+          <a:xfrm>
+            <a:off x="7178871" y="4169664"/>
+            <a:ext cx="603504" cy="475488"/>
+          </a:xfrm>
+          <a:prstGeom prst="rect">
+            <a:avLst>
+              <a:gd name="adj" fmla="val 7692"/>
+            </a:avLst>
+          </a:prstGeom>
+          <a:solidFill>
+            <a:srgbClr val="FFFFFF"/>
+          </a:solidFill>
+          <a:ln w="12700">
+            <a:solidFill>
+              <a:srgbClr val="DB2777"/>
+            </a:solidFill>
+            <a:prstDash val="solid"/>
+          </a:ln>
+        </p:spPr>
+      </p:sp>
+      <p:sp>
+        <p:nvSpPr>
+          <p:cNvPr id="54" name="Text 52"/>
+          <p:cNvSpPr/>
+          <p:nvPr/>
+        </p:nvSpPr>
+        <p:spPr>
+          <a:xfrm>
+            <a:off x="7178871" y="4169664"/>
+            <a:ext cx="603504" cy="475488"/>
+          </a:xfrm>
+          <a:prstGeom prst="rect">
+            <a:avLst/>
+          </a:prstGeom>
+          <a:noFill/>
+          <a:ln/>
+        </p:spPr>
+        <p:txBody>
+          <a:bodyPr wrap="square" lIns="0" tIns="0" rIns="0" bIns="0" rtlCol="0" anchor="ctr"/>
+          <a:lstStyle/>
+          <a:p>
+            <a:pPr algn="ctr" indent="0" marL="0">
+              <a:buNone/>
+            </a:pPr>
+            <a:r>
+              <a:rPr lang="en-US" sz="900" b="1" dirty="0">
+                <a:solidFill>
+                  <a:srgbClr val="9D174D"/>
+                </a:solidFill>
+                <a:latin typeface="Trebuchet MS" pitchFamily="34" charset="0"/>
+                <a:ea typeface="Trebuchet MS" pitchFamily="34" charset="-122"/>
+                <a:cs typeface="Trebuchet MS" pitchFamily="34" charset="-120"/>
+              </a:rPr>
               <a:t>n</a:t>
             </a:r>
             <a:endParaRPr lang="en-US" sz="900" dirty="0"/>
@@ -11240,18 +11360,18 @@
       </p:sp>
       <p:sp>
         <p:nvSpPr>
-          <p:cNvPr id="51" name="Shape 49"/>
-          <p:cNvSpPr/>
-          <p:nvPr/>
-        </p:nvSpPr>
-        <p:spPr>
-          <a:xfrm>
-            <a:off x="7576947" y="4169664"/>
-            <a:ext cx="685800" cy="384048"/>
+          <p:cNvPr id="55" name="Shape 53"/>
+          <p:cNvSpPr/>
+          <p:nvPr/>
+        </p:nvSpPr>
+        <p:spPr>
+          <a:xfrm>
+            <a:off x="7832252" y="4169664"/>
+            <a:ext cx="603504" cy="475488"/>
           </a:xfrm>
           <a:prstGeom prst="rect">
             <a:avLst>
-              <a:gd name="adj" fmla="val 9524"/>
+              <a:gd name="adj" fmla="val 7692"/>
             </a:avLst>
           </a:prstGeom>
           <a:solidFill>
@@ -11267,14 +11387,14 @@
       </p:sp>
       <p:sp>
         <p:nvSpPr>
-          <p:cNvPr id="52" name="Text 50"/>
-          <p:cNvSpPr/>
-          <p:nvPr/>
-        </p:nvSpPr>
-        <p:spPr>
-          <a:xfrm>
-            <a:off x="7576947" y="4169664"/>
-            <a:ext cx="685800" cy="384048"/>
+          <p:cNvPr id="56" name="Text 54"/>
+          <p:cNvSpPr/>
+          <p:nvPr/>
+        </p:nvSpPr>
+        <p:spPr>
+          <a:xfrm>
+            <a:off x="7832252" y="4169664"/>
+            <a:ext cx="603504" cy="475488"/>
           </a:xfrm>
           <a:prstGeom prst="rect">
             <a:avLst/>
@@ -39851,7 +39971,7 @@
                 <a:ea typeface="Calibri" pitchFamily="34" charset="-122"/>
                 <a:cs typeface="Calibri" pitchFamily="34" charset="-120"/>
               </a:rPr>
-              <a:t>1.  The word 'excited' does not contain the root 'excite'.</a:t>
+              <a:t>1.  The root 'excite' means to make someone feel calm and sleepy.</a:t>
             </a:r>
             <a:endParaRPr lang="en-US" sz="1300" dirty="0"/>
           </a:p>
@@ -39990,7 +40110,7 @@
                 <a:ea typeface="Calibri" pitchFamily="34" charset="-122"/>
                 <a:cs typeface="Calibri" pitchFamily="34" charset="-120"/>
               </a:rPr>
-              <a:t>2.  The root 'excite' means to make someone feel calm and sleepy.</a:t>
+              <a:t>2.  The root 'excite' comes from the Latin word 'excitare'.</a:t>
             </a:r>
             <a:endParaRPr lang="en-US" sz="1300" dirty="0"/>
           </a:p>
@@ -40013,11 +40133,11 @@
             </a:avLst>
           </a:prstGeom>
           <a:solidFill>
-            <a:srgbClr val="FEE2E2"/>
-          </a:solidFill>
-          <a:ln w="12700">
-            <a:solidFill>
-              <a:srgbClr val="DC2626"/>
+            <a:srgbClr val="DCFCE7"/>
+          </a:solidFill>
+          <a:ln w="12700">
+            <a:solidFill>
+              <a:srgbClr val="16A34A"/>
             </a:solidFill>
             <a:prstDash val="solid"/>
           </a:ln>
@@ -40050,13 +40170,13 @@
             <a:r>
               <a:rPr lang="en-US" sz="1100" b="1" dirty="0">
                 <a:solidFill>
-                  <a:srgbClr val="DC2626"/>
+                  <a:srgbClr val="16A34A"/>
                 </a:solidFill>
                 <a:latin typeface="Trebuchet MS" pitchFamily="34" charset="0"/>
                 <a:ea typeface="Trebuchet MS" pitchFamily="34" charset="-122"/>
                 <a:cs typeface="Trebuchet MS" pitchFamily="34" charset="-120"/>
               </a:rPr>
-              <a:t>FALSE</a:t>
+              <a:t>TRUE</a:t>
             </a:r>
             <a:endParaRPr lang="en-US" sz="1100" dirty="0"/>
           </a:p>
@@ -40129,7 +40249,7 @@
                 <a:ea typeface="Calibri" pitchFamily="34" charset="-122"/>
                 <a:cs typeface="Calibri" pitchFamily="34" charset="-120"/>
               </a:rPr>
-              <a:t>3.  The root 'excite' comes from the Latin word 'excitare'.</a:t>
+              <a:t>3.  Adding the suffix '-ment' to 'excite' makes the word 'excitement'.</a:t>
             </a:r>
             <a:endParaRPr lang="en-US" sz="1300" dirty="0"/>
           </a:p>
@@ -40268,7 +40388,7 @@
                 <a:ea typeface="Calibri" pitchFamily="34" charset="-122"/>
                 <a:cs typeface="Calibri" pitchFamily="34" charset="-120"/>
               </a:rPr>
-              <a:t>4.  Adding the suffix '-ment' to 'excite' makes the word 'excitement'.</a:t>
+              <a:t>4.  The prefix 'over' can be added to 'excited' to mean too excited.</a:t>
             </a:r>
             <a:endParaRPr lang="en-US" sz="1300" dirty="0"/>
           </a:p>
@@ -40407,7 +40527,7 @@
                 <a:ea typeface="Calibri" pitchFamily="34" charset="-122"/>
                 <a:cs typeface="Calibri" pitchFamily="34" charset="-120"/>
               </a:rPr>
-              <a:t>5.  The prefix 'over' can be added to 'excited' to mean too excited.</a:t>
+              <a:t>5.  The word 'excited' does not contain the root 'excite'.</a:t>
             </a:r>
             <a:endParaRPr lang="en-US" sz="1300" dirty="0"/>
           </a:p>
@@ -40430,11 +40550,11 @@
             </a:avLst>
           </a:prstGeom>
           <a:solidFill>
-            <a:srgbClr val="DCFCE7"/>
-          </a:solidFill>
-          <a:ln w="12700">
-            <a:solidFill>
-              <a:srgbClr val="16A34A"/>
+            <a:srgbClr val="FEE2E2"/>
+          </a:solidFill>
+          <a:ln w="12700">
+            <a:solidFill>
+              <a:srgbClr val="DC2626"/>
             </a:solidFill>
             <a:prstDash val="solid"/>
           </a:ln>
@@ -40467,13 +40587,13 @@
             <a:r>
               <a:rPr lang="en-US" sz="1100" b="1" dirty="0">
                 <a:solidFill>
-                  <a:srgbClr val="16A34A"/>
+                  <a:srgbClr val="DC2626"/>
                 </a:solidFill>
                 <a:latin typeface="Trebuchet MS" pitchFamily="34" charset="0"/>
                 <a:ea typeface="Trebuchet MS" pitchFamily="34" charset="-122"/>
                 <a:cs typeface="Trebuchet MS" pitchFamily="34" charset="-120"/>
               </a:rPr>
-              <a:t>TRUE</a:t>
+              <a:t>FALSE</a:t>
             </a:r>
             <a:endParaRPr lang="en-US" sz="1100" dirty="0"/>
           </a:p>
